--- a/design-system/samples/Mivada_Overview_and_Services.pptx
+++ b/design-system/samples/Mivada_Overview_and_Services.pptx
@@ -3342,7 +3342,7 @@
         <p:spPr>
           <a:xfrm>
             <a:off x="877824" y="1737360"/>
-            <a:ext cx="10058400" cy="640080"/>
+            <a:ext cx="10241280" cy="548640"/>
           </a:xfrm>
           <a:prstGeom prst="rect">
             <a:avLst/>
@@ -3378,529 +3378,204 @@
       </p:sp>
       <p:sp>
         <p:nvSpPr>
-          <p:cNvPr id="6" name="TextBox 5"/>
-          <p:cNvSpPr txBox="1"/>
-          <p:nvPr/>
-        </p:nvSpPr>
-        <p:spPr>
-          <a:xfrm>
-            <a:off x="877824" y="2468880"/>
-            <a:ext cx="3204362" cy="640080"/>
-          </a:xfrm>
-          <a:prstGeom prst="rect">
-            <a:avLst/>
-          </a:prstGeom>
-          <a:noFill/>
-        </p:spPr>
-        <p:txBody>
-          <a:bodyPr wrap="square" anchor="t" lIns="0" rIns="0" tIns="0" bIns="0"/>
+          <p:cNvPr id="6" name="Rectangle 5"/>
+          <p:cNvSpPr/>
+          <p:nvPr/>
+        </p:nvSpPr>
+        <p:spPr>
+          <a:xfrm>
+            <a:off x="877824" y="2286000"/>
+            <a:ext cx="10436047" cy="310896"/>
+          </a:xfrm>
+          <a:prstGeom prst="rect">
+            <a:avLst/>
+          </a:prstGeom>
+          <a:solidFill>
+            <a:srgbClr val="EA493F"/>
+          </a:solidFill>
+          <a:ln>
+            <a:noFill/>
+          </a:ln>
+          <a:effectLst/>
+        </p:spPr>
+        <p:style>
+          <a:lnRef idx="1">
+            <a:schemeClr val="accent1"/>
+          </a:lnRef>
+          <a:fillRef idx="3">
+            <a:schemeClr val="accent1"/>
+          </a:fillRef>
+          <a:effectRef idx="2">
+            <a:schemeClr val="accent1"/>
+          </a:effectRef>
+          <a:fontRef idx="minor">
+            <a:schemeClr val="lt1"/>
+          </a:fontRef>
+        </p:style>
+        <p:txBody>
+          <a:bodyPr rtlCol="0" anchor="ctr"/>
+          <a:lstStyle/>
+          <a:p>
+            <a:pPr algn="ctr"/>
+          </a:p>
+        </p:txBody>
+      </p:sp>
+      <p:sp>
+        <p:nvSpPr>
+          <p:cNvPr id="7" name="TextBox 6"/>
+          <p:cNvSpPr txBox="1"/>
+          <p:nvPr/>
+        </p:nvSpPr>
+        <p:spPr>
+          <a:xfrm>
+            <a:off x="1106424" y="2286000"/>
+            <a:ext cx="9978847" cy="310896"/>
+          </a:xfrm>
+          <a:prstGeom prst="rect">
+            <a:avLst/>
+          </a:prstGeom>
+          <a:noFill/>
+        </p:spPr>
+        <p:txBody>
+          <a:bodyPr wrap="square" anchor="ctr" lIns="0" rIns="0" tIns="0" bIns="0"/>
           <a:lstStyle/>
           <a:p>
             <a:pPr algn="l">
               <a:lnSpc>
-                <a:spcPct val="105000"/>
-              </a:lnSpc>
-              <a:spcBef>
-                <a:spcPts val="0"/>
-              </a:spcBef>
-              <a:spcAft>
-                <a:spcPts val="0"/>
-              </a:spcAft>
-            </a:pPr>
-            <a:r>
-              <a:rPr sz="1450" b="1" i="0" lang="en-AU" spc="-14">
-                <a:solidFill>
-                  <a:srgbClr val="111111"/>
-                </a:solidFill>
-                <a:latin typeface="Inter"/>
-              </a:rPr>
-              <a:t>Operational excellence · ITIL</a:t>
-            </a:r>
-          </a:p>
-        </p:txBody>
-      </p:sp>
-      <p:sp>
-        <p:nvSpPr>
-          <p:cNvPr id="7" name="TextBox 6"/>
-          <p:cNvSpPr txBox="1"/>
-          <p:nvPr/>
-        </p:nvSpPr>
-        <p:spPr>
-          <a:xfrm>
-            <a:off x="877824" y="3154680"/>
-            <a:ext cx="3204362" cy="365760"/>
-          </a:xfrm>
-          <a:prstGeom prst="rect">
-            <a:avLst/>
-          </a:prstGeom>
-          <a:noFill/>
-        </p:spPr>
-        <p:txBody>
-          <a:bodyPr wrap="square" anchor="t" lIns="0" rIns="0" tIns="0" bIns="0"/>
+                <a:spcPct val="100000"/>
+              </a:lnSpc>
+              <a:spcBef>
+                <a:spcPts val="0"/>
+              </a:spcBef>
+              <a:spcAft>
+                <a:spcPts val="0"/>
+              </a:spcAft>
+            </a:pPr>
+            <a:r>
+              <a:rPr sz="1150" b="1" i="0" lang="en-AU" spc="115" cap="all">
+                <a:solidFill>
+                  <a:srgbClr val="FFFFFF"/>
+                </a:solidFill>
+                <a:latin typeface="Inter"/>
+              </a:rPr>
+              <a:t>CONTINUOUS IMPROVEMENT</a:t>
+            </a:r>
+          </a:p>
+        </p:txBody>
+      </p:sp>
+      <p:sp>
+        <p:nvSpPr>
+          <p:cNvPr id="8" name="Rectangle 7"/>
+          <p:cNvSpPr/>
+          <p:nvPr/>
+        </p:nvSpPr>
+        <p:spPr>
+          <a:xfrm>
+            <a:off x="877824" y="2633472"/>
+            <a:ext cx="10436047" cy="420624"/>
+          </a:xfrm>
+          <a:prstGeom prst="rect">
+            <a:avLst/>
+          </a:prstGeom>
+          <a:solidFill>
+            <a:srgbClr val="111111"/>
+          </a:solidFill>
+          <a:ln>
+            <a:noFill/>
+          </a:ln>
+          <a:effectLst/>
+        </p:spPr>
+        <p:style>
+          <a:lnRef idx="1">
+            <a:schemeClr val="accent1"/>
+          </a:lnRef>
+          <a:fillRef idx="3">
+            <a:schemeClr val="accent1"/>
+          </a:fillRef>
+          <a:effectRef idx="2">
+            <a:schemeClr val="accent1"/>
+          </a:effectRef>
+          <a:fontRef idx="minor">
+            <a:schemeClr val="lt1"/>
+          </a:fontRef>
+        </p:style>
+        <p:txBody>
+          <a:bodyPr rtlCol="0" anchor="ctr"/>
+          <a:lstStyle/>
+          <a:p>
+            <a:pPr algn="ctr"/>
+          </a:p>
+        </p:txBody>
+      </p:sp>
+      <p:sp>
+        <p:nvSpPr>
+          <p:cNvPr id="9" name="TextBox 8"/>
+          <p:cNvSpPr txBox="1"/>
+          <p:nvPr/>
+        </p:nvSpPr>
+        <p:spPr>
+          <a:xfrm>
+            <a:off x="1106424" y="2633472"/>
+            <a:ext cx="9978847" cy="420624"/>
+          </a:xfrm>
+          <a:prstGeom prst="rect">
+            <a:avLst/>
+          </a:prstGeom>
+          <a:noFill/>
+        </p:spPr>
+        <p:txBody>
+          <a:bodyPr wrap="square" anchor="ctr" lIns="0" rIns="0" tIns="0" bIns="0"/>
           <a:lstStyle/>
           <a:p>
             <a:pPr algn="l">
               <a:lnSpc>
-                <a:spcPct val="112000"/>
-              </a:lnSpc>
-              <a:spcBef>
-                <a:spcPts val="0"/>
-              </a:spcBef>
-              <a:spcAft>
-                <a:spcPts val="0"/>
-              </a:spcAft>
-            </a:pPr>
-            <a:r>
-              <a:rPr sz="1100" b="1" i="0" lang="en-AU" spc="0">
-                <a:solidFill>
-                  <a:srgbClr val="EA493F"/>
-                </a:solidFill>
-                <a:latin typeface="Inter"/>
-              </a:rPr>
-              <a:t>—  </a:t>
-            </a:r>
-            <a:r>
-              <a:rPr sz="1100" b="0" i="0" lang="en-AU" spc="0">
-                <a:solidFill>
-                  <a:srgbClr val="323232"/>
-                </a:solidFill>
-                <a:latin typeface="Inter"/>
-              </a:rPr>
-              <a:t>Incident management</a:t>
-            </a:r>
-          </a:p>
-        </p:txBody>
-      </p:sp>
-      <p:sp>
-        <p:nvSpPr>
-          <p:cNvPr id="8" name="TextBox 7"/>
-          <p:cNvSpPr txBox="1"/>
-          <p:nvPr/>
-        </p:nvSpPr>
-        <p:spPr>
-          <a:xfrm>
-            <a:off x="877824" y="3520440"/>
-            <a:ext cx="3204362" cy="365760"/>
-          </a:xfrm>
-          <a:prstGeom prst="rect">
-            <a:avLst/>
-          </a:prstGeom>
-          <a:noFill/>
-        </p:spPr>
-        <p:txBody>
-          <a:bodyPr wrap="square" anchor="t" lIns="0" rIns="0" tIns="0" bIns="0"/>
-          <a:lstStyle/>
-          <a:p>
-            <a:pPr algn="l">
-              <a:lnSpc>
-                <a:spcPct val="112000"/>
-              </a:lnSpc>
-              <a:spcBef>
-                <a:spcPts val="0"/>
-              </a:spcBef>
-              <a:spcAft>
-                <a:spcPts val="0"/>
-              </a:spcAft>
-            </a:pPr>
-            <a:r>
-              <a:rPr sz="1100" b="1" i="0" lang="en-AU" spc="0">
-                <a:solidFill>
-                  <a:srgbClr val="EA493F"/>
-                </a:solidFill>
-                <a:latin typeface="Inter"/>
-              </a:rPr>
-              <a:t>—  </a:t>
-            </a:r>
-            <a:r>
-              <a:rPr sz="1100" b="0" i="0" lang="en-AU" spc="0">
-                <a:solidFill>
-                  <a:srgbClr val="323232"/>
-                </a:solidFill>
-                <a:latin typeface="Inter"/>
-              </a:rPr>
-              <a:t>Problem management</a:t>
-            </a:r>
-          </a:p>
-        </p:txBody>
-      </p:sp>
-      <p:sp>
-        <p:nvSpPr>
-          <p:cNvPr id="9" name="TextBox 8"/>
-          <p:cNvSpPr txBox="1"/>
-          <p:nvPr/>
-        </p:nvSpPr>
-        <p:spPr>
-          <a:xfrm>
-            <a:off x="877824" y="3886200"/>
-            <a:ext cx="3204362" cy="365760"/>
-          </a:xfrm>
-          <a:prstGeom prst="rect">
-            <a:avLst/>
-          </a:prstGeom>
-          <a:noFill/>
-        </p:spPr>
-        <p:txBody>
-          <a:bodyPr wrap="square" anchor="t" lIns="0" rIns="0" tIns="0" bIns="0"/>
-          <a:lstStyle/>
-          <a:p>
-            <a:pPr algn="l">
-              <a:lnSpc>
-                <a:spcPct val="112000"/>
-              </a:lnSpc>
-              <a:spcBef>
-                <a:spcPts val="0"/>
-              </a:spcBef>
-              <a:spcAft>
-                <a:spcPts val="0"/>
-              </a:spcAft>
-            </a:pPr>
-            <a:r>
-              <a:rPr sz="1100" b="1" i="0" lang="en-AU" spc="0">
-                <a:solidFill>
-                  <a:srgbClr val="EA493F"/>
-                </a:solidFill>
-                <a:latin typeface="Inter"/>
-              </a:rPr>
-              <a:t>—  </a:t>
-            </a:r>
-            <a:r>
-              <a:rPr sz="1100" b="0" i="0" lang="en-AU" spc="0">
-                <a:solidFill>
-                  <a:srgbClr val="323232"/>
-                </a:solidFill>
-                <a:latin typeface="Inter"/>
-              </a:rPr>
-              <a:t>Change management</a:t>
-            </a:r>
-          </a:p>
-        </p:txBody>
-      </p:sp>
-      <p:sp>
-        <p:nvSpPr>
-          <p:cNvPr id="10" name="TextBox 9"/>
-          <p:cNvSpPr txBox="1"/>
-          <p:nvPr/>
-        </p:nvSpPr>
-        <p:spPr>
-          <a:xfrm>
-            <a:off x="877824" y="4251960"/>
-            <a:ext cx="3204362" cy="365760"/>
-          </a:xfrm>
-          <a:prstGeom prst="rect">
-            <a:avLst/>
-          </a:prstGeom>
-          <a:noFill/>
-        </p:spPr>
-        <p:txBody>
-          <a:bodyPr wrap="square" anchor="t" lIns="0" rIns="0" tIns="0" bIns="0"/>
-          <a:lstStyle/>
-          <a:p>
-            <a:pPr algn="l">
-              <a:lnSpc>
-                <a:spcPct val="112000"/>
-              </a:lnSpc>
-              <a:spcBef>
-                <a:spcPts val="0"/>
-              </a:spcBef>
-              <a:spcAft>
-                <a:spcPts val="0"/>
-              </a:spcAft>
-            </a:pPr>
-            <a:r>
-              <a:rPr sz="1100" b="1" i="0" lang="en-AU" spc="0">
-                <a:solidFill>
-                  <a:srgbClr val="EA493F"/>
-                </a:solidFill>
-                <a:latin typeface="Inter"/>
-              </a:rPr>
-              <a:t>—  </a:t>
-            </a:r>
-            <a:r>
-              <a:rPr sz="1100" b="0" i="0" lang="en-AU" spc="0">
-                <a:solidFill>
-                  <a:srgbClr val="323232"/>
-                </a:solidFill>
-                <a:latin typeface="Inter"/>
-              </a:rPr>
-              <a:t>Release management</a:t>
-            </a:r>
-          </a:p>
-        </p:txBody>
-      </p:sp>
-      <p:sp>
-        <p:nvSpPr>
-          <p:cNvPr id="11" name="TextBox 10"/>
-          <p:cNvSpPr txBox="1"/>
-          <p:nvPr/>
-        </p:nvSpPr>
-        <p:spPr>
-          <a:xfrm>
-            <a:off x="877824" y="4617720"/>
-            <a:ext cx="3204362" cy="365760"/>
-          </a:xfrm>
-          <a:prstGeom prst="rect">
-            <a:avLst/>
-          </a:prstGeom>
-          <a:noFill/>
-        </p:spPr>
-        <p:txBody>
-          <a:bodyPr wrap="square" anchor="t" lIns="0" rIns="0" tIns="0" bIns="0"/>
-          <a:lstStyle/>
-          <a:p>
-            <a:pPr algn="l">
-              <a:lnSpc>
-                <a:spcPct val="112000"/>
-              </a:lnSpc>
-              <a:spcBef>
-                <a:spcPts val="0"/>
-              </a:spcBef>
-              <a:spcAft>
-                <a:spcPts val="0"/>
-              </a:spcAft>
-            </a:pPr>
-            <a:r>
-              <a:rPr sz="1100" b="1" i="0" lang="en-AU" spc="0">
-                <a:solidFill>
-                  <a:srgbClr val="EA493F"/>
-                </a:solidFill>
-                <a:latin typeface="Inter"/>
-              </a:rPr>
-              <a:t>—  </a:t>
-            </a:r>
-            <a:r>
-              <a:rPr sz="1100" b="0" i="0" lang="en-AU" spc="0">
-                <a:solidFill>
-                  <a:srgbClr val="323232"/>
-                </a:solidFill>
-                <a:latin typeface="Inter"/>
-              </a:rPr>
-              <a:t>Service requests</a:t>
-            </a:r>
-          </a:p>
-        </p:txBody>
-      </p:sp>
-      <p:sp>
-        <p:nvSpPr>
-          <p:cNvPr id="12" name="TextBox 11"/>
-          <p:cNvSpPr txBox="1"/>
-          <p:nvPr/>
-        </p:nvSpPr>
-        <p:spPr>
-          <a:xfrm>
-            <a:off x="877824" y="4983480"/>
-            <a:ext cx="3204362" cy="365760"/>
-          </a:xfrm>
-          <a:prstGeom prst="rect">
-            <a:avLst/>
-          </a:prstGeom>
-          <a:noFill/>
-        </p:spPr>
-        <p:txBody>
-          <a:bodyPr wrap="square" anchor="t" lIns="0" rIns="0" tIns="0" bIns="0"/>
-          <a:lstStyle/>
-          <a:p>
-            <a:pPr algn="l">
-              <a:lnSpc>
-                <a:spcPct val="112000"/>
-              </a:lnSpc>
-              <a:spcBef>
-                <a:spcPts val="0"/>
-              </a:spcBef>
-              <a:spcAft>
-                <a:spcPts val="0"/>
-              </a:spcAft>
-            </a:pPr>
-            <a:r>
-              <a:rPr sz="1100" b="1" i="0" lang="en-AU" spc="0">
-                <a:solidFill>
-                  <a:srgbClr val="EA493F"/>
-                </a:solidFill>
-                <a:latin typeface="Inter"/>
-              </a:rPr>
-              <a:t>—  </a:t>
-            </a:r>
-            <a:r>
-              <a:rPr sz="1100" b="0" i="0" lang="en-AU" spc="0">
-                <a:solidFill>
-                  <a:srgbClr val="323232"/>
-                </a:solidFill>
-                <a:latin typeface="Inter"/>
-              </a:rPr>
-              <a:t>SLAs &amp; metrics</a:t>
-            </a:r>
-          </a:p>
-        </p:txBody>
-      </p:sp>
-      <p:sp>
-        <p:nvSpPr>
-          <p:cNvPr id="13" name="TextBox 12"/>
-          <p:cNvSpPr txBox="1"/>
-          <p:nvPr/>
-        </p:nvSpPr>
-        <p:spPr>
-          <a:xfrm>
-            <a:off x="877824" y="5349240"/>
-            <a:ext cx="3204362" cy="365760"/>
-          </a:xfrm>
-          <a:prstGeom prst="rect">
-            <a:avLst/>
-          </a:prstGeom>
-          <a:noFill/>
-        </p:spPr>
-        <p:txBody>
-          <a:bodyPr wrap="square" anchor="t" lIns="0" rIns="0" tIns="0" bIns="0"/>
-          <a:lstStyle/>
-          <a:p>
-            <a:pPr algn="l">
-              <a:lnSpc>
-                <a:spcPct val="112000"/>
-              </a:lnSpc>
-              <a:spcBef>
-                <a:spcPts val="0"/>
-              </a:spcBef>
-              <a:spcAft>
-                <a:spcPts val="0"/>
-              </a:spcAft>
-            </a:pPr>
-            <a:r>
-              <a:rPr sz="1100" b="1" i="0" lang="en-AU" spc="0">
-                <a:solidFill>
-                  <a:srgbClr val="EA493F"/>
-                </a:solidFill>
-                <a:latin typeface="Inter"/>
-              </a:rPr>
-              <a:t>—  </a:t>
-            </a:r>
-            <a:r>
-              <a:rPr sz="1100" b="0" i="0" lang="en-AU" spc="0">
-                <a:solidFill>
-                  <a:srgbClr val="323232"/>
-                </a:solidFill>
-                <a:latin typeface="Inter"/>
-              </a:rPr>
-              <a:t>Change Advisory Board</a:t>
-            </a:r>
-          </a:p>
-        </p:txBody>
-      </p:sp>
-      <p:sp>
-        <p:nvSpPr>
-          <p:cNvPr id="14" name="TextBox 13"/>
-          <p:cNvSpPr txBox="1"/>
-          <p:nvPr/>
-        </p:nvSpPr>
-        <p:spPr>
-          <a:xfrm>
-            <a:off x="877824" y="5715000"/>
-            <a:ext cx="3204362" cy="365760"/>
-          </a:xfrm>
-          <a:prstGeom prst="rect">
-            <a:avLst/>
-          </a:prstGeom>
-          <a:noFill/>
-        </p:spPr>
-        <p:txBody>
-          <a:bodyPr wrap="square" anchor="t" lIns="0" rIns="0" tIns="0" bIns="0"/>
-          <a:lstStyle/>
-          <a:p>
-            <a:pPr algn="l">
-              <a:lnSpc>
-                <a:spcPct val="112000"/>
-              </a:lnSpc>
-              <a:spcBef>
-                <a:spcPts val="0"/>
-              </a:spcBef>
-              <a:spcAft>
-                <a:spcPts val="0"/>
-              </a:spcAft>
-            </a:pPr>
-            <a:r>
-              <a:rPr sz="1100" b="1" i="0" lang="en-AU" spc="0">
-                <a:solidFill>
-                  <a:srgbClr val="EA493F"/>
-                </a:solidFill>
-                <a:latin typeface="Inter"/>
-              </a:rPr>
-              <a:t>—  </a:t>
-            </a:r>
-            <a:r>
-              <a:rPr sz="1100" b="0" i="0" lang="en-AU" spc="0">
-                <a:solidFill>
-                  <a:srgbClr val="323232"/>
-                </a:solidFill>
-                <a:latin typeface="Inter"/>
-              </a:rPr>
-              <a:t>Service integration (ITSM)</a:t>
-            </a:r>
-          </a:p>
-        </p:txBody>
-      </p:sp>
-      <p:sp>
-        <p:nvSpPr>
-          <p:cNvPr id="15" name="TextBox 14"/>
-          <p:cNvSpPr txBox="1"/>
-          <p:nvPr/>
-        </p:nvSpPr>
-        <p:spPr>
-          <a:xfrm>
-            <a:off x="877824" y="6080760"/>
-            <a:ext cx="3204362" cy="365760"/>
-          </a:xfrm>
-          <a:prstGeom prst="rect">
-            <a:avLst/>
-          </a:prstGeom>
-          <a:noFill/>
-        </p:spPr>
-        <p:txBody>
-          <a:bodyPr wrap="square" anchor="t" lIns="0" rIns="0" tIns="0" bIns="0"/>
-          <a:lstStyle/>
-          <a:p>
-            <a:pPr algn="l">
-              <a:lnSpc>
-                <a:spcPct val="112000"/>
-              </a:lnSpc>
-              <a:spcBef>
-                <a:spcPts val="0"/>
-              </a:spcBef>
-              <a:spcAft>
-                <a:spcPts val="0"/>
-              </a:spcAft>
-            </a:pPr>
-            <a:r>
-              <a:rPr sz="1100" b="1" i="0" lang="en-AU" spc="0">
-                <a:solidFill>
-                  <a:srgbClr val="EA493F"/>
-                </a:solidFill>
-                <a:latin typeface="Inter"/>
-              </a:rPr>
-              <a:t>—  </a:t>
-            </a:r>
-            <a:r>
-              <a:rPr sz="1100" b="0" i="0" lang="en-AU" spc="0">
-                <a:solidFill>
-                  <a:srgbClr val="323232"/>
-                </a:solidFill>
-                <a:latin typeface="Inter"/>
-              </a:rPr>
-              <a:t>Capacity management</a:t>
-            </a:r>
-          </a:p>
-        </p:txBody>
-      </p:sp>
-      <p:cxnSp>
-        <p:nvCxnSpPr>
-          <p:cNvPr id="16" name="Connector 15"/>
-          <p:cNvCxnSpPr/>
-          <p:nvPr/>
-        </p:nvCxnSpPr>
-        <p:spPr>
-          <a:xfrm>
-            <a:off x="4356506" y="2468880"/>
-            <a:ext cx="0" cy="3657600"/>
-          </a:xfrm>
-          <a:prstGeom prst="bentConnector3">
-            <a:avLst/>
-          </a:prstGeom>
+                <a:spcPct val="100000"/>
+              </a:lnSpc>
+              <a:spcBef>
+                <a:spcPts val="0"/>
+              </a:spcBef>
+              <a:spcAft>
+                <a:spcPts val="0"/>
+              </a:spcAft>
+            </a:pPr>
+            <a:r>
+              <a:rPr sz="1150" b="1" i="0" lang="en-AU" spc="115" cap="all">
+                <a:solidFill>
+                  <a:srgbClr val="FFFFFF"/>
+                </a:solidFill>
+                <a:latin typeface="Inter"/>
+              </a:rPr>
+              <a:t>GOVERNANCE</a:t>
+            </a:r>
+            <a:r>
+              <a:rPr sz="1000" b="0" i="0" lang="en-AU" spc="0">
+                <a:solidFill>
+                  <a:srgbClr val="FFFFFF"/>
+                </a:solidFill>
+                <a:latin typeface="Inter"/>
+              </a:rPr>
+              <a:t>    Thought leadership · Product &amp; vendor relationship · Technical-debt reduction · WD bi-annual release management</a:t>
+            </a:r>
+          </a:p>
+        </p:txBody>
+      </p:sp>
+      <p:sp>
+        <p:nvSpPr>
+          <p:cNvPr id="10" name="Rectangle 9"/>
+          <p:cNvSpPr/>
+          <p:nvPr/>
+        </p:nvSpPr>
+        <p:spPr>
+          <a:xfrm>
+            <a:off x="877824" y="3200400"/>
+            <a:ext cx="2512999" cy="457200"/>
+          </a:xfrm>
+          <a:prstGeom prst="rect">
+            <a:avLst/>
+          </a:prstGeom>
+          <a:solidFill>
+            <a:srgbClr val="FFFFFF"/>
+          </a:solidFill>
           <a:ln w="12700">
             <a:solidFill>
               <a:srgbClr val="E4E4E0"/>
@@ -3909,441 +3584,87 @@
           <a:effectLst/>
         </p:spPr>
         <p:style>
-          <a:lnRef idx="2">
+          <a:lnRef idx="1">
             <a:schemeClr val="accent1"/>
           </a:lnRef>
-          <a:fillRef idx="0">
+          <a:fillRef idx="3">
             <a:schemeClr val="accent1"/>
           </a:fillRef>
-          <a:effectRef idx="1">
+          <a:effectRef idx="2">
             <a:schemeClr val="accent1"/>
           </a:effectRef>
           <a:fontRef idx="minor">
-            <a:schemeClr val="tx1"/>
+            <a:schemeClr val="lt1"/>
           </a:fontRef>
         </p:style>
-      </p:cxnSp>
-      <p:sp>
-        <p:nvSpPr>
-          <p:cNvPr id="17" name="TextBox 16"/>
-          <p:cNvSpPr txBox="1"/>
-          <p:nvPr/>
-        </p:nvSpPr>
-        <p:spPr>
-          <a:xfrm>
-            <a:off x="4667402" y="2468880"/>
-            <a:ext cx="2893466" cy="640080"/>
-          </a:xfrm>
-          <a:prstGeom prst="rect">
-            <a:avLst/>
-          </a:prstGeom>
-          <a:noFill/>
-        </p:spPr>
-        <p:txBody>
-          <a:bodyPr wrap="square" anchor="t" lIns="0" rIns="0" tIns="0" bIns="0"/>
-          <a:lstStyle/>
-          <a:p>
-            <a:pPr algn="l">
-              <a:lnSpc>
-                <a:spcPct val="105000"/>
-              </a:lnSpc>
-              <a:spcBef>
-                <a:spcPts val="0"/>
-              </a:spcBef>
-              <a:spcAft>
-                <a:spcPts val="0"/>
-              </a:spcAft>
-            </a:pPr>
-            <a:r>
-              <a:rPr sz="1450" b="1" i="0" lang="en-AU" spc="-14">
+        <p:txBody>
+          <a:bodyPr rtlCol="0" anchor="ctr"/>
+          <a:lstStyle/>
+          <a:p>
+            <a:pPr algn="ctr"/>
+          </a:p>
+        </p:txBody>
+      </p:sp>
+      <p:sp>
+        <p:nvSpPr>
+          <p:cNvPr id="11" name="TextBox 10"/>
+          <p:cNvSpPr txBox="1"/>
+          <p:nvPr/>
+        </p:nvSpPr>
+        <p:spPr>
+          <a:xfrm>
+            <a:off x="950976" y="3200400"/>
+            <a:ext cx="2366695" cy="457200"/>
+          </a:xfrm>
+          <a:prstGeom prst="rect">
+            <a:avLst/>
+          </a:prstGeom>
+          <a:noFill/>
+        </p:spPr>
+        <p:txBody>
+          <a:bodyPr wrap="square" anchor="ctr" lIns="0" rIns="0" tIns="0" bIns="0"/>
+          <a:lstStyle/>
+          <a:p>
+            <a:pPr algn="ctr">
+              <a:lnSpc>
+                <a:spcPct val="100000"/>
+              </a:lnSpc>
+              <a:spcBef>
+                <a:spcPts val="0"/>
+              </a:spcBef>
+              <a:spcAft>
+                <a:spcPts val="0"/>
+              </a:spcAft>
+            </a:pPr>
+            <a:r>
+              <a:rPr sz="950" b="1" i="0" lang="en-AU" spc="-4">
                 <a:solidFill>
                   <a:srgbClr val="111111"/>
                 </a:solidFill>
                 <a:latin typeface="Inter"/>
               </a:rPr>
-              <a:t>Operations as a priority</a:t>
-            </a:r>
-          </a:p>
-        </p:txBody>
-      </p:sp>
-      <p:sp>
-        <p:nvSpPr>
-          <p:cNvPr id="18" name="TextBox 17"/>
-          <p:cNvSpPr txBox="1"/>
-          <p:nvPr/>
-        </p:nvSpPr>
-        <p:spPr>
-          <a:xfrm>
-            <a:off x="4667402" y="3154680"/>
-            <a:ext cx="2893466" cy="365760"/>
-          </a:xfrm>
-          <a:prstGeom prst="rect">
-            <a:avLst/>
-          </a:prstGeom>
-          <a:noFill/>
-        </p:spPr>
-        <p:txBody>
-          <a:bodyPr wrap="square" anchor="t" lIns="0" rIns="0" tIns="0" bIns="0"/>
-          <a:lstStyle/>
-          <a:p>
-            <a:pPr algn="l">
-              <a:lnSpc>
-                <a:spcPct val="112000"/>
-              </a:lnSpc>
-              <a:spcBef>
-                <a:spcPts val="0"/>
-              </a:spcBef>
-              <a:spcAft>
-                <a:spcPts val="0"/>
-              </a:spcAft>
-            </a:pPr>
-            <a:r>
-              <a:rPr sz="1100" b="1" i="0" lang="en-AU" spc="0">
-                <a:solidFill>
-                  <a:srgbClr val="EA493F"/>
-                </a:solidFill>
-                <a:latin typeface="Inter"/>
-              </a:rPr>
-              <a:t>—  </a:t>
-            </a:r>
-            <a:r>
-              <a:rPr sz="1100" b="0" i="0" lang="en-AU" spc="0">
-                <a:solidFill>
-                  <a:srgbClr val="323232"/>
-                </a:solidFill>
-                <a:latin typeface="Inter"/>
-              </a:rPr>
-              <a:t>Governance</a:t>
-            </a:r>
-          </a:p>
-        </p:txBody>
-      </p:sp>
-      <p:sp>
-        <p:nvSpPr>
-          <p:cNvPr id="19" name="TextBox 18"/>
-          <p:cNvSpPr txBox="1"/>
-          <p:nvPr/>
-        </p:nvSpPr>
-        <p:spPr>
-          <a:xfrm>
-            <a:off x="4667402" y="3520440"/>
-            <a:ext cx="2893466" cy="365760"/>
-          </a:xfrm>
-          <a:prstGeom prst="rect">
-            <a:avLst/>
-          </a:prstGeom>
-          <a:noFill/>
-        </p:spPr>
-        <p:txBody>
-          <a:bodyPr wrap="square" anchor="t" lIns="0" rIns="0" tIns="0" bIns="0"/>
-          <a:lstStyle/>
-          <a:p>
-            <a:pPr algn="l">
-              <a:lnSpc>
-                <a:spcPct val="112000"/>
-              </a:lnSpc>
-              <a:spcBef>
-                <a:spcPts val="0"/>
-              </a:spcBef>
-              <a:spcAft>
-                <a:spcPts val="0"/>
-              </a:spcAft>
-            </a:pPr>
-            <a:r>
-              <a:rPr sz="1100" b="1" i="0" lang="en-AU" spc="0">
-                <a:solidFill>
-                  <a:srgbClr val="EA493F"/>
-                </a:solidFill>
-                <a:latin typeface="Inter"/>
-              </a:rPr>
-              <a:t>—  </a:t>
-            </a:r>
-            <a:r>
-              <a:rPr sz="1100" b="0" i="0" lang="en-AU" spc="0">
-                <a:solidFill>
-                  <a:srgbClr val="323232"/>
-                </a:solidFill>
-                <a:latin typeface="Inter"/>
-              </a:rPr>
-              <a:t>BP &amp; security config management</a:t>
-            </a:r>
-          </a:p>
-        </p:txBody>
-      </p:sp>
-      <p:sp>
-        <p:nvSpPr>
-          <p:cNvPr id="20" name="TextBox 19"/>
-          <p:cNvSpPr txBox="1"/>
-          <p:nvPr/>
-        </p:nvSpPr>
-        <p:spPr>
-          <a:xfrm>
-            <a:off x="4667402" y="3886200"/>
-            <a:ext cx="2893466" cy="365760"/>
-          </a:xfrm>
-          <a:prstGeom prst="rect">
-            <a:avLst/>
-          </a:prstGeom>
-          <a:noFill/>
-        </p:spPr>
-        <p:txBody>
-          <a:bodyPr wrap="square" anchor="t" lIns="0" rIns="0" tIns="0" bIns="0"/>
-          <a:lstStyle/>
-          <a:p>
-            <a:pPr algn="l">
-              <a:lnSpc>
-                <a:spcPct val="112000"/>
-              </a:lnSpc>
-              <a:spcBef>
-                <a:spcPts val="0"/>
-              </a:spcBef>
-              <a:spcAft>
-                <a:spcPts val="0"/>
-              </a:spcAft>
-            </a:pPr>
-            <a:r>
-              <a:rPr sz="1100" b="1" i="0" lang="en-AU" spc="0">
-                <a:solidFill>
-                  <a:srgbClr val="EA493F"/>
-                </a:solidFill>
-                <a:latin typeface="Inter"/>
-              </a:rPr>
-              <a:t>—  </a:t>
-            </a:r>
-            <a:r>
-              <a:rPr sz="1100" b="0" i="0" lang="en-AU" spc="0">
-                <a:solidFill>
-                  <a:srgbClr val="323232"/>
-                </a:solidFill>
-                <a:latin typeface="Inter"/>
-              </a:rPr>
-              <a:t>Integration health checks</a:t>
-            </a:r>
-          </a:p>
-        </p:txBody>
-      </p:sp>
-      <p:sp>
-        <p:nvSpPr>
-          <p:cNvPr id="21" name="TextBox 20"/>
-          <p:cNvSpPr txBox="1"/>
-          <p:nvPr/>
-        </p:nvSpPr>
-        <p:spPr>
-          <a:xfrm>
-            <a:off x="4667402" y="4251960"/>
-            <a:ext cx="2893466" cy="365760"/>
-          </a:xfrm>
-          <a:prstGeom prst="rect">
-            <a:avLst/>
-          </a:prstGeom>
-          <a:noFill/>
-        </p:spPr>
-        <p:txBody>
-          <a:bodyPr wrap="square" anchor="t" lIns="0" rIns="0" tIns="0" bIns="0"/>
-          <a:lstStyle/>
-          <a:p>
-            <a:pPr algn="l">
-              <a:lnSpc>
-                <a:spcPct val="112000"/>
-              </a:lnSpc>
-              <a:spcBef>
-                <a:spcPts val="0"/>
-              </a:spcBef>
-              <a:spcAft>
-                <a:spcPts val="0"/>
-              </a:spcAft>
-            </a:pPr>
-            <a:r>
-              <a:rPr sz="1100" b="1" i="0" lang="en-AU" spc="0">
-                <a:solidFill>
-                  <a:srgbClr val="EA493F"/>
-                </a:solidFill>
-                <a:latin typeface="Inter"/>
-              </a:rPr>
-              <a:t>—  </a:t>
-            </a:r>
-            <a:r>
-              <a:rPr sz="1100" b="0" i="0" lang="en-AU" spc="0">
-                <a:solidFill>
-                  <a:srgbClr val="323232"/>
-                </a:solidFill>
-                <a:latin typeface="Inter"/>
-              </a:rPr>
-              <a:t>Cyber security</a:t>
-            </a:r>
-          </a:p>
-        </p:txBody>
-      </p:sp>
-      <p:sp>
-        <p:nvSpPr>
-          <p:cNvPr id="22" name="TextBox 21"/>
-          <p:cNvSpPr txBox="1"/>
-          <p:nvPr/>
-        </p:nvSpPr>
-        <p:spPr>
-          <a:xfrm>
-            <a:off x="4667402" y="4617720"/>
-            <a:ext cx="2893466" cy="365760"/>
-          </a:xfrm>
-          <a:prstGeom prst="rect">
-            <a:avLst/>
-          </a:prstGeom>
-          <a:noFill/>
-        </p:spPr>
-        <p:txBody>
-          <a:bodyPr wrap="square" anchor="t" lIns="0" rIns="0" tIns="0" bIns="0"/>
-          <a:lstStyle/>
-          <a:p>
-            <a:pPr algn="l">
-              <a:lnSpc>
-                <a:spcPct val="112000"/>
-              </a:lnSpc>
-              <a:spcBef>
-                <a:spcPts val="0"/>
-              </a:spcBef>
-              <a:spcAft>
-                <a:spcPts val="0"/>
-              </a:spcAft>
-            </a:pPr>
-            <a:r>
-              <a:rPr sz="1100" b="1" i="0" lang="en-AU" spc="0">
-                <a:solidFill>
-                  <a:srgbClr val="EA493F"/>
-                </a:solidFill>
-                <a:latin typeface="Inter"/>
-              </a:rPr>
-              <a:t>—  </a:t>
-            </a:r>
-            <a:r>
-              <a:rPr sz="1100" b="0" i="0" lang="en-AU" spc="0">
-                <a:solidFill>
-                  <a:srgbClr val="323232"/>
-                </a:solidFill>
-                <a:latin typeface="Inter"/>
-              </a:rPr>
-              <a:t>Backlog management</a:t>
-            </a:r>
-          </a:p>
-        </p:txBody>
-      </p:sp>
-      <p:sp>
-        <p:nvSpPr>
-          <p:cNvPr id="23" name="TextBox 22"/>
-          <p:cNvSpPr txBox="1"/>
-          <p:nvPr/>
-        </p:nvSpPr>
-        <p:spPr>
-          <a:xfrm>
-            <a:off x="4667402" y="4983480"/>
-            <a:ext cx="2893466" cy="365760"/>
-          </a:xfrm>
-          <a:prstGeom prst="rect">
-            <a:avLst/>
-          </a:prstGeom>
-          <a:noFill/>
-        </p:spPr>
-        <p:txBody>
-          <a:bodyPr wrap="square" anchor="t" lIns="0" rIns="0" tIns="0" bIns="0"/>
-          <a:lstStyle/>
-          <a:p>
-            <a:pPr algn="l">
-              <a:lnSpc>
-                <a:spcPct val="112000"/>
-              </a:lnSpc>
-              <a:spcBef>
-                <a:spcPts val="0"/>
-              </a:spcBef>
-              <a:spcAft>
-                <a:spcPts val="0"/>
-              </a:spcAft>
-            </a:pPr>
-            <a:r>
-              <a:rPr sz="1100" b="1" i="0" lang="en-AU" spc="0">
-                <a:solidFill>
-                  <a:srgbClr val="EA493F"/>
-                </a:solidFill>
-                <a:latin typeface="Inter"/>
-              </a:rPr>
-              <a:t>—  </a:t>
-            </a:r>
-            <a:r>
-              <a:rPr sz="1100" b="0" i="0" lang="en-AU" spc="0">
-                <a:solidFill>
-                  <a:srgbClr val="323232"/>
-                </a:solidFill>
-                <a:latin typeface="Inter"/>
-              </a:rPr>
-              <a:t>Prioritisation forum</a:t>
-            </a:r>
-          </a:p>
-        </p:txBody>
-      </p:sp>
-      <p:sp>
-        <p:nvSpPr>
-          <p:cNvPr id="24" name="TextBox 23"/>
-          <p:cNvSpPr txBox="1"/>
-          <p:nvPr/>
-        </p:nvSpPr>
-        <p:spPr>
-          <a:xfrm>
-            <a:off x="4667402" y="5349240"/>
-            <a:ext cx="2893466" cy="365760"/>
-          </a:xfrm>
-          <a:prstGeom prst="rect">
-            <a:avLst/>
-          </a:prstGeom>
-          <a:noFill/>
-        </p:spPr>
-        <p:txBody>
-          <a:bodyPr wrap="square" anchor="t" lIns="0" rIns="0" tIns="0" bIns="0"/>
-          <a:lstStyle/>
-          <a:p>
-            <a:pPr algn="l">
-              <a:lnSpc>
-                <a:spcPct val="112000"/>
-              </a:lnSpc>
-              <a:spcBef>
-                <a:spcPts val="0"/>
-              </a:spcBef>
-              <a:spcAft>
-                <a:spcPts val="0"/>
-              </a:spcAft>
-            </a:pPr>
-            <a:r>
-              <a:rPr sz="1100" b="1" i="0" lang="en-AU" spc="0">
-                <a:solidFill>
-                  <a:srgbClr val="EA493F"/>
-                </a:solidFill>
-                <a:latin typeface="Inter"/>
-              </a:rPr>
-              <a:t>—  </a:t>
-            </a:r>
-            <a:r>
-              <a:rPr sz="1100" b="0" i="0" lang="en-AU" spc="0">
-                <a:solidFill>
-                  <a:srgbClr val="323232"/>
-                </a:solidFill>
-                <a:latin typeface="Inter"/>
-              </a:rPr>
-              <a:t>WD bi-annual release management</a:t>
-            </a:r>
-          </a:p>
-        </p:txBody>
-      </p:sp>
-      <p:cxnSp>
-        <p:nvCxnSpPr>
-          <p:cNvPr id="25" name="Connector 24"/>
-          <p:cNvCxnSpPr/>
-          <p:nvPr/>
-        </p:nvCxnSpPr>
-        <p:spPr>
-          <a:xfrm>
-            <a:off x="7835188" y="2468880"/>
-            <a:ext cx="0" cy="3657600"/>
-          </a:xfrm>
-          <a:prstGeom prst="bentConnector3">
-            <a:avLst/>
-          </a:prstGeom>
+              <a:t>Incident management</a:t>
+            </a:r>
+          </a:p>
+        </p:txBody>
+      </p:sp>
+      <p:sp>
+        <p:nvSpPr>
+          <p:cNvPr id="12" name="Rectangle 11"/>
+          <p:cNvSpPr/>
+          <p:nvPr/>
+        </p:nvSpPr>
+        <p:spPr>
+          <a:xfrm>
+            <a:off x="3518839" y="3200400"/>
+            <a:ext cx="2512999" cy="457200"/>
+          </a:xfrm>
+          <a:prstGeom prst="rect">
+            <a:avLst/>
+          </a:prstGeom>
+          <a:solidFill>
+            <a:srgbClr val="FFFFFF"/>
+          </a:solidFill>
           <a:ln w="12700">
             <a:solidFill>
               <a:srgbClr val="E4E4E0"/>
@@ -4352,371 +3673,1666 @@
           <a:effectLst/>
         </p:spPr>
         <p:style>
-          <a:lnRef idx="2">
+          <a:lnRef idx="1">
             <a:schemeClr val="accent1"/>
           </a:lnRef>
-          <a:fillRef idx="0">
+          <a:fillRef idx="3">
             <a:schemeClr val="accent1"/>
           </a:fillRef>
-          <a:effectRef idx="1">
+          <a:effectRef idx="2">
             <a:schemeClr val="accent1"/>
           </a:effectRef>
           <a:fontRef idx="minor">
-            <a:schemeClr val="tx1"/>
+            <a:schemeClr val="lt1"/>
           </a:fontRef>
         </p:style>
-      </p:cxnSp>
-      <p:sp>
-        <p:nvSpPr>
-          <p:cNvPr id="26" name="TextBox 25"/>
-          <p:cNvSpPr txBox="1"/>
-          <p:nvPr/>
-        </p:nvSpPr>
-        <p:spPr>
-          <a:xfrm>
-            <a:off x="8146084" y="2468880"/>
-            <a:ext cx="2893466" cy="640080"/>
-          </a:xfrm>
-          <a:prstGeom prst="rect">
-            <a:avLst/>
-          </a:prstGeom>
-          <a:noFill/>
-        </p:spPr>
-        <p:txBody>
-          <a:bodyPr wrap="square" anchor="t" lIns="0" rIns="0" tIns="0" bIns="0"/>
+        <p:txBody>
+          <a:bodyPr rtlCol="0" anchor="ctr"/>
+          <a:lstStyle/>
+          <a:p>
+            <a:pPr algn="ctr"/>
+          </a:p>
+        </p:txBody>
+      </p:sp>
+      <p:sp>
+        <p:nvSpPr>
+          <p:cNvPr id="13" name="TextBox 12"/>
+          <p:cNvSpPr txBox="1"/>
+          <p:nvPr/>
+        </p:nvSpPr>
+        <p:spPr>
+          <a:xfrm>
+            <a:off x="3591991" y="3200400"/>
+            <a:ext cx="2366695" cy="457200"/>
+          </a:xfrm>
+          <a:prstGeom prst="rect">
+            <a:avLst/>
+          </a:prstGeom>
+          <a:noFill/>
+        </p:spPr>
+        <p:txBody>
+          <a:bodyPr wrap="square" anchor="ctr" lIns="0" rIns="0" tIns="0" bIns="0"/>
+          <a:lstStyle/>
+          <a:p>
+            <a:pPr algn="ctr">
+              <a:lnSpc>
+                <a:spcPct val="100000"/>
+              </a:lnSpc>
+              <a:spcBef>
+                <a:spcPts val="0"/>
+              </a:spcBef>
+              <a:spcAft>
+                <a:spcPts val="0"/>
+              </a:spcAft>
+            </a:pPr>
+            <a:r>
+              <a:rPr sz="950" b="1" i="0" lang="en-AU" spc="-4">
+                <a:solidFill>
+                  <a:srgbClr val="111111"/>
+                </a:solidFill>
+                <a:latin typeface="Inter"/>
+              </a:rPr>
+              <a:t>Problem management</a:t>
+            </a:r>
+          </a:p>
+        </p:txBody>
+      </p:sp>
+      <p:sp>
+        <p:nvSpPr>
+          <p:cNvPr id="14" name="Rectangle 13"/>
+          <p:cNvSpPr/>
+          <p:nvPr/>
+        </p:nvSpPr>
+        <p:spPr>
+          <a:xfrm>
+            <a:off x="6159855" y="3200400"/>
+            <a:ext cx="2512999" cy="457200"/>
+          </a:xfrm>
+          <a:prstGeom prst="rect">
+            <a:avLst/>
+          </a:prstGeom>
+          <a:solidFill>
+            <a:srgbClr val="FFFFFF"/>
+          </a:solidFill>
+          <a:ln w="12700">
+            <a:solidFill>
+              <a:srgbClr val="E4E4E0"/>
+            </a:solidFill>
+          </a:ln>
+          <a:effectLst/>
+        </p:spPr>
+        <p:style>
+          <a:lnRef idx="1">
+            <a:schemeClr val="accent1"/>
+          </a:lnRef>
+          <a:fillRef idx="3">
+            <a:schemeClr val="accent1"/>
+          </a:fillRef>
+          <a:effectRef idx="2">
+            <a:schemeClr val="accent1"/>
+          </a:effectRef>
+          <a:fontRef idx="minor">
+            <a:schemeClr val="lt1"/>
+          </a:fontRef>
+        </p:style>
+        <p:txBody>
+          <a:bodyPr rtlCol="0" anchor="ctr"/>
+          <a:lstStyle/>
+          <a:p>
+            <a:pPr algn="ctr"/>
+          </a:p>
+        </p:txBody>
+      </p:sp>
+      <p:sp>
+        <p:nvSpPr>
+          <p:cNvPr id="15" name="TextBox 14"/>
+          <p:cNvSpPr txBox="1"/>
+          <p:nvPr/>
+        </p:nvSpPr>
+        <p:spPr>
+          <a:xfrm>
+            <a:off x="6233007" y="3200400"/>
+            <a:ext cx="2366695" cy="457200"/>
+          </a:xfrm>
+          <a:prstGeom prst="rect">
+            <a:avLst/>
+          </a:prstGeom>
+          <a:noFill/>
+        </p:spPr>
+        <p:txBody>
+          <a:bodyPr wrap="square" anchor="ctr" lIns="0" rIns="0" tIns="0" bIns="0"/>
+          <a:lstStyle/>
+          <a:p>
+            <a:pPr algn="ctr">
+              <a:lnSpc>
+                <a:spcPct val="100000"/>
+              </a:lnSpc>
+              <a:spcBef>
+                <a:spcPts val="0"/>
+              </a:spcBef>
+              <a:spcAft>
+                <a:spcPts val="0"/>
+              </a:spcAft>
+            </a:pPr>
+            <a:r>
+              <a:rPr sz="950" b="1" i="0" lang="en-AU" spc="-4">
+                <a:solidFill>
+                  <a:srgbClr val="111111"/>
+                </a:solidFill>
+                <a:latin typeface="Inter"/>
+              </a:rPr>
+              <a:t>Change management</a:t>
+            </a:r>
+          </a:p>
+        </p:txBody>
+      </p:sp>
+      <p:sp>
+        <p:nvSpPr>
+          <p:cNvPr id="16" name="Rectangle 15"/>
+          <p:cNvSpPr/>
+          <p:nvPr/>
+        </p:nvSpPr>
+        <p:spPr>
+          <a:xfrm>
+            <a:off x="8800871" y="3200400"/>
+            <a:ext cx="2512999" cy="457200"/>
+          </a:xfrm>
+          <a:prstGeom prst="rect">
+            <a:avLst/>
+          </a:prstGeom>
+          <a:solidFill>
+            <a:srgbClr val="FFFFFF"/>
+          </a:solidFill>
+          <a:ln w="12700">
+            <a:solidFill>
+              <a:srgbClr val="E4E4E0"/>
+            </a:solidFill>
+          </a:ln>
+          <a:effectLst/>
+        </p:spPr>
+        <p:style>
+          <a:lnRef idx="1">
+            <a:schemeClr val="accent1"/>
+          </a:lnRef>
+          <a:fillRef idx="3">
+            <a:schemeClr val="accent1"/>
+          </a:fillRef>
+          <a:effectRef idx="2">
+            <a:schemeClr val="accent1"/>
+          </a:effectRef>
+          <a:fontRef idx="minor">
+            <a:schemeClr val="lt1"/>
+          </a:fontRef>
+        </p:style>
+        <p:txBody>
+          <a:bodyPr rtlCol="0" anchor="ctr"/>
+          <a:lstStyle/>
+          <a:p>
+            <a:pPr algn="ctr"/>
+          </a:p>
+        </p:txBody>
+      </p:sp>
+      <p:sp>
+        <p:nvSpPr>
+          <p:cNvPr id="17" name="TextBox 16"/>
+          <p:cNvSpPr txBox="1"/>
+          <p:nvPr/>
+        </p:nvSpPr>
+        <p:spPr>
+          <a:xfrm>
+            <a:off x="8874023" y="3200400"/>
+            <a:ext cx="2366695" cy="457200"/>
+          </a:xfrm>
+          <a:prstGeom prst="rect">
+            <a:avLst/>
+          </a:prstGeom>
+          <a:noFill/>
+        </p:spPr>
+        <p:txBody>
+          <a:bodyPr wrap="square" anchor="ctr" lIns="0" rIns="0" tIns="0" bIns="0"/>
+          <a:lstStyle/>
+          <a:p>
+            <a:pPr algn="ctr">
+              <a:lnSpc>
+                <a:spcPct val="100000"/>
+              </a:lnSpc>
+              <a:spcBef>
+                <a:spcPts val="0"/>
+              </a:spcBef>
+              <a:spcAft>
+                <a:spcPts val="0"/>
+              </a:spcAft>
+            </a:pPr>
+            <a:r>
+              <a:rPr sz="950" b="1" i="0" lang="en-AU" spc="-4">
+                <a:solidFill>
+                  <a:srgbClr val="111111"/>
+                </a:solidFill>
+                <a:latin typeface="Inter"/>
+              </a:rPr>
+              <a:t>Release management</a:t>
+            </a:r>
+          </a:p>
+        </p:txBody>
+      </p:sp>
+      <p:sp>
+        <p:nvSpPr>
+          <p:cNvPr id="18" name="Rectangle 17"/>
+          <p:cNvSpPr/>
+          <p:nvPr/>
+        </p:nvSpPr>
+        <p:spPr>
+          <a:xfrm>
+            <a:off x="877824" y="3785615"/>
+            <a:ext cx="2512999" cy="457200"/>
+          </a:xfrm>
+          <a:prstGeom prst="rect">
+            <a:avLst/>
+          </a:prstGeom>
+          <a:solidFill>
+            <a:srgbClr val="FFFFFF"/>
+          </a:solidFill>
+          <a:ln w="12700">
+            <a:solidFill>
+              <a:srgbClr val="E4E4E0"/>
+            </a:solidFill>
+          </a:ln>
+          <a:effectLst/>
+        </p:spPr>
+        <p:style>
+          <a:lnRef idx="1">
+            <a:schemeClr val="accent1"/>
+          </a:lnRef>
+          <a:fillRef idx="3">
+            <a:schemeClr val="accent1"/>
+          </a:fillRef>
+          <a:effectRef idx="2">
+            <a:schemeClr val="accent1"/>
+          </a:effectRef>
+          <a:fontRef idx="minor">
+            <a:schemeClr val="lt1"/>
+          </a:fontRef>
+        </p:style>
+        <p:txBody>
+          <a:bodyPr rtlCol="0" anchor="ctr"/>
+          <a:lstStyle/>
+          <a:p>
+            <a:pPr algn="ctr"/>
+          </a:p>
+        </p:txBody>
+      </p:sp>
+      <p:sp>
+        <p:nvSpPr>
+          <p:cNvPr id="19" name="TextBox 18"/>
+          <p:cNvSpPr txBox="1"/>
+          <p:nvPr/>
+        </p:nvSpPr>
+        <p:spPr>
+          <a:xfrm>
+            <a:off x="950976" y="3785615"/>
+            <a:ext cx="2366695" cy="457200"/>
+          </a:xfrm>
+          <a:prstGeom prst="rect">
+            <a:avLst/>
+          </a:prstGeom>
+          <a:noFill/>
+        </p:spPr>
+        <p:txBody>
+          <a:bodyPr wrap="square" anchor="ctr" lIns="0" rIns="0" tIns="0" bIns="0"/>
+          <a:lstStyle/>
+          <a:p>
+            <a:pPr algn="ctr">
+              <a:lnSpc>
+                <a:spcPct val="100000"/>
+              </a:lnSpc>
+              <a:spcBef>
+                <a:spcPts val="0"/>
+              </a:spcBef>
+              <a:spcAft>
+                <a:spcPts val="0"/>
+              </a:spcAft>
+            </a:pPr>
+            <a:r>
+              <a:rPr sz="950" b="1" i="0" lang="en-AU" spc="-4">
+                <a:solidFill>
+                  <a:srgbClr val="111111"/>
+                </a:solidFill>
+                <a:latin typeface="Inter"/>
+              </a:rPr>
+              <a:t>Service requests</a:t>
+            </a:r>
+          </a:p>
+        </p:txBody>
+      </p:sp>
+      <p:sp>
+        <p:nvSpPr>
+          <p:cNvPr id="20" name="Rectangle 19"/>
+          <p:cNvSpPr/>
+          <p:nvPr/>
+        </p:nvSpPr>
+        <p:spPr>
+          <a:xfrm>
+            <a:off x="3518839" y="3785615"/>
+            <a:ext cx="2512999" cy="457200"/>
+          </a:xfrm>
+          <a:prstGeom prst="rect">
+            <a:avLst/>
+          </a:prstGeom>
+          <a:solidFill>
+            <a:srgbClr val="FFFFFF"/>
+          </a:solidFill>
+          <a:ln w="12700">
+            <a:solidFill>
+              <a:srgbClr val="E4E4E0"/>
+            </a:solidFill>
+          </a:ln>
+          <a:effectLst/>
+        </p:spPr>
+        <p:style>
+          <a:lnRef idx="1">
+            <a:schemeClr val="accent1"/>
+          </a:lnRef>
+          <a:fillRef idx="3">
+            <a:schemeClr val="accent1"/>
+          </a:fillRef>
+          <a:effectRef idx="2">
+            <a:schemeClr val="accent1"/>
+          </a:effectRef>
+          <a:fontRef idx="minor">
+            <a:schemeClr val="lt1"/>
+          </a:fontRef>
+        </p:style>
+        <p:txBody>
+          <a:bodyPr rtlCol="0" anchor="ctr"/>
+          <a:lstStyle/>
+          <a:p>
+            <a:pPr algn="ctr"/>
+          </a:p>
+        </p:txBody>
+      </p:sp>
+      <p:sp>
+        <p:nvSpPr>
+          <p:cNvPr id="21" name="TextBox 20"/>
+          <p:cNvSpPr txBox="1"/>
+          <p:nvPr/>
+        </p:nvSpPr>
+        <p:spPr>
+          <a:xfrm>
+            <a:off x="3591991" y="3785615"/>
+            <a:ext cx="2366695" cy="457200"/>
+          </a:xfrm>
+          <a:prstGeom prst="rect">
+            <a:avLst/>
+          </a:prstGeom>
+          <a:noFill/>
+        </p:spPr>
+        <p:txBody>
+          <a:bodyPr wrap="square" anchor="ctr" lIns="0" rIns="0" tIns="0" bIns="0"/>
+          <a:lstStyle/>
+          <a:p>
+            <a:pPr algn="ctr">
+              <a:lnSpc>
+                <a:spcPct val="100000"/>
+              </a:lnSpc>
+              <a:spcBef>
+                <a:spcPts val="0"/>
+              </a:spcBef>
+              <a:spcAft>
+                <a:spcPts val="0"/>
+              </a:spcAft>
+            </a:pPr>
+            <a:r>
+              <a:rPr sz="950" b="1" i="0" lang="en-AU" spc="-4">
+                <a:solidFill>
+                  <a:srgbClr val="111111"/>
+                </a:solidFill>
+                <a:latin typeface="Inter"/>
+              </a:rPr>
+              <a:t>Change Advisory Board</a:t>
+            </a:r>
+          </a:p>
+        </p:txBody>
+      </p:sp>
+      <p:sp>
+        <p:nvSpPr>
+          <p:cNvPr id="22" name="Rectangle 21"/>
+          <p:cNvSpPr/>
+          <p:nvPr/>
+        </p:nvSpPr>
+        <p:spPr>
+          <a:xfrm>
+            <a:off x="6159855" y="3785615"/>
+            <a:ext cx="2512999" cy="457200"/>
+          </a:xfrm>
+          <a:prstGeom prst="rect">
+            <a:avLst/>
+          </a:prstGeom>
+          <a:solidFill>
+            <a:srgbClr val="FFFFFF"/>
+          </a:solidFill>
+          <a:ln w="12700">
+            <a:solidFill>
+              <a:srgbClr val="E4E4E0"/>
+            </a:solidFill>
+          </a:ln>
+          <a:effectLst/>
+        </p:spPr>
+        <p:style>
+          <a:lnRef idx="1">
+            <a:schemeClr val="accent1"/>
+          </a:lnRef>
+          <a:fillRef idx="3">
+            <a:schemeClr val="accent1"/>
+          </a:fillRef>
+          <a:effectRef idx="2">
+            <a:schemeClr val="accent1"/>
+          </a:effectRef>
+          <a:fontRef idx="minor">
+            <a:schemeClr val="lt1"/>
+          </a:fontRef>
+        </p:style>
+        <p:txBody>
+          <a:bodyPr rtlCol="0" anchor="ctr"/>
+          <a:lstStyle/>
+          <a:p>
+            <a:pPr algn="ctr"/>
+          </a:p>
+        </p:txBody>
+      </p:sp>
+      <p:sp>
+        <p:nvSpPr>
+          <p:cNvPr id="23" name="TextBox 22"/>
+          <p:cNvSpPr txBox="1"/>
+          <p:nvPr/>
+        </p:nvSpPr>
+        <p:spPr>
+          <a:xfrm>
+            <a:off x="6233007" y="3785615"/>
+            <a:ext cx="2366695" cy="457200"/>
+          </a:xfrm>
+          <a:prstGeom prst="rect">
+            <a:avLst/>
+          </a:prstGeom>
+          <a:noFill/>
+        </p:spPr>
+        <p:txBody>
+          <a:bodyPr wrap="square" anchor="ctr" lIns="0" rIns="0" tIns="0" bIns="0"/>
+          <a:lstStyle/>
+          <a:p>
+            <a:pPr algn="ctr">
+              <a:lnSpc>
+                <a:spcPct val="100000"/>
+              </a:lnSpc>
+              <a:spcBef>
+                <a:spcPts val="0"/>
+              </a:spcBef>
+              <a:spcAft>
+                <a:spcPts val="0"/>
+              </a:spcAft>
+            </a:pPr>
+            <a:r>
+              <a:rPr sz="950" b="1" i="0" lang="en-AU" spc="-4">
+                <a:solidFill>
+                  <a:srgbClr val="111111"/>
+                </a:solidFill>
+                <a:latin typeface="Inter"/>
+              </a:rPr>
+              <a:t>SLAs</a:t>
+            </a:r>
+          </a:p>
+        </p:txBody>
+      </p:sp>
+      <p:sp>
+        <p:nvSpPr>
+          <p:cNvPr id="24" name="Rectangle 23"/>
+          <p:cNvSpPr/>
+          <p:nvPr/>
+        </p:nvSpPr>
+        <p:spPr>
+          <a:xfrm>
+            <a:off x="8800871" y="3785615"/>
+            <a:ext cx="2512999" cy="457200"/>
+          </a:xfrm>
+          <a:prstGeom prst="rect">
+            <a:avLst/>
+          </a:prstGeom>
+          <a:solidFill>
+            <a:srgbClr val="FFFFFF"/>
+          </a:solidFill>
+          <a:ln w="12700">
+            <a:solidFill>
+              <a:srgbClr val="E4E4E0"/>
+            </a:solidFill>
+          </a:ln>
+          <a:effectLst/>
+        </p:spPr>
+        <p:style>
+          <a:lnRef idx="1">
+            <a:schemeClr val="accent1"/>
+          </a:lnRef>
+          <a:fillRef idx="3">
+            <a:schemeClr val="accent1"/>
+          </a:fillRef>
+          <a:effectRef idx="2">
+            <a:schemeClr val="accent1"/>
+          </a:effectRef>
+          <a:fontRef idx="minor">
+            <a:schemeClr val="lt1"/>
+          </a:fontRef>
+        </p:style>
+        <p:txBody>
+          <a:bodyPr rtlCol="0" anchor="ctr"/>
+          <a:lstStyle/>
+          <a:p>
+            <a:pPr algn="ctr"/>
+          </a:p>
+        </p:txBody>
+      </p:sp>
+      <p:sp>
+        <p:nvSpPr>
+          <p:cNvPr id="25" name="TextBox 24"/>
+          <p:cNvSpPr txBox="1"/>
+          <p:nvPr/>
+        </p:nvSpPr>
+        <p:spPr>
+          <a:xfrm>
+            <a:off x="8874023" y="3785615"/>
+            <a:ext cx="2366695" cy="457200"/>
+          </a:xfrm>
+          <a:prstGeom prst="rect">
+            <a:avLst/>
+          </a:prstGeom>
+          <a:noFill/>
+        </p:spPr>
+        <p:txBody>
+          <a:bodyPr wrap="square" anchor="ctr" lIns="0" rIns="0" tIns="0" bIns="0"/>
+          <a:lstStyle/>
+          <a:p>
+            <a:pPr algn="ctr">
+              <a:lnSpc>
+                <a:spcPct val="100000"/>
+              </a:lnSpc>
+              <a:spcBef>
+                <a:spcPts val="0"/>
+              </a:spcBef>
+              <a:spcAft>
+                <a:spcPts val="0"/>
+              </a:spcAft>
+            </a:pPr>
+            <a:r>
+              <a:rPr sz="950" b="1" i="0" lang="en-AU" spc="-4">
+                <a:solidFill>
+                  <a:srgbClr val="111111"/>
+                </a:solidFill>
+                <a:latin typeface="Inter"/>
+              </a:rPr>
+              <a:t>Metrics</a:t>
+            </a:r>
+          </a:p>
+        </p:txBody>
+      </p:sp>
+      <p:sp>
+        <p:nvSpPr>
+          <p:cNvPr id="26" name="Rectangle 25"/>
+          <p:cNvSpPr/>
+          <p:nvPr/>
+        </p:nvSpPr>
+        <p:spPr>
+          <a:xfrm>
+            <a:off x="877824" y="4370832"/>
+            <a:ext cx="2512999" cy="457200"/>
+          </a:xfrm>
+          <a:prstGeom prst="rect">
+            <a:avLst/>
+          </a:prstGeom>
+          <a:solidFill>
+            <a:srgbClr val="FFFFFF"/>
+          </a:solidFill>
+          <a:ln w="12700">
+            <a:solidFill>
+              <a:srgbClr val="E4E4E0"/>
+            </a:solidFill>
+          </a:ln>
+          <a:effectLst/>
+        </p:spPr>
+        <p:style>
+          <a:lnRef idx="1">
+            <a:schemeClr val="accent1"/>
+          </a:lnRef>
+          <a:fillRef idx="3">
+            <a:schemeClr val="accent1"/>
+          </a:fillRef>
+          <a:effectRef idx="2">
+            <a:schemeClr val="accent1"/>
+          </a:effectRef>
+          <a:fontRef idx="minor">
+            <a:schemeClr val="lt1"/>
+          </a:fontRef>
+        </p:style>
+        <p:txBody>
+          <a:bodyPr rtlCol="0" anchor="ctr"/>
+          <a:lstStyle/>
+          <a:p>
+            <a:pPr algn="ctr"/>
+          </a:p>
+        </p:txBody>
+      </p:sp>
+      <p:sp>
+        <p:nvSpPr>
+          <p:cNvPr id="27" name="TextBox 26"/>
+          <p:cNvSpPr txBox="1"/>
+          <p:nvPr/>
+        </p:nvSpPr>
+        <p:spPr>
+          <a:xfrm>
+            <a:off x="950976" y="4370832"/>
+            <a:ext cx="2366695" cy="457200"/>
+          </a:xfrm>
+          <a:prstGeom prst="rect">
+            <a:avLst/>
+          </a:prstGeom>
+          <a:noFill/>
+        </p:spPr>
+        <p:txBody>
+          <a:bodyPr wrap="square" anchor="ctr" lIns="0" rIns="0" tIns="0" bIns="0"/>
+          <a:lstStyle/>
+          <a:p>
+            <a:pPr algn="ctr">
+              <a:lnSpc>
+                <a:spcPct val="100000"/>
+              </a:lnSpc>
+              <a:spcBef>
+                <a:spcPts val="0"/>
+              </a:spcBef>
+              <a:spcAft>
+                <a:spcPts val="0"/>
+              </a:spcAft>
+            </a:pPr>
+            <a:r>
+              <a:rPr sz="950" b="1" i="0" lang="en-AU" spc="-4">
+                <a:solidFill>
+                  <a:srgbClr val="111111"/>
+                </a:solidFill>
+                <a:latin typeface="Inter"/>
+              </a:rPr>
+              <a:t>Integration health checks</a:t>
+            </a:r>
+          </a:p>
+        </p:txBody>
+      </p:sp>
+      <p:sp>
+        <p:nvSpPr>
+          <p:cNvPr id="28" name="Rectangle 27"/>
+          <p:cNvSpPr/>
+          <p:nvPr/>
+        </p:nvSpPr>
+        <p:spPr>
+          <a:xfrm>
+            <a:off x="3518839" y="4370832"/>
+            <a:ext cx="2512999" cy="457200"/>
+          </a:xfrm>
+          <a:prstGeom prst="rect">
+            <a:avLst/>
+          </a:prstGeom>
+          <a:solidFill>
+            <a:srgbClr val="FFFFFF"/>
+          </a:solidFill>
+          <a:ln w="12700">
+            <a:solidFill>
+              <a:srgbClr val="E4E4E0"/>
+            </a:solidFill>
+          </a:ln>
+          <a:effectLst/>
+        </p:spPr>
+        <p:style>
+          <a:lnRef idx="1">
+            <a:schemeClr val="accent1"/>
+          </a:lnRef>
+          <a:fillRef idx="3">
+            <a:schemeClr val="accent1"/>
+          </a:fillRef>
+          <a:effectRef idx="2">
+            <a:schemeClr val="accent1"/>
+          </a:effectRef>
+          <a:fontRef idx="minor">
+            <a:schemeClr val="lt1"/>
+          </a:fontRef>
+        </p:style>
+        <p:txBody>
+          <a:bodyPr rtlCol="0" anchor="ctr"/>
+          <a:lstStyle/>
+          <a:p>
+            <a:pPr algn="ctr"/>
+          </a:p>
+        </p:txBody>
+      </p:sp>
+      <p:sp>
+        <p:nvSpPr>
+          <p:cNvPr id="29" name="TextBox 28"/>
+          <p:cNvSpPr txBox="1"/>
+          <p:nvPr/>
+        </p:nvSpPr>
+        <p:spPr>
+          <a:xfrm>
+            <a:off x="3591991" y="4370832"/>
+            <a:ext cx="2366695" cy="457200"/>
+          </a:xfrm>
+          <a:prstGeom prst="rect">
+            <a:avLst/>
+          </a:prstGeom>
+          <a:noFill/>
+        </p:spPr>
+        <p:txBody>
+          <a:bodyPr wrap="square" anchor="ctr" lIns="0" rIns="0" tIns="0" bIns="0"/>
+          <a:lstStyle/>
+          <a:p>
+            <a:pPr algn="ctr">
+              <a:lnSpc>
+                <a:spcPct val="100000"/>
+              </a:lnSpc>
+              <a:spcBef>
+                <a:spcPts val="0"/>
+              </a:spcBef>
+              <a:spcAft>
+                <a:spcPts val="0"/>
+              </a:spcAft>
+            </a:pPr>
+            <a:r>
+              <a:rPr sz="950" b="1" i="0" lang="en-AU" spc="-4">
+                <a:solidFill>
+                  <a:srgbClr val="111111"/>
+                </a:solidFill>
+                <a:latin typeface="Inter"/>
+              </a:rPr>
+              <a:t>Backlog management</a:t>
+            </a:r>
+          </a:p>
+        </p:txBody>
+      </p:sp>
+      <p:sp>
+        <p:nvSpPr>
+          <p:cNvPr id="30" name="Rectangle 29"/>
+          <p:cNvSpPr/>
+          <p:nvPr/>
+        </p:nvSpPr>
+        <p:spPr>
+          <a:xfrm>
+            <a:off x="6159855" y="4370832"/>
+            <a:ext cx="2512999" cy="457200"/>
+          </a:xfrm>
+          <a:prstGeom prst="rect">
+            <a:avLst/>
+          </a:prstGeom>
+          <a:solidFill>
+            <a:srgbClr val="FFFFFF"/>
+          </a:solidFill>
+          <a:ln w="12700">
+            <a:solidFill>
+              <a:srgbClr val="E4E4E0"/>
+            </a:solidFill>
+          </a:ln>
+          <a:effectLst/>
+        </p:spPr>
+        <p:style>
+          <a:lnRef idx="1">
+            <a:schemeClr val="accent1"/>
+          </a:lnRef>
+          <a:fillRef idx="3">
+            <a:schemeClr val="accent1"/>
+          </a:fillRef>
+          <a:effectRef idx="2">
+            <a:schemeClr val="accent1"/>
+          </a:effectRef>
+          <a:fontRef idx="minor">
+            <a:schemeClr val="lt1"/>
+          </a:fontRef>
+        </p:style>
+        <p:txBody>
+          <a:bodyPr rtlCol="0" anchor="ctr"/>
+          <a:lstStyle/>
+          <a:p>
+            <a:pPr algn="ctr"/>
+          </a:p>
+        </p:txBody>
+      </p:sp>
+      <p:sp>
+        <p:nvSpPr>
+          <p:cNvPr id="31" name="TextBox 30"/>
+          <p:cNvSpPr txBox="1"/>
+          <p:nvPr/>
+        </p:nvSpPr>
+        <p:spPr>
+          <a:xfrm>
+            <a:off x="6233007" y="4370832"/>
+            <a:ext cx="2366695" cy="457200"/>
+          </a:xfrm>
+          <a:prstGeom prst="rect">
+            <a:avLst/>
+          </a:prstGeom>
+          <a:noFill/>
+        </p:spPr>
+        <p:txBody>
+          <a:bodyPr wrap="square" anchor="ctr" lIns="0" rIns="0" tIns="0" bIns="0"/>
+          <a:lstStyle/>
+          <a:p>
+            <a:pPr algn="ctr">
+              <a:lnSpc>
+                <a:spcPct val="100000"/>
+              </a:lnSpc>
+              <a:spcBef>
+                <a:spcPts val="0"/>
+              </a:spcBef>
+              <a:spcAft>
+                <a:spcPts val="0"/>
+              </a:spcAft>
+            </a:pPr>
+            <a:r>
+              <a:rPr sz="950" b="1" i="0" lang="en-AU" spc="-4">
+                <a:solidFill>
+                  <a:srgbClr val="111111"/>
+                </a:solidFill>
+                <a:latin typeface="Inter"/>
+              </a:rPr>
+              <a:t>Prioritisation forum</a:t>
+            </a:r>
+          </a:p>
+        </p:txBody>
+      </p:sp>
+      <p:sp>
+        <p:nvSpPr>
+          <p:cNvPr id="32" name="Rectangle 31"/>
+          <p:cNvSpPr/>
+          <p:nvPr/>
+        </p:nvSpPr>
+        <p:spPr>
+          <a:xfrm>
+            <a:off x="8800871" y="4370832"/>
+            <a:ext cx="2512999" cy="457200"/>
+          </a:xfrm>
+          <a:prstGeom prst="rect">
+            <a:avLst/>
+          </a:prstGeom>
+          <a:solidFill>
+            <a:srgbClr val="FFFFFF"/>
+          </a:solidFill>
+          <a:ln w="12700">
+            <a:solidFill>
+              <a:srgbClr val="E4E4E0"/>
+            </a:solidFill>
+          </a:ln>
+          <a:effectLst/>
+        </p:spPr>
+        <p:style>
+          <a:lnRef idx="1">
+            <a:schemeClr val="accent1"/>
+          </a:lnRef>
+          <a:fillRef idx="3">
+            <a:schemeClr val="accent1"/>
+          </a:fillRef>
+          <a:effectRef idx="2">
+            <a:schemeClr val="accent1"/>
+          </a:effectRef>
+          <a:fontRef idx="minor">
+            <a:schemeClr val="lt1"/>
+          </a:fontRef>
+        </p:style>
+        <p:txBody>
+          <a:bodyPr rtlCol="0" anchor="ctr"/>
+          <a:lstStyle/>
+          <a:p>
+            <a:pPr algn="ctr"/>
+          </a:p>
+        </p:txBody>
+      </p:sp>
+      <p:sp>
+        <p:nvSpPr>
+          <p:cNvPr id="33" name="TextBox 32"/>
+          <p:cNvSpPr txBox="1"/>
+          <p:nvPr/>
+        </p:nvSpPr>
+        <p:spPr>
+          <a:xfrm>
+            <a:off x="8874023" y="4370832"/>
+            <a:ext cx="2366695" cy="457200"/>
+          </a:xfrm>
+          <a:prstGeom prst="rect">
+            <a:avLst/>
+          </a:prstGeom>
+          <a:noFill/>
+        </p:spPr>
+        <p:txBody>
+          <a:bodyPr wrap="square" anchor="ctr" lIns="0" rIns="0" tIns="0" bIns="0"/>
+          <a:lstStyle/>
+          <a:p>
+            <a:pPr algn="ctr">
+              <a:lnSpc>
+                <a:spcPct val="100000"/>
+              </a:lnSpc>
+              <a:spcBef>
+                <a:spcPts val="0"/>
+              </a:spcBef>
+              <a:spcAft>
+                <a:spcPts val="0"/>
+              </a:spcAft>
+            </a:pPr>
+            <a:r>
+              <a:rPr sz="950" b="1" i="0" lang="en-AU" spc="-4">
+                <a:solidFill>
+                  <a:srgbClr val="111111"/>
+                </a:solidFill>
+                <a:latin typeface="Inter"/>
+              </a:rPr>
+              <a:t>Capacity management</a:t>
+            </a:r>
+          </a:p>
+        </p:txBody>
+      </p:sp>
+      <p:sp>
+        <p:nvSpPr>
+          <p:cNvPr id="34" name="Rectangle 33"/>
+          <p:cNvSpPr/>
+          <p:nvPr/>
+        </p:nvSpPr>
+        <p:spPr>
+          <a:xfrm>
+            <a:off x="877824" y="4956048"/>
+            <a:ext cx="2512999" cy="457200"/>
+          </a:xfrm>
+          <a:prstGeom prst="rect">
+            <a:avLst/>
+          </a:prstGeom>
+          <a:solidFill>
+            <a:srgbClr val="FFFFFF"/>
+          </a:solidFill>
+          <a:ln w="12700">
+            <a:solidFill>
+              <a:srgbClr val="E4E4E0"/>
+            </a:solidFill>
+          </a:ln>
+          <a:effectLst/>
+        </p:spPr>
+        <p:style>
+          <a:lnRef idx="1">
+            <a:schemeClr val="accent1"/>
+          </a:lnRef>
+          <a:fillRef idx="3">
+            <a:schemeClr val="accent1"/>
+          </a:fillRef>
+          <a:effectRef idx="2">
+            <a:schemeClr val="accent1"/>
+          </a:effectRef>
+          <a:fontRef idx="minor">
+            <a:schemeClr val="lt1"/>
+          </a:fontRef>
+        </p:style>
+        <p:txBody>
+          <a:bodyPr rtlCol="0" anchor="ctr"/>
+          <a:lstStyle/>
+          <a:p>
+            <a:pPr algn="ctr"/>
+          </a:p>
+        </p:txBody>
+      </p:sp>
+      <p:sp>
+        <p:nvSpPr>
+          <p:cNvPr id="35" name="TextBox 34"/>
+          <p:cNvSpPr txBox="1"/>
+          <p:nvPr/>
+        </p:nvSpPr>
+        <p:spPr>
+          <a:xfrm>
+            <a:off x="950976" y="4956048"/>
+            <a:ext cx="2366695" cy="457200"/>
+          </a:xfrm>
+          <a:prstGeom prst="rect">
+            <a:avLst/>
+          </a:prstGeom>
+          <a:noFill/>
+        </p:spPr>
+        <p:txBody>
+          <a:bodyPr wrap="square" anchor="ctr" lIns="0" rIns="0" tIns="0" bIns="0"/>
+          <a:lstStyle/>
+          <a:p>
+            <a:pPr algn="ctr">
+              <a:lnSpc>
+                <a:spcPct val="100000"/>
+              </a:lnSpc>
+              <a:spcBef>
+                <a:spcPts val="0"/>
+              </a:spcBef>
+              <a:spcAft>
+                <a:spcPts val="0"/>
+              </a:spcAft>
+            </a:pPr>
+            <a:r>
+              <a:rPr sz="950" b="1" i="0" lang="en-AU" spc="-4">
+                <a:solidFill>
+                  <a:srgbClr val="111111"/>
+                </a:solidFill>
+                <a:latin typeface="Inter"/>
+              </a:rPr>
+              <a:t>Enhancements</a:t>
+            </a:r>
+          </a:p>
+        </p:txBody>
+      </p:sp>
+      <p:sp>
+        <p:nvSpPr>
+          <p:cNvPr id="36" name="Rectangle 35"/>
+          <p:cNvSpPr/>
+          <p:nvPr/>
+        </p:nvSpPr>
+        <p:spPr>
+          <a:xfrm>
+            <a:off x="3518839" y="4956048"/>
+            <a:ext cx="2512999" cy="457200"/>
+          </a:xfrm>
+          <a:prstGeom prst="rect">
+            <a:avLst/>
+          </a:prstGeom>
+          <a:solidFill>
+            <a:srgbClr val="FFFFFF"/>
+          </a:solidFill>
+          <a:ln w="12700">
+            <a:solidFill>
+              <a:srgbClr val="E4E4E0"/>
+            </a:solidFill>
+          </a:ln>
+          <a:effectLst/>
+        </p:spPr>
+        <p:style>
+          <a:lnRef idx="1">
+            <a:schemeClr val="accent1"/>
+          </a:lnRef>
+          <a:fillRef idx="3">
+            <a:schemeClr val="accent1"/>
+          </a:fillRef>
+          <a:effectRef idx="2">
+            <a:schemeClr val="accent1"/>
+          </a:effectRef>
+          <a:fontRef idx="minor">
+            <a:schemeClr val="lt1"/>
+          </a:fontRef>
+        </p:style>
+        <p:txBody>
+          <a:bodyPr rtlCol="0" anchor="ctr"/>
+          <a:lstStyle/>
+          <a:p>
+            <a:pPr algn="ctr"/>
+          </a:p>
+        </p:txBody>
+      </p:sp>
+      <p:sp>
+        <p:nvSpPr>
+          <p:cNvPr id="37" name="TextBox 36"/>
+          <p:cNvSpPr txBox="1"/>
+          <p:nvPr/>
+        </p:nvSpPr>
+        <p:spPr>
+          <a:xfrm>
+            <a:off x="3591991" y="4956048"/>
+            <a:ext cx="2366695" cy="457200"/>
+          </a:xfrm>
+          <a:prstGeom prst="rect">
+            <a:avLst/>
+          </a:prstGeom>
+          <a:noFill/>
+        </p:spPr>
+        <p:txBody>
+          <a:bodyPr wrap="square" anchor="ctr" lIns="0" rIns="0" tIns="0" bIns="0"/>
+          <a:lstStyle/>
+          <a:p>
+            <a:pPr algn="ctr">
+              <a:lnSpc>
+                <a:spcPct val="100000"/>
+              </a:lnSpc>
+              <a:spcBef>
+                <a:spcPts val="0"/>
+              </a:spcBef>
+              <a:spcAft>
+                <a:spcPts val="0"/>
+              </a:spcAft>
+            </a:pPr>
+            <a:r>
+              <a:rPr sz="950" b="1" i="0" lang="en-AU" spc="-4">
+                <a:solidFill>
+                  <a:srgbClr val="111111"/>
+                </a:solidFill>
+                <a:latin typeface="Inter"/>
+              </a:rPr>
+              <a:t>Knowledge base</a:t>
+            </a:r>
+          </a:p>
+        </p:txBody>
+      </p:sp>
+      <p:sp>
+        <p:nvSpPr>
+          <p:cNvPr id="38" name="Rectangle 37"/>
+          <p:cNvSpPr/>
+          <p:nvPr/>
+        </p:nvSpPr>
+        <p:spPr>
+          <a:xfrm>
+            <a:off x="6159855" y="4956048"/>
+            <a:ext cx="2512999" cy="457200"/>
+          </a:xfrm>
+          <a:prstGeom prst="rect">
+            <a:avLst/>
+          </a:prstGeom>
+          <a:solidFill>
+            <a:srgbClr val="FFFFFF"/>
+          </a:solidFill>
+          <a:ln w="12700">
+            <a:solidFill>
+              <a:srgbClr val="E4E4E0"/>
+            </a:solidFill>
+          </a:ln>
+          <a:effectLst/>
+        </p:spPr>
+        <p:style>
+          <a:lnRef idx="1">
+            <a:schemeClr val="accent1"/>
+          </a:lnRef>
+          <a:fillRef idx="3">
+            <a:schemeClr val="accent1"/>
+          </a:fillRef>
+          <a:effectRef idx="2">
+            <a:schemeClr val="accent1"/>
+          </a:effectRef>
+          <a:fontRef idx="minor">
+            <a:schemeClr val="lt1"/>
+          </a:fontRef>
+        </p:style>
+        <p:txBody>
+          <a:bodyPr rtlCol="0" anchor="ctr"/>
+          <a:lstStyle/>
+          <a:p>
+            <a:pPr algn="ctr"/>
+          </a:p>
+        </p:txBody>
+      </p:sp>
+      <p:sp>
+        <p:nvSpPr>
+          <p:cNvPr id="39" name="TextBox 38"/>
+          <p:cNvSpPr txBox="1"/>
+          <p:nvPr/>
+        </p:nvSpPr>
+        <p:spPr>
+          <a:xfrm>
+            <a:off x="6233007" y="4956048"/>
+            <a:ext cx="2366695" cy="457200"/>
+          </a:xfrm>
+          <a:prstGeom prst="rect">
+            <a:avLst/>
+          </a:prstGeom>
+          <a:noFill/>
+        </p:spPr>
+        <p:txBody>
+          <a:bodyPr wrap="square" anchor="ctr" lIns="0" rIns="0" tIns="0" bIns="0"/>
+          <a:lstStyle/>
+          <a:p>
+            <a:pPr algn="ctr">
+              <a:lnSpc>
+                <a:spcPct val="100000"/>
+              </a:lnSpc>
+              <a:spcBef>
+                <a:spcPts val="0"/>
+              </a:spcBef>
+              <a:spcAft>
+                <a:spcPts val="0"/>
+              </a:spcAft>
+            </a:pPr>
+            <a:r>
+              <a:rPr sz="950" b="1" i="0" lang="en-AU" spc="-4">
+                <a:solidFill>
+                  <a:srgbClr val="111111"/>
+                </a:solidFill>
+                <a:latin typeface="Inter"/>
+              </a:rPr>
+              <a:t>Cyber security</a:t>
+            </a:r>
+          </a:p>
+        </p:txBody>
+      </p:sp>
+      <p:sp>
+        <p:nvSpPr>
+          <p:cNvPr id="40" name="Rectangle 39"/>
+          <p:cNvSpPr/>
+          <p:nvPr/>
+        </p:nvSpPr>
+        <p:spPr>
+          <a:xfrm>
+            <a:off x="8800871" y="4956048"/>
+            <a:ext cx="2512999" cy="457200"/>
+          </a:xfrm>
+          <a:prstGeom prst="rect">
+            <a:avLst/>
+          </a:prstGeom>
+          <a:solidFill>
+            <a:srgbClr val="FFFFFF"/>
+          </a:solidFill>
+          <a:ln w="12700">
+            <a:solidFill>
+              <a:srgbClr val="E4E4E0"/>
+            </a:solidFill>
+          </a:ln>
+          <a:effectLst/>
+        </p:spPr>
+        <p:style>
+          <a:lnRef idx="1">
+            <a:schemeClr val="accent1"/>
+          </a:lnRef>
+          <a:fillRef idx="3">
+            <a:schemeClr val="accent1"/>
+          </a:fillRef>
+          <a:effectRef idx="2">
+            <a:schemeClr val="accent1"/>
+          </a:effectRef>
+          <a:fontRef idx="minor">
+            <a:schemeClr val="lt1"/>
+          </a:fontRef>
+        </p:style>
+        <p:txBody>
+          <a:bodyPr rtlCol="0" anchor="ctr"/>
+          <a:lstStyle/>
+          <a:p>
+            <a:pPr algn="ctr"/>
+          </a:p>
+        </p:txBody>
+      </p:sp>
+      <p:sp>
+        <p:nvSpPr>
+          <p:cNvPr id="41" name="TextBox 40"/>
+          <p:cNvSpPr txBox="1"/>
+          <p:nvPr/>
+        </p:nvSpPr>
+        <p:spPr>
+          <a:xfrm>
+            <a:off x="8874023" y="4956048"/>
+            <a:ext cx="2366695" cy="457200"/>
+          </a:xfrm>
+          <a:prstGeom prst="rect">
+            <a:avLst/>
+          </a:prstGeom>
+          <a:noFill/>
+        </p:spPr>
+        <p:txBody>
+          <a:bodyPr wrap="square" anchor="ctr" lIns="0" rIns="0" tIns="0" bIns="0"/>
+          <a:lstStyle/>
+          <a:p>
+            <a:pPr algn="ctr">
+              <a:lnSpc>
+                <a:spcPct val="100000"/>
+              </a:lnSpc>
+              <a:spcBef>
+                <a:spcPts val="0"/>
+              </a:spcBef>
+              <a:spcAft>
+                <a:spcPts val="0"/>
+              </a:spcAft>
+            </a:pPr>
+            <a:r>
+              <a:rPr sz="950" b="1" i="0" lang="en-AU" spc="-4">
+                <a:solidFill>
+                  <a:srgbClr val="111111"/>
+                </a:solidFill>
+                <a:latin typeface="Inter"/>
+              </a:rPr>
+              <a:t>BP &amp; security config</a:t>
+            </a:r>
+          </a:p>
+        </p:txBody>
+      </p:sp>
+      <p:sp>
+        <p:nvSpPr>
+          <p:cNvPr id="42" name="Rectangle 41"/>
+          <p:cNvSpPr/>
+          <p:nvPr/>
+        </p:nvSpPr>
+        <p:spPr>
+          <a:xfrm>
+            <a:off x="877824" y="5541264"/>
+            <a:ext cx="10436047" cy="384048"/>
+          </a:xfrm>
+          <a:prstGeom prst="rect">
+            <a:avLst/>
+          </a:prstGeom>
+          <a:solidFill>
+            <a:srgbClr val="EA493F"/>
+          </a:solidFill>
+          <a:ln>
+            <a:noFill/>
+          </a:ln>
+          <a:effectLst/>
+        </p:spPr>
+        <p:style>
+          <a:lnRef idx="1">
+            <a:schemeClr val="accent1"/>
+          </a:lnRef>
+          <a:fillRef idx="3">
+            <a:schemeClr val="accent1"/>
+          </a:fillRef>
+          <a:effectRef idx="2">
+            <a:schemeClr val="accent1"/>
+          </a:effectRef>
+          <a:fontRef idx="minor">
+            <a:schemeClr val="lt1"/>
+          </a:fontRef>
+        </p:style>
+        <p:txBody>
+          <a:bodyPr rtlCol="0" anchor="ctr"/>
+          <a:lstStyle/>
+          <a:p>
+            <a:pPr algn="ctr"/>
+          </a:p>
+        </p:txBody>
+      </p:sp>
+      <p:sp>
+        <p:nvSpPr>
+          <p:cNvPr id="43" name="TextBox 42"/>
+          <p:cNvSpPr txBox="1"/>
+          <p:nvPr/>
+        </p:nvSpPr>
+        <p:spPr>
+          <a:xfrm>
+            <a:off x="1106424" y="5541264"/>
+            <a:ext cx="9978847" cy="384048"/>
+          </a:xfrm>
+          <a:prstGeom prst="rect">
+            <a:avLst/>
+          </a:prstGeom>
+          <a:noFill/>
+        </p:spPr>
+        <p:txBody>
+          <a:bodyPr wrap="square" anchor="ctr" lIns="0" rIns="0" tIns="0" bIns="0"/>
           <a:lstStyle/>
           <a:p>
             <a:pPr algn="l">
               <a:lnSpc>
-                <a:spcPct val="105000"/>
-              </a:lnSpc>
-              <a:spcBef>
-                <a:spcPts val="0"/>
-              </a:spcBef>
-              <a:spcAft>
-                <a:spcPts val="0"/>
-              </a:spcAft>
-            </a:pPr>
-            <a:r>
-              <a:rPr sz="1450" b="1" i="0" lang="en-AU" spc="-14">
-                <a:solidFill>
-                  <a:srgbClr val="111111"/>
-                </a:solidFill>
-                <a:latin typeface="Inter"/>
-              </a:rPr>
-              <a:t>Business value realisation</a:t>
-            </a:r>
-          </a:p>
-        </p:txBody>
-      </p:sp>
-      <p:sp>
-        <p:nvSpPr>
-          <p:cNvPr id="27" name="TextBox 26"/>
-          <p:cNvSpPr txBox="1"/>
-          <p:nvPr/>
-        </p:nvSpPr>
-        <p:spPr>
-          <a:xfrm>
-            <a:off x="8146084" y="3154680"/>
-            <a:ext cx="2893466" cy="365760"/>
-          </a:xfrm>
-          <a:prstGeom prst="rect">
-            <a:avLst/>
-          </a:prstGeom>
-          <a:noFill/>
-        </p:spPr>
-        <p:txBody>
-          <a:bodyPr wrap="square" anchor="t" lIns="0" rIns="0" tIns="0" bIns="0"/>
-          <a:lstStyle/>
-          <a:p>
-            <a:pPr algn="l">
-              <a:lnSpc>
-                <a:spcPct val="112000"/>
-              </a:lnSpc>
-              <a:spcBef>
-                <a:spcPts val="0"/>
-              </a:spcBef>
-              <a:spcAft>
-                <a:spcPts val="0"/>
-              </a:spcAft>
-            </a:pPr>
-            <a:r>
-              <a:rPr sz="1100" b="1" i="0" lang="en-AU" spc="0">
+                <a:spcPct val="100000"/>
+              </a:lnSpc>
+              <a:spcBef>
+                <a:spcPts val="0"/>
+              </a:spcBef>
+              <a:spcAft>
+                <a:spcPts val="0"/>
+              </a:spcAft>
+            </a:pPr>
+            <a:r>
+              <a:rPr sz="1150" b="1" i="0" lang="en-AU" spc="115" cap="all">
+                <a:solidFill>
+                  <a:srgbClr val="FFFFFF"/>
+                </a:solidFill>
+                <a:latin typeface="Inter"/>
+              </a:rPr>
+              <a:t>SERVICE INTEGRATION · ITSM</a:t>
+            </a:r>
+          </a:p>
+        </p:txBody>
+      </p:sp>
+      <p:sp>
+        <p:nvSpPr>
+          <p:cNvPr id="44" name="Rectangle 43"/>
+          <p:cNvSpPr/>
+          <p:nvPr/>
+        </p:nvSpPr>
+        <p:spPr>
+          <a:xfrm>
+            <a:off x="877824" y="6016752"/>
+            <a:ext cx="3387242" cy="365760"/>
+          </a:xfrm>
+          <a:prstGeom prst="rect">
+            <a:avLst/>
+          </a:prstGeom>
+          <a:solidFill>
+            <a:srgbClr val="F2F3EE"/>
+          </a:solidFill>
+          <a:ln w="12700">
+            <a:solidFill>
+              <a:srgbClr val="E4E4E0"/>
+            </a:solidFill>
+          </a:ln>
+          <a:effectLst/>
+        </p:spPr>
+        <p:style>
+          <a:lnRef idx="1">
+            <a:schemeClr val="accent1"/>
+          </a:lnRef>
+          <a:fillRef idx="3">
+            <a:schemeClr val="accent1"/>
+          </a:fillRef>
+          <a:effectRef idx="2">
+            <a:schemeClr val="accent1"/>
+          </a:effectRef>
+          <a:fontRef idx="minor">
+            <a:schemeClr val="lt1"/>
+          </a:fontRef>
+        </p:style>
+        <p:txBody>
+          <a:bodyPr rtlCol="0" anchor="ctr"/>
+          <a:lstStyle/>
+          <a:p>
+            <a:pPr algn="ctr"/>
+          </a:p>
+        </p:txBody>
+      </p:sp>
+      <p:sp>
+        <p:nvSpPr>
+          <p:cNvPr id="45" name="TextBox 44"/>
+          <p:cNvSpPr txBox="1"/>
+          <p:nvPr/>
+        </p:nvSpPr>
+        <p:spPr>
+          <a:xfrm>
+            <a:off x="950976" y="6016752"/>
+            <a:ext cx="3240938" cy="365760"/>
+          </a:xfrm>
+          <a:prstGeom prst="rect">
+            <a:avLst/>
+          </a:prstGeom>
+          <a:noFill/>
+        </p:spPr>
+        <p:txBody>
+          <a:bodyPr wrap="square" anchor="ctr" lIns="0" rIns="0" tIns="0" bIns="0"/>
+          <a:lstStyle/>
+          <a:p>
+            <a:pPr algn="ctr">
+              <a:lnSpc>
+                <a:spcPct val="100000"/>
+              </a:lnSpc>
+              <a:spcBef>
+                <a:spcPts val="0"/>
+              </a:spcBef>
+              <a:spcAft>
+                <a:spcPts val="0"/>
+              </a:spcAft>
+            </a:pPr>
+            <a:r>
+              <a:rPr sz="1000" b="1" i="0" lang="en-AU" spc="-5">
                 <a:solidFill>
                   <a:srgbClr val="EA493F"/>
                 </a:solidFill>
                 <a:latin typeface="Inter"/>
               </a:rPr>
-              <a:t>—  </a:t>
-            </a:r>
-            <a:r>
-              <a:rPr sz="1100" b="0" i="0" lang="en-AU" spc="0">
-                <a:solidFill>
-                  <a:srgbClr val="323232"/>
-                </a:solidFill>
-                <a:latin typeface="Inter"/>
-              </a:rPr>
-              <a:t>Continuous improvement</a:t>
-            </a:r>
-          </a:p>
-        </p:txBody>
-      </p:sp>
-      <p:sp>
-        <p:nvSpPr>
-          <p:cNvPr id="28" name="TextBox 27"/>
-          <p:cNvSpPr txBox="1"/>
-          <p:nvPr/>
-        </p:nvSpPr>
-        <p:spPr>
-          <a:xfrm>
-            <a:off x="8146084" y="3520440"/>
-            <a:ext cx="2893466" cy="365760"/>
-          </a:xfrm>
-          <a:prstGeom prst="rect">
-            <a:avLst/>
-          </a:prstGeom>
-          <a:noFill/>
-        </p:spPr>
-        <p:txBody>
-          <a:bodyPr wrap="square" anchor="t" lIns="0" rIns="0" tIns="0" bIns="0"/>
-          <a:lstStyle/>
-          <a:p>
-            <a:pPr algn="l">
-              <a:lnSpc>
-                <a:spcPct val="112000"/>
-              </a:lnSpc>
-              <a:spcBef>
-                <a:spcPts val="0"/>
-              </a:spcBef>
-              <a:spcAft>
-                <a:spcPts val="0"/>
-              </a:spcAft>
-            </a:pPr>
-            <a:r>
-              <a:rPr sz="1100" b="1" i="0" lang="en-AU" spc="0">
+              <a:t>OPERATIONS AS A PRIORITY</a:t>
+            </a:r>
+          </a:p>
+        </p:txBody>
+      </p:sp>
+      <p:sp>
+        <p:nvSpPr>
+          <p:cNvPr id="46" name="Rectangle 45"/>
+          <p:cNvSpPr/>
+          <p:nvPr/>
+        </p:nvSpPr>
+        <p:spPr>
+          <a:xfrm>
+            <a:off x="4402226" y="6016752"/>
+            <a:ext cx="3387242" cy="365760"/>
+          </a:xfrm>
+          <a:prstGeom prst="rect">
+            <a:avLst/>
+          </a:prstGeom>
+          <a:solidFill>
+            <a:srgbClr val="F2F3EE"/>
+          </a:solidFill>
+          <a:ln w="12700">
+            <a:solidFill>
+              <a:srgbClr val="E4E4E0"/>
+            </a:solidFill>
+          </a:ln>
+          <a:effectLst/>
+        </p:spPr>
+        <p:style>
+          <a:lnRef idx="1">
+            <a:schemeClr val="accent1"/>
+          </a:lnRef>
+          <a:fillRef idx="3">
+            <a:schemeClr val="accent1"/>
+          </a:fillRef>
+          <a:effectRef idx="2">
+            <a:schemeClr val="accent1"/>
+          </a:effectRef>
+          <a:fontRef idx="minor">
+            <a:schemeClr val="lt1"/>
+          </a:fontRef>
+        </p:style>
+        <p:txBody>
+          <a:bodyPr rtlCol="0" anchor="ctr"/>
+          <a:lstStyle/>
+          <a:p>
+            <a:pPr algn="ctr"/>
+          </a:p>
+        </p:txBody>
+      </p:sp>
+      <p:sp>
+        <p:nvSpPr>
+          <p:cNvPr id="47" name="TextBox 46"/>
+          <p:cNvSpPr txBox="1"/>
+          <p:nvPr/>
+        </p:nvSpPr>
+        <p:spPr>
+          <a:xfrm>
+            <a:off x="4475378" y="6016752"/>
+            <a:ext cx="3240938" cy="365760"/>
+          </a:xfrm>
+          <a:prstGeom prst="rect">
+            <a:avLst/>
+          </a:prstGeom>
+          <a:noFill/>
+        </p:spPr>
+        <p:txBody>
+          <a:bodyPr wrap="square" anchor="ctr" lIns="0" rIns="0" tIns="0" bIns="0"/>
+          <a:lstStyle/>
+          <a:p>
+            <a:pPr algn="ctr">
+              <a:lnSpc>
+                <a:spcPct val="100000"/>
+              </a:lnSpc>
+              <a:spcBef>
+                <a:spcPts val="0"/>
+              </a:spcBef>
+              <a:spcAft>
+                <a:spcPts val="0"/>
+              </a:spcAft>
+            </a:pPr>
+            <a:r>
+              <a:rPr sz="1000" b="1" i="0" lang="en-AU" spc="-5">
                 <a:solidFill>
                   <a:srgbClr val="EA493F"/>
                 </a:solidFill>
                 <a:latin typeface="Inter"/>
               </a:rPr>
-              <a:t>—  </a:t>
-            </a:r>
-            <a:r>
-              <a:rPr sz="1100" b="0" i="0" lang="en-AU" spc="0">
-                <a:solidFill>
-                  <a:srgbClr val="323232"/>
-                </a:solidFill>
-                <a:latin typeface="Inter"/>
-              </a:rPr>
-              <a:t>Enhancements</a:t>
-            </a:r>
-          </a:p>
-        </p:txBody>
-      </p:sp>
-      <p:sp>
-        <p:nvSpPr>
-          <p:cNvPr id="29" name="TextBox 28"/>
-          <p:cNvSpPr txBox="1"/>
-          <p:nvPr/>
-        </p:nvSpPr>
-        <p:spPr>
-          <a:xfrm>
-            <a:off x="8146084" y="3886200"/>
-            <a:ext cx="2893466" cy="365760"/>
-          </a:xfrm>
-          <a:prstGeom prst="rect">
-            <a:avLst/>
-          </a:prstGeom>
-          <a:noFill/>
-        </p:spPr>
-        <p:txBody>
-          <a:bodyPr wrap="square" anchor="t" lIns="0" rIns="0" tIns="0" bIns="0"/>
-          <a:lstStyle/>
-          <a:p>
-            <a:pPr algn="l">
-              <a:lnSpc>
-                <a:spcPct val="112000"/>
-              </a:lnSpc>
-              <a:spcBef>
-                <a:spcPts val="0"/>
-              </a:spcBef>
-              <a:spcAft>
-                <a:spcPts val="0"/>
-              </a:spcAft>
-            </a:pPr>
-            <a:r>
-              <a:rPr sz="1100" b="1" i="0" lang="en-AU" spc="0">
+              <a:t>BUSINESS VALUE REALISATION</a:t>
+            </a:r>
+          </a:p>
+        </p:txBody>
+      </p:sp>
+      <p:sp>
+        <p:nvSpPr>
+          <p:cNvPr id="48" name="Rectangle 47"/>
+          <p:cNvSpPr/>
+          <p:nvPr/>
+        </p:nvSpPr>
+        <p:spPr>
+          <a:xfrm>
+            <a:off x="7926628" y="6016752"/>
+            <a:ext cx="3387242" cy="365760"/>
+          </a:xfrm>
+          <a:prstGeom prst="rect">
+            <a:avLst/>
+          </a:prstGeom>
+          <a:solidFill>
+            <a:srgbClr val="F2F3EE"/>
+          </a:solidFill>
+          <a:ln w="12700">
+            <a:solidFill>
+              <a:srgbClr val="E4E4E0"/>
+            </a:solidFill>
+          </a:ln>
+          <a:effectLst/>
+        </p:spPr>
+        <p:style>
+          <a:lnRef idx="1">
+            <a:schemeClr val="accent1"/>
+          </a:lnRef>
+          <a:fillRef idx="3">
+            <a:schemeClr val="accent1"/>
+          </a:fillRef>
+          <a:effectRef idx="2">
+            <a:schemeClr val="accent1"/>
+          </a:effectRef>
+          <a:fontRef idx="minor">
+            <a:schemeClr val="lt1"/>
+          </a:fontRef>
+        </p:style>
+        <p:txBody>
+          <a:bodyPr rtlCol="0" anchor="ctr"/>
+          <a:lstStyle/>
+          <a:p>
+            <a:pPr algn="ctr"/>
+          </a:p>
+        </p:txBody>
+      </p:sp>
+      <p:sp>
+        <p:nvSpPr>
+          <p:cNvPr id="49" name="TextBox 48"/>
+          <p:cNvSpPr txBox="1"/>
+          <p:nvPr/>
+        </p:nvSpPr>
+        <p:spPr>
+          <a:xfrm>
+            <a:off x="7999780" y="6016752"/>
+            <a:ext cx="3240938" cy="365760"/>
+          </a:xfrm>
+          <a:prstGeom prst="rect">
+            <a:avLst/>
+          </a:prstGeom>
+          <a:noFill/>
+        </p:spPr>
+        <p:txBody>
+          <a:bodyPr wrap="square" anchor="ctr" lIns="0" rIns="0" tIns="0" bIns="0"/>
+          <a:lstStyle/>
+          <a:p>
+            <a:pPr algn="ctr">
+              <a:lnSpc>
+                <a:spcPct val="100000"/>
+              </a:lnSpc>
+              <a:spcBef>
+                <a:spcPts val="0"/>
+              </a:spcBef>
+              <a:spcAft>
+                <a:spcPts val="0"/>
+              </a:spcAft>
+            </a:pPr>
+            <a:r>
+              <a:rPr sz="1000" b="1" i="0" lang="en-AU" spc="-5">
                 <a:solidFill>
                   <a:srgbClr val="EA493F"/>
                 </a:solidFill>
                 <a:latin typeface="Inter"/>
               </a:rPr>
-              <a:t>—  </a:t>
-            </a:r>
-            <a:r>
-              <a:rPr sz="1100" b="0" i="0" lang="en-AU" spc="0">
-                <a:solidFill>
-                  <a:srgbClr val="323232"/>
-                </a:solidFill>
-                <a:latin typeface="Inter"/>
-              </a:rPr>
-              <a:t>Knowledge base</a:t>
-            </a:r>
-          </a:p>
-        </p:txBody>
-      </p:sp>
-      <p:sp>
-        <p:nvSpPr>
-          <p:cNvPr id="30" name="TextBox 29"/>
-          <p:cNvSpPr txBox="1"/>
-          <p:nvPr/>
-        </p:nvSpPr>
-        <p:spPr>
-          <a:xfrm>
-            <a:off x="8146084" y="4251960"/>
-            <a:ext cx="2893466" cy="365760"/>
-          </a:xfrm>
-          <a:prstGeom prst="rect">
-            <a:avLst/>
-          </a:prstGeom>
-          <a:noFill/>
-        </p:spPr>
-        <p:txBody>
-          <a:bodyPr wrap="square" anchor="t" lIns="0" rIns="0" tIns="0" bIns="0"/>
-          <a:lstStyle/>
-          <a:p>
-            <a:pPr algn="l">
-              <a:lnSpc>
-                <a:spcPct val="112000"/>
-              </a:lnSpc>
-              <a:spcBef>
-                <a:spcPts val="0"/>
-              </a:spcBef>
-              <a:spcAft>
-                <a:spcPts val="0"/>
-              </a:spcAft>
-            </a:pPr>
-            <a:r>
-              <a:rPr sz="1100" b="1" i="0" lang="en-AU" spc="0">
-                <a:solidFill>
-                  <a:srgbClr val="EA493F"/>
-                </a:solidFill>
-                <a:latin typeface="Inter"/>
-              </a:rPr>
-              <a:t>—  </a:t>
-            </a:r>
-            <a:r>
-              <a:rPr sz="1100" b="0" i="0" lang="en-AU" spc="0">
-                <a:solidFill>
-                  <a:srgbClr val="323232"/>
-                </a:solidFill>
-                <a:latin typeface="Inter"/>
-              </a:rPr>
-              <a:t>Thought leadership</a:t>
-            </a:r>
-          </a:p>
-        </p:txBody>
-      </p:sp>
-      <p:sp>
-        <p:nvSpPr>
-          <p:cNvPr id="31" name="TextBox 30"/>
-          <p:cNvSpPr txBox="1"/>
-          <p:nvPr/>
-        </p:nvSpPr>
-        <p:spPr>
-          <a:xfrm>
-            <a:off x="8146084" y="4617720"/>
-            <a:ext cx="2893466" cy="365760"/>
-          </a:xfrm>
-          <a:prstGeom prst="rect">
-            <a:avLst/>
-          </a:prstGeom>
-          <a:noFill/>
-        </p:spPr>
-        <p:txBody>
-          <a:bodyPr wrap="square" anchor="t" lIns="0" rIns="0" tIns="0" bIns="0"/>
-          <a:lstStyle/>
-          <a:p>
-            <a:pPr algn="l">
-              <a:lnSpc>
-                <a:spcPct val="112000"/>
-              </a:lnSpc>
-              <a:spcBef>
-                <a:spcPts val="0"/>
-              </a:spcBef>
-              <a:spcAft>
-                <a:spcPts val="0"/>
-              </a:spcAft>
-            </a:pPr>
-            <a:r>
-              <a:rPr sz="1100" b="1" i="0" lang="en-AU" spc="0">
-                <a:solidFill>
-                  <a:srgbClr val="EA493F"/>
-                </a:solidFill>
-                <a:latin typeface="Inter"/>
-              </a:rPr>
-              <a:t>—  </a:t>
-            </a:r>
-            <a:r>
-              <a:rPr sz="1100" b="0" i="0" lang="en-AU" spc="0">
-                <a:solidFill>
-                  <a:srgbClr val="323232"/>
-                </a:solidFill>
-                <a:latin typeface="Inter"/>
-              </a:rPr>
-              <a:t>Technical-debt reduction</a:t>
-            </a:r>
-          </a:p>
-        </p:txBody>
-      </p:sp>
-      <p:sp>
-        <p:nvSpPr>
-          <p:cNvPr id="32" name="TextBox 31"/>
-          <p:cNvSpPr txBox="1"/>
-          <p:nvPr/>
-        </p:nvSpPr>
-        <p:spPr>
-          <a:xfrm>
-            <a:off x="8146084" y="4983480"/>
-            <a:ext cx="2893466" cy="365760"/>
-          </a:xfrm>
-          <a:prstGeom prst="rect">
-            <a:avLst/>
-          </a:prstGeom>
-          <a:noFill/>
-        </p:spPr>
-        <p:txBody>
-          <a:bodyPr wrap="square" anchor="t" lIns="0" rIns="0" tIns="0" bIns="0"/>
-          <a:lstStyle/>
-          <a:p>
-            <a:pPr algn="l">
-              <a:lnSpc>
-                <a:spcPct val="112000"/>
-              </a:lnSpc>
-              <a:spcBef>
-                <a:spcPts val="0"/>
-              </a:spcBef>
-              <a:spcAft>
-                <a:spcPts val="0"/>
-              </a:spcAft>
-            </a:pPr>
-            <a:r>
-              <a:rPr sz="1100" b="1" i="0" lang="en-AU" spc="0">
-                <a:solidFill>
-                  <a:srgbClr val="EA493F"/>
-                </a:solidFill>
-                <a:latin typeface="Inter"/>
-              </a:rPr>
-              <a:t>—  </a:t>
-            </a:r>
-            <a:r>
-              <a:rPr sz="1100" b="0" i="0" lang="en-AU" spc="0">
-                <a:solidFill>
-                  <a:srgbClr val="323232"/>
-                </a:solidFill>
-                <a:latin typeface="Inter"/>
-              </a:rPr>
-              <a:t>Product &amp; vendor relationship</a:t>
+              <a:t>OPERATIONAL EXCELLENCE · ITIL</a:t>
             </a:r>
           </a:p>
         </p:txBody>
@@ -4735,7 +5351,7 @@
     <p:bg>
       <p:bgPr>
         <a:solidFill>
-          <a:srgbClr val="000000"/>
+          <a:srgbClr val="FAFAFA"/>
         </a:solidFill>
         <a:effectLst/>
       </p:bgPr>
@@ -4749,7 +5365,7 @@
       <p:grpSpPr/>
       <p:pic>
         <p:nvPicPr>
-          <p:cNvPr id="2" name="Picture 1" descr="Mivada_Icon_White_RGB_L.png"/>
+          <p:cNvPr id="2" name="Picture 1" descr="Mivada_Icon_Melon_RGB_L.png"/>
           <p:cNvPicPr>
             <a:picLocks noChangeAspect="1"/>
           </p:cNvPicPr>
@@ -4848,7 +5464,7 @@
             <a:r>
               <a:rPr sz="3300" b="1" i="0" lang="en-AU" spc="-72">
                 <a:solidFill>
-                  <a:srgbClr val="FFFFFF"/>
+                  <a:srgbClr val="111111"/>
                 </a:solidFill>
                 <a:latin typeface="Inter"/>
               </a:rPr>
@@ -4875,7 +5491,7 @@
         <p:spPr>
           <a:xfrm>
             <a:off x="877824" y="1737360"/>
-            <a:ext cx="10058400" cy="640080"/>
+            <a:ext cx="10241280" cy="548640"/>
           </a:xfrm>
           <a:prstGeom prst="rect">
             <a:avLst/>
@@ -4900,7 +5516,7 @@
             <a:r>
               <a:rPr sz="1300" b="0" i="0" lang="en-AU" spc="0">
                 <a:solidFill>
-                  <a:srgbClr val="CFCFCF"/>
+                  <a:srgbClr val="323232"/>
                 </a:solidFill>
                 <a:latin typeface="Inter"/>
               </a:rPr>
@@ -4911,20 +5527,1256 @@
       </p:sp>
       <p:sp>
         <p:nvSpPr>
-          <p:cNvPr id="6" name="Rectangle 5"/>
+          <p:cNvPr id="6" name="TextBox 5"/>
+          <p:cNvSpPr txBox="1"/>
+          <p:nvPr/>
+        </p:nvSpPr>
+        <p:spPr>
+          <a:xfrm>
+            <a:off x="877824" y="2423160"/>
+            <a:ext cx="1097280" cy="228600"/>
+          </a:xfrm>
+          <a:prstGeom prst="rect">
+            <a:avLst/>
+          </a:prstGeom>
+          <a:noFill/>
+        </p:spPr>
+        <p:txBody>
+          <a:bodyPr wrap="square" anchor="t" lIns="0" rIns="0" tIns="0" bIns="0"/>
+          <a:lstStyle/>
+          <a:p/>
+        </p:txBody>
+      </p:sp>
+      <p:sp>
+        <p:nvSpPr>
+          <p:cNvPr id="7" name="TextBox 6"/>
+          <p:cNvSpPr txBox="1"/>
+          <p:nvPr/>
+        </p:nvSpPr>
+        <p:spPr>
+          <a:xfrm>
+            <a:off x="877824" y="2441448"/>
+            <a:ext cx="745431" cy="219456"/>
+          </a:xfrm>
+          <a:prstGeom prst="rect">
+            <a:avLst/>
+          </a:prstGeom>
+          <a:noFill/>
+        </p:spPr>
+        <p:txBody>
+          <a:bodyPr wrap="square" anchor="t" lIns="0" rIns="0" tIns="0" bIns="0"/>
+          <a:lstStyle/>
+          <a:p>
+            <a:pPr algn="ctr">
+              <a:lnSpc>
+                <a:spcPct val="100000"/>
+              </a:lnSpc>
+              <a:spcBef>
+                <a:spcPts val="0"/>
+              </a:spcBef>
+              <a:spcAft>
+                <a:spcPts val="0"/>
+              </a:spcAft>
+            </a:pPr>
+            <a:r>
+              <a:rPr sz="800" b="1" i="0" lang="en-AU" spc="0">
+                <a:solidFill>
+                  <a:srgbClr val="AEAEAE"/>
+                </a:solidFill>
+                <a:latin typeface="Inter"/>
+              </a:rPr>
+              <a:t>8:30</a:t>
+            </a:r>
+          </a:p>
+        </p:txBody>
+      </p:sp>
+      <p:sp>
+        <p:nvSpPr>
+          <p:cNvPr id="8" name="TextBox 7"/>
+          <p:cNvSpPr txBox="1"/>
+          <p:nvPr/>
+        </p:nvSpPr>
+        <p:spPr>
+          <a:xfrm>
+            <a:off x="1623255" y="2441448"/>
+            <a:ext cx="745431" cy="219456"/>
+          </a:xfrm>
+          <a:prstGeom prst="rect">
+            <a:avLst/>
+          </a:prstGeom>
+          <a:noFill/>
+        </p:spPr>
+        <p:txBody>
+          <a:bodyPr wrap="square" anchor="t" lIns="0" rIns="0" tIns="0" bIns="0"/>
+          <a:lstStyle/>
+          <a:p>
+            <a:pPr algn="ctr">
+              <a:lnSpc>
+                <a:spcPct val="100000"/>
+              </a:lnSpc>
+              <a:spcBef>
+                <a:spcPts val="0"/>
+              </a:spcBef>
+              <a:spcAft>
+                <a:spcPts val="0"/>
+              </a:spcAft>
+            </a:pPr>
+            <a:r>
+              <a:rPr sz="800" b="1" i="0" lang="en-AU" spc="0">
+                <a:solidFill>
+                  <a:srgbClr val="AEAEAE"/>
+                </a:solidFill>
+                <a:latin typeface="Inter"/>
+              </a:rPr>
+              <a:t>9:30</a:t>
+            </a:r>
+          </a:p>
+        </p:txBody>
+      </p:sp>
+      <p:sp>
+        <p:nvSpPr>
+          <p:cNvPr id="9" name="TextBox 8"/>
+          <p:cNvSpPr txBox="1"/>
+          <p:nvPr/>
+        </p:nvSpPr>
+        <p:spPr>
+          <a:xfrm>
+            <a:off x="2368687" y="2441448"/>
+            <a:ext cx="745431" cy="219456"/>
+          </a:xfrm>
+          <a:prstGeom prst="rect">
+            <a:avLst/>
+          </a:prstGeom>
+          <a:noFill/>
+        </p:spPr>
+        <p:txBody>
+          <a:bodyPr wrap="square" anchor="t" lIns="0" rIns="0" tIns="0" bIns="0"/>
+          <a:lstStyle/>
+          <a:p>
+            <a:pPr algn="ctr">
+              <a:lnSpc>
+                <a:spcPct val="100000"/>
+              </a:lnSpc>
+              <a:spcBef>
+                <a:spcPts val="0"/>
+              </a:spcBef>
+              <a:spcAft>
+                <a:spcPts val="0"/>
+              </a:spcAft>
+            </a:pPr>
+            <a:r>
+              <a:rPr sz="800" b="1" i="0" lang="en-AU" spc="0">
+                <a:solidFill>
+                  <a:srgbClr val="AEAEAE"/>
+                </a:solidFill>
+                <a:latin typeface="Inter"/>
+              </a:rPr>
+              <a:t>10:30</a:t>
+            </a:r>
+          </a:p>
+        </p:txBody>
+      </p:sp>
+      <p:sp>
+        <p:nvSpPr>
+          <p:cNvPr id="10" name="TextBox 9"/>
+          <p:cNvSpPr txBox="1"/>
+          <p:nvPr/>
+        </p:nvSpPr>
+        <p:spPr>
+          <a:xfrm>
+            <a:off x="3114119" y="2441448"/>
+            <a:ext cx="745431" cy="219456"/>
+          </a:xfrm>
+          <a:prstGeom prst="rect">
+            <a:avLst/>
+          </a:prstGeom>
+          <a:noFill/>
+        </p:spPr>
+        <p:txBody>
+          <a:bodyPr wrap="square" anchor="t" lIns="0" rIns="0" tIns="0" bIns="0"/>
+          <a:lstStyle/>
+          <a:p>
+            <a:pPr algn="ctr">
+              <a:lnSpc>
+                <a:spcPct val="100000"/>
+              </a:lnSpc>
+              <a:spcBef>
+                <a:spcPts val="0"/>
+              </a:spcBef>
+              <a:spcAft>
+                <a:spcPts val="0"/>
+              </a:spcAft>
+            </a:pPr>
+            <a:r>
+              <a:rPr sz="800" b="1" i="0" lang="en-AU" spc="0">
+                <a:solidFill>
+                  <a:srgbClr val="AEAEAE"/>
+                </a:solidFill>
+                <a:latin typeface="Inter"/>
+              </a:rPr>
+              <a:t>11:30</a:t>
+            </a:r>
+          </a:p>
+        </p:txBody>
+      </p:sp>
+      <p:sp>
+        <p:nvSpPr>
+          <p:cNvPr id="11" name="TextBox 10"/>
+          <p:cNvSpPr txBox="1"/>
+          <p:nvPr/>
+        </p:nvSpPr>
+        <p:spPr>
+          <a:xfrm>
+            <a:off x="3859551" y="2441448"/>
+            <a:ext cx="745431" cy="219456"/>
+          </a:xfrm>
+          <a:prstGeom prst="rect">
+            <a:avLst/>
+          </a:prstGeom>
+          <a:noFill/>
+        </p:spPr>
+        <p:txBody>
+          <a:bodyPr wrap="square" anchor="t" lIns="0" rIns="0" tIns="0" bIns="0"/>
+          <a:lstStyle/>
+          <a:p>
+            <a:pPr algn="ctr">
+              <a:lnSpc>
+                <a:spcPct val="100000"/>
+              </a:lnSpc>
+              <a:spcBef>
+                <a:spcPts val="0"/>
+              </a:spcBef>
+              <a:spcAft>
+                <a:spcPts val="0"/>
+              </a:spcAft>
+            </a:pPr>
+            <a:r>
+              <a:rPr sz="800" b="1" i="0" lang="en-AU" spc="0">
+                <a:solidFill>
+                  <a:srgbClr val="AEAEAE"/>
+                </a:solidFill>
+                <a:latin typeface="Inter"/>
+              </a:rPr>
+              <a:t>12:30</a:t>
+            </a:r>
+          </a:p>
+        </p:txBody>
+      </p:sp>
+      <p:sp>
+        <p:nvSpPr>
+          <p:cNvPr id="12" name="TextBox 11"/>
+          <p:cNvSpPr txBox="1"/>
+          <p:nvPr/>
+        </p:nvSpPr>
+        <p:spPr>
+          <a:xfrm>
+            <a:off x="4604983" y="2441448"/>
+            <a:ext cx="745431" cy="219456"/>
+          </a:xfrm>
+          <a:prstGeom prst="rect">
+            <a:avLst/>
+          </a:prstGeom>
+          <a:noFill/>
+        </p:spPr>
+        <p:txBody>
+          <a:bodyPr wrap="square" anchor="t" lIns="0" rIns="0" tIns="0" bIns="0"/>
+          <a:lstStyle/>
+          <a:p>
+            <a:pPr algn="ctr">
+              <a:lnSpc>
+                <a:spcPct val="100000"/>
+              </a:lnSpc>
+              <a:spcBef>
+                <a:spcPts val="0"/>
+              </a:spcBef>
+              <a:spcAft>
+                <a:spcPts val="0"/>
+              </a:spcAft>
+            </a:pPr>
+            <a:r>
+              <a:rPr sz="800" b="1" i="0" lang="en-AU" spc="0">
+                <a:solidFill>
+                  <a:srgbClr val="AEAEAE"/>
+                </a:solidFill>
+                <a:latin typeface="Inter"/>
+              </a:rPr>
+              <a:t>13:30</a:t>
+            </a:r>
+          </a:p>
+        </p:txBody>
+      </p:sp>
+      <p:sp>
+        <p:nvSpPr>
+          <p:cNvPr id="13" name="TextBox 12"/>
+          <p:cNvSpPr txBox="1"/>
+          <p:nvPr/>
+        </p:nvSpPr>
+        <p:spPr>
+          <a:xfrm>
+            <a:off x="5350415" y="2441448"/>
+            <a:ext cx="745431" cy="219456"/>
+          </a:xfrm>
+          <a:prstGeom prst="rect">
+            <a:avLst/>
+          </a:prstGeom>
+          <a:noFill/>
+        </p:spPr>
+        <p:txBody>
+          <a:bodyPr wrap="square" anchor="t" lIns="0" rIns="0" tIns="0" bIns="0"/>
+          <a:lstStyle/>
+          <a:p>
+            <a:pPr algn="ctr">
+              <a:lnSpc>
+                <a:spcPct val="100000"/>
+              </a:lnSpc>
+              <a:spcBef>
+                <a:spcPts val="0"/>
+              </a:spcBef>
+              <a:spcAft>
+                <a:spcPts val="0"/>
+              </a:spcAft>
+            </a:pPr>
+            <a:r>
+              <a:rPr sz="800" b="1" i="0" lang="en-AU" spc="0">
+                <a:solidFill>
+                  <a:srgbClr val="AEAEAE"/>
+                </a:solidFill>
+                <a:latin typeface="Inter"/>
+              </a:rPr>
+              <a:t>14:30</a:t>
+            </a:r>
+          </a:p>
+        </p:txBody>
+      </p:sp>
+      <p:sp>
+        <p:nvSpPr>
+          <p:cNvPr id="14" name="TextBox 13"/>
+          <p:cNvSpPr txBox="1"/>
+          <p:nvPr/>
+        </p:nvSpPr>
+        <p:spPr>
+          <a:xfrm>
+            <a:off x="6095847" y="2441448"/>
+            <a:ext cx="745431" cy="219456"/>
+          </a:xfrm>
+          <a:prstGeom prst="rect">
+            <a:avLst/>
+          </a:prstGeom>
+          <a:noFill/>
+        </p:spPr>
+        <p:txBody>
+          <a:bodyPr wrap="square" anchor="t" lIns="0" rIns="0" tIns="0" bIns="0"/>
+          <a:lstStyle/>
+          <a:p>
+            <a:pPr algn="ctr">
+              <a:lnSpc>
+                <a:spcPct val="100000"/>
+              </a:lnSpc>
+              <a:spcBef>
+                <a:spcPts val="0"/>
+              </a:spcBef>
+              <a:spcAft>
+                <a:spcPts val="0"/>
+              </a:spcAft>
+            </a:pPr>
+            <a:r>
+              <a:rPr sz="800" b="1" i="0" lang="en-AU" spc="0">
+                <a:solidFill>
+                  <a:srgbClr val="AEAEAE"/>
+                </a:solidFill>
+                <a:latin typeface="Inter"/>
+              </a:rPr>
+              <a:t>15:30</a:t>
+            </a:r>
+          </a:p>
+        </p:txBody>
+      </p:sp>
+      <p:sp>
+        <p:nvSpPr>
+          <p:cNvPr id="15" name="TextBox 14"/>
+          <p:cNvSpPr txBox="1"/>
+          <p:nvPr/>
+        </p:nvSpPr>
+        <p:spPr>
+          <a:xfrm>
+            <a:off x="6841279" y="2441448"/>
+            <a:ext cx="745431" cy="219456"/>
+          </a:xfrm>
+          <a:prstGeom prst="rect">
+            <a:avLst/>
+          </a:prstGeom>
+          <a:noFill/>
+        </p:spPr>
+        <p:txBody>
+          <a:bodyPr wrap="square" anchor="t" lIns="0" rIns="0" tIns="0" bIns="0"/>
+          <a:lstStyle/>
+          <a:p>
+            <a:pPr algn="ctr">
+              <a:lnSpc>
+                <a:spcPct val="100000"/>
+              </a:lnSpc>
+              <a:spcBef>
+                <a:spcPts val="0"/>
+              </a:spcBef>
+              <a:spcAft>
+                <a:spcPts val="0"/>
+              </a:spcAft>
+            </a:pPr>
+            <a:r>
+              <a:rPr sz="800" b="1" i="0" lang="en-AU" spc="0">
+                <a:solidFill>
+                  <a:srgbClr val="AEAEAE"/>
+                </a:solidFill>
+                <a:latin typeface="Inter"/>
+              </a:rPr>
+              <a:t>16:30</a:t>
+            </a:r>
+          </a:p>
+        </p:txBody>
+      </p:sp>
+      <p:sp>
+        <p:nvSpPr>
+          <p:cNvPr id="16" name="TextBox 15"/>
+          <p:cNvSpPr txBox="1"/>
+          <p:nvPr/>
+        </p:nvSpPr>
+        <p:spPr>
+          <a:xfrm>
+            <a:off x="7586711" y="2441448"/>
+            <a:ext cx="745431" cy="219456"/>
+          </a:xfrm>
+          <a:prstGeom prst="rect">
+            <a:avLst/>
+          </a:prstGeom>
+          <a:noFill/>
+        </p:spPr>
+        <p:txBody>
+          <a:bodyPr wrap="square" anchor="t" lIns="0" rIns="0" tIns="0" bIns="0"/>
+          <a:lstStyle/>
+          <a:p>
+            <a:pPr algn="ctr">
+              <a:lnSpc>
+                <a:spcPct val="100000"/>
+              </a:lnSpc>
+              <a:spcBef>
+                <a:spcPts val="0"/>
+              </a:spcBef>
+              <a:spcAft>
+                <a:spcPts val="0"/>
+              </a:spcAft>
+            </a:pPr>
+            <a:r>
+              <a:rPr sz="800" b="1" i="0" lang="en-AU" spc="0">
+                <a:solidFill>
+                  <a:srgbClr val="AEAEAE"/>
+                </a:solidFill>
+                <a:latin typeface="Inter"/>
+              </a:rPr>
+              <a:t>17:30</a:t>
+            </a:r>
+          </a:p>
+        </p:txBody>
+      </p:sp>
+      <p:sp>
+        <p:nvSpPr>
+          <p:cNvPr id="17" name="TextBox 16"/>
+          <p:cNvSpPr txBox="1"/>
+          <p:nvPr/>
+        </p:nvSpPr>
+        <p:spPr>
+          <a:xfrm>
+            <a:off x="8332143" y="2441448"/>
+            <a:ext cx="745431" cy="219456"/>
+          </a:xfrm>
+          <a:prstGeom prst="rect">
+            <a:avLst/>
+          </a:prstGeom>
+          <a:noFill/>
+        </p:spPr>
+        <p:txBody>
+          <a:bodyPr wrap="square" anchor="t" lIns="0" rIns="0" tIns="0" bIns="0"/>
+          <a:lstStyle/>
+          <a:p>
+            <a:pPr algn="ctr">
+              <a:lnSpc>
+                <a:spcPct val="100000"/>
+              </a:lnSpc>
+              <a:spcBef>
+                <a:spcPts val="0"/>
+              </a:spcBef>
+              <a:spcAft>
+                <a:spcPts val="0"/>
+              </a:spcAft>
+            </a:pPr>
+            <a:r>
+              <a:rPr sz="800" b="1" i="0" lang="en-AU" spc="0">
+                <a:solidFill>
+                  <a:srgbClr val="AEAEAE"/>
+                </a:solidFill>
+                <a:latin typeface="Inter"/>
+              </a:rPr>
+              <a:t>18:30</a:t>
+            </a:r>
+          </a:p>
+        </p:txBody>
+      </p:sp>
+      <p:sp>
+        <p:nvSpPr>
+          <p:cNvPr id="18" name="TextBox 17"/>
+          <p:cNvSpPr txBox="1"/>
+          <p:nvPr/>
+        </p:nvSpPr>
+        <p:spPr>
+          <a:xfrm>
+            <a:off x="9077575" y="2441448"/>
+            <a:ext cx="745431" cy="219456"/>
+          </a:xfrm>
+          <a:prstGeom prst="rect">
+            <a:avLst/>
+          </a:prstGeom>
+          <a:noFill/>
+        </p:spPr>
+        <p:txBody>
+          <a:bodyPr wrap="square" anchor="t" lIns="0" rIns="0" tIns="0" bIns="0"/>
+          <a:lstStyle/>
+          <a:p>
+            <a:pPr algn="ctr">
+              <a:lnSpc>
+                <a:spcPct val="100000"/>
+              </a:lnSpc>
+              <a:spcBef>
+                <a:spcPts val="0"/>
+              </a:spcBef>
+              <a:spcAft>
+                <a:spcPts val="0"/>
+              </a:spcAft>
+            </a:pPr>
+            <a:r>
+              <a:rPr sz="800" b="1" i="0" lang="en-AU" spc="0">
+                <a:solidFill>
+                  <a:srgbClr val="AEAEAE"/>
+                </a:solidFill>
+                <a:latin typeface="Inter"/>
+              </a:rPr>
+              <a:t>19:30</a:t>
+            </a:r>
+          </a:p>
+        </p:txBody>
+      </p:sp>
+      <p:sp>
+        <p:nvSpPr>
+          <p:cNvPr id="19" name="TextBox 18"/>
+          <p:cNvSpPr txBox="1"/>
+          <p:nvPr/>
+        </p:nvSpPr>
+        <p:spPr>
+          <a:xfrm>
+            <a:off x="9823007" y="2441448"/>
+            <a:ext cx="745431" cy="219456"/>
+          </a:xfrm>
+          <a:prstGeom prst="rect">
+            <a:avLst/>
+          </a:prstGeom>
+          <a:noFill/>
+        </p:spPr>
+        <p:txBody>
+          <a:bodyPr wrap="square" anchor="t" lIns="0" rIns="0" tIns="0" bIns="0"/>
+          <a:lstStyle/>
+          <a:p>
+            <a:pPr algn="ctr">
+              <a:lnSpc>
+                <a:spcPct val="100000"/>
+              </a:lnSpc>
+              <a:spcBef>
+                <a:spcPts val="0"/>
+              </a:spcBef>
+              <a:spcAft>
+                <a:spcPts val="0"/>
+              </a:spcAft>
+            </a:pPr>
+            <a:r>
+              <a:rPr sz="800" b="1" i="0" lang="en-AU" spc="0">
+                <a:solidFill>
+                  <a:srgbClr val="AEAEAE"/>
+                </a:solidFill>
+                <a:latin typeface="Inter"/>
+              </a:rPr>
+              <a:t>20:30</a:t>
+            </a:r>
+          </a:p>
+        </p:txBody>
+      </p:sp>
+      <p:sp>
+        <p:nvSpPr>
+          <p:cNvPr id="20" name="TextBox 19"/>
+          <p:cNvSpPr txBox="1"/>
+          <p:nvPr/>
+        </p:nvSpPr>
+        <p:spPr>
+          <a:xfrm>
+            <a:off x="10568439" y="2441448"/>
+            <a:ext cx="745431" cy="219456"/>
+          </a:xfrm>
+          <a:prstGeom prst="rect">
+            <a:avLst/>
+          </a:prstGeom>
+          <a:noFill/>
+        </p:spPr>
+        <p:txBody>
+          <a:bodyPr wrap="square" anchor="t" lIns="0" rIns="0" tIns="0" bIns="0"/>
+          <a:lstStyle/>
+          <a:p>
+            <a:pPr algn="ctr">
+              <a:lnSpc>
+                <a:spcPct val="100000"/>
+              </a:lnSpc>
+              <a:spcBef>
+                <a:spcPts val="0"/>
+              </a:spcBef>
+              <a:spcAft>
+                <a:spcPts val="0"/>
+              </a:spcAft>
+            </a:pPr>
+            <a:r>
+              <a:rPr sz="800" b="1" i="0" lang="en-AU" spc="0">
+                <a:solidFill>
+                  <a:srgbClr val="AEAEAE"/>
+                </a:solidFill>
+                <a:latin typeface="Inter"/>
+              </a:rPr>
+              <a:t>21:30</a:t>
+            </a:r>
+          </a:p>
+        </p:txBody>
+      </p:sp>
+      <p:cxnSp>
+        <p:nvCxnSpPr>
+          <p:cNvPr id="21" name="Connector 20"/>
+          <p:cNvCxnSpPr/>
+          <p:nvPr/>
+        </p:nvCxnSpPr>
+        <p:spPr>
+          <a:xfrm>
+            <a:off x="877824" y="2697480"/>
+            <a:ext cx="0" cy="1371600"/>
+          </a:xfrm>
+          <a:prstGeom prst="bentConnector3">
+            <a:avLst/>
+          </a:prstGeom>
+          <a:ln w="9525">
+            <a:solidFill>
+              <a:srgbClr val="E4E4E0"/>
+            </a:solidFill>
+          </a:ln>
+          <a:effectLst/>
+        </p:spPr>
+        <p:style>
+          <a:lnRef idx="2">
+            <a:schemeClr val="accent1"/>
+          </a:lnRef>
+          <a:fillRef idx="0">
+            <a:schemeClr val="accent1"/>
+          </a:fillRef>
+          <a:effectRef idx="1">
+            <a:schemeClr val="accent1"/>
+          </a:effectRef>
+          <a:fontRef idx="minor">
+            <a:schemeClr val="tx1"/>
+          </a:fontRef>
+        </p:style>
+      </p:cxnSp>
+      <p:cxnSp>
+        <p:nvCxnSpPr>
+          <p:cNvPr id="22" name="Connector 21"/>
+          <p:cNvCxnSpPr/>
+          <p:nvPr/>
+        </p:nvCxnSpPr>
+        <p:spPr>
+          <a:xfrm>
+            <a:off x="1623255" y="2697480"/>
+            <a:ext cx="0" cy="1371600"/>
+          </a:xfrm>
+          <a:prstGeom prst="bentConnector3">
+            <a:avLst/>
+          </a:prstGeom>
+          <a:ln w="9525">
+            <a:solidFill>
+              <a:srgbClr val="E4E4E0"/>
+            </a:solidFill>
+          </a:ln>
+          <a:effectLst/>
+        </p:spPr>
+        <p:style>
+          <a:lnRef idx="2">
+            <a:schemeClr val="accent1"/>
+          </a:lnRef>
+          <a:fillRef idx="0">
+            <a:schemeClr val="accent1"/>
+          </a:fillRef>
+          <a:effectRef idx="1">
+            <a:schemeClr val="accent1"/>
+          </a:effectRef>
+          <a:fontRef idx="minor">
+            <a:schemeClr val="tx1"/>
+          </a:fontRef>
+        </p:style>
+      </p:cxnSp>
+      <p:cxnSp>
+        <p:nvCxnSpPr>
+          <p:cNvPr id="23" name="Connector 22"/>
+          <p:cNvCxnSpPr/>
+          <p:nvPr/>
+        </p:nvCxnSpPr>
+        <p:spPr>
+          <a:xfrm>
+            <a:off x="2368687" y="2697480"/>
+            <a:ext cx="0" cy="1371600"/>
+          </a:xfrm>
+          <a:prstGeom prst="bentConnector3">
+            <a:avLst/>
+          </a:prstGeom>
+          <a:ln w="9525">
+            <a:solidFill>
+              <a:srgbClr val="E4E4E0"/>
+            </a:solidFill>
+          </a:ln>
+          <a:effectLst/>
+        </p:spPr>
+        <p:style>
+          <a:lnRef idx="2">
+            <a:schemeClr val="accent1"/>
+          </a:lnRef>
+          <a:fillRef idx="0">
+            <a:schemeClr val="accent1"/>
+          </a:fillRef>
+          <a:effectRef idx="1">
+            <a:schemeClr val="accent1"/>
+          </a:effectRef>
+          <a:fontRef idx="minor">
+            <a:schemeClr val="tx1"/>
+          </a:fontRef>
+        </p:style>
+      </p:cxnSp>
+      <p:cxnSp>
+        <p:nvCxnSpPr>
+          <p:cNvPr id="24" name="Connector 23"/>
+          <p:cNvCxnSpPr/>
+          <p:nvPr/>
+        </p:nvCxnSpPr>
+        <p:spPr>
+          <a:xfrm>
+            <a:off x="3114119" y="2697480"/>
+            <a:ext cx="0" cy="1371600"/>
+          </a:xfrm>
+          <a:prstGeom prst="bentConnector3">
+            <a:avLst/>
+          </a:prstGeom>
+          <a:ln w="9525">
+            <a:solidFill>
+              <a:srgbClr val="E4E4E0"/>
+            </a:solidFill>
+          </a:ln>
+          <a:effectLst/>
+        </p:spPr>
+        <p:style>
+          <a:lnRef idx="2">
+            <a:schemeClr val="accent1"/>
+          </a:lnRef>
+          <a:fillRef idx="0">
+            <a:schemeClr val="accent1"/>
+          </a:fillRef>
+          <a:effectRef idx="1">
+            <a:schemeClr val="accent1"/>
+          </a:effectRef>
+          <a:fontRef idx="minor">
+            <a:schemeClr val="tx1"/>
+          </a:fontRef>
+        </p:style>
+      </p:cxnSp>
+      <p:cxnSp>
+        <p:nvCxnSpPr>
+          <p:cNvPr id="25" name="Connector 24"/>
+          <p:cNvCxnSpPr/>
+          <p:nvPr/>
+        </p:nvCxnSpPr>
+        <p:spPr>
+          <a:xfrm>
+            <a:off x="3859551" y="2697480"/>
+            <a:ext cx="0" cy="1371600"/>
+          </a:xfrm>
+          <a:prstGeom prst="bentConnector3">
+            <a:avLst/>
+          </a:prstGeom>
+          <a:ln w="9525">
+            <a:solidFill>
+              <a:srgbClr val="E4E4E0"/>
+            </a:solidFill>
+          </a:ln>
+          <a:effectLst/>
+        </p:spPr>
+        <p:style>
+          <a:lnRef idx="2">
+            <a:schemeClr val="accent1"/>
+          </a:lnRef>
+          <a:fillRef idx="0">
+            <a:schemeClr val="accent1"/>
+          </a:fillRef>
+          <a:effectRef idx="1">
+            <a:schemeClr val="accent1"/>
+          </a:effectRef>
+          <a:fontRef idx="minor">
+            <a:schemeClr val="tx1"/>
+          </a:fontRef>
+        </p:style>
+      </p:cxnSp>
+      <p:cxnSp>
+        <p:nvCxnSpPr>
+          <p:cNvPr id="26" name="Connector 25"/>
+          <p:cNvCxnSpPr/>
+          <p:nvPr/>
+        </p:nvCxnSpPr>
+        <p:spPr>
+          <a:xfrm>
+            <a:off x="4604983" y="2697480"/>
+            <a:ext cx="0" cy="1371600"/>
+          </a:xfrm>
+          <a:prstGeom prst="bentConnector3">
+            <a:avLst/>
+          </a:prstGeom>
+          <a:ln w="9525">
+            <a:solidFill>
+              <a:srgbClr val="E4E4E0"/>
+            </a:solidFill>
+          </a:ln>
+          <a:effectLst/>
+        </p:spPr>
+        <p:style>
+          <a:lnRef idx="2">
+            <a:schemeClr val="accent1"/>
+          </a:lnRef>
+          <a:fillRef idx="0">
+            <a:schemeClr val="accent1"/>
+          </a:fillRef>
+          <a:effectRef idx="1">
+            <a:schemeClr val="accent1"/>
+          </a:effectRef>
+          <a:fontRef idx="minor">
+            <a:schemeClr val="tx1"/>
+          </a:fontRef>
+        </p:style>
+      </p:cxnSp>
+      <p:cxnSp>
+        <p:nvCxnSpPr>
+          <p:cNvPr id="27" name="Connector 26"/>
+          <p:cNvCxnSpPr/>
+          <p:nvPr/>
+        </p:nvCxnSpPr>
+        <p:spPr>
+          <a:xfrm>
+            <a:off x="5350415" y="2697480"/>
+            <a:ext cx="0" cy="1371600"/>
+          </a:xfrm>
+          <a:prstGeom prst="bentConnector3">
+            <a:avLst/>
+          </a:prstGeom>
+          <a:ln w="9525">
+            <a:solidFill>
+              <a:srgbClr val="E4E4E0"/>
+            </a:solidFill>
+          </a:ln>
+          <a:effectLst/>
+        </p:spPr>
+        <p:style>
+          <a:lnRef idx="2">
+            <a:schemeClr val="accent1"/>
+          </a:lnRef>
+          <a:fillRef idx="0">
+            <a:schemeClr val="accent1"/>
+          </a:fillRef>
+          <a:effectRef idx="1">
+            <a:schemeClr val="accent1"/>
+          </a:effectRef>
+          <a:fontRef idx="minor">
+            <a:schemeClr val="tx1"/>
+          </a:fontRef>
+        </p:style>
+      </p:cxnSp>
+      <p:cxnSp>
+        <p:nvCxnSpPr>
+          <p:cNvPr id="28" name="Connector 27"/>
+          <p:cNvCxnSpPr/>
+          <p:nvPr/>
+        </p:nvCxnSpPr>
+        <p:spPr>
+          <a:xfrm>
+            <a:off x="6095847" y="2697480"/>
+            <a:ext cx="0" cy="1371600"/>
+          </a:xfrm>
+          <a:prstGeom prst="bentConnector3">
+            <a:avLst/>
+          </a:prstGeom>
+          <a:ln w="9525">
+            <a:solidFill>
+              <a:srgbClr val="E4E4E0"/>
+            </a:solidFill>
+          </a:ln>
+          <a:effectLst/>
+        </p:spPr>
+        <p:style>
+          <a:lnRef idx="2">
+            <a:schemeClr val="accent1"/>
+          </a:lnRef>
+          <a:fillRef idx="0">
+            <a:schemeClr val="accent1"/>
+          </a:fillRef>
+          <a:effectRef idx="1">
+            <a:schemeClr val="accent1"/>
+          </a:effectRef>
+          <a:fontRef idx="minor">
+            <a:schemeClr val="tx1"/>
+          </a:fontRef>
+        </p:style>
+      </p:cxnSp>
+      <p:cxnSp>
+        <p:nvCxnSpPr>
+          <p:cNvPr id="29" name="Connector 28"/>
+          <p:cNvCxnSpPr/>
+          <p:nvPr/>
+        </p:nvCxnSpPr>
+        <p:spPr>
+          <a:xfrm>
+            <a:off x="6841279" y="2697480"/>
+            <a:ext cx="0" cy="1371600"/>
+          </a:xfrm>
+          <a:prstGeom prst="bentConnector3">
+            <a:avLst/>
+          </a:prstGeom>
+          <a:ln w="9525">
+            <a:solidFill>
+              <a:srgbClr val="E4E4E0"/>
+            </a:solidFill>
+          </a:ln>
+          <a:effectLst/>
+        </p:spPr>
+        <p:style>
+          <a:lnRef idx="2">
+            <a:schemeClr val="accent1"/>
+          </a:lnRef>
+          <a:fillRef idx="0">
+            <a:schemeClr val="accent1"/>
+          </a:fillRef>
+          <a:effectRef idx="1">
+            <a:schemeClr val="accent1"/>
+          </a:effectRef>
+          <a:fontRef idx="minor">
+            <a:schemeClr val="tx1"/>
+          </a:fontRef>
+        </p:style>
+      </p:cxnSp>
+      <p:cxnSp>
+        <p:nvCxnSpPr>
+          <p:cNvPr id="30" name="Connector 29"/>
+          <p:cNvCxnSpPr/>
+          <p:nvPr/>
+        </p:nvCxnSpPr>
+        <p:spPr>
+          <a:xfrm>
+            <a:off x="7586711" y="2697480"/>
+            <a:ext cx="0" cy="1371600"/>
+          </a:xfrm>
+          <a:prstGeom prst="bentConnector3">
+            <a:avLst/>
+          </a:prstGeom>
+          <a:ln w="9525">
+            <a:solidFill>
+              <a:srgbClr val="E4E4E0"/>
+            </a:solidFill>
+          </a:ln>
+          <a:effectLst/>
+        </p:spPr>
+        <p:style>
+          <a:lnRef idx="2">
+            <a:schemeClr val="accent1"/>
+          </a:lnRef>
+          <a:fillRef idx="0">
+            <a:schemeClr val="accent1"/>
+          </a:fillRef>
+          <a:effectRef idx="1">
+            <a:schemeClr val="accent1"/>
+          </a:effectRef>
+          <a:fontRef idx="minor">
+            <a:schemeClr val="tx1"/>
+          </a:fontRef>
+        </p:style>
+      </p:cxnSp>
+      <p:cxnSp>
+        <p:nvCxnSpPr>
+          <p:cNvPr id="31" name="Connector 30"/>
+          <p:cNvCxnSpPr/>
+          <p:nvPr/>
+        </p:nvCxnSpPr>
+        <p:spPr>
+          <a:xfrm>
+            <a:off x="8332143" y="2697480"/>
+            <a:ext cx="0" cy="1371600"/>
+          </a:xfrm>
+          <a:prstGeom prst="bentConnector3">
+            <a:avLst/>
+          </a:prstGeom>
+          <a:ln w="9525">
+            <a:solidFill>
+              <a:srgbClr val="E4E4E0"/>
+            </a:solidFill>
+          </a:ln>
+          <a:effectLst/>
+        </p:spPr>
+        <p:style>
+          <a:lnRef idx="2">
+            <a:schemeClr val="accent1"/>
+          </a:lnRef>
+          <a:fillRef idx="0">
+            <a:schemeClr val="accent1"/>
+          </a:fillRef>
+          <a:effectRef idx="1">
+            <a:schemeClr val="accent1"/>
+          </a:effectRef>
+          <a:fontRef idx="minor">
+            <a:schemeClr val="tx1"/>
+          </a:fontRef>
+        </p:style>
+      </p:cxnSp>
+      <p:cxnSp>
+        <p:nvCxnSpPr>
+          <p:cNvPr id="32" name="Connector 31"/>
+          <p:cNvCxnSpPr/>
+          <p:nvPr/>
+        </p:nvCxnSpPr>
+        <p:spPr>
+          <a:xfrm>
+            <a:off x="9077575" y="2697480"/>
+            <a:ext cx="0" cy="1371600"/>
+          </a:xfrm>
+          <a:prstGeom prst="bentConnector3">
+            <a:avLst/>
+          </a:prstGeom>
+          <a:ln w="9525">
+            <a:solidFill>
+              <a:srgbClr val="E4E4E0"/>
+            </a:solidFill>
+          </a:ln>
+          <a:effectLst/>
+        </p:spPr>
+        <p:style>
+          <a:lnRef idx="2">
+            <a:schemeClr val="accent1"/>
+          </a:lnRef>
+          <a:fillRef idx="0">
+            <a:schemeClr val="accent1"/>
+          </a:fillRef>
+          <a:effectRef idx="1">
+            <a:schemeClr val="accent1"/>
+          </a:effectRef>
+          <a:fontRef idx="minor">
+            <a:schemeClr val="tx1"/>
+          </a:fontRef>
+        </p:style>
+      </p:cxnSp>
+      <p:cxnSp>
+        <p:nvCxnSpPr>
+          <p:cNvPr id="33" name="Connector 32"/>
+          <p:cNvCxnSpPr/>
+          <p:nvPr/>
+        </p:nvCxnSpPr>
+        <p:spPr>
+          <a:xfrm>
+            <a:off x="9823007" y="2697480"/>
+            <a:ext cx="0" cy="1371600"/>
+          </a:xfrm>
+          <a:prstGeom prst="bentConnector3">
+            <a:avLst/>
+          </a:prstGeom>
+          <a:ln w="9525">
+            <a:solidFill>
+              <a:srgbClr val="E4E4E0"/>
+            </a:solidFill>
+          </a:ln>
+          <a:effectLst/>
+        </p:spPr>
+        <p:style>
+          <a:lnRef idx="2">
+            <a:schemeClr val="accent1"/>
+          </a:lnRef>
+          <a:fillRef idx="0">
+            <a:schemeClr val="accent1"/>
+          </a:fillRef>
+          <a:effectRef idx="1">
+            <a:schemeClr val="accent1"/>
+          </a:effectRef>
+          <a:fontRef idx="minor">
+            <a:schemeClr val="tx1"/>
+          </a:fontRef>
+        </p:style>
+      </p:cxnSp>
+      <p:cxnSp>
+        <p:nvCxnSpPr>
+          <p:cNvPr id="34" name="Connector 33"/>
+          <p:cNvCxnSpPr/>
+          <p:nvPr/>
+        </p:nvCxnSpPr>
+        <p:spPr>
+          <a:xfrm>
+            <a:off x="10568439" y="2697480"/>
+            <a:ext cx="0" cy="1371600"/>
+          </a:xfrm>
+          <a:prstGeom prst="bentConnector3">
+            <a:avLst/>
+          </a:prstGeom>
+          <a:ln w="9525">
+            <a:solidFill>
+              <a:srgbClr val="E4E4E0"/>
+            </a:solidFill>
+          </a:ln>
+          <a:effectLst/>
+        </p:spPr>
+        <p:style>
+          <a:lnRef idx="2">
+            <a:schemeClr val="accent1"/>
+          </a:lnRef>
+          <a:fillRef idx="0">
+            <a:schemeClr val="accent1"/>
+          </a:fillRef>
+          <a:effectRef idx="1">
+            <a:schemeClr val="accent1"/>
+          </a:effectRef>
+          <a:fontRef idx="minor">
+            <a:schemeClr val="tx1"/>
+          </a:fontRef>
+        </p:style>
+      </p:cxnSp>
+      <p:cxnSp>
+        <p:nvCxnSpPr>
+          <p:cNvPr id="35" name="Connector 34"/>
+          <p:cNvCxnSpPr/>
+          <p:nvPr/>
+        </p:nvCxnSpPr>
+        <p:spPr>
+          <a:xfrm>
+            <a:off x="11313871" y="2697480"/>
+            <a:ext cx="0" cy="1371600"/>
+          </a:xfrm>
+          <a:prstGeom prst="bentConnector3">
+            <a:avLst/>
+          </a:prstGeom>
+          <a:ln w="9525">
+            <a:solidFill>
+              <a:srgbClr val="E4E4E0"/>
+            </a:solidFill>
+          </a:ln>
+          <a:effectLst/>
+        </p:spPr>
+        <p:style>
+          <a:lnRef idx="2">
+            <a:schemeClr val="accent1"/>
+          </a:lnRef>
+          <a:fillRef idx="0">
+            <a:schemeClr val="accent1"/>
+          </a:fillRef>
+          <a:effectRef idx="1">
+            <a:schemeClr val="accent1"/>
+          </a:effectRef>
+          <a:fontRef idx="minor">
+            <a:schemeClr val="tx1"/>
+          </a:fontRef>
+        </p:style>
+      </p:cxnSp>
+      <p:cxnSp>
+        <p:nvCxnSpPr>
+          <p:cNvPr id="36" name="Connector 35"/>
+          <p:cNvCxnSpPr/>
+          <p:nvPr/>
+        </p:nvCxnSpPr>
+        <p:spPr>
+          <a:xfrm>
+            <a:off x="877824" y="2697480"/>
+            <a:ext cx="10436047" cy="0"/>
+          </a:xfrm>
+          <a:prstGeom prst="bentConnector3">
+            <a:avLst/>
+          </a:prstGeom>
+          <a:ln w="9525">
+            <a:solidFill>
+              <a:srgbClr val="E4E4E0"/>
+            </a:solidFill>
+          </a:ln>
+          <a:effectLst/>
+        </p:spPr>
+        <p:style>
+          <a:lnRef idx="2">
+            <a:schemeClr val="accent1"/>
+          </a:lnRef>
+          <a:fillRef idx="0">
+            <a:schemeClr val="accent1"/>
+          </a:fillRef>
+          <a:effectRef idx="1">
+            <a:schemeClr val="accent1"/>
+          </a:effectRef>
+          <a:fontRef idx="minor">
+            <a:schemeClr val="tx1"/>
+          </a:fontRef>
+        </p:style>
+      </p:cxnSp>
+      <p:cxnSp>
+        <p:nvCxnSpPr>
+          <p:cNvPr id="37" name="Connector 36"/>
+          <p:cNvCxnSpPr/>
+          <p:nvPr/>
+        </p:nvCxnSpPr>
+        <p:spPr>
+          <a:xfrm>
+            <a:off x="877824" y="4069080"/>
+            <a:ext cx="10436047" cy="0"/>
+          </a:xfrm>
+          <a:prstGeom prst="bentConnector3">
+            <a:avLst/>
+          </a:prstGeom>
+          <a:ln w="9525">
+            <a:solidFill>
+              <a:srgbClr val="E4E4E0"/>
+            </a:solidFill>
+          </a:ln>
+          <a:effectLst/>
+        </p:spPr>
+        <p:style>
+          <a:lnRef idx="2">
+            <a:schemeClr val="accent1"/>
+          </a:lnRef>
+          <a:fillRef idx="0">
+            <a:schemeClr val="accent1"/>
+          </a:fillRef>
+          <a:effectRef idx="1">
+            <a:schemeClr val="accent1"/>
+          </a:effectRef>
+          <a:fontRef idx="minor">
+            <a:schemeClr val="tx1"/>
+          </a:fontRef>
+        </p:style>
+      </p:cxnSp>
+      <p:sp>
+        <p:nvSpPr>
+          <p:cNvPr id="38" name="Rectangle 37"/>
           <p:cNvSpPr/>
           <p:nvPr/>
         </p:nvSpPr>
         <p:spPr>
           <a:xfrm>
-            <a:off x="5805957" y="2697480"/>
-            <a:ext cx="2898902" cy="1554480"/>
+            <a:off x="3859551" y="2697480"/>
+            <a:ext cx="4472591" cy="1371600"/>
           </a:xfrm>
           <a:prstGeom prst="rect">
             <a:avLst/>
           </a:prstGeom>
           <a:solidFill>
-            <a:srgbClr val="2A1714"/>
+            <a:srgbClr val="FBE7E4"/>
           </a:solidFill>
           <a:ln>
             <a:noFill/>
@@ -4955,66 +6807,14 @@
       </p:sp>
       <p:sp>
         <p:nvSpPr>
-          <p:cNvPr id="7" name="TextBox 6"/>
-          <p:cNvSpPr txBox="1"/>
-          <p:nvPr/>
-        </p:nvSpPr>
-        <p:spPr>
-          <a:xfrm>
-            <a:off x="877824" y="2569464"/>
-            <a:ext cx="7315200" cy="274320"/>
-          </a:xfrm>
-          <a:prstGeom prst="rect">
-            <a:avLst/>
-          </a:prstGeom>
-          <a:noFill/>
-        </p:spPr>
-        <p:txBody>
-          <a:bodyPr wrap="square" anchor="t" lIns="0" rIns="0" tIns="0" bIns="0"/>
-          <a:lstStyle/>
-          <a:p>
-            <a:pPr algn="l">
-              <a:lnSpc>
-                <a:spcPct val="100000"/>
-              </a:lnSpc>
-              <a:spcBef>
-                <a:spcPts val="0"/>
-              </a:spcBef>
-              <a:spcAft>
-                <a:spcPts val="0"/>
-              </a:spcAft>
-            </a:pPr>
-            <a:r>
-              <a:rPr sz="1150" b="1" i="0" lang="en-AU" spc="23">
-                <a:solidFill>
-                  <a:srgbClr val="FFFFFF"/>
-                </a:solidFill>
-                <a:latin typeface="Inter"/>
-              </a:rPr>
-              <a:t>ONSHORE · Australia   </a:t>
-            </a:r>
-            <a:r>
-              <a:rPr sz="1150" b="1" i="0" lang="en-AU" spc="46">
-                <a:solidFill>
-                  <a:srgbClr val="AEAEAE"/>
-                </a:solidFill>
-                <a:latin typeface="Inter"/>
-              </a:rPr>
-              <a:t>8:30 – 17:30 AEST</a:t>
-            </a:r>
-          </a:p>
-        </p:txBody>
-      </p:sp>
-      <p:sp>
-        <p:nvSpPr>
-          <p:cNvPr id="8" name="Rectangle 7"/>
+          <p:cNvPr id="39" name="Rectangle 38"/>
           <p:cNvSpPr/>
           <p:nvPr/>
         </p:nvSpPr>
         <p:spPr>
           <a:xfrm>
-            <a:off x="3486835" y="2880360"/>
-            <a:ext cx="5218023" cy="457200"/>
+            <a:off x="914400" y="2862072"/>
+            <a:ext cx="7381167" cy="420624"/>
           </a:xfrm>
           <a:prstGeom prst="rect">
             <a:avLst/>
@@ -5051,14 +6851,14 @@
       </p:sp>
       <p:sp>
         <p:nvSpPr>
-          <p:cNvPr id="9" name="TextBox 8"/>
-          <p:cNvSpPr txBox="1"/>
-          <p:nvPr/>
-        </p:nvSpPr>
-        <p:spPr>
-          <a:xfrm>
-            <a:off x="877824" y="3483864"/>
-            <a:ext cx="7315200" cy="274320"/>
+          <p:cNvPr id="40" name="TextBox 39"/>
+          <p:cNvSpPr txBox="1"/>
+          <p:nvPr/>
+        </p:nvSpPr>
+        <p:spPr>
+          <a:xfrm>
+            <a:off x="987552" y="2898648"/>
+            <a:ext cx="4572000" cy="329184"/>
           </a:xfrm>
           <a:prstGeom prst="rect">
             <a:avLst/>
@@ -5081,36 +6881,1071 @@
               </a:spcAft>
             </a:pPr>
             <a:r>
-              <a:rPr sz="1150" b="1" i="0" lang="en-AU" spc="23">
+              <a:rPr sz="1100" b="1" i="0" lang="en-AU" spc="22">
                 <a:solidFill>
                   <a:srgbClr val="FFFFFF"/>
                 </a:solidFill>
                 <a:latin typeface="Inter"/>
               </a:rPr>
-              <a:t>OFFSHORE · India   </a:t>
-            </a:r>
-            <a:r>
-              <a:rPr sz="1150" b="1" i="0" lang="en-AU" spc="46">
+              <a:t>ONSHORE · Australia</a:t>
+            </a:r>
+          </a:p>
+        </p:txBody>
+      </p:sp>
+      <p:sp>
+        <p:nvSpPr>
+          <p:cNvPr id="41" name="Rectangle 40"/>
+          <p:cNvSpPr/>
+          <p:nvPr/>
+        </p:nvSpPr>
+        <p:spPr>
+          <a:xfrm>
+            <a:off x="3896127" y="3483864"/>
+            <a:ext cx="7381167" cy="420624"/>
+          </a:xfrm>
+          <a:prstGeom prst="rect">
+            <a:avLst/>
+          </a:prstGeom>
+          <a:solidFill>
+            <a:srgbClr val="111111"/>
+          </a:solidFill>
+          <a:ln>
+            <a:noFill/>
+          </a:ln>
+          <a:effectLst/>
+        </p:spPr>
+        <p:style>
+          <a:lnRef idx="1">
+            <a:schemeClr val="accent1"/>
+          </a:lnRef>
+          <a:fillRef idx="3">
+            <a:schemeClr val="accent1"/>
+          </a:fillRef>
+          <a:effectRef idx="2">
+            <a:schemeClr val="accent1"/>
+          </a:effectRef>
+          <a:fontRef idx="minor">
+            <a:schemeClr val="lt1"/>
+          </a:fontRef>
+        </p:style>
+        <p:txBody>
+          <a:bodyPr rtlCol="0" anchor="ctr"/>
+          <a:lstStyle/>
+          <a:p>
+            <a:pPr algn="ctr"/>
+          </a:p>
+        </p:txBody>
+      </p:sp>
+      <p:sp>
+        <p:nvSpPr>
+          <p:cNvPr id="42" name="TextBox 41"/>
+          <p:cNvSpPr txBox="1"/>
+          <p:nvPr/>
+        </p:nvSpPr>
+        <p:spPr>
+          <a:xfrm>
+            <a:off x="3969279" y="3520440"/>
+            <a:ext cx="4572000" cy="329184"/>
+          </a:xfrm>
+          <a:prstGeom prst="rect">
+            <a:avLst/>
+          </a:prstGeom>
+          <a:noFill/>
+        </p:spPr>
+        <p:txBody>
+          <a:bodyPr wrap="square" anchor="t" lIns="0" rIns="0" tIns="0" bIns="0"/>
+          <a:lstStyle/>
+          <a:p>
+            <a:pPr algn="l">
+              <a:lnSpc>
+                <a:spcPct val="100000"/>
+              </a:lnSpc>
+              <a:spcBef>
+                <a:spcPts val="0"/>
+              </a:spcBef>
+              <a:spcAft>
+                <a:spcPts val="0"/>
+              </a:spcAft>
+            </a:pPr>
+            <a:r>
+              <a:rPr sz="1100" b="1" i="0" lang="en-AU" spc="22">
+                <a:solidFill>
+                  <a:srgbClr val="FFFFFF"/>
+                </a:solidFill>
+                <a:latin typeface="Inter"/>
+              </a:rPr>
+              <a:t>OFFSHORE · India</a:t>
+            </a:r>
+          </a:p>
+        </p:txBody>
+      </p:sp>
+      <p:sp>
+        <p:nvSpPr>
+          <p:cNvPr id="43" name="TextBox 42"/>
+          <p:cNvSpPr txBox="1"/>
+          <p:nvPr/>
+        </p:nvSpPr>
+        <p:spPr>
+          <a:xfrm>
+            <a:off x="877824" y="4105656"/>
+            <a:ext cx="745431" cy="219456"/>
+          </a:xfrm>
+          <a:prstGeom prst="rect">
+            <a:avLst/>
+          </a:prstGeom>
+          <a:noFill/>
+        </p:spPr>
+        <p:txBody>
+          <a:bodyPr wrap="square" anchor="t" lIns="0" rIns="0" tIns="0" bIns="0"/>
+          <a:lstStyle/>
+          <a:p>
+            <a:pPr algn="ctr">
+              <a:lnSpc>
+                <a:spcPct val="100000"/>
+              </a:lnSpc>
+              <a:spcBef>
+                <a:spcPts val="0"/>
+              </a:spcBef>
+              <a:spcAft>
+                <a:spcPts val="0"/>
+              </a:spcAft>
+            </a:pPr>
+            <a:r>
+              <a:rPr sz="800" b="1" i="0" lang="en-AU" spc="0">
                 <a:solidFill>
                   <a:srgbClr val="AEAEAE"/>
                 </a:solidFill>
                 <a:latin typeface="Inter"/>
               </a:rPr>
-              <a:t>8:00 – 17:00 IST</a:t>
-            </a:r>
-          </a:p>
-        </p:txBody>
-      </p:sp>
-      <p:sp>
-        <p:nvSpPr>
-          <p:cNvPr id="10" name="Rectangle 9"/>
+              <a:t>4:00</a:t>
+            </a:r>
+          </a:p>
+        </p:txBody>
+      </p:sp>
+      <p:sp>
+        <p:nvSpPr>
+          <p:cNvPr id="44" name="TextBox 43"/>
+          <p:cNvSpPr txBox="1"/>
+          <p:nvPr/>
+        </p:nvSpPr>
+        <p:spPr>
+          <a:xfrm>
+            <a:off x="1623255" y="4105656"/>
+            <a:ext cx="745431" cy="219456"/>
+          </a:xfrm>
+          <a:prstGeom prst="rect">
+            <a:avLst/>
+          </a:prstGeom>
+          <a:noFill/>
+        </p:spPr>
+        <p:txBody>
+          <a:bodyPr wrap="square" anchor="t" lIns="0" rIns="0" tIns="0" bIns="0"/>
+          <a:lstStyle/>
+          <a:p>
+            <a:pPr algn="ctr">
+              <a:lnSpc>
+                <a:spcPct val="100000"/>
+              </a:lnSpc>
+              <a:spcBef>
+                <a:spcPts val="0"/>
+              </a:spcBef>
+              <a:spcAft>
+                <a:spcPts val="0"/>
+              </a:spcAft>
+            </a:pPr>
+            <a:r>
+              <a:rPr sz="800" b="1" i="0" lang="en-AU" spc="0">
+                <a:solidFill>
+                  <a:srgbClr val="AEAEAE"/>
+                </a:solidFill>
+                <a:latin typeface="Inter"/>
+              </a:rPr>
+              <a:t>5:00</a:t>
+            </a:r>
+          </a:p>
+        </p:txBody>
+      </p:sp>
+      <p:sp>
+        <p:nvSpPr>
+          <p:cNvPr id="45" name="TextBox 44"/>
+          <p:cNvSpPr txBox="1"/>
+          <p:nvPr/>
+        </p:nvSpPr>
+        <p:spPr>
+          <a:xfrm>
+            <a:off x="2368687" y="4105656"/>
+            <a:ext cx="745431" cy="219456"/>
+          </a:xfrm>
+          <a:prstGeom prst="rect">
+            <a:avLst/>
+          </a:prstGeom>
+          <a:noFill/>
+        </p:spPr>
+        <p:txBody>
+          <a:bodyPr wrap="square" anchor="t" lIns="0" rIns="0" tIns="0" bIns="0"/>
+          <a:lstStyle/>
+          <a:p>
+            <a:pPr algn="ctr">
+              <a:lnSpc>
+                <a:spcPct val="100000"/>
+              </a:lnSpc>
+              <a:spcBef>
+                <a:spcPts val="0"/>
+              </a:spcBef>
+              <a:spcAft>
+                <a:spcPts val="0"/>
+              </a:spcAft>
+            </a:pPr>
+            <a:r>
+              <a:rPr sz="800" b="1" i="0" lang="en-AU" spc="0">
+                <a:solidFill>
+                  <a:srgbClr val="AEAEAE"/>
+                </a:solidFill>
+                <a:latin typeface="Inter"/>
+              </a:rPr>
+              <a:t>6:00</a:t>
+            </a:r>
+          </a:p>
+        </p:txBody>
+      </p:sp>
+      <p:sp>
+        <p:nvSpPr>
+          <p:cNvPr id="46" name="TextBox 45"/>
+          <p:cNvSpPr txBox="1"/>
+          <p:nvPr/>
+        </p:nvSpPr>
+        <p:spPr>
+          <a:xfrm>
+            <a:off x="3114119" y="4105656"/>
+            <a:ext cx="745431" cy="219456"/>
+          </a:xfrm>
+          <a:prstGeom prst="rect">
+            <a:avLst/>
+          </a:prstGeom>
+          <a:noFill/>
+        </p:spPr>
+        <p:txBody>
+          <a:bodyPr wrap="square" anchor="t" lIns="0" rIns="0" tIns="0" bIns="0"/>
+          <a:lstStyle/>
+          <a:p>
+            <a:pPr algn="ctr">
+              <a:lnSpc>
+                <a:spcPct val="100000"/>
+              </a:lnSpc>
+              <a:spcBef>
+                <a:spcPts val="0"/>
+              </a:spcBef>
+              <a:spcAft>
+                <a:spcPts val="0"/>
+              </a:spcAft>
+            </a:pPr>
+            <a:r>
+              <a:rPr sz="800" b="1" i="0" lang="en-AU" spc="0">
+                <a:solidFill>
+                  <a:srgbClr val="AEAEAE"/>
+                </a:solidFill>
+                <a:latin typeface="Inter"/>
+              </a:rPr>
+              <a:t>7:00</a:t>
+            </a:r>
+          </a:p>
+        </p:txBody>
+      </p:sp>
+      <p:sp>
+        <p:nvSpPr>
+          <p:cNvPr id="47" name="TextBox 46"/>
+          <p:cNvSpPr txBox="1"/>
+          <p:nvPr/>
+        </p:nvSpPr>
+        <p:spPr>
+          <a:xfrm>
+            <a:off x="3859551" y="4105656"/>
+            <a:ext cx="745431" cy="219456"/>
+          </a:xfrm>
+          <a:prstGeom prst="rect">
+            <a:avLst/>
+          </a:prstGeom>
+          <a:noFill/>
+        </p:spPr>
+        <p:txBody>
+          <a:bodyPr wrap="square" anchor="t" lIns="0" rIns="0" tIns="0" bIns="0"/>
+          <a:lstStyle/>
+          <a:p>
+            <a:pPr algn="ctr">
+              <a:lnSpc>
+                <a:spcPct val="100000"/>
+              </a:lnSpc>
+              <a:spcBef>
+                <a:spcPts val="0"/>
+              </a:spcBef>
+              <a:spcAft>
+                <a:spcPts val="0"/>
+              </a:spcAft>
+            </a:pPr>
+            <a:r>
+              <a:rPr sz="800" b="1" i="0" lang="en-AU" spc="0">
+                <a:solidFill>
+                  <a:srgbClr val="AEAEAE"/>
+                </a:solidFill>
+                <a:latin typeface="Inter"/>
+              </a:rPr>
+              <a:t>8:00</a:t>
+            </a:r>
+          </a:p>
+        </p:txBody>
+      </p:sp>
+      <p:sp>
+        <p:nvSpPr>
+          <p:cNvPr id="48" name="TextBox 47"/>
+          <p:cNvSpPr txBox="1"/>
+          <p:nvPr/>
+        </p:nvSpPr>
+        <p:spPr>
+          <a:xfrm>
+            <a:off x="4604983" y="4105656"/>
+            <a:ext cx="745431" cy="219456"/>
+          </a:xfrm>
+          <a:prstGeom prst="rect">
+            <a:avLst/>
+          </a:prstGeom>
+          <a:noFill/>
+        </p:spPr>
+        <p:txBody>
+          <a:bodyPr wrap="square" anchor="t" lIns="0" rIns="0" tIns="0" bIns="0"/>
+          <a:lstStyle/>
+          <a:p>
+            <a:pPr algn="ctr">
+              <a:lnSpc>
+                <a:spcPct val="100000"/>
+              </a:lnSpc>
+              <a:spcBef>
+                <a:spcPts val="0"/>
+              </a:spcBef>
+              <a:spcAft>
+                <a:spcPts val="0"/>
+              </a:spcAft>
+            </a:pPr>
+            <a:r>
+              <a:rPr sz="800" b="1" i="0" lang="en-AU" spc="0">
+                <a:solidFill>
+                  <a:srgbClr val="AEAEAE"/>
+                </a:solidFill>
+                <a:latin typeface="Inter"/>
+              </a:rPr>
+              <a:t>9:00</a:t>
+            </a:r>
+          </a:p>
+        </p:txBody>
+      </p:sp>
+      <p:sp>
+        <p:nvSpPr>
+          <p:cNvPr id="49" name="TextBox 48"/>
+          <p:cNvSpPr txBox="1"/>
+          <p:nvPr/>
+        </p:nvSpPr>
+        <p:spPr>
+          <a:xfrm>
+            <a:off x="5350415" y="4105656"/>
+            <a:ext cx="745431" cy="219456"/>
+          </a:xfrm>
+          <a:prstGeom prst="rect">
+            <a:avLst/>
+          </a:prstGeom>
+          <a:noFill/>
+        </p:spPr>
+        <p:txBody>
+          <a:bodyPr wrap="square" anchor="t" lIns="0" rIns="0" tIns="0" bIns="0"/>
+          <a:lstStyle/>
+          <a:p>
+            <a:pPr algn="ctr">
+              <a:lnSpc>
+                <a:spcPct val="100000"/>
+              </a:lnSpc>
+              <a:spcBef>
+                <a:spcPts val="0"/>
+              </a:spcBef>
+              <a:spcAft>
+                <a:spcPts val="0"/>
+              </a:spcAft>
+            </a:pPr>
+            <a:r>
+              <a:rPr sz="800" b="1" i="0" lang="en-AU" spc="0">
+                <a:solidFill>
+                  <a:srgbClr val="AEAEAE"/>
+                </a:solidFill>
+                <a:latin typeface="Inter"/>
+              </a:rPr>
+              <a:t>10:00</a:t>
+            </a:r>
+          </a:p>
+        </p:txBody>
+      </p:sp>
+      <p:sp>
+        <p:nvSpPr>
+          <p:cNvPr id="50" name="TextBox 49"/>
+          <p:cNvSpPr txBox="1"/>
+          <p:nvPr/>
+        </p:nvSpPr>
+        <p:spPr>
+          <a:xfrm>
+            <a:off x="6095847" y="4105656"/>
+            <a:ext cx="745431" cy="219456"/>
+          </a:xfrm>
+          <a:prstGeom prst="rect">
+            <a:avLst/>
+          </a:prstGeom>
+          <a:noFill/>
+        </p:spPr>
+        <p:txBody>
+          <a:bodyPr wrap="square" anchor="t" lIns="0" rIns="0" tIns="0" bIns="0"/>
+          <a:lstStyle/>
+          <a:p>
+            <a:pPr algn="ctr">
+              <a:lnSpc>
+                <a:spcPct val="100000"/>
+              </a:lnSpc>
+              <a:spcBef>
+                <a:spcPts val="0"/>
+              </a:spcBef>
+              <a:spcAft>
+                <a:spcPts val="0"/>
+              </a:spcAft>
+            </a:pPr>
+            <a:r>
+              <a:rPr sz="800" b="1" i="0" lang="en-AU" spc="0">
+                <a:solidFill>
+                  <a:srgbClr val="AEAEAE"/>
+                </a:solidFill>
+                <a:latin typeface="Inter"/>
+              </a:rPr>
+              <a:t>11:00</a:t>
+            </a:r>
+          </a:p>
+        </p:txBody>
+      </p:sp>
+      <p:sp>
+        <p:nvSpPr>
+          <p:cNvPr id="51" name="TextBox 50"/>
+          <p:cNvSpPr txBox="1"/>
+          <p:nvPr/>
+        </p:nvSpPr>
+        <p:spPr>
+          <a:xfrm>
+            <a:off x="6841279" y="4105656"/>
+            <a:ext cx="745431" cy="219456"/>
+          </a:xfrm>
+          <a:prstGeom prst="rect">
+            <a:avLst/>
+          </a:prstGeom>
+          <a:noFill/>
+        </p:spPr>
+        <p:txBody>
+          <a:bodyPr wrap="square" anchor="t" lIns="0" rIns="0" tIns="0" bIns="0"/>
+          <a:lstStyle/>
+          <a:p>
+            <a:pPr algn="ctr">
+              <a:lnSpc>
+                <a:spcPct val="100000"/>
+              </a:lnSpc>
+              <a:spcBef>
+                <a:spcPts val="0"/>
+              </a:spcBef>
+              <a:spcAft>
+                <a:spcPts val="0"/>
+              </a:spcAft>
+            </a:pPr>
+            <a:r>
+              <a:rPr sz="800" b="1" i="0" lang="en-AU" spc="0">
+                <a:solidFill>
+                  <a:srgbClr val="AEAEAE"/>
+                </a:solidFill>
+                <a:latin typeface="Inter"/>
+              </a:rPr>
+              <a:t>12:00</a:t>
+            </a:r>
+          </a:p>
+        </p:txBody>
+      </p:sp>
+      <p:sp>
+        <p:nvSpPr>
+          <p:cNvPr id="52" name="TextBox 51"/>
+          <p:cNvSpPr txBox="1"/>
+          <p:nvPr/>
+        </p:nvSpPr>
+        <p:spPr>
+          <a:xfrm>
+            <a:off x="7586711" y="4105656"/>
+            <a:ext cx="745431" cy="219456"/>
+          </a:xfrm>
+          <a:prstGeom prst="rect">
+            <a:avLst/>
+          </a:prstGeom>
+          <a:noFill/>
+        </p:spPr>
+        <p:txBody>
+          <a:bodyPr wrap="square" anchor="t" lIns="0" rIns="0" tIns="0" bIns="0"/>
+          <a:lstStyle/>
+          <a:p>
+            <a:pPr algn="ctr">
+              <a:lnSpc>
+                <a:spcPct val="100000"/>
+              </a:lnSpc>
+              <a:spcBef>
+                <a:spcPts val="0"/>
+              </a:spcBef>
+              <a:spcAft>
+                <a:spcPts val="0"/>
+              </a:spcAft>
+            </a:pPr>
+            <a:r>
+              <a:rPr sz="800" b="1" i="0" lang="en-AU" spc="0">
+                <a:solidFill>
+                  <a:srgbClr val="AEAEAE"/>
+                </a:solidFill>
+                <a:latin typeface="Inter"/>
+              </a:rPr>
+              <a:t>13:00</a:t>
+            </a:r>
+          </a:p>
+        </p:txBody>
+      </p:sp>
+      <p:sp>
+        <p:nvSpPr>
+          <p:cNvPr id="53" name="TextBox 52"/>
+          <p:cNvSpPr txBox="1"/>
+          <p:nvPr/>
+        </p:nvSpPr>
+        <p:spPr>
+          <a:xfrm>
+            <a:off x="8332143" y="4105656"/>
+            <a:ext cx="745431" cy="219456"/>
+          </a:xfrm>
+          <a:prstGeom prst="rect">
+            <a:avLst/>
+          </a:prstGeom>
+          <a:noFill/>
+        </p:spPr>
+        <p:txBody>
+          <a:bodyPr wrap="square" anchor="t" lIns="0" rIns="0" tIns="0" bIns="0"/>
+          <a:lstStyle/>
+          <a:p>
+            <a:pPr algn="ctr">
+              <a:lnSpc>
+                <a:spcPct val="100000"/>
+              </a:lnSpc>
+              <a:spcBef>
+                <a:spcPts val="0"/>
+              </a:spcBef>
+              <a:spcAft>
+                <a:spcPts val="0"/>
+              </a:spcAft>
+            </a:pPr>
+            <a:r>
+              <a:rPr sz="800" b="1" i="0" lang="en-AU" spc="0">
+                <a:solidFill>
+                  <a:srgbClr val="AEAEAE"/>
+                </a:solidFill>
+                <a:latin typeface="Inter"/>
+              </a:rPr>
+              <a:t>14:00</a:t>
+            </a:r>
+          </a:p>
+        </p:txBody>
+      </p:sp>
+      <p:sp>
+        <p:nvSpPr>
+          <p:cNvPr id="54" name="TextBox 53"/>
+          <p:cNvSpPr txBox="1"/>
+          <p:nvPr/>
+        </p:nvSpPr>
+        <p:spPr>
+          <a:xfrm>
+            <a:off x="9077575" y="4105656"/>
+            <a:ext cx="745431" cy="219456"/>
+          </a:xfrm>
+          <a:prstGeom prst="rect">
+            <a:avLst/>
+          </a:prstGeom>
+          <a:noFill/>
+        </p:spPr>
+        <p:txBody>
+          <a:bodyPr wrap="square" anchor="t" lIns="0" rIns="0" tIns="0" bIns="0"/>
+          <a:lstStyle/>
+          <a:p>
+            <a:pPr algn="ctr">
+              <a:lnSpc>
+                <a:spcPct val="100000"/>
+              </a:lnSpc>
+              <a:spcBef>
+                <a:spcPts val="0"/>
+              </a:spcBef>
+              <a:spcAft>
+                <a:spcPts val="0"/>
+              </a:spcAft>
+            </a:pPr>
+            <a:r>
+              <a:rPr sz="800" b="1" i="0" lang="en-AU" spc="0">
+                <a:solidFill>
+                  <a:srgbClr val="AEAEAE"/>
+                </a:solidFill>
+                <a:latin typeface="Inter"/>
+              </a:rPr>
+              <a:t>15:00</a:t>
+            </a:r>
+          </a:p>
+        </p:txBody>
+      </p:sp>
+      <p:sp>
+        <p:nvSpPr>
+          <p:cNvPr id="55" name="TextBox 54"/>
+          <p:cNvSpPr txBox="1"/>
+          <p:nvPr/>
+        </p:nvSpPr>
+        <p:spPr>
+          <a:xfrm>
+            <a:off x="9823007" y="4105656"/>
+            <a:ext cx="745431" cy="219456"/>
+          </a:xfrm>
+          <a:prstGeom prst="rect">
+            <a:avLst/>
+          </a:prstGeom>
+          <a:noFill/>
+        </p:spPr>
+        <p:txBody>
+          <a:bodyPr wrap="square" anchor="t" lIns="0" rIns="0" tIns="0" bIns="0"/>
+          <a:lstStyle/>
+          <a:p>
+            <a:pPr algn="ctr">
+              <a:lnSpc>
+                <a:spcPct val="100000"/>
+              </a:lnSpc>
+              <a:spcBef>
+                <a:spcPts val="0"/>
+              </a:spcBef>
+              <a:spcAft>
+                <a:spcPts val="0"/>
+              </a:spcAft>
+            </a:pPr>
+            <a:r>
+              <a:rPr sz="800" b="1" i="0" lang="en-AU" spc="0">
+                <a:solidFill>
+                  <a:srgbClr val="AEAEAE"/>
+                </a:solidFill>
+                <a:latin typeface="Inter"/>
+              </a:rPr>
+              <a:t>16:00</a:t>
+            </a:r>
+          </a:p>
+        </p:txBody>
+      </p:sp>
+      <p:sp>
+        <p:nvSpPr>
+          <p:cNvPr id="56" name="TextBox 55"/>
+          <p:cNvSpPr txBox="1"/>
+          <p:nvPr/>
+        </p:nvSpPr>
+        <p:spPr>
+          <a:xfrm>
+            <a:off x="10568439" y="4105656"/>
+            <a:ext cx="745431" cy="219456"/>
+          </a:xfrm>
+          <a:prstGeom prst="rect">
+            <a:avLst/>
+          </a:prstGeom>
+          <a:noFill/>
+        </p:spPr>
+        <p:txBody>
+          <a:bodyPr wrap="square" anchor="t" lIns="0" rIns="0" tIns="0" bIns="0"/>
+          <a:lstStyle/>
+          <a:p>
+            <a:pPr algn="ctr">
+              <a:lnSpc>
+                <a:spcPct val="100000"/>
+              </a:lnSpc>
+              <a:spcBef>
+                <a:spcPts val="0"/>
+              </a:spcBef>
+              <a:spcAft>
+                <a:spcPts val="0"/>
+              </a:spcAft>
+            </a:pPr>
+            <a:r>
+              <a:rPr sz="800" b="1" i="0" lang="en-AU" spc="0">
+                <a:solidFill>
+                  <a:srgbClr val="AEAEAE"/>
+                </a:solidFill>
+                <a:latin typeface="Inter"/>
+              </a:rPr>
+              <a:t>17:00</a:t>
+            </a:r>
+          </a:p>
+        </p:txBody>
+      </p:sp>
+      <p:sp>
+        <p:nvSpPr>
+          <p:cNvPr id="57" name="TextBox 56"/>
+          <p:cNvSpPr txBox="1"/>
+          <p:nvPr/>
+        </p:nvSpPr>
+        <p:spPr>
+          <a:xfrm>
+            <a:off x="877824" y="4325112"/>
+            <a:ext cx="2743200" cy="201168"/>
+          </a:xfrm>
+          <a:prstGeom prst="rect">
+            <a:avLst/>
+          </a:prstGeom>
+          <a:noFill/>
+        </p:spPr>
+        <p:txBody>
+          <a:bodyPr wrap="square" anchor="t" lIns="0" rIns="0" tIns="0" bIns="0"/>
+          <a:lstStyle/>
+          <a:p>
+            <a:pPr algn="l">
+              <a:lnSpc>
+                <a:spcPct val="100000"/>
+              </a:lnSpc>
+              <a:spcBef>
+                <a:spcPts val="0"/>
+              </a:spcBef>
+              <a:spcAft>
+                <a:spcPts val="0"/>
+              </a:spcAft>
+            </a:pPr>
+            <a:r>
+              <a:rPr sz="850" b="1" i="0" lang="en-AU" spc="51" cap="all">
+                <a:solidFill>
+                  <a:srgbClr val="EA493F"/>
+                </a:solidFill>
+                <a:latin typeface="Inter"/>
+              </a:rPr>
+              <a:t>← AEST   ·   IST →</a:t>
+            </a:r>
+          </a:p>
+        </p:txBody>
+      </p:sp>
+      <p:sp>
+        <p:nvSpPr>
+          <p:cNvPr id="58" name="TextBox 57"/>
+          <p:cNvSpPr txBox="1"/>
+          <p:nvPr/>
+        </p:nvSpPr>
+        <p:spPr>
+          <a:xfrm>
+            <a:off x="877824" y="4709160"/>
+            <a:ext cx="4846320" cy="329184"/>
+          </a:xfrm>
+          <a:prstGeom prst="rect">
+            <a:avLst/>
+          </a:prstGeom>
+          <a:noFill/>
+        </p:spPr>
+        <p:txBody>
+          <a:bodyPr wrap="square" anchor="t" lIns="0" rIns="0" tIns="0" bIns="0"/>
+          <a:lstStyle/>
+          <a:p>
+            <a:pPr algn="l">
+              <a:lnSpc>
+                <a:spcPct val="112000"/>
+              </a:lnSpc>
+              <a:spcBef>
+                <a:spcPts val="0"/>
+              </a:spcBef>
+              <a:spcAft>
+                <a:spcPts val="0"/>
+              </a:spcAft>
+            </a:pPr>
+            <a:r>
+              <a:rPr sz="1050" b="1" i="0" lang="en-AU" spc="0">
+                <a:solidFill>
+                  <a:srgbClr val="EA493F"/>
+                </a:solidFill>
+                <a:latin typeface="Inter"/>
+              </a:rPr>
+              <a:t>—  </a:t>
+            </a:r>
+            <a:r>
+              <a:rPr sz="1050" b="0" i="0" lang="en-AU" spc="0">
+                <a:solidFill>
+                  <a:srgbClr val="323232"/>
+                </a:solidFill>
+                <a:latin typeface="Inter"/>
+              </a:rPr>
+              <a:t>Governance &amp; stakeholder engagement</a:t>
+            </a:r>
+          </a:p>
+        </p:txBody>
+      </p:sp>
+      <p:sp>
+        <p:nvSpPr>
+          <p:cNvPr id="59" name="TextBox 58"/>
+          <p:cNvSpPr txBox="1"/>
+          <p:nvPr/>
+        </p:nvSpPr>
+        <p:spPr>
+          <a:xfrm>
+            <a:off x="877824" y="5038344"/>
+            <a:ext cx="4846320" cy="329184"/>
+          </a:xfrm>
+          <a:prstGeom prst="rect">
+            <a:avLst/>
+          </a:prstGeom>
+          <a:noFill/>
+        </p:spPr>
+        <p:txBody>
+          <a:bodyPr wrap="square" anchor="t" lIns="0" rIns="0" tIns="0" bIns="0"/>
+          <a:lstStyle/>
+          <a:p>
+            <a:pPr algn="l">
+              <a:lnSpc>
+                <a:spcPct val="112000"/>
+              </a:lnSpc>
+              <a:spcBef>
+                <a:spcPts val="0"/>
+              </a:spcBef>
+              <a:spcAft>
+                <a:spcPts val="0"/>
+              </a:spcAft>
+            </a:pPr>
+            <a:r>
+              <a:rPr sz="1050" b="1" i="0" lang="en-AU" spc="0">
+                <a:solidFill>
+                  <a:srgbClr val="EA493F"/>
+                </a:solidFill>
+                <a:latin typeface="Inter"/>
+              </a:rPr>
+              <a:t>—  </a:t>
+            </a:r>
+            <a:r>
+              <a:rPr sz="1050" b="0" i="0" lang="en-AU" spc="0">
+                <a:solidFill>
+                  <a:srgbClr val="323232"/>
+                </a:solidFill>
+                <a:latin typeface="Inter"/>
+              </a:rPr>
+              <a:t>Resolution of P1 / P2 incidents</a:t>
+            </a:r>
+          </a:p>
+        </p:txBody>
+      </p:sp>
+      <p:sp>
+        <p:nvSpPr>
+          <p:cNvPr id="60" name="TextBox 59"/>
+          <p:cNvSpPr txBox="1"/>
+          <p:nvPr/>
+        </p:nvSpPr>
+        <p:spPr>
+          <a:xfrm>
+            <a:off x="877824" y="5367528"/>
+            <a:ext cx="4846320" cy="329184"/>
+          </a:xfrm>
+          <a:prstGeom prst="rect">
+            <a:avLst/>
+          </a:prstGeom>
+          <a:noFill/>
+        </p:spPr>
+        <p:txBody>
+          <a:bodyPr wrap="square" anchor="t" lIns="0" rIns="0" tIns="0" bIns="0"/>
+          <a:lstStyle/>
+          <a:p>
+            <a:pPr algn="l">
+              <a:lnSpc>
+                <a:spcPct val="112000"/>
+              </a:lnSpc>
+              <a:spcBef>
+                <a:spcPts val="0"/>
+              </a:spcBef>
+              <a:spcAft>
+                <a:spcPts val="0"/>
+              </a:spcAft>
+            </a:pPr>
+            <a:r>
+              <a:rPr sz="1050" b="1" i="0" lang="en-AU" spc="0">
+                <a:solidFill>
+                  <a:srgbClr val="EA493F"/>
+                </a:solidFill>
+                <a:latin typeface="Inter"/>
+              </a:rPr>
+              <a:t>—  </a:t>
+            </a:r>
+            <a:r>
+              <a:rPr sz="1050" b="0" i="0" lang="en-AU" spc="0">
+                <a:solidFill>
+                  <a:srgbClr val="323232"/>
+                </a:solidFill>
+                <a:latin typeface="Inter"/>
+              </a:rPr>
+              <a:t>App health check &amp; start-of-day triage</a:t>
+            </a:r>
+          </a:p>
+        </p:txBody>
+      </p:sp>
+      <p:sp>
+        <p:nvSpPr>
+          <p:cNvPr id="61" name="TextBox 60"/>
+          <p:cNvSpPr txBox="1"/>
+          <p:nvPr/>
+        </p:nvSpPr>
+        <p:spPr>
+          <a:xfrm>
+            <a:off x="5943600" y="4709160"/>
+            <a:ext cx="3657600" cy="329184"/>
+          </a:xfrm>
+          <a:prstGeom prst="rect">
+            <a:avLst/>
+          </a:prstGeom>
+          <a:noFill/>
+        </p:spPr>
+        <p:txBody>
+          <a:bodyPr wrap="square" anchor="t" lIns="0" rIns="0" tIns="0" bIns="0"/>
+          <a:lstStyle/>
+          <a:p>
+            <a:pPr algn="l">
+              <a:lnSpc>
+                <a:spcPct val="112000"/>
+              </a:lnSpc>
+              <a:spcBef>
+                <a:spcPts val="0"/>
+              </a:spcBef>
+              <a:spcAft>
+                <a:spcPts val="0"/>
+              </a:spcAft>
+            </a:pPr>
+            <a:r>
+              <a:rPr sz="1050" b="1" i="0" lang="en-AU" spc="0">
+                <a:solidFill>
+                  <a:srgbClr val="EA493F"/>
+                </a:solidFill>
+                <a:latin typeface="Inter"/>
+              </a:rPr>
+              <a:t>—  </a:t>
+            </a:r>
+            <a:r>
+              <a:rPr sz="1050" b="0" i="0" lang="en-AU" spc="0">
+                <a:solidFill>
+                  <a:srgbClr val="323232"/>
+                </a:solidFill>
+                <a:latin typeface="Inter"/>
+              </a:rPr>
+              <a:t>Day-to-day incident management &amp; support</a:t>
+            </a:r>
+          </a:p>
+        </p:txBody>
+      </p:sp>
+      <p:sp>
+        <p:nvSpPr>
+          <p:cNvPr id="62" name="TextBox 61"/>
+          <p:cNvSpPr txBox="1"/>
+          <p:nvPr/>
+        </p:nvSpPr>
+        <p:spPr>
+          <a:xfrm>
+            <a:off x="5943600" y="5038344"/>
+            <a:ext cx="3657600" cy="329184"/>
+          </a:xfrm>
+          <a:prstGeom prst="rect">
+            <a:avLst/>
+          </a:prstGeom>
+          <a:noFill/>
+        </p:spPr>
+        <p:txBody>
+          <a:bodyPr wrap="square" anchor="t" lIns="0" rIns="0" tIns="0" bIns="0"/>
+          <a:lstStyle/>
+          <a:p>
+            <a:pPr algn="l">
+              <a:lnSpc>
+                <a:spcPct val="112000"/>
+              </a:lnSpc>
+              <a:spcBef>
+                <a:spcPts val="0"/>
+              </a:spcBef>
+              <a:spcAft>
+                <a:spcPts val="0"/>
+              </a:spcAft>
+            </a:pPr>
+            <a:r>
+              <a:rPr sz="1050" b="1" i="0" lang="en-AU" spc="0">
+                <a:solidFill>
+                  <a:srgbClr val="EA493F"/>
+                </a:solidFill>
+                <a:latin typeface="Inter"/>
+              </a:rPr>
+              <a:t>—  </a:t>
+            </a:r>
+            <a:r>
+              <a:rPr sz="1050" b="0" i="0" lang="en-AU" spc="0">
+                <a:solidFill>
+                  <a:srgbClr val="323232"/>
+                </a:solidFill>
+                <a:latin typeface="Inter"/>
+              </a:rPr>
+              <a:t>Routine incidents &amp; service requests</a:t>
+            </a:r>
+          </a:p>
+        </p:txBody>
+      </p:sp>
+      <p:sp>
+        <p:nvSpPr>
+          <p:cNvPr id="63" name="TextBox 62"/>
+          <p:cNvSpPr txBox="1"/>
+          <p:nvPr/>
+        </p:nvSpPr>
+        <p:spPr>
+          <a:xfrm>
+            <a:off x="5943600" y="5367528"/>
+            <a:ext cx="3657600" cy="329184"/>
+          </a:xfrm>
+          <a:prstGeom prst="rect">
+            <a:avLst/>
+          </a:prstGeom>
+          <a:noFill/>
+        </p:spPr>
+        <p:txBody>
+          <a:bodyPr wrap="square" anchor="t" lIns="0" rIns="0" tIns="0" bIns="0"/>
+          <a:lstStyle/>
+          <a:p>
+            <a:pPr algn="l">
+              <a:lnSpc>
+                <a:spcPct val="112000"/>
+              </a:lnSpc>
+              <a:spcBef>
+                <a:spcPts val="0"/>
+              </a:spcBef>
+              <a:spcAft>
+                <a:spcPts val="0"/>
+              </a:spcAft>
+            </a:pPr>
+            <a:r>
+              <a:rPr sz="1050" b="1" i="0" lang="en-AU" spc="0">
+                <a:solidFill>
+                  <a:srgbClr val="EA493F"/>
+                </a:solidFill>
+                <a:latin typeface="Inter"/>
+              </a:rPr>
+              <a:t>—  </a:t>
+            </a:r>
+            <a:r>
+              <a:rPr sz="1050" b="0" i="0" lang="en-AU" spc="0">
+                <a:solidFill>
+                  <a:srgbClr val="323232"/>
+                </a:solidFill>
+                <a:latin typeface="Inter"/>
+              </a:rPr>
+              <a:t>Monitoring &amp; backlog resolution per SLAs</a:t>
+            </a:r>
+          </a:p>
+        </p:txBody>
+      </p:sp>
+      <p:sp>
+        <p:nvSpPr>
+          <p:cNvPr id="64" name="Rectangle 63"/>
           <p:cNvSpPr/>
           <p:nvPr/>
         </p:nvSpPr>
         <p:spPr>
           <a:xfrm>
-            <a:off x="5805957" y="3794760"/>
-            <a:ext cx="5218023" cy="457200"/>
+            <a:off x="877824" y="5943600"/>
+            <a:ext cx="10436047" cy="420624"/>
           </a:xfrm>
           <a:prstGeom prst="rect">
             <a:avLst/>
@@ -5147,25 +7982,25 @@
       </p:sp>
       <p:sp>
         <p:nvSpPr>
-          <p:cNvPr id="11" name="TextBox 10"/>
-          <p:cNvSpPr txBox="1"/>
-          <p:nvPr/>
-        </p:nvSpPr>
-        <p:spPr>
-          <a:xfrm>
-            <a:off x="3121075" y="4370832"/>
-            <a:ext cx="731520" cy="274320"/>
-          </a:xfrm>
-          <a:prstGeom prst="rect">
-            <a:avLst/>
-          </a:prstGeom>
-          <a:noFill/>
-        </p:spPr>
-        <p:txBody>
-          <a:bodyPr wrap="square" anchor="t" lIns="0" rIns="0" tIns="0" bIns="0"/>
-          <a:lstStyle/>
-          <a:p>
-            <a:pPr algn="ctr">
+          <p:cNvPr id="65" name="TextBox 64"/>
+          <p:cNvSpPr txBox="1"/>
+          <p:nvPr/>
+        </p:nvSpPr>
+        <p:spPr>
+          <a:xfrm>
+            <a:off x="1106424" y="6007608"/>
+            <a:ext cx="9978847" cy="310896"/>
+          </a:xfrm>
+          <a:prstGeom prst="rect">
+            <a:avLst/>
+          </a:prstGeom>
+          <a:noFill/>
+        </p:spPr>
+        <p:txBody>
+          <a:bodyPr wrap="square" anchor="t" lIns="0" rIns="0" tIns="0" bIns="0"/>
+          <a:lstStyle/>
+          <a:p>
+            <a:pPr algn="l">
               <a:lnSpc>
                 <a:spcPct val="100000"/>
               </a:lnSpc>
@@ -5177,552 +8012,22 @@
               </a:spcAft>
             </a:pPr>
             <a:r>
-              <a:rPr sz="950" b="1" i="0" lang="en-AU" spc="38">
-                <a:solidFill>
-                  <a:srgbClr val="AEAEAE"/>
-                </a:solidFill>
-                <a:latin typeface="Inter"/>
-              </a:rPr>
-              <a:t>8:30</a:t>
-            </a:r>
-          </a:p>
-        </p:txBody>
-      </p:sp>
-      <p:sp>
-        <p:nvSpPr>
-          <p:cNvPr id="12" name="TextBox 11"/>
-          <p:cNvSpPr txBox="1"/>
-          <p:nvPr/>
-        </p:nvSpPr>
-        <p:spPr>
-          <a:xfrm>
-            <a:off x="5440197" y="4370832"/>
-            <a:ext cx="731520" cy="274320"/>
-          </a:xfrm>
-          <a:prstGeom prst="rect">
-            <a:avLst/>
-          </a:prstGeom>
-          <a:noFill/>
-        </p:spPr>
-        <p:txBody>
-          <a:bodyPr wrap="square" anchor="t" lIns="0" rIns="0" tIns="0" bIns="0"/>
-          <a:lstStyle/>
-          <a:p>
-            <a:pPr algn="ctr">
-              <a:lnSpc>
-                <a:spcPct val="100000"/>
-              </a:lnSpc>
-              <a:spcBef>
-                <a:spcPts val="0"/>
-              </a:spcBef>
-              <a:spcAft>
-                <a:spcPts val="0"/>
-              </a:spcAft>
-            </a:pPr>
-            <a:r>
-              <a:rPr sz="950" b="1" i="0" lang="en-AU" spc="38">
-                <a:solidFill>
-                  <a:srgbClr val="AEAEAE"/>
-                </a:solidFill>
-                <a:latin typeface="Inter"/>
-              </a:rPr>
-              <a:t>12:30</a:t>
-            </a:r>
-          </a:p>
-        </p:txBody>
-      </p:sp>
-      <p:sp>
-        <p:nvSpPr>
-          <p:cNvPr id="13" name="TextBox 12"/>
-          <p:cNvSpPr txBox="1"/>
-          <p:nvPr/>
-        </p:nvSpPr>
-        <p:spPr>
-          <a:xfrm>
-            <a:off x="8339099" y="4370832"/>
-            <a:ext cx="731520" cy="274320"/>
-          </a:xfrm>
-          <a:prstGeom prst="rect">
-            <a:avLst/>
-          </a:prstGeom>
-          <a:noFill/>
-        </p:spPr>
-        <p:txBody>
-          <a:bodyPr wrap="square" anchor="t" lIns="0" rIns="0" tIns="0" bIns="0"/>
-          <a:lstStyle/>
-          <a:p>
-            <a:pPr algn="ctr">
-              <a:lnSpc>
-                <a:spcPct val="100000"/>
-              </a:lnSpc>
-              <a:spcBef>
-                <a:spcPts val="0"/>
-              </a:spcBef>
-              <a:spcAft>
-                <a:spcPts val="0"/>
-              </a:spcAft>
-            </a:pPr>
-            <a:r>
-              <a:rPr sz="950" b="1" i="0" lang="en-AU" spc="38">
-                <a:solidFill>
-                  <a:srgbClr val="AEAEAE"/>
-                </a:solidFill>
-                <a:latin typeface="Inter"/>
-              </a:rPr>
-              <a:t>17:30</a:t>
-            </a:r>
-          </a:p>
-        </p:txBody>
-      </p:sp>
-      <p:sp>
-        <p:nvSpPr>
-          <p:cNvPr id="14" name="TextBox 13"/>
-          <p:cNvSpPr txBox="1"/>
-          <p:nvPr/>
-        </p:nvSpPr>
-        <p:spPr>
-          <a:xfrm>
-            <a:off x="10658221" y="4370832"/>
-            <a:ext cx="731520" cy="274320"/>
-          </a:xfrm>
-          <a:prstGeom prst="rect">
-            <a:avLst/>
-          </a:prstGeom>
-          <a:noFill/>
-        </p:spPr>
-        <p:txBody>
-          <a:bodyPr wrap="square" anchor="t" lIns="0" rIns="0" tIns="0" bIns="0"/>
-          <a:lstStyle/>
-          <a:p>
-            <a:pPr algn="ctr">
-              <a:lnSpc>
-                <a:spcPct val="100000"/>
-              </a:lnSpc>
-              <a:spcBef>
-                <a:spcPts val="0"/>
-              </a:spcBef>
-              <a:spcAft>
-                <a:spcPts val="0"/>
-              </a:spcAft>
-            </a:pPr>
-            <a:r>
-              <a:rPr sz="950" b="1" i="0" lang="en-AU" spc="38">
-                <a:solidFill>
-                  <a:srgbClr val="AEAEAE"/>
-                </a:solidFill>
-                <a:latin typeface="Inter"/>
-              </a:rPr>
-              <a:t>21:30</a:t>
-            </a:r>
-          </a:p>
-        </p:txBody>
-      </p:sp>
-      <p:sp>
-        <p:nvSpPr>
-          <p:cNvPr id="15" name="Rectangle 14"/>
-          <p:cNvSpPr/>
-          <p:nvPr/>
-        </p:nvSpPr>
-        <p:spPr>
-          <a:xfrm>
-            <a:off x="877824" y="4892040"/>
-            <a:ext cx="10436047" cy="420624"/>
-          </a:xfrm>
-          <a:prstGeom prst="rect">
-            <a:avLst/>
-          </a:prstGeom>
-          <a:solidFill>
-            <a:srgbClr val="141414"/>
-          </a:solidFill>
-          <a:ln w="12700">
-            <a:solidFill>
-              <a:srgbClr val="3A3A3A"/>
-            </a:solidFill>
-          </a:ln>
-          <a:effectLst/>
-        </p:spPr>
-        <p:style>
-          <a:lnRef idx="1">
-            <a:schemeClr val="accent1"/>
-          </a:lnRef>
-          <a:fillRef idx="3">
-            <a:schemeClr val="accent1"/>
-          </a:fillRef>
-          <a:effectRef idx="2">
-            <a:schemeClr val="accent1"/>
-          </a:effectRef>
-          <a:fontRef idx="minor">
-            <a:schemeClr val="lt1"/>
-          </a:fontRef>
-        </p:style>
-        <p:txBody>
-          <a:bodyPr rtlCol="0" anchor="ctr"/>
-          <a:lstStyle/>
-          <a:p>
-            <a:pPr algn="ctr"/>
-          </a:p>
-        </p:txBody>
-      </p:sp>
-      <p:sp>
-        <p:nvSpPr>
-          <p:cNvPr id="16" name="TextBox 15"/>
-          <p:cNvSpPr txBox="1"/>
-          <p:nvPr/>
-        </p:nvSpPr>
-        <p:spPr>
-          <a:xfrm>
-            <a:off x="1106424" y="4956048"/>
-            <a:ext cx="9978847" cy="310896"/>
-          </a:xfrm>
-          <a:prstGeom prst="rect">
-            <a:avLst/>
-          </a:prstGeom>
-          <a:noFill/>
-        </p:spPr>
-        <p:txBody>
-          <a:bodyPr wrap="square" anchor="t" lIns="0" rIns="0" tIns="0" bIns="0"/>
-          <a:lstStyle/>
-          <a:p>
-            <a:pPr algn="l">
-              <a:lnSpc>
-                <a:spcPct val="100000"/>
-              </a:lnSpc>
-              <a:spcBef>
-                <a:spcPts val="0"/>
-              </a:spcBef>
-              <a:spcAft>
-                <a:spcPts val="0"/>
-              </a:spcAft>
-            </a:pPr>
-            <a:r>
               <a:rPr sz="1100" b="1" i="0" lang="en-AU" spc="131" cap="all">
                 <a:solidFill>
-                  <a:srgbClr val="EA493F"/>
+                  <a:srgbClr val="FFFFFF"/>
                 </a:solidFill>
                 <a:latin typeface="Inter"/>
               </a:rPr>
               <a:t>24×7 P1/P2 ON-CALL   </a:t>
             </a:r>
             <a:r>
-              <a:rPr sz="1100" b="1" i="0" lang="en-AU" spc="0">
-                <a:solidFill>
-                  <a:srgbClr val="D6D6D6"/>
+              <a:rPr sz="1100" b="0" i="0" lang="en-AU" spc="0">
+                <a:solidFill>
+                  <a:srgbClr val="FFFFFF"/>
                 </a:solidFill>
                 <a:latin typeface="Inter"/>
               </a:rPr>
               <a:t>always-on safety net for P1 &amp; P2 incidents, in line with monthly hours.</a:t>
-            </a:r>
-          </a:p>
-        </p:txBody>
-      </p:sp>
-      <p:sp>
-        <p:nvSpPr>
-          <p:cNvPr id="17" name="TextBox 16"/>
-          <p:cNvSpPr txBox="1"/>
-          <p:nvPr/>
-        </p:nvSpPr>
-        <p:spPr>
-          <a:xfrm>
-            <a:off x="877824" y="5532120"/>
-            <a:ext cx="4937760" cy="329184"/>
-          </a:xfrm>
-          <a:prstGeom prst="rect">
-            <a:avLst/>
-          </a:prstGeom>
-          <a:noFill/>
-        </p:spPr>
-        <p:txBody>
-          <a:bodyPr wrap="square" anchor="t" lIns="0" rIns="0" tIns="0" bIns="0"/>
-          <a:lstStyle/>
-          <a:p>
-            <a:pPr algn="l">
-              <a:lnSpc>
-                <a:spcPct val="112000"/>
-              </a:lnSpc>
-              <a:spcBef>
-                <a:spcPts val="0"/>
-              </a:spcBef>
-              <a:spcAft>
-                <a:spcPts val="0"/>
-              </a:spcAft>
-            </a:pPr>
-            <a:r>
-              <a:rPr sz="1050" b="1" i="0" lang="en-AU" spc="0">
-                <a:solidFill>
-                  <a:srgbClr val="EA493F"/>
-                </a:solidFill>
-                <a:latin typeface="Inter"/>
-              </a:rPr>
-              <a:t>—  </a:t>
-            </a:r>
-            <a:r>
-              <a:rPr sz="1050" b="0" i="0" lang="en-AU" spc="0">
-                <a:solidFill>
-                  <a:srgbClr val="D6D6D6"/>
-                </a:solidFill>
-                <a:latin typeface="Inter"/>
-              </a:rPr>
-              <a:t>Governance &amp; stakeholder engagement</a:t>
-            </a:r>
-          </a:p>
-        </p:txBody>
-      </p:sp>
-      <p:sp>
-        <p:nvSpPr>
-          <p:cNvPr id="18" name="TextBox 17"/>
-          <p:cNvSpPr txBox="1"/>
-          <p:nvPr/>
-        </p:nvSpPr>
-        <p:spPr>
-          <a:xfrm>
-            <a:off x="877824" y="5861304"/>
-            <a:ext cx="4937760" cy="329184"/>
-          </a:xfrm>
-          <a:prstGeom prst="rect">
-            <a:avLst/>
-          </a:prstGeom>
-          <a:noFill/>
-        </p:spPr>
-        <p:txBody>
-          <a:bodyPr wrap="square" anchor="t" lIns="0" rIns="0" tIns="0" bIns="0"/>
-          <a:lstStyle/>
-          <a:p>
-            <a:pPr algn="l">
-              <a:lnSpc>
-                <a:spcPct val="112000"/>
-              </a:lnSpc>
-              <a:spcBef>
-                <a:spcPts val="0"/>
-              </a:spcBef>
-              <a:spcAft>
-                <a:spcPts val="0"/>
-              </a:spcAft>
-            </a:pPr>
-            <a:r>
-              <a:rPr sz="1050" b="1" i="0" lang="en-AU" spc="0">
-                <a:solidFill>
-                  <a:srgbClr val="EA493F"/>
-                </a:solidFill>
-                <a:latin typeface="Inter"/>
-              </a:rPr>
-              <a:t>—  </a:t>
-            </a:r>
-            <a:r>
-              <a:rPr sz="1050" b="0" i="0" lang="en-AU" spc="0">
-                <a:solidFill>
-                  <a:srgbClr val="D6D6D6"/>
-                </a:solidFill>
-                <a:latin typeface="Inter"/>
-              </a:rPr>
-              <a:t>Resolution of P1 / P2 incidents</a:t>
-            </a:r>
-          </a:p>
-        </p:txBody>
-      </p:sp>
-      <p:sp>
-        <p:nvSpPr>
-          <p:cNvPr id="19" name="TextBox 18"/>
-          <p:cNvSpPr txBox="1"/>
-          <p:nvPr/>
-        </p:nvSpPr>
-        <p:spPr>
-          <a:xfrm>
-            <a:off x="877824" y="6190488"/>
-            <a:ext cx="4937760" cy="329184"/>
-          </a:xfrm>
-          <a:prstGeom prst="rect">
-            <a:avLst/>
-          </a:prstGeom>
-          <a:noFill/>
-        </p:spPr>
-        <p:txBody>
-          <a:bodyPr wrap="square" anchor="t" lIns="0" rIns="0" tIns="0" bIns="0"/>
-          <a:lstStyle/>
-          <a:p>
-            <a:pPr algn="l">
-              <a:lnSpc>
-                <a:spcPct val="112000"/>
-              </a:lnSpc>
-              <a:spcBef>
-                <a:spcPts val="0"/>
-              </a:spcBef>
-              <a:spcAft>
-                <a:spcPts val="0"/>
-              </a:spcAft>
-            </a:pPr>
-            <a:r>
-              <a:rPr sz="1050" b="1" i="0" lang="en-AU" spc="0">
-                <a:solidFill>
-                  <a:srgbClr val="EA493F"/>
-                </a:solidFill>
-                <a:latin typeface="Inter"/>
-              </a:rPr>
-              <a:t>—  </a:t>
-            </a:r>
-            <a:r>
-              <a:rPr sz="1050" b="0" i="0" lang="en-AU" spc="0">
-                <a:solidFill>
-                  <a:srgbClr val="D6D6D6"/>
-                </a:solidFill>
-                <a:latin typeface="Inter"/>
-              </a:rPr>
-              <a:t>App health check &amp; start-of-day triage</a:t>
-            </a:r>
-          </a:p>
-        </p:txBody>
-      </p:sp>
-      <p:sp>
-        <p:nvSpPr>
-          <p:cNvPr id="20" name="TextBox 19"/>
-          <p:cNvSpPr txBox="1"/>
-          <p:nvPr/>
-        </p:nvSpPr>
-        <p:spPr>
-          <a:xfrm>
-            <a:off x="6400800" y="5532120"/>
-            <a:ext cx="4937760" cy="329184"/>
-          </a:xfrm>
-          <a:prstGeom prst="rect">
-            <a:avLst/>
-          </a:prstGeom>
-          <a:noFill/>
-        </p:spPr>
-        <p:txBody>
-          <a:bodyPr wrap="square" anchor="t" lIns="0" rIns="0" tIns="0" bIns="0"/>
-          <a:lstStyle/>
-          <a:p>
-            <a:pPr algn="l">
-              <a:lnSpc>
-                <a:spcPct val="112000"/>
-              </a:lnSpc>
-              <a:spcBef>
-                <a:spcPts val="0"/>
-              </a:spcBef>
-              <a:spcAft>
-                <a:spcPts val="0"/>
-              </a:spcAft>
-            </a:pPr>
-            <a:r>
-              <a:rPr sz="1050" b="1" i="0" lang="en-AU" spc="0">
-                <a:solidFill>
-                  <a:srgbClr val="EA493F"/>
-                </a:solidFill>
-                <a:latin typeface="Inter"/>
-              </a:rPr>
-              <a:t>—  </a:t>
-            </a:r>
-            <a:r>
-              <a:rPr sz="1050" b="0" i="0" lang="en-AU" spc="0">
-                <a:solidFill>
-                  <a:srgbClr val="D6D6D6"/>
-                </a:solidFill>
-                <a:latin typeface="Inter"/>
-              </a:rPr>
-              <a:t>Day-to-day incident management &amp; support</a:t>
-            </a:r>
-          </a:p>
-        </p:txBody>
-      </p:sp>
-      <p:sp>
-        <p:nvSpPr>
-          <p:cNvPr id="21" name="TextBox 20"/>
-          <p:cNvSpPr txBox="1"/>
-          <p:nvPr/>
-        </p:nvSpPr>
-        <p:spPr>
-          <a:xfrm>
-            <a:off x="6400800" y="5861304"/>
-            <a:ext cx="4937760" cy="329184"/>
-          </a:xfrm>
-          <a:prstGeom prst="rect">
-            <a:avLst/>
-          </a:prstGeom>
-          <a:noFill/>
-        </p:spPr>
-        <p:txBody>
-          <a:bodyPr wrap="square" anchor="t" lIns="0" rIns="0" tIns="0" bIns="0"/>
-          <a:lstStyle/>
-          <a:p>
-            <a:pPr algn="l">
-              <a:lnSpc>
-                <a:spcPct val="112000"/>
-              </a:lnSpc>
-              <a:spcBef>
-                <a:spcPts val="0"/>
-              </a:spcBef>
-              <a:spcAft>
-                <a:spcPts val="0"/>
-              </a:spcAft>
-            </a:pPr>
-            <a:r>
-              <a:rPr sz="1050" b="1" i="0" lang="en-AU" spc="0">
-                <a:solidFill>
-                  <a:srgbClr val="EA493F"/>
-                </a:solidFill>
-                <a:latin typeface="Inter"/>
-              </a:rPr>
-              <a:t>—  </a:t>
-            </a:r>
-            <a:r>
-              <a:rPr sz="1050" b="0" i="0" lang="en-AU" spc="0">
-                <a:solidFill>
-                  <a:srgbClr val="D6D6D6"/>
-                </a:solidFill>
-                <a:latin typeface="Inter"/>
-              </a:rPr>
-              <a:t>Routine incidents &amp; service requests</a:t>
-            </a:r>
-          </a:p>
-        </p:txBody>
-      </p:sp>
-      <p:sp>
-        <p:nvSpPr>
-          <p:cNvPr id="22" name="TextBox 21"/>
-          <p:cNvSpPr txBox="1"/>
-          <p:nvPr/>
-        </p:nvSpPr>
-        <p:spPr>
-          <a:xfrm>
-            <a:off x="6400800" y="6190488"/>
-            <a:ext cx="4937760" cy="329184"/>
-          </a:xfrm>
-          <a:prstGeom prst="rect">
-            <a:avLst/>
-          </a:prstGeom>
-          <a:noFill/>
-        </p:spPr>
-        <p:txBody>
-          <a:bodyPr wrap="square" anchor="t" lIns="0" rIns="0" tIns="0" bIns="0"/>
-          <a:lstStyle/>
-          <a:p>
-            <a:pPr algn="l">
-              <a:lnSpc>
-                <a:spcPct val="112000"/>
-              </a:lnSpc>
-              <a:spcBef>
-                <a:spcPts val="0"/>
-              </a:spcBef>
-              <a:spcAft>
-                <a:spcPts val="0"/>
-              </a:spcAft>
-            </a:pPr>
-            <a:r>
-              <a:rPr sz="1050" b="1" i="0" lang="en-AU" spc="0">
-                <a:solidFill>
-                  <a:srgbClr val="EA493F"/>
-                </a:solidFill>
-                <a:latin typeface="Inter"/>
-              </a:rPr>
-              <a:t>—  </a:t>
-            </a:r>
-            <a:r>
-              <a:rPr sz="1050" b="0" i="0" lang="en-AU" spc="0">
-                <a:solidFill>
-                  <a:srgbClr val="D6D6D6"/>
-                </a:solidFill>
-                <a:latin typeface="Inter"/>
-              </a:rPr>
-              <a:t>Monitoring &amp; backlog resolution per SLAs</a:t>
             </a:r>
           </a:p>
         </p:txBody>
@@ -5881,7 +8186,7 @@
         <p:spPr>
           <a:xfrm>
             <a:off x="877824" y="1737360"/>
-            <a:ext cx="10058400" cy="640080"/>
+            <a:ext cx="10241280" cy="548640"/>
           </a:xfrm>
           <a:prstGeom prst="rect">
             <a:avLst/>
@@ -5911,25 +8216,456 @@
                 <a:latin typeface="Inter"/>
               </a:rPr>
               <a:t>Strong governance. Aligned teams. Confident execution.</a:t>
+            </a:r>
+          </a:p>
+        </p:txBody>
+      </p:sp>
+      <p:sp>
+        <p:nvSpPr>
+          <p:cNvPr id="6" name="TextBox 5"/>
+          <p:cNvSpPr txBox="1"/>
+          <p:nvPr/>
+        </p:nvSpPr>
+        <p:spPr>
+          <a:xfrm>
+            <a:off x="877824" y="2194560"/>
+            <a:ext cx="1828800" cy="274320"/>
+          </a:xfrm>
+          <a:prstGeom prst="rect">
+            <a:avLst/>
+          </a:prstGeom>
+          <a:noFill/>
+        </p:spPr>
+        <p:txBody>
+          <a:bodyPr wrap="square" anchor="t" lIns="0" rIns="0" tIns="0" bIns="0"/>
+          <a:lstStyle/>
+          <a:p>
+            <a:pPr algn="l">
+              <a:lnSpc>
+                <a:spcPct val="100000"/>
+              </a:lnSpc>
+              <a:spcBef>
+                <a:spcPts val="0"/>
+              </a:spcBef>
+              <a:spcAft>
+                <a:spcPts val="0"/>
+              </a:spcAft>
+            </a:pPr>
+            <a:r>
+              <a:rPr sz="900" b="1" i="0" lang="en-AU" spc="108" cap="all">
+                <a:solidFill>
+                  <a:srgbClr val="AEAEAE"/>
+                </a:solidFill>
+                <a:latin typeface="Inter"/>
+              </a:rPr>
+              <a:t>CUSTOMER</a:t>
+            </a:r>
+          </a:p>
+        </p:txBody>
+      </p:sp>
+      <p:sp>
+        <p:nvSpPr>
+          <p:cNvPr id="7" name="TextBox 6"/>
+          <p:cNvSpPr txBox="1"/>
+          <p:nvPr/>
+        </p:nvSpPr>
+        <p:spPr>
+          <a:xfrm>
+            <a:off x="2788920" y="2194560"/>
+            <a:ext cx="1828800" cy="274320"/>
+          </a:xfrm>
+          <a:prstGeom prst="rect">
+            <a:avLst/>
+          </a:prstGeom>
+          <a:noFill/>
+        </p:spPr>
+        <p:txBody>
+          <a:bodyPr wrap="square" anchor="t" lIns="0" rIns="0" tIns="0" bIns="0"/>
+          <a:lstStyle/>
+          <a:p>
+            <a:pPr algn="l">
+              <a:lnSpc>
+                <a:spcPct val="100000"/>
+              </a:lnSpc>
+              <a:spcBef>
+                <a:spcPts val="0"/>
+              </a:spcBef>
+              <a:spcAft>
+                <a:spcPts val="0"/>
+              </a:spcAft>
+            </a:pPr>
+            <a:r>
+              <a:rPr sz="900" b="1" i="0" lang="en-AU" spc="108" cap="all">
+                <a:solidFill>
+                  <a:srgbClr val="AEAEAE"/>
+                </a:solidFill>
+                <a:latin typeface="Inter"/>
+              </a:rPr>
+              <a:t>ACTIVITIES</a:t>
+            </a:r>
+          </a:p>
+        </p:txBody>
+      </p:sp>
+      <p:sp>
+        <p:nvSpPr>
+          <p:cNvPr id="8" name="TextBox 7"/>
+          <p:cNvSpPr txBox="1"/>
+          <p:nvPr/>
+        </p:nvSpPr>
+        <p:spPr>
+          <a:xfrm>
+            <a:off x="7589520" y="2194560"/>
+            <a:ext cx="1828800" cy="274320"/>
+          </a:xfrm>
+          <a:prstGeom prst="rect">
+            <a:avLst/>
+          </a:prstGeom>
+          <a:noFill/>
+        </p:spPr>
+        <p:txBody>
+          <a:bodyPr wrap="square" anchor="t" lIns="0" rIns="0" tIns="0" bIns="0"/>
+          <a:lstStyle/>
+          <a:p>
+            <a:pPr algn="l">
+              <a:lnSpc>
+                <a:spcPct val="100000"/>
+              </a:lnSpc>
+              <a:spcBef>
+                <a:spcPts val="0"/>
+              </a:spcBef>
+              <a:spcAft>
+                <a:spcPts val="0"/>
+              </a:spcAft>
+            </a:pPr>
+            <a:r>
+              <a:rPr sz="900" b="1" i="0" lang="en-AU" spc="108" cap="all">
+                <a:solidFill>
+                  <a:srgbClr val="AEAEAE"/>
+                </a:solidFill>
+                <a:latin typeface="Inter"/>
+              </a:rPr>
+              <a:t>MIVADA</a:t>
+            </a:r>
+          </a:p>
+        </p:txBody>
+      </p:sp>
+      <p:sp>
+        <p:nvSpPr>
+          <p:cNvPr id="9" name="TextBox 8"/>
+          <p:cNvSpPr txBox="1"/>
+          <p:nvPr/>
+        </p:nvSpPr>
+        <p:spPr>
+          <a:xfrm>
+            <a:off x="9509760" y="2194560"/>
+            <a:ext cx="1828800" cy="274320"/>
+          </a:xfrm>
+          <a:prstGeom prst="rect">
+            <a:avLst/>
+          </a:prstGeom>
+          <a:noFill/>
+        </p:spPr>
+        <p:txBody>
+          <a:bodyPr wrap="square" anchor="t" lIns="0" rIns="0" tIns="0" bIns="0"/>
+          <a:lstStyle/>
+          <a:p>
+            <a:pPr algn="l">
+              <a:lnSpc>
+                <a:spcPct val="100000"/>
+              </a:lnSpc>
+              <a:spcBef>
+                <a:spcPts val="0"/>
+              </a:spcBef>
+              <a:spcAft>
+                <a:spcPts val="0"/>
+              </a:spcAft>
+            </a:pPr>
+            <a:r>
+              <a:rPr sz="900" b="1" i="0" lang="en-AU" spc="108" cap="all">
+                <a:solidFill>
+                  <a:srgbClr val="AEAEAE"/>
+                </a:solidFill>
+                <a:latin typeface="Inter"/>
+              </a:rPr>
+              <a:t>CADENCE</a:t>
+            </a:r>
+          </a:p>
+        </p:txBody>
+      </p:sp>
+      <p:sp>
+        <p:nvSpPr>
+          <p:cNvPr id="10" name="Rectangle 9"/>
+          <p:cNvSpPr/>
+          <p:nvPr/>
+        </p:nvSpPr>
+        <p:spPr>
+          <a:xfrm>
+            <a:off x="5410047" y="2651760"/>
+            <a:ext cx="1371600" cy="841247"/>
+          </a:xfrm>
+          <a:prstGeom prst="rect">
+            <a:avLst/>
+          </a:prstGeom>
+          <a:solidFill>
+            <a:srgbClr val="EA493F"/>
+          </a:solidFill>
+          <a:ln>
+            <a:noFill/>
+          </a:ln>
+          <a:effectLst/>
+        </p:spPr>
+        <p:style>
+          <a:lnRef idx="1">
+            <a:schemeClr val="accent1"/>
+          </a:lnRef>
+          <a:fillRef idx="3">
+            <a:schemeClr val="accent1"/>
+          </a:fillRef>
+          <a:effectRef idx="2">
+            <a:schemeClr val="accent1"/>
+          </a:effectRef>
+          <a:fontRef idx="minor">
+            <a:schemeClr val="lt1"/>
+          </a:fontRef>
+        </p:style>
+        <p:txBody>
+          <a:bodyPr rtlCol="0" anchor="ctr"/>
+          <a:lstStyle/>
+          <a:p>
+            <a:pPr algn="ctr"/>
+          </a:p>
+        </p:txBody>
+      </p:sp>
+      <p:sp>
+        <p:nvSpPr>
+          <p:cNvPr id="11" name="TextBox 10"/>
+          <p:cNvSpPr txBox="1"/>
+          <p:nvPr/>
+        </p:nvSpPr>
+        <p:spPr>
+          <a:xfrm>
+            <a:off x="5410047" y="2651760"/>
+            <a:ext cx="1371600" cy="841247"/>
+          </a:xfrm>
+          <a:prstGeom prst="rect">
+            <a:avLst/>
+          </a:prstGeom>
+          <a:noFill/>
+        </p:spPr>
+        <p:txBody>
+          <a:bodyPr wrap="square" anchor="ctr" lIns="0" rIns="0" tIns="0" bIns="0"/>
+          <a:lstStyle/>
+          <a:p>
+            <a:pPr algn="ctr">
+              <a:lnSpc>
+                <a:spcPct val="100000"/>
+              </a:lnSpc>
+              <a:spcBef>
+                <a:spcPts val="0"/>
+              </a:spcBef>
+              <a:spcAft>
+                <a:spcPts val="0"/>
+              </a:spcAft>
+            </a:pPr>
+            <a:r>
+              <a:rPr sz="1200" b="1" i="0" lang="en-AU" spc="96" cap="all">
+                <a:solidFill>
+                  <a:srgbClr val="FFFFFF"/>
+                </a:solidFill>
+                <a:latin typeface="Inter"/>
+              </a:rPr>
+              <a:t>STRATEGIC</a:t>
+            </a:r>
+          </a:p>
+        </p:txBody>
+      </p:sp>
+      <p:sp>
+        <p:nvSpPr>
+          <p:cNvPr id="12" name="TextBox 11"/>
+          <p:cNvSpPr txBox="1"/>
+          <p:nvPr/>
+        </p:nvSpPr>
+        <p:spPr>
+          <a:xfrm>
+            <a:off x="877824" y="2587751"/>
+            <a:ext cx="1828800" cy="987551"/>
+          </a:xfrm>
+          <a:prstGeom prst="rect">
+            <a:avLst/>
+          </a:prstGeom>
+          <a:noFill/>
+        </p:spPr>
+        <p:txBody>
+          <a:bodyPr wrap="square" anchor="t" lIns="0" rIns="0" tIns="0" bIns="0"/>
+          <a:lstStyle/>
+          <a:p>
+            <a:pPr algn="l">
+              <a:lnSpc>
+                <a:spcPct val="116000"/>
+              </a:lnSpc>
+              <a:spcBef>
+                <a:spcPts val="0"/>
+              </a:spcBef>
+              <a:spcAft>
+                <a:spcPts val="0"/>
+              </a:spcAft>
+            </a:pPr>
+            <a:r>
+              <a:rPr sz="950" b="0" i="0" lang="en-AU" spc="0">
+                <a:solidFill>
+                  <a:srgbClr val="323232"/>
+                </a:solidFill>
+                <a:latin typeface="Inter"/>
+              </a:rPr>
+              <a:t>Executive Sponsor · CIO / IT Exec · Head of HR / Payroll</a:t>
+            </a:r>
+          </a:p>
+        </p:txBody>
+      </p:sp>
+      <p:sp>
+        <p:nvSpPr>
+          <p:cNvPr id="13" name="TextBox 12"/>
+          <p:cNvSpPr txBox="1"/>
+          <p:nvPr/>
+        </p:nvSpPr>
+        <p:spPr>
+          <a:xfrm>
+            <a:off x="2788920" y="2587751"/>
+            <a:ext cx="1783080" cy="987551"/>
+          </a:xfrm>
+          <a:prstGeom prst="rect">
+            <a:avLst/>
+          </a:prstGeom>
+          <a:noFill/>
+        </p:spPr>
+        <p:txBody>
+          <a:bodyPr wrap="square" anchor="t" lIns="0" rIns="0" tIns="0" bIns="0"/>
+          <a:lstStyle/>
+          <a:p>
+            <a:pPr algn="l">
+              <a:lnSpc>
+                <a:spcPct val="116000"/>
+              </a:lnSpc>
+              <a:spcBef>
+                <a:spcPts val="0"/>
+              </a:spcBef>
+              <a:spcAft>
+                <a:spcPts val="0"/>
+              </a:spcAft>
+            </a:pPr>
+            <a:r>
+              <a:rPr sz="950" b="0" i="0" lang="en-AU" spc="0">
+                <a:solidFill>
+                  <a:srgbClr val="323232"/>
+                </a:solidFill>
+                <a:latin typeface="Inter"/>
+              </a:rPr>
+              <a:t>Strategic oversight · innovation &amp; thought leadership · roadmap &amp; investment · relationship health</a:t>
+            </a:r>
+          </a:p>
+        </p:txBody>
+      </p:sp>
+      <p:sp>
+        <p:nvSpPr>
+          <p:cNvPr id="14" name="TextBox 13"/>
+          <p:cNvSpPr txBox="1"/>
+          <p:nvPr/>
+        </p:nvSpPr>
+        <p:spPr>
+          <a:xfrm>
+            <a:off x="7589520" y="2587751"/>
+            <a:ext cx="1828800" cy="987551"/>
+          </a:xfrm>
+          <a:prstGeom prst="rect">
+            <a:avLst/>
+          </a:prstGeom>
+          <a:noFill/>
+        </p:spPr>
+        <p:txBody>
+          <a:bodyPr wrap="square" anchor="t" lIns="0" rIns="0" tIns="0" bIns="0"/>
+          <a:lstStyle/>
+          <a:p>
+            <a:pPr algn="l">
+              <a:lnSpc>
+                <a:spcPct val="116000"/>
+              </a:lnSpc>
+              <a:spcBef>
+                <a:spcPts val="0"/>
+              </a:spcBef>
+              <a:spcAft>
+                <a:spcPts val="0"/>
+              </a:spcAft>
+            </a:pPr>
+            <a:r>
+              <a:rPr sz="950" b="1" i="0" lang="en-AU" spc="0">
+                <a:solidFill>
+                  <a:srgbClr val="111111"/>
+                </a:solidFill>
+                <a:latin typeface="Inter"/>
+              </a:rPr>
+              <a:t>CEO · Client Partner</a:t>
+            </a:r>
+          </a:p>
+        </p:txBody>
+      </p:sp>
+      <p:sp>
+        <p:nvSpPr>
+          <p:cNvPr id="15" name="TextBox 14"/>
+          <p:cNvSpPr txBox="1"/>
+          <p:nvPr/>
+        </p:nvSpPr>
+        <p:spPr>
+          <a:xfrm>
+            <a:off x="9509760" y="2688336"/>
+            <a:ext cx="1828800" cy="365760"/>
+          </a:xfrm>
+          <a:prstGeom prst="rect">
+            <a:avLst/>
+          </a:prstGeom>
+          <a:noFill/>
+        </p:spPr>
+        <p:txBody>
+          <a:bodyPr wrap="square" anchor="t" lIns="0" rIns="0" tIns="0" bIns="0"/>
+          <a:lstStyle/>
+          <a:p>
+            <a:pPr algn="l">
+              <a:lnSpc>
+                <a:spcPct val="100000"/>
+              </a:lnSpc>
+              <a:spcBef>
+                <a:spcPts val="0"/>
+              </a:spcBef>
+              <a:spcAft>
+                <a:spcPts val="0"/>
+              </a:spcAft>
+            </a:pPr>
+            <a:r>
+              <a:rPr sz="950" b="1" i="0" lang="en-AU" spc="76" cap="all">
+                <a:solidFill>
+                  <a:srgbClr val="EA493F"/>
+                </a:solidFill>
+                <a:latin typeface="Inter"/>
+              </a:rPr>
+              <a:t>QUARTERLY</a:t>
             </a:r>
           </a:p>
         </p:txBody>
       </p:sp>
       <p:cxnSp>
         <p:nvCxnSpPr>
-          <p:cNvPr id="6" name="Connector 5"/>
+          <p:cNvPr id="16" name="Connector 15"/>
           <p:cNvCxnSpPr/>
           <p:nvPr/>
         </p:nvCxnSpPr>
         <p:spPr>
           <a:xfrm>
-            <a:off x="877824" y="2331720"/>
+            <a:off x="877824" y="2542032"/>
             <a:ext cx="10436047" cy="0"/>
           </a:xfrm>
           <a:prstGeom prst="bentConnector3">
             <a:avLst/>
           </a:prstGeom>
-          <a:ln w="12700">
+          <a:ln w="9525">
             <a:solidFill>
               <a:srgbClr val="E4E4E0"/>
             </a:solidFill>
@@ -5953,14 +8689,101 @@
       </p:cxnSp>
       <p:sp>
         <p:nvSpPr>
-          <p:cNvPr id="7" name="TextBox 6"/>
-          <p:cNvSpPr txBox="1"/>
-          <p:nvPr/>
-        </p:nvSpPr>
-        <p:spPr>
-          <a:xfrm>
-            <a:off x="2697480" y="2404872"/>
-            <a:ext cx="3108960" cy="274320"/>
+          <p:cNvPr id="17" name="Rectangle 16"/>
+          <p:cNvSpPr/>
+          <p:nvPr/>
+        </p:nvSpPr>
+        <p:spPr>
+          <a:xfrm>
+            <a:off x="5044287" y="3730752"/>
+            <a:ext cx="2103120" cy="841247"/>
+          </a:xfrm>
+          <a:prstGeom prst="rect">
+            <a:avLst/>
+          </a:prstGeom>
+          <a:solidFill>
+            <a:srgbClr val="D8392E"/>
+          </a:solidFill>
+          <a:ln>
+            <a:noFill/>
+          </a:ln>
+          <a:effectLst/>
+        </p:spPr>
+        <p:style>
+          <a:lnRef idx="1">
+            <a:schemeClr val="accent1"/>
+          </a:lnRef>
+          <a:fillRef idx="3">
+            <a:schemeClr val="accent1"/>
+          </a:fillRef>
+          <a:effectRef idx="2">
+            <a:schemeClr val="accent1"/>
+          </a:effectRef>
+          <a:fontRef idx="minor">
+            <a:schemeClr val="lt1"/>
+          </a:fontRef>
+        </p:style>
+        <p:txBody>
+          <a:bodyPr rtlCol="0" anchor="ctr"/>
+          <a:lstStyle/>
+          <a:p>
+            <a:pPr algn="ctr"/>
+          </a:p>
+        </p:txBody>
+      </p:sp>
+      <p:sp>
+        <p:nvSpPr>
+          <p:cNvPr id="18" name="TextBox 17"/>
+          <p:cNvSpPr txBox="1"/>
+          <p:nvPr/>
+        </p:nvSpPr>
+        <p:spPr>
+          <a:xfrm>
+            <a:off x="5044287" y="3730752"/>
+            <a:ext cx="2103120" cy="841247"/>
+          </a:xfrm>
+          <a:prstGeom prst="rect">
+            <a:avLst/>
+          </a:prstGeom>
+          <a:noFill/>
+        </p:spPr>
+        <p:txBody>
+          <a:bodyPr wrap="square" anchor="ctr" lIns="0" rIns="0" tIns="0" bIns="0"/>
+          <a:lstStyle/>
+          <a:p>
+            <a:pPr algn="ctr">
+              <a:lnSpc>
+                <a:spcPct val="100000"/>
+              </a:lnSpc>
+              <a:spcBef>
+                <a:spcPts val="0"/>
+              </a:spcBef>
+              <a:spcAft>
+                <a:spcPts val="0"/>
+              </a:spcAft>
+            </a:pPr>
+            <a:r>
+              <a:rPr sz="1200" b="1" i="0" lang="en-AU" spc="96" cap="all">
+                <a:solidFill>
+                  <a:srgbClr val="FFFFFF"/>
+                </a:solidFill>
+                <a:latin typeface="Inter"/>
+              </a:rPr>
+              <a:t>TACTICAL</a:t>
+            </a:r>
+          </a:p>
+        </p:txBody>
+      </p:sp>
+      <p:sp>
+        <p:nvSpPr>
+          <p:cNvPr id="19" name="TextBox 18"/>
+          <p:cNvSpPr txBox="1"/>
+          <p:nvPr/>
+        </p:nvSpPr>
+        <p:spPr>
+          <a:xfrm>
+            <a:off x="877824" y="3666744"/>
+            <a:ext cx="1828800" cy="987551"/>
           </a:xfrm>
           <a:prstGeom prst="rect">
             <a:avLst/>
@@ -5973,6 +8796,135 @@
           <a:p>
             <a:pPr algn="l">
               <a:lnSpc>
+                <a:spcPct val="116000"/>
+              </a:lnSpc>
+              <a:spcBef>
+                <a:spcPts val="0"/>
+              </a:spcBef>
+              <a:spcAft>
+                <a:spcPts val="0"/>
+              </a:spcAft>
+            </a:pPr>
+            <a:r>
+              <a:rPr sz="950" b="0" i="0" lang="en-AU" spc="0">
+                <a:solidFill>
+                  <a:srgbClr val="323232"/>
+                </a:solidFill>
+                <a:latin typeface="Inter"/>
+              </a:rPr>
+              <a:t>Product Owner · IT Service Owner – AMS · Risk &amp; Compliance Lead</a:t>
+            </a:r>
+          </a:p>
+        </p:txBody>
+      </p:sp>
+      <p:sp>
+        <p:nvSpPr>
+          <p:cNvPr id="20" name="TextBox 19"/>
+          <p:cNvSpPr txBox="1"/>
+          <p:nvPr/>
+        </p:nvSpPr>
+        <p:spPr>
+          <a:xfrm>
+            <a:off x="2788920" y="3666744"/>
+            <a:ext cx="1783080" cy="987551"/>
+          </a:xfrm>
+          <a:prstGeom prst="rect">
+            <a:avLst/>
+          </a:prstGeom>
+          <a:noFill/>
+        </p:spPr>
+        <p:txBody>
+          <a:bodyPr wrap="square" anchor="t" lIns="0" rIns="0" tIns="0" bIns="0"/>
+          <a:lstStyle/>
+          <a:p>
+            <a:pPr algn="l">
+              <a:lnSpc>
+                <a:spcPct val="116000"/>
+              </a:lnSpc>
+              <a:spcBef>
+                <a:spcPts val="0"/>
+              </a:spcBef>
+              <a:spcAft>
+                <a:spcPts val="0"/>
+              </a:spcAft>
+            </a:pPr>
+            <a:r>
+              <a:rPr sz="950" b="0" i="0" lang="en-AU" spc="0">
+                <a:solidFill>
+                  <a:srgbClr val="323232"/>
+                </a:solidFill>
+                <a:latin typeface="Inter"/>
+              </a:rPr>
+              <a:t>Service &amp; SLA review · risk &amp; compliance · release planning &amp; adoption · improvement backlog</a:t>
+            </a:r>
+          </a:p>
+        </p:txBody>
+      </p:sp>
+      <p:sp>
+        <p:nvSpPr>
+          <p:cNvPr id="21" name="TextBox 20"/>
+          <p:cNvSpPr txBox="1"/>
+          <p:nvPr/>
+        </p:nvSpPr>
+        <p:spPr>
+          <a:xfrm>
+            <a:off x="7589520" y="3666744"/>
+            <a:ext cx="1828800" cy="987551"/>
+          </a:xfrm>
+          <a:prstGeom prst="rect">
+            <a:avLst/>
+          </a:prstGeom>
+          <a:noFill/>
+        </p:spPr>
+        <p:txBody>
+          <a:bodyPr wrap="square" anchor="t" lIns="0" rIns="0" tIns="0" bIns="0"/>
+          <a:lstStyle/>
+          <a:p>
+            <a:pPr algn="l">
+              <a:lnSpc>
+                <a:spcPct val="116000"/>
+              </a:lnSpc>
+              <a:spcBef>
+                <a:spcPts val="0"/>
+              </a:spcBef>
+              <a:spcAft>
+                <a:spcPts val="0"/>
+              </a:spcAft>
+            </a:pPr>
+            <a:r>
+              <a:rPr sz="950" b="1" i="0" lang="en-AU" spc="0">
+                <a:solidFill>
+                  <a:srgbClr val="111111"/>
+                </a:solidFill>
+                <a:latin typeface="Inter"/>
+              </a:rPr>
+              <a:t>Client Partner · Service Delivery Lead</a:t>
+            </a:r>
+          </a:p>
+        </p:txBody>
+      </p:sp>
+      <p:sp>
+        <p:nvSpPr>
+          <p:cNvPr id="22" name="TextBox 21"/>
+          <p:cNvSpPr txBox="1"/>
+          <p:nvPr/>
+        </p:nvSpPr>
+        <p:spPr>
+          <a:xfrm>
+            <a:off x="9509760" y="3767328"/>
+            <a:ext cx="1828800" cy="365760"/>
+          </a:xfrm>
+          <a:prstGeom prst="rect">
+            <a:avLst/>
+          </a:prstGeom>
+          <a:noFill/>
+        </p:spPr>
+        <p:txBody>
+          <a:bodyPr wrap="square" anchor="t" lIns="0" rIns="0" tIns="0" bIns="0"/>
+          <a:lstStyle/>
+          <a:p>
+            <a:pPr algn="l">
+              <a:lnSpc>
                 <a:spcPct val="100000"/>
               </a:lnSpc>
               <a:spcBef>
@@ -5983,333 +8935,32 @@
               </a:spcAft>
             </a:pPr>
             <a:r>
-              <a:rPr sz="900" b="1" i="0" lang="en-AU" spc="108" cap="all">
-                <a:solidFill>
-                  <a:srgbClr val="AEAEAE"/>
-                </a:solidFill>
-                <a:latin typeface="Inter"/>
-              </a:rPr>
-              <a:t>CUSTOMER</a:t>
-            </a:r>
-          </a:p>
-        </p:txBody>
-      </p:sp>
-      <p:sp>
-        <p:nvSpPr>
-          <p:cNvPr id="8" name="TextBox 7"/>
-          <p:cNvSpPr txBox="1"/>
-          <p:nvPr/>
-        </p:nvSpPr>
-        <p:spPr>
-          <a:xfrm>
-            <a:off x="5943600" y="2404872"/>
-            <a:ext cx="3108960" cy="274320"/>
-          </a:xfrm>
-          <a:prstGeom prst="rect">
-            <a:avLst/>
-          </a:prstGeom>
-          <a:noFill/>
-        </p:spPr>
-        <p:txBody>
-          <a:bodyPr wrap="square" anchor="t" lIns="0" rIns="0" tIns="0" bIns="0"/>
-          <a:lstStyle/>
-          <a:p>
-            <a:pPr algn="l">
-              <a:lnSpc>
-                <a:spcPct val="100000"/>
-              </a:lnSpc>
-              <a:spcBef>
-                <a:spcPts val="0"/>
-              </a:spcBef>
-              <a:spcAft>
-                <a:spcPts val="0"/>
-              </a:spcAft>
-            </a:pPr>
-            <a:r>
-              <a:rPr sz="900" b="1" i="0" lang="en-AU" spc="108" cap="all">
-                <a:solidFill>
-                  <a:srgbClr val="AEAEAE"/>
-                </a:solidFill>
-                <a:latin typeface="Inter"/>
-              </a:rPr>
-              <a:t>ACTIVITIES</a:t>
-            </a:r>
-          </a:p>
-        </p:txBody>
-      </p:sp>
-      <p:sp>
-        <p:nvSpPr>
-          <p:cNvPr id="9" name="TextBox 8"/>
-          <p:cNvSpPr txBox="1"/>
-          <p:nvPr/>
-        </p:nvSpPr>
-        <p:spPr>
-          <a:xfrm>
-            <a:off x="9646920" y="2404872"/>
-            <a:ext cx="3108960" cy="274320"/>
-          </a:xfrm>
-          <a:prstGeom prst="rect">
-            <a:avLst/>
-          </a:prstGeom>
-          <a:noFill/>
-        </p:spPr>
-        <p:txBody>
-          <a:bodyPr wrap="square" anchor="t" lIns="0" rIns="0" tIns="0" bIns="0"/>
-          <a:lstStyle/>
-          <a:p>
-            <a:pPr algn="l">
-              <a:lnSpc>
-                <a:spcPct val="100000"/>
-              </a:lnSpc>
-              <a:spcBef>
-                <a:spcPts val="0"/>
-              </a:spcBef>
-              <a:spcAft>
-                <a:spcPts val="0"/>
-              </a:spcAft>
-            </a:pPr>
-            <a:r>
-              <a:rPr sz="900" b="1" i="0" lang="en-AU" spc="108" cap="all">
-                <a:solidFill>
-                  <a:srgbClr val="AEAEAE"/>
-                </a:solidFill>
-                <a:latin typeface="Inter"/>
-              </a:rPr>
-              <a:t>MIVADA</a:t>
-            </a:r>
-          </a:p>
-        </p:txBody>
-      </p:sp>
-      <p:sp>
-        <p:nvSpPr>
-          <p:cNvPr id="10" name="TextBox 9"/>
-          <p:cNvSpPr txBox="1"/>
-          <p:nvPr/>
-        </p:nvSpPr>
-        <p:spPr>
-          <a:xfrm>
-            <a:off x="877824" y="2770632"/>
-            <a:ext cx="1737360" cy="548640"/>
-          </a:xfrm>
-          <a:prstGeom prst="rect">
-            <a:avLst/>
-          </a:prstGeom>
-          <a:noFill/>
-        </p:spPr>
-        <p:txBody>
-          <a:bodyPr wrap="square" anchor="t" lIns="0" rIns="0" tIns="0" bIns="0"/>
-          <a:lstStyle/>
-          <a:p>
-            <a:pPr algn="l">
-              <a:lnSpc>
-                <a:spcPct val="100000"/>
-              </a:lnSpc>
-              <a:spcBef>
-                <a:spcPts val="0"/>
-              </a:spcBef>
-              <a:spcAft>
-                <a:spcPts val="0"/>
-              </a:spcAft>
-            </a:pPr>
-            <a:r>
-              <a:rPr sz="1500" b="1" i="0" lang="en-AU" spc="-15">
-                <a:solidFill>
-                  <a:srgbClr val="111111"/>
-                </a:solidFill>
-                <a:latin typeface="Inter"/>
-              </a:rPr>
-              <a:t>Strategic</a:t>
-            </a:r>
-          </a:p>
-        </p:txBody>
-      </p:sp>
-      <p:sp>
-        <p:nvSpPr>
-          <p:cNvPr id="11" name="TextBox 10"/>
-          <p:cNvSpPr txBox="1"/>
-          <p:nvPr/>
-        </p:nvSpPr>
-        <p:spPr>
-          <a:xfrm>
-            <a:off x="877824" y="3099815"/>
-            <a:ext cx="1737360" cy="274320"/>
-          </a:xfrm>
-          <a:prstGeom prst="rect">
-            <a:avLst/>
-          </a:prstGeom>
-          <a:noFill/>
-        </p:spPr>
-        <p:txBody>
-          <a:bodyPr wrap="square" anchor="t" lIns="0" rIns="0" tIns="0" bIns="0"/>
-          <a:lstStyle/>
-          <a:p>
-            <a:pPr algn="l">
-              <a:lnSpc>
-                <a:spcPct val="100000"/>
-              </a:lnSpc>
-              <a:spcBef>
-                <a:spcPts val="0"/>
-              </a:spcBef>
-              <a:spcAft>
-                <a:spcPts val="0"/>
-              </a:spcAft>
-            </a:pPr>
-            <a:r>
-              <a:rPr sz="900" b="1" i="0" lang="en-AU" spc="90" cap="all">
+              <a:rPr sz="950" b="1" i="0" lang="en-AU" spc="76" cap="all">
                 <a:solidFill>
                   <a:srgbClr val="EA493F"/>
                 </a:solidFill>
                 <a:latin typeface="Inter"/>
               </a:rPr>
-              <a:t>QUARTERLY</a:t>
-            </a:r>
-          </a:p>
-        </p:txBody>
-      </p:sp>
-      <p:sp>
-        <p:nvSpPr>
-          <p:cNvPr id="12" name="TextBox 11"/>
-          <p:cNvSpPr txBox="1"/>
-          <p:nvPr/>
-        </p:nvSpPr>
-        <p:spPr>
-          <a:xfrm>
-            <a:off x="2697480" y="2752344"/>
-            <a:ext cx="3154680" cy="1005840"/>
-          </a:xfrm>
-          <a:prstGeom prst="rect">
-            <a:avLst/>
-          </a:prstGeom>
-          <a:noFill/>
-        </p:spPr>
-        <p:txBody>
-          <a:bodyPr wrap="square" anchor="t" lIns="0" rIns="0" tIns="0" bIns="0"/>
-          <a:lstStyle/>
-          <a:p>
-            <a:pPr algn="l">
-              <a:lnSpc>
-                <a:spcPct val="120000"/>
-              </a:lnSpc>
-              <a:spcBef>
-                <a:spcPts val="0"/>
-              </a:spcBef>
-              <a:spcAft>
-                <a:spcPts val="0"/>
-              </a:spcAft>
-            </a:pPr>
-            <a:r>
-              <a:rPr sz="1000" b="0" i="0" lang="en-AU" spc="0">
-                <a:solidFill>
-                  <a:srgbClr val="323232"/>
-                </a:solidFill>
-                <a:latin typeface="Inter"/>
-              </a:rPr>
-              <a:t>Executive Sponsor · CIO / IT Exec · Head of HR / Payroll</a:t>
-            </a:r>
-          </a:p>
-        </p:txBody>
-      </p:sp>
-      <p:sp>
-        <p:nvSpPr>
-          <p:cNvPr id="13" name="TextBox 12"/>
-          <p:cNvSpPr txBox="1"/>
-          <p:nvPr/>
-        </p:nvSpPr>
-        <p:spPr>
-          <a:xfrm>
-            <a:off x="5943600" y="2752344"/>
-            <a:ext cx="3566160" cy="1005840"/>
-          </a:xfrm>
-          <a:prstGeom prst="rect">
-            <a:avLst/>
-          </a:prstGeom>
-          <a:noFill/>
-        </p:spPr>
-        <p:txBody>
-          <a:bodyPr wrap="square" anchor="t" lIns="0" rIns="0" tIns="0" bIns="0"/>
-          <a:lstStyle/>
-          <a:p>
-            <a:pPr algn="l">
-              <a:lnSpc>
-                <a:spcPct val="120000"/>
-              </a:lnSpc>
-              <a:spcBef>
-                <a:spcPts val="0"/>
-              </a:spcBef>
-              <a:spcAft>
-                <a:spcPts val="0"/>
-              </a:spcAft>
-            </a:pPr>
-            <a:r>
-              <a:rPr sz="1000" b="0" i="0" lang="en-AU" spc="0">
-                <a:solidFill>
-                  <a:srgbClr val="323232"/>
-                </a:solidFill>
-                <a:latin typeface="Inter"/>
-              </a:rPr>
-              <a:t>Strategic oversight &amp; direction · innovation &amp; thought leadership · roadmap &amp; investment · relationship health</a:t>
-            </a:r>
-          </a:p>
-        </p:txBody>
-      </p:sp>
-      <p:sp>
-        <p:nvSpPr>
-          <p:cNvPr id="14" name="TextBox 13"/>
-          <p:cNvSpPr txBox="1"/>
-          <p:nvPr/>
-        </p:nvSpPr>
-        <p:spPr>
-          <a:xfrm>
-            <a:off x="9646920" y="2752344"/>
-            <a:ext cx="1691640" cy="1005840"/>
-          </a:xfrm>
-          <a:prstGeom prst="rect">
-            <a:avLst/>
-          </a:prstGeom>
-          <a:noFill/>
-        </p:spPr>
-        <p:txBody>
-          <a:bodyPr wrap="square" anchor="t" lIns="0" rIns="0" tIns="0" bIns="0"/>
-          <a:lstStyle/>
-          <a:p>
-            <a:pPr algn="l">
-              <a:lnSpc>
-                <a:spcPct val="120000"/>
-              </a:lnSpc>
-              <a:spcBef>
-                <a:spcPts val="0"/>
-              </a:spcBef>
-              <a:spcAft>
-                <a:spcPts val="0"/>
-              </a:spcAft>
-            </a:pPr>
-            <a:r>
-              <a:rPr sz="1000" b="1" i="0" lang="en-AU" spc="0">
-                <a:solidFill>
-                  <a:srgbClr val="111111"/>
-                </a:solidFill>
-                <a:latin typeface="Inter"/>
-              </a:rPr>
-              <a:t>CEO · Client Partner</a:t>
+              <a:t>MONTHLY</a:t>
             </a:r>
           </a:p>
         </p:txBody>
       </p:sp>
       <p:cxnSp>
         <p:nvCxnSpPr>
-          <p:cNvPr id="15" name="Connector 14"/>
+          <p:cNvPr id="23" name="Connector 22"/>
           <p:cNvCxnSpPr/>
           <p:nvPr/>
         </p:nvCxnSpPr>
         <p:spPr>
           <a:xfrm>
-            <a:off x="877824" y="3950208"/>
+            <a:off x="877824" y="3621024"/>
             <a:ext cx="10436047" cy="0"/>
           </a:xfrm>
           <a:prstGeom prst="bentConnector3">
             <a:avLst/>
           </a:prstGeom>
-          <a:ln w="12700">
+          <a:ln w="9525">
             <a:solidFill>
               <a:srgbClr val="E4E4E0"/>
             </a:solidFill>
@@ -6333,14 +8984,101 @@
       </p:cxnSp>
       <p:sp>
         <p:nvSpPr>
-          <p:cNvPr id="16" name="TextBox 15"/>
-          <p:cNvSpPr txBox="1"/>
-          <p:nvPr/>
-        </p:nvSpPr>
-        <p:spPr>
-          <a:xfrm>
-            <a:off x="877824" y="4005072"/>
-            <a:ext cx="1737360" cy="548640"/>
+          <p:cNvPr id="24" name="Rectangle 23"/>
+          <p:cNvSpPr/>
+          <p:nvPr/>
+        </p:nvSpPr>
+        <p:spPr>
+          <a:xfrm>
+            <a:off x="4678527" y="4809744"/>
+            <a:ext cx="2834640" cy="841247"/>
+          </a:xfrm>
+          <a:prstGeom prst="rect">
+            <a:avLst/>
+          </a:prstGeom>
+          <a:solidFill>
+            <a:srgbClr val="111111"/>
+          </a:solidFill>
+          <a:ln>
+            <a:noFill/>
+          </a:ln>
+          <a:effectLst/>
+        </p:spPr>
+        <p:style>
+          <a:lnRef idx="1">
+            <a:schemeClr val="accent1"/>
+          </a:lnRef>
+          <a:fillRef idx="3">
+            <a:schemeClr val="accent1"/>
+          </a:fillRef>
+          <a:effectRef idx="2">
+            <a:schemeClr val="accent1"/>
+          </a:effectRef>
+          <a:fontRef idx="minor">
+            <a:schemeClr val="lt1"/>
+          </a:fontRef>
+        </p:style>
+        <p:txBody>
+          <a:bodyPr rtlCol="0" anchor="ctr"/>
+          <a:lstStyle/>
+          <a:p>
+            <a:pPr algn="ctr"/>
+          </a:p>
+        </p:txBody>
+      </p:sp>
+      <p:sp>
+        <p:nvSpPr>
+          <p:cNvPr id="25" name="TextBox 24"/>
+          <p:cNvSpPr txBox="1"/>
+          <p:nvPr/>
+        </p:nvSpPr>
+        <p:spPr>
+          <a:xfrm>
+            <a:off x="4678527" y="4809744"/>
+            <a:ext cx="2834640" cy="841247"/>
+          </a:xfrm>
+          <a:prstGeom prst="rect">
+            <a:avLst/>
+          </a:prstGeom>
+          <a:noFill/>
+        </p:spPr>
+        <p:txBody>
+          <a:bodyPr wrap="square" anchor="ctr" lIns="0" rIns="0" tIns="0" bIns="0"/>
+          <a:lstStyle/>
+          <a:p>
+            <a:pPr algn="ctr">
+              <a:lnSpc>
+                <a:spcPct val="100000"/>
+              </a:lnSpc>
+              <a:spcBef>
+                <a:spcPts val="0"/>
+              </a:spcBef>
+              <a:spcAft>
+                <a:spcPts val="0"/>
+              </a:spcAft>
+            </a:pPr>
+            <a:r>
+              <a:rPr sz="1200" b="1" i="0" lang="en-AU" spc="96" cap="all">
+                <a:solidFill>
+                  <a:srgbClr val="FFFFFF"/>
+                </a:solidFill>
+                <a:latin typeface="Inter"/>
+              </a:rPr>
+              <a:t>OPERATIONAL</a:t>
+            </a:r>
+          </a:p>
+        </p:txBody>
+      </p:sp>
+      <p:sp>
+        <p:nvSpPr>
+          <p:cNvPr id="26" name="TextBox 25"/>
+          <p:cNvSpPr txBox="1"/>
+          <p:nvPr/>
+        </p:nvSpPr>
+        <p:spPr>
+          <a:xfrm>
+            <a:off x="877824" y="4745736"/>
+            <a:ext cx="1828800" cy="987551"/>
           </a:xfrm>
           <a:prstGeom prst="rect">
             <a:avLst/>
@@ -6353,6 +9091,135 @@
           <a:p>
             <a:pPr algn="l">
               <a:lnSpc>
+                <a:spcPct val="116000"/>
+              </a:lnSpc>
+              <a:spcBef>
+                <a:spcPts val="0"/>
+              </a:spcBef>
+              <a:spcAft>
+                <a:spcPts val="0"/>
+              </a:spcAft>
+            </a:pPr>
+            <a:r>
+              <a:rPr sz="950" b="0" i="0" lang="en-AU" spc="0">
+                <a:solidFill>
+                  <a:srgbClr val="323232"/>
+                </a:solidFill>
+                <a:latin typeface="Inter"/>
+              </a:rPr>
+              <a:t>AMS team · Change &amp; Release Coordinators · Super Users / SMEs</a:t>
+            </a:r>
+          </a:p>
+        </p:txBody>
+      </p:sp>
+      <p:sp>
+        <p:nvSpPr>
+          <p:cNvPr id="27" name="TextBox 26"/>
+          <p:cNvSpPr txBox="1"/>
+          <p:nvPr/>
+        </p:nvSpPr>
+        <p:spPr>
+          <a:xfrm>
+            <a:off x="2788920" y="4745736"/>
+            <a:ext cx="1783080" cy="987551"/>
+          </a:xfrm>
+          <a:prstGeom prst="rect">
+            <a:avLst/>
+          </a:prstGeom>
+          <a:noFill/>
+        </p:spPr>
+        <p:txBody>
+          <a:bodyPr wrap="square" anchor="t" lIns="0" rIns="0" tIns="0" bIns="0"/>
+          <a:lstStyle/>
+          <a:p>
+            <a:pPr algn="l">
+              <a:lnSpc>
+                <a:spcPct val="116000"/>
+              </a:lnSpc>
+              <a:spcBef>
+                <a:spcPts val="0"/>
+              </a:spcBef>
+              <a:spcAft>
+                <a:spcPts val="0"/>
+              </a:spcAft>
+            </a:pPr>
+            <a:r>
+              <a:rPr sz="950" b="0" i="0" lang="en-AU" spc="0">
+                <a:solidFill>
+                  <a:srgbClr val="323232"/>
+                </a:solidFill>
+                <a:latin typeface="Inter"/>
+              </a:rPr>
+              <a:t>Daily triage &amp; resolution · change &amp; release execution · UX · operational performance</a:t>
+            </a:r>
+          </a:p>
+        </p:txBody>
+      </p:sp>
+      <p:sp>
+        <p:nvSpPr>
+          <p:cNvPr id="28" name="TextBox 27"/>
+          <p:cNvSpPr txBox="1"/>
+          <p:nvPr/>
+        </p:nvSpPr>
+        <p:spPr>
+          <a:xfrm>
+            <a:off x="7589520" y="4745736"/>
+            <a:ext cx="1828800" cy="987551"/>
+          </a:xfrm>
+          <a:prstGeom prst="rect">
+            <a:avLst/>
+          </a:prstGeom>
+          <a:noFill/>
+        </p:spPr>
+        <p:txBody>
+          <a:bodyPr wrap="square" anchor="t" lIns="0" rIns="0" tIns="0" bIns="0"/>
+          <a:lstStyle/>
+          <a:p>
+            <a:pPr algn="l">
+              <a:lnSpc>
+                <a:spcPct val="116000"/>
+              </a:lnSpc>
+              <a:spcBef>
+                <a:spcPts val="0"/>
+              </a:spcBef>
+              <a:spcAft>
+                <a:spcPts val="0"/>
+              </a:spcAft>
+            </a:pPr>
+            <a:r>
+              <a:rPr sz="950" b="1" i="0" lang="en-AU" spc="0">
+                <a:solidFill>
+                  <a:srgbClr val="111111"/>
+                </a:solidFill>
+                <a:latin typeface="Inter"/>
+              </a:rPr>
+              <a:t>Service Delivery Lead · Consultants</a:t>
+            </a:r>
+          </a:p>
+        </p:txBody>
+      </p:sp>
+      <p:sp>
+        <p:nvSpPr>
+          <p:cNvPr id="29" name="TextBox 28"/>
+          <p:cNvSpPr txBox="1"/>
+          <p:nvPr/>
+        </p:nvSpPr>
+        <p:spPr>
+          <a:xfrm>
+            <a:off x="9509760" y="4846320"/>
+            <a:ext cx="1828800" cy="365760"/>
+          </a:xfrm>
+          <a:prstGeom prst="rect">
+            <a:avLst/>
+          </a:prstGeom>
+          <a:noFill/>
+        </p:spPr>
+        <p:txBody>
+          <a:bodyPr wrap="square" anchor="t" lIns="0" rIns="0" tIns="0" bIns="0"/>
+          <a:lstStyle/>
+          <a:p>
+            <a:pPr algn="l">
+              <a:lnSpc>
                 <a:spcPct val="100000"/>
               </a:lnSpc>
               <a:spcBef>
@@ -6363,204 +9230,32 @@
               </a:spcAft>
             </a:pPr>
             <a:r>
-              <a:rPr sz="1500" b="1" i="0" lang="en-AU" spc="-15">
-                <a:solidFill>
-                  <a:srgbClr val="111111"/>
-                </a:solidFill>
-                <a:latin typeface="Inter"/>
-              </a:rPr>
-              <a:t>Tactical</a:t>
-            </a:r>
-          </a:p>
-        </p:txBody>
-      </p:sp>
-      <p:sp>
-        <p:nvSpPr>
-          <p:cNvPr id="17" name="TextBox 16"/>
-          <p:cNvSpPr txBox="1"/>
-          <p:nvPr/>
-        </p:nvSpPr>
-        <p:spPr>
-          <a:xfrm>
-            <a:off x="877824" y="4334256"/>
-            <a:ext cx="1737360" cy="274320"/>
-          </a:xfrm>
-          <a:prstGeom prst="rect">
-            <a:avLst/>
-          </a:prstGeom>
-          <a:noFill/>
-        </p:spPr>
-        <p:txBody>
-          <a:bodyPr wrap="square" anchor="t" lIns="0" rIns="0" tIns="0" bIns="0"/>
-          <a:lstStyle/>
-          <a:p>
-            <a:pPr algn="l">
-              <a:lnSpc>
-                <a:spcPct val="100000"/>
-              </a:lnSpc>
-              <a:spcBef>
-                <a:spcPts val="0"/>
-              </a:spcBef>
-              <a:spcAft>
-                <a:spcPts val="0"/>
-              </a:spcAft>
-            </a:pPr>
-            <a:r>
-              <a:rPr sz="900" b="1" i="0" lang="en-AU" spc="90" cap="all">
+              <a:rPr sz="950" b="1" i="0" lang="en-AU" spc="76" cap="all">
                 <a:solidFill>
                   <a:srgbClr val="EA493F"/>
                 </a:solidFill>
                 <a:latin typeface="Inter"/>
               </a:rPr>
-              <a:t>MONTHLY</a:t>
-            </a:r>
-          </a:p>
-        </p:txBody>
-      </p:sp>
-      <p:sp>
-        <p:nvSpPr>
-          <p:cNvPr id="18" name="TextBox 17"/>
-          <p:cNvSpPr txBox="1"/>
-          <p:nvPr/>
-        </p:nvSpPr>
-        <p:spPr>
-          <a:xfrm>
-            <a:off x="2697480" y="3986784"/>
-            <a:ext cx="3154680" cy="1005840"/>
-          </a:xfrm>
-          <a:prstGeom prst="rect">
-            <a:avLst/>
-          </a:prstGeom>
-          <a:noFill/>
-        </p:spPr>
-        <p:txBody>
-          <a:bodyPr wrap="square" anchor="t" lIns="0" rIns="0" tIns="0" bIns="0"/>
-          <a:lstStyle/>
-          <a:p>
-            <a:pPr algn="l">
-              <a:lnSpc>
-                <a:spcPct val="120000"/>
-              </a:lnSpc>
-              <a:spcBef>
-                <a:spcPts val="0"/>
-              </a:spcBef>
-              <a:spcAft>
-                <a:spcPts val="0"/>
-              </a:spcAft>
-            </a:pPr>
-            <a:r>
-              <a:rPr sz="1000" b="0" i="0" lang="en-AU" spc="0">
-                <a:solidFill>
-                  <a:srgbClr val="323232"/>
-                </a:solidFill>
-                <a:latin typeface="Inter"/>
-              </a:rPr>
-              <a:t>Product Owner – Workday · IT Service Owner – AMS · Risk, Security &amp; Compliance Lead</a:t>
-            </a:r>
-          </a:p>
-        </p:txBody>
-      </p:sp>
-      <p:sp>
-        <p:nvSpPr>
-          <p:cNvPr id="19" name="TextBox 18"/>
-          <p:cNvSpPr txBox="1"/>
-          <p:nvPr/>
-        </p:nvSpPr>
-        <p:spPr>
-          <a:xfrm>
-            <a:off x="5943600" y="3986784"/>
-            <a:ext cx="3566160" cy="1005840"/>
-          </a:xfrm>
-          <a:prstGeom prst="rect">
-            <a:avLst/>
-          </a:prstGeom>
-          <a:noFill/>
-        </p:spPr>
-        <p:txBody>
-          <a:bodyPr wrap="square" anchor="t" lIns="0" rIns="0" tIns="0" bIns="0"/>
-          <a:lstStyle/>
-          <a:p>
-            <a:pPr algn="l">
-              <a:lnSpc>
-                <a:spcPct val="120000"/>
-              </a:lnSpc>
-              <a:spcBef>
-                <a:spcPts val="0"/>
-              </a:spcBef>
-              <a:spcAft>
-                <a:spcPts val="0"/>
-              </a:spcAft>
-            </a:pPr>
-            <a:r>
-              <a:rPr sz="1000" b="0" i="0" lang="en-AU" spc="0">
-                <a:solidFill>
-                  <a:srgbClr val="323232"/>
-                </a:solidFill>
-                <a:latin typeface="Inter"/>
-              </a:rPr>
-              <a:t>Service performance &amp; SLA review · risk &amp; compliance · release planning &amp; adoption · improvement backlog</a:t>
-            </a:r>
-          </a:p>
-        </p:txBody>
-      </p:sp>
-      <p:sp>
-        <p:nvSpPr>
-          <p:cNvPr id="20" name="TextBox 19"/>
-          <p:cNvSpPr txBox="1"/>
-          <p:nvPr/>
-        </p:nvSpPr>
-        <p:spPr>
-          <a:xfrm>
-            <a:off x="9646920" y="3986784"/>
-            <a:ext cx="1691640" cy="1005840"/>
-          </a:xfrm>
-          <a:prstGeom prst="rect">
-            <a:avLst/>
-          </a:prstGeom>
-          <a:noFill/>
-        </p:spPr>
-        <p:txBody>
-          <a:bodyPr wrap="square" anchor="t" lIns="0" rIns="0" tIns="0" bIns="0"/>
-          <a:lstStyle/>
-          <a:p>
-            <a:pPr algn="l">
-              <a:lnSpc>
-                <a:spcPct val="120000"/>
-              </a:lnSpc>
-              <a:spcBef>
-                <a:spcPts val="0"/>
-              </a:spcBef>
-              <a:spcAft>
-                <a:spcPts val="0"/>
-              </a:spcAft>
-            </a:pPr>
-            <a:r>
-              <a:rPr sz="1000" b="1" i="0" lang="en-AU" spc="0">
-                <a:solidFill>
-                  <a:srgbClr val="111111"/>
-                </a:solidFill>
-                <a:latin typeface="Inter"/>
-              </a:rPr>
-              <a:t>Client Partner · Service Delivery Lead</a:t>
+              <a:t>WEEKLY / DAILY</a:t>
             </a:r>
           </a:p>
         </p:txBody>
       </p:sp>
       <p:cxnSp>
         <p:nvCxnSpPr>
-          <p:cNvPr id="21" name="Connector 20"/>
+          <p:cNvPr id="30" name="Connector 29"/>
           <p:cNvCxnSpPr/>
           <p:nvPr/>
         </p:nvCxnSpPr>
         <p:spPr>
           <a:xfrm>
-            <a:off x="877824" y="5184648"/>
+            <a:off x="877824" y="4700016"/>
             <a:ext cx="10436047" cy="0"/>
           </a:xfrm>
           <a:prstGeom prst="bentConnector3">
             <a:avLst/>
           </a:prstGeom>
-          <a:ln w="12700">
+          <a:ln w="9525">
             <a:solidFill>
               <a:srgbClr val="E4E4E0"/>
             </a:solidFill>
@@ -6582,236 +9277,21 @@
           </a:fontRef>
         </p:style>
       </p:cxnSp>
-      <p:sp>
-        <p:nvSpPr>
-          <p:cNvPr id="22" name="TextBox 21"/>
-          <p:cNvSpPr txBox="1"/>
-          <p:nvPr/>
-        </p:nvSpPr>
-        <p:spPr>
-          <a:xfrm>
-            <a:off x="877824" y="5239512"/>
-            <a:ext cx="1737360" cy="548640"/>
-          </a:xfrm>
-          <a:prstGeom prst="rect">
-            <a:avLst/>
-          </a:prstGeom>
-          <a:noFill/>
-        </p:spPr>
-        <p:txBody>
-          <a:bodyPr wrap="square" anchor="t" lIns="0" rIns="0" tIns="0" bIns="0"/>
-          <a:lstStyle/>
-          <a:p>
-            <a:pPr algn="l">
-              <a:lnSpc>
-                <a:spcPct val="100000"/>
-              </a:lnSpc>
-              <a:spcBef>
-                <a:spcPts val="0"/>
-              </a:spcBef>
-              <a:spcAft>
-                <a:spcPts val="0"/>
-              </a:spcAft>
-            </a:pPr>
-            <a:r>
-              <a:rPr sz="1500" b="1" i="0" lang="en-AU" spc="-15">
-                <a:solidFill>
-                  <a:srgbClr val="111111"/>
-                </a:solidFill>
-                <a:latin typeface="Inter"/>
-              </a:rPr>
-              <a:t>Operational</a:t>
-            </a:r>
-          </a:p>
-        </p:txBody>
-      </p:sp>
-      <p:sp>
-        <p:nvSpPr>
-          <p:cNvPr id="23" name="TextBox 22"/>
-          <p:cNvSpPr txBox="1"/>
-          <p:nvPr/>
-        </p:nvSpPr>
-        <p:spPr>
-          <a:xfrm>
-            <a:off x="877824" y="5568696"/>
-            <a:ext cx="1737360" cy="274320"/>
-          </a:xfrm>
-          <a:prstGeom prst="rect">
-            <a:avLst/>
-          </a:prstGeom>
-          <a:noFill/>
-        </p:spPr>
-        <p:txBody>
-          <a:bodyPr wrap="square" anchor="t" lIns="0" rIns="0" tIns="0" bIns="0"/>
-          <a:lstStyle/>
-          <a:p>
-            <a:pPr algn="l">
-              <a:lnSpc>
-                <a:spcPct val="100000"/>
-              </a:lnSpc>
-              <a:spcBef>
-                <a:spcPts val="0"/>
-              </a:spcBef>
-              <a:spcAft>
-                <a:spcPts val="0"/>
-              </a:spcAft>
-            </a:pPr>
-            <a:r>
-              <a:rPr sz="900" b="1" i="0" lang="en-AU" spc="90" cap="all">
-                <a:solidFill>
-                  <a:srgbClr val="EA493F"/>
-                </a:solidFill>
-                <a:latin typeface="Inter"/>
-              </a:rPr>
-              <a:t>WEEKLY / DAILY</a:t>
-            </a:r>
-          </a:p>
-        </p:txBody>
-      </p:sp>
-      <p:sp>
-        <p:nvSpPr>
-          <p:cNvPr id="24" name="TextBox 23"/>
-          <p:cNvSpPr txBox="1"/>
-          <p:nvPr/>
-        </p:nvSpPr>
-        <p:spPr>
-          <a:xfrm>
-            <a:off x="2697480" y="5221224"/>
-            <a:ext cx="3154680" cy="1005840"/>
-          </a:xfrm>
-          <a:prstGeom prst="rect">
-            <a:avLst/>
-          </a:prstGeom>
-          <a:noFill/>
-        </p:spPr>
-        <p:txBody>
-          <a:bodyPr wrap="square" anchor="t" lIns="0" rIns="0" tIns="0" bIns="0"/>
-          <a:lstStyle/>
-          <a:p>
-            <a:pPr algn="l">
-              <a:lnSpc>
-                <a:spcPct val="120000"/>
-              </a:lnSpc>
-              <a:spcBef>
-                <a:spcPts val="0"/>
-              </a:spcBef>
-              <a:spcAft>
-                <a:spcPts val="0"/>
-              </a:spcAft>
-            </a:pPr>
-            <a:r>
-              <a:rPr sz="1000" b="0" i="0" lang="en-AU" spc="0">
-                <a:solidFill>
-                  <a:srgbClr val="323232"/>
-                </a:solidFill>
-                <a:latin typeface="Inter"/>
-              </a:rPr>
-              <a:t>IT App Support / AMS team · Change &amp; Release Coordinators · Super Users / SMEs</a:t>
-            </a:r>
-          </a:p>
-        </p:txBody>
-      </p:sp>
-      <p:sp>
-        <p:nvSpPr>
-          <p:cNvPr id="25" name="TextBox 24"/>
-          <p:cNvSpPr txBox="1"/>
-          <p:nvPr/>
-        </p:nvSpPr>
-        <p:spPr>
-          <a:xfrm>
-            <a:off x="5943600" y="5221224"/>
-            <a:ext cx="3566160" cy="1005840"/>
-          </a:xfrm>
-          <a:prstGeom prst="rect">
-            <a:avLst/>
-          </a:prstGeom>
-          <a:noFill/>
-        </p:spPr>
-        <p:txBody>
-          <a:bodyPr wrap="square" anchor="t" lIns="0" rIns="0" tIns="0" bIns="0"/>
-          <a:lstStyle/>
-          <a:p>
-            <a:pPr algn="l">
-              <a:lnSpc>
-                <a:spcPct val="120000"/>
-              </a:lnSpc>
-              <a:spcBef>
-                <a:spcPts val="0"/>
-              </a:spcBef>
-              <a:spcAft>
-                <a:spcPts val="0"/>
-              </a:spcAft>
-            </a:pPr>
-            <a:r>
-              <a:rPr sz="1000" b="0" i="0" lang="en-AU" spc="0">
-                <a:solidFill>
-                  <a:srgbClr val="323232"/>
-                </a:solidFill>
-                <a:latin typeface="Inter"/>
-              </a:rPr>
-              <a:t>Daily incident triage &amp; resolution · change &amp; release execution · user experience · operational performance</a:t>
-            </a:r>
-          </a:p>
-        </p:txBody>
-      </p:sp>
-      <p:sp>
-        <p:nvSpPr>
-          <p:cNvPr id="26" name="TextBox 25"/>
-          <p:cNvSpPr txBox="1"/>
-          <p:nvPr/>
-        </p:nvSpPr>
-        <p:spPr>
-          <a:xfrm>
-            <a:off x="9646920" y="5221224"/>
-            <a:ext cx="1691640" cy="1005840"/>
-          </a:xfrm>
-          <a:prstGeom prst="rect">
-            <a:avLst/>
-          </a:prstGeom>
-          <a:noFill/>
-        </p:spPr>
-        <p:txBody>
-          <a:bodyPr wrap="square" anchor="t" lIns="0" rIns="0" tIns="0" bIns="0"/>
-          <a:lstStyle/>
-          <a:p>
-            <a:pPr algn="l">
-              <a:lnSpc>
-                <a:spcPct val="120000"/>
-              </a:lnSpc>
-              <a:spcBef>
-                <a:spcPts val="0"/>
-              </a:spcBef>
-              <a:spcAft>
-                <a:spcPts val="0"/>
-              </a:spcAft>
-            </a:pPr>
-            <a:r>
-              <a:rPr sz="1000" b="1" i="0" lang="en-AU" spc="0">
-                <a:solidFill>
-                  <a:srgbClr val="111111"/>
-                </a:solidFill>
-                <a:latin typeface="Inter"/>
-              </a:rPr>
-              <a:t>Service Delivery Lead · Workday Consultants</a:t>
-            </a:r>
-          </a:p>
-        </p:txBody>
-      </p:sp>
       <p:cxnSp>
         <p:nvCxnSpPr>
-          <p:cNvPr id="27" name="Connector 26"/>
+          <p:cNvPr id="31" name="Connector 30"/>
           <p:cNvCxnSpPr/>
           <p:nvPr/>
         </p:nvCxnSpPr>
         <p:spPr>
           <a:xfrm>
-            <a:off x="877824" y="6419088"/>
+            <a:off x="877824" y="5779008"/>
             <a:ext cx="10436047" cy="0"/>
           </a:xfrm>
           <a:prstGeom prst="bentConnector3">
             <a:avLst/>
           </a:prstGeom>
-          <a:ln w="12700">
+          <a:ln w="9525">
             <a:solidFill>
               <a:srgbClr val="E4E4E0"/>
             </a:solidFill>
@@ -6835,13 +9315,13 @@
       </p:cxnSp>
       <p:sp>
         <p:nvSpPr>
-          <p:cNvPr id="28" name="TextBox 27"/>
-          <p:cNvSpPr txBox="1"/>
-          <p:nvPr/>
-        </p:nvSpPr>
-        <p:spPr>
-          <a:xfrm>
-            <a:off x="877824" y="6528816"/>
+          <p:cNvPr id="32" name="TextBox 31"/>
+          <p:cNvSpPr txBox="1"/>
+          <p:nvPr/>
+        </p:nvSpPr>
+        <p:spPr>
+          <a:xfrm>
+            <a:off x="877824" y="5888736"/>
             <a:ext cx="10436047" cy="365760"/>
           </a:xfrm>
           <a:prstGeom prst="rect">
@@ -6890,7 +9370,7 @@
     <p:bg>
       <p:bgPr>
         <a:solidFill>
-          <a:srgbClr val="000000"/>
+          <a:srgbClr val="FAFAFA"/>
         </a:solidFill>
         <a:effectLst/>
       </p:bgPr>
@@ -6904,7 +9384,7 @@
       <p:grpSpPr/>
       <p:pic>
         <p:nvPicPr>
-          <p:cNvPr id="2" name="Picture 1" descr="Mivada_Icon_White_RGB_L.png"/>
+          <p:cNvPr id="2" name="Picture 1" descr="Mivada_Icon_Melon_RGB_L.png"/>
           <p:cNvPicPr>
             <a:picLocks noChangeAspect="1"/>
           </p:cNvPicPr>
@@ -7003,7 +9483,7 @@
             <a:r>
               <a:rPr sz="3300" b="1" i="0" lang="en-AU" spc="-72">
                 <a:solidFill>
-                  <a:srgbClr val="FFFFFF"/>
+                  <a:srgbClr val="111111"/>
                 </a:solidFill>
                 <a:latin typeface="Inter"/>
               </a:rPr>
@@ -7030,7 +9510,7 @@
         <p:spPr>
           <a:xfrm>
             <a:off x="877824" y="1737360"/>
-            <a:ext cx="10058400" cy="640080"/>
+            <a:ext cx="10241280" cy="548640"/>
           </a:xfrm>
           <a:prstGeom prst="rect">
             <a:avLst/>
@@ -7055,7 +9535,7 @@
             <a:r>
               <a:rPr sz="1300" b="0" i="0" lang="en-AU" spc="0">
                 <a:solidFill>
-                  <a:srgbClr val="CFCFCF"/>
+                  <a:srgbClr val="323232"/>
                 </a:solidFill>
                 <a:latin typeface="Inter"/>
               </a:rPr>
@@ -7073,17 +9553,17 @@
         <p:spPr>
           <a:xfrm>
             <a:off x="877824" y="2286000"/>
-            <a:ext cx="3234842" cy="1371600"/>
+            <a:ext cx="4989423" cy="960120"/>
           </a:xfrm>
           <a:prstGeom prst="rect">
             <a:avLst/>
           </a:prstGeom>
           <a:solidFill>
-            <a:srgbClr val="141414"/>
+            <a:srgbClr val="FFFFFF"/>
           </a:solidFill>
           <a:ln w="12700">
             <a:solidFill>
-              <a:srgbClr val="3A3A3A"/>
+              <a:srgbClr val="E4E4E0"/>
             </a:solidFill>
           </a:ln>
           <a:effectLst/>
@@ -7118,8 +9598,8 @@
         </p:nvSpPr>
         <p:spPr>
           <a:xfrm>
-            <a:off x="1133856" y="2487168"/>
-            <a:ext cx="2777642" cy="457200"/>
+            <a:off x="1133856" y="2468880"/>
+            <a:ext cx="4532223" cy="365760"/>
           </a:xfrm>
           <a:prstGeom prst="rect">
             <a:avLst/>
@@ -7142,9 +9622,9 @@
               </a:spcAft>
             </a:pPr>
             <a:r>
-              <a:rPr sz="1600" b="1" i="0" lang="en-AU" spc="-16">
-                <a:solidFill>
-                  <a:srgbClr val="FFFFFF"/>
+              <a:rPr sz="1500" b="1" i="0" lang="en-AU" spc="-15">
+                <a:solidFill>
+                  <a:srgbClr val="111111"/>
                 </a:solidFill>
                 <a:latin typeface="Inter"/>
               </a:rPr>
@@ -7161,8 +9641,8 @@
         </p:nvSpPr>
         <p:spPr>
           <a:xfrm>
-            <a:off x="1133856" y="2926080"/>
-            <a:ext cx="2777642" cy="548640"/>
+            <a:off x="1133856" y="2852928"/>
+            <a:ext cx="4532223" cy="548640"/>
           </a:xfrm>
           <a:prstGeom prst="rect">
             <a:avLst/>
@@ -7175,19 +9655,19 @@
           <a:p>
             <a:pPr algn="l">
               <a:lnSpc>
-                <a:spcPct val="120000"/>
-              </a:lnSpc>
-              <a:spcBef>
-                <a:spcPts val="0"/>
-              </a:spcBef>
-              <a:spcAft>
-                <a:spcPts val="0"/>
-              </a:spcAft>
-            </a:pPr>
-            <a:r>
-              <a:rPr sz="1100" b="0" i="0" lang="en-AU" spc="0">
-                <a:solidFill>
-                  <a:srgbClr val="CFCFCF"/>
+                <a:spcPct val="118000"/>
+              </a:lnSpc>
+              <a:spcBef>
+                <a:spcPts val="0"/>
+              </a:spcBef>
+              <a:spcAft>
+                <a:spcPts val="0"/>
+              </a:spcAft>
+            </a:pPr>
+            <a:r>
+              <a:rPr sz="1050" b="0" i="0" lang="en-AU" spc="0">
+                <a:solidFill>
+                  <a:srgbClr val="323232"/>
                 </a:solidFill>
                 <a:latin typeface="Inter"/>
               </a:rPr>
@@ -7204,18 +9684,18 @@
         </p:nvSpPr>
         <p:spPr>
           <a:xfrm>
-            <a:off x="4478426" y="2286000"/>
-            <a:ext cx="3234842" cy="1371600"/>
+            <a:off x="6324447" y="2286000"/>
+            <a:ext cx="4989423" cy="960120"/>
           </a:xfrm>
           <a:prstGeom prst="rect">
             <a:avLst/>
           </a:prstGeom>
           <a:solidFill>
-            <a:srgbClr val="141414"/>
+            <a:srgbClr val="FFFFFF"/>
           </a:solidFill>
           <a:ln w="12700">
             <a:solidFill>
-              <a:srgbClr val="3A3A3A"/>
+              <a:srgbClr val="E4E4E0"/>
             </a:solidFill>
           </a:ln>
           <a:effectLst/>
@@ -7250,8 +9730,8 @@
         </p:nvSpPr>
         <p:spPr>
           <a:xfrm>
-            <a:off x="4734458" y="2487168"/>
-            <a:ext cx="2777642" cy="457200"/>
+            <a:off x="6580479" y="2468880"/>
+            <a:ext cx="4532223" cy="365760"/>
           </a:xfrm>
           <a:prstGeom prst="rect">
             <a:avLst/>
@@ -7274,9 +9754,9 @@
               </a:spcAft>
             </a:pPr>
             <a:r>
-              <a:rPr sz="1600" b="1" i="0" lang="en-AU" spc="-16">
-                <a:solidFill>
-                  <a:srgbClr val="FFFFFF"/>
+              <a:rPr sz="1500" b="1" i="0" lang="en-AU" spc="-15">
+                <a:solidFill>
+                  <a:srgbClr val="111111"/>
                 </a:solidFill>
                 <a:latin typeface="Inter"/>
               </a:rPr>
@@ -7293,8 +9773,8 @@
         </p:nvSpPr>
         <p:spPr>
           <a:xfrm>
-            <a:off x="4734458" y="2926080"/>
-            <a:ext cx="2777642" cy="548640"/>
+            <a:off x="6580479" y="2852928"/>
+            <a:ext cx="4532223" cy="548640"/>
           </a:xfrm>
           <a:prstGeom prst="rect">
             <a:avLst/>
@@ -7307,19 +9787,19 @@
           <a:p>
             <a:pPr algn="l">
               <a:lnSpc>
-                <a:spcPct val="120000"/>
-              </a:lnSpc>
-              <a:spcBef>
-                <a:spcPts val="0"/>
-              </a:spcBef>
-              <a:spcAft>
-                <a:spcPts val="0"/>
-              </a:spcAft>
-            </a:pPr>
-            <a:r>
-              <a:rPr sz="1100" b="0" i="0" lang="en-AU" spc="0">
-                <a:solidFill>
-                  <a:srgbClr val="CFCFCF"/>
+                <a:spcPct val="118000"/>
+              </a:lnSpc>
+              <a:spcBef>
+                <a:spcPts val="0"/>
+              </a:spcBef>
+              <a:spcAft>
+                <a:spcPts val="0"/>
+              </a:spcAft>
+            </a:pPr>
+            <a:r>
+              <a:rPr sz="1050" b="0" i="0" lang="en-AU" spc="0">
+                <a:solidFill>
+                  <a:srgbClr val="323232"/>
                 </a:solidFill>
                 <a:latin typeface="Inter"/>
               </a:rPr>
@@ -7328,16 +9808,424 @@
           </a:p>
         </p:txBody>
       </p:sp>
-      <p:sp>
-        <p:nvSpPr>
-          <p:cNvPr id="12" name="Rectangle 11"/>
+      <p:cxnSp>
+        <p:nvCxnSpPr>
+          <p:cNvPr id="12" name="Connector 11"/>
+          <p:cNvCxnSpPr/>
+          <p:nvPr/>
+        </p:nvCxnSpPr>
+        <p:spPr>
+          <a:xfrm>
+            <a:off x="3372535" y="3246120"/>
+            <a:ext cx="0" cy="320040"/>
+          </a:xfrm>
+          <a:prstGeom prst="bentConnector3">
+            <a:avLst/>
+          </a:prstGeom>
+          <a:ln w="12700">
+            <a:solidFill>
+              <a:srgbClr val="AEAEAE"/>
+            </a:solidFill>
+          </a:ln>
+          <a:effectLst/>
+        </p:spPr>
+        <p:style>
+          <a:lnRef idx="2">
+            <a:schemeClr val="accent1"/>
+          </a:lnRef>
+          <a:fillRef idx="0">
+            <a:schemeClr val="accent1"/>
+          </a:fillRef>
+          <a:effectRef idx="1">
+            <a:schemeClr val="accent1"/>
+          </a:effectRef>
+          <a:fontRef idx="minor">
+            <a:schemeClr val="tx1"/>
+          </a:fontRef>
+        </p:style>
+      </p:cxnSp>
+      <p:cxnSp>
+        <p:nvCxnSpPr>
+          <p:cNvPr id="13" name="Connector 12"/>
+          <p:cNvCxnSpPr/>
+          <p:nvPr/>
+        </p:nvCxnSpPr>
+        <p:spPr>
+          <a:xfrm>
+            <a:off x="8819159" y="3246120"/>
+            <a:ext cx="0" cy="320040"/>
+          </a:xfrm>
+          <a:prstGeom prst="bentConnector3">
+            <a:avLst/>
+          </a:prstGeom>
+          <a:ln w="12700">
+            <a:solidFill>
+              <a:srgbClr val="AEAEAE"/>
+            </a:solidFill>
+          </a:ln>
+          <a:effectLst/>
+        </p:spPr>
+        <p:style>
+          <a:lnRef idx="2">
+            <a:schemeClr val="accent1"/>
+          </a:lnRef>
+          <a:fillRef idx="0">
+            <a:schemeClr val="accent1"/>
+          </a:fillRef>
+          <a:effectRef idx="1">
+            <a:schemeClr val="accent1"/>
+          </a:effectRef>
+          <a:fontRef idx="minor">
+            <a:schemeClr val="tx1"/>
+          </a:fontRef>
+        </p:style>
+      </p:cxnSp>
+      <p:cxnSp>
+        <p:nvCxnSpPr>
+          <p:cNvPr id="14" name="Connector 13"/>
+          <p:cNvCxnSpPr/>
+          <p:nvPr/>
+        </p:nvCxnSpPr>
+        <p:spPr>
+          <a:xfrm>
+            <a:off x="3372535" y="3566160"/>
+            <a:ext cx="5446624" cy="0"/>
+          </a:xfrm>
+          <a:prstGeom prst="bentConnector3">
+            <a:avLst/>
+          </a:prstGeom>
+          <a:ln w="12700">
+            <a:solidFill>
+              <a:srgbClr val="AEAEAE"/>
+            </a:solidFill>
+          </a:ln>
+          <a:effectLst/>
+        </p:spPr>
+        <p:style>
+          <a:lnRef idx="2">
+            <a:schemeClr val="accent1"/>
+          </a:lnRef>
+          <a:fillRef idx="0">
+            <a:schemeClr val="accent1"/>
+          </a:fillRef>
+          <a:effectRef idx="1">
+            <a:schemeClr val="accent1"/>
+          </a:effectRef>
+          <a:fontRef idx="minor">
+            <a:schemeClr val="tx1"/>
+          </a:fontRef>
+        </p:style>
+      </p:cxnSp>
+      <p:cxnSp>
+        <p:nvCxnSpPr>
+          <p:cNvPr id="15" name="Connector 14"/>
+          <p:cNvCxnSpPr/>
+          <p:nvPr/>
+        </p:nvCxnSpPr>
+        <p:spPr>
+          <a:xfrm>
+            <a:off x="6095847" y="3566160"/>
+            <a:ext cx="0" cy="274320"/>
+          </a:xfrm>
+          <a:prstGeom prst="bentConnector3">
+            <a:avLst/>
+          </a:prstGeom>
+          <a:ln w="12700">
+            <a:solidFill>
+              <a:srgbClr val="AEAEAE"/>
+            </a:solidFill>
+          </a:ln>
+          <a:effectLst/>
+        </p:spPr>
+        <p:style>
+          <a:lnRef idx="2">
+            <a:schemeClr val="accent1"/>
+          </a:lnRef>
+          <a:fillRef idx="0">
+            <a:schemeClr val="accent1"/>
+          </a:fillRef>
+          <a:effectRef idx="1">
+            <a:schemeClr val="accent1"/>
+          </a:effectRef>
+          <a:fontRef idx="minor">
+            <a:schemeClr val="tx1"/>
+          </a:fontRef>
+        </p:style>
+      </p:cxnSp>
+      <p:sp>
+        <p:nvSpPr>
+          <p:cNvPr id="16" name="Rectangle 15"/>
           <p:cNvSpPr/>
           <p:nvPr/>
         </p:nvSpPr>
         <p:spPr>
           <a:xfrm>
-            <a:off x="8079028" y="2286000"/>
-            <a:ext cx="3234842" cy="1371600"/>
+            <a:off x="877824" y="3840480"/>
+            <a:ext cx="4989423" cy="1051560"/>
+          </a:xfrm>
+          <a:prstGeom prst="rect">
+            <a:avLst/>
+          </a:prstGeom>
+          <a:solidFill>
+            <a:srgbClr val="FFFFFF"/>
+          </a:solidFill>
+          <a:ln w="12700">
+            <a:solidFill>
+              <a:srgbClr val="E4E4E0"/>
+            </a:solidFill>
+          </a:ln>
+          <a:effectLst/>
+        </p:spPr>
+        <p:style>
+          <a:lnRef idx="1">
+            <a:schemeClr val="accent1"/>
+          </a:lnRef>
+          <a:fillRef idx="3">
+            <a:schemeClr val="accent1"/>
+          </a:fillRef>
+          <a:effectRef idx="2">
+            <a:schemeClr val="accent1"/>
+          </a:effectRef>
+          <a:fontRef idx="minor">
+            <a:schemeClr val="lt1"/>
+          </a:fontRef>
+        </p:style>
+        <p:txBody>
+          <a:bodyPr rtlCol="0" anchor="ctr"/>
+          <a:lstStyle/>
+          <a:p>
+            <a:pPr algn="ctr"/>
+          </a:p>
+        </p:txBody>
+      </p:sp>
+      <p:sp>
+        <p:nvSpPr>
+          <p:cNvPr id="17" name="TextBox 16"/>
+          <p:cNvSpPr txBox="1"/>
+          <p:nvPr/>
+        </p:nvSpPr>
+        <p:spPr>
+          <a:xfrm>
+            <a:off x="1133856" y="4023360"/>
+            <a:ext cx="4532223" cy="365760"/>
+          </a:xfrm>
+          <a:prstGeom prst="rect">
+            <a:avLst/>
+          </a:prstGeom>
+          <a:noFill/>
+        </p:spPr>
+        <p:txBody>
+          <a:bodyPr wrap="square" anchor="t" lIns="0" rIns="0" tIns="0" bIns="0"/>
+          <a:lstStyle/>
+          <a:p>
+            <a:pPr algn="l">
+              <a:lnSpc>
+                <a:spcPct val="100000"/>
+              </a:lnSpc>
+              <a:spcBef>
+                <a:spcPts val="0"/>
+              </a:spcBef>
+              <a:spcAft>
+                <a:spcPts val="0"/>
+              </a:spcAft>
+            </a:pPr>
+            <a:r>
+              <a:rPr sz="1500" b="1" i="0" lang="en-AU" spc="-15">
+                <a:solidFill>
+                  <a:srgbClr val="111111"/>
+                </a:solidFill>
+                <a:latin typeface="Inter"/>
+              </a:rPr>
+              <a:t>Onshore · Australia</a:t>
+            </a:r>
+          </a:p>
+        </p:txBody>
+      </p:sp>
+      <p:sp>
+        <p:nvSpPr>
+          <p:cNvPr id="18" name="TextBox 17"/>
+          <p:cNvSpPr txBox="1"/>
+          <p:nvPr/>
+        </p:nvSpPr>
+        <p:spPr>
+          <a:xfrm>
+            <a:off x="1133856" y="4407408"/>
+            <a:ext cx="4532223" cy="548640"/>
+          </a:xfrm>
+          <a:prstGeom prst="rect">
+            <a:avLst/>
+          </a:prstGeom>
+          <a:noFill/>
+        </p:spPr>
+        <p:txBody>
+          <a:bodyPr wrap="square" anchor="t" lIns="0" rIns="0" tIns="0" bIns="0"/>
+          <a:lstStyle/>
+          <a:p>
+            <a:pPr algn="l">
+              <a:lnSpc>
+                <a:spcPct val="118000"/>
+              </a:lnSpc>
+              <a:spcBef>
+                <a:spcPts val="0"/>
+              </a:spcBef>
+              <a:spcAft>
+                <a:spcPts val="0"/>
+              </a:spcAft>
+            </a:pPr>
+            <a:r>
+              <a:rPr sz="1050" b="0" i="0" lang="en-AU" spc="0">
+                <a:solidFill>
+                  <a:srgbClr val="323232"/>
+                </a:solidFill>
+                <a:latin typeface="Inter"/>
+              </a:rPr>
+              <a:t>Functional / Integration Consultants — Core HCM · Financials · Integrations</a:t>
+            </a:r>
+          </a:p>
+        </p:txBody>
+      </p:sp>
+      <p:sp>
+        <p:nvSpPr>
+          <p:cNvPr id="19" name="Rectangle 18"/>
+          <p:cNvSpPr/>
+          <p:nvPr/>
+        </p:nvSpPr>
+        <p:spPr>
+          <a:xfrm>
+            <a:off x="6324447" y="3840480"/>
+            <a:ext cx="4989423" cy="1051560"/>
+          </a:xfrm>
+          <a:prstGeom prst="rect">
+            <a:avLst/>
+          </a:prstGeom>
+          <a:solidFill>
+            <a:srgbClr val="FFFFFF"/>
+          </a:solidFill>
+          <a:ln w="12700">
+            <a:solidFill>
+              <a:srgbClr val="E4E4E0"/>
+            </a:solidFill>
+          </a:ln>
+          <a:effectLst/>
+        </p:spPr>
+        <p:style>
+          <a:lnRef idx="1">
+            <a:schemeClr val="accent1"/>
+          </a:lnRef>
+          <a:fillRef idx="3">
+            <a:schemeClr val="accent1"/>
+          </a:fillRef>
+          <a:effectRef idx="2">
+            <a:schemeClr val="accent1"/>
+          </a:effectRef>
+          <a:fontRef idx="minor">
+            <a:schemeClr val="lt1"/>
+          </a:fontRef>
+        </p:style>
+        <p:txBody>
+          <a:bodyPr rtlCol="0" anchor="ctr"/>
+          <a:lstStyle/>
+          <a:p>
+            <a:pPr algn="ctr"/>
+          </a:p>
+        </p:txBody>
+      </p:sp>
+      <p:sp>
+        <p:nvSpPr>
+          <p:cNvPr id="20" name="TextBox 19"/>
+          <p:cNvSpPr txBox="1"/>
+          <p:nvPr/>
+        </p:nvSpPr>
+        <p:spPr>
+          <a:xfrm>
+            <a:off x="6580479" y="4023360"/>
+            <a:ext cx="4532223" cy="365760"/>
+          </a:xfrm>
+          <a:prstGeom prst="rect">
+            <a:avLst/>
+          </a:prstGeom>
+          <a:noFill/>
+        </p:spPr>
+        <p:txBody>
+          <a:bodyPr wrap="square" anchor="t" lIns="0" rIns="0" tIns="0" bIns="0"/>
+          <a:lstStyle/>
+          <a:p>
+            <a:pPr algn="l">
+              <a:lnSpc>
+                <a:spcPct val="100000"/>
+              </a:lnSpc>
+              <a:spcBef>
+                <a:spcPts val="0"/>
+              </a:spcBef>
+              <a:spcAft>
+                <a:spcPts val="0"/>
+              </a:spcAft>
+            </a:pPr>
+            <a:r>
+              <a:rPr sz="1500" b="1" i="0" lang="en-AU" spc="-15">
+                <a:solidFill>
+                  <a:srgbClr val="111111"/>
+                </a:solidFill>
+                <a:latin typeface="Inter"/>
+              </a:rPr>
+              <a:t>Offshore · India</a:t>
+            </a:r>
+          </a:p>
+        </p:txBody>
+      </p:sp>
+      <p:sp>
+        <p:nvSpPr>
+          <p:cNvPr id="21" name="TextBox 20"/>
+          <p:cNvSpPr txBox="1"/>
+          <p:nvPr/>
+        </p:nvSpPr>
+        <p:spPr>
+          <a:xfrm>
+            <a:off x="6580479" y="4407408"/>
+            <a:ext cx="4532223" cy="548640"/>
+          </a:xfrm>
+          <a:prstGeom prst="rect">
+            <a:avLst/>
+          </a:prstGeom>
+          <a:noFill/>
+        </p:spPr>
+        <p:txBody>
+          <a:bodyPr wrap="square" anchor="t" lIns="0" rIns="0" tIns="0" bIns="0"/>
+          <a:lstStyle/>
+          <a:p>
+            <a:pPr algn="l">
+              <a:lnSpc>
+                <a:spcPct val="118000"/>
+              </a:lnSpc>
+              <a:spcBef>
+                <a:spcPts val="0"/>
+              </a:spcBef>
+              <a:spcAft>
+                <a:spcPts val="0"/>
+              </a:spcAft>
+            </a:pPr>
+            <a:r>
+              <a:rPr sz="1050" b="0" i="0" lang="en-AU" spc="0">
+                <a:solidFill>
+                  <a:srgbClr val="323232"/>
+                </a:solidFill>
+                <a:latin typeface="Inter"/>
+              </a:rPr>
+              <a:t>Functional / Integration Consultants — Core HCM · Financials · Integrations</a:t>
+            </a:r>
+          </a:p>
+        </p:txBody>
+      </p:sp>
+      <p:sp>
+        <p:nvSpPr>
+          <p:cNvPr id="22" name="Rectangle 21"/>
+          <p:cNvSpPr/>
+          <p:nvPr/>
+        </p:nvSpPr>
+        <p:spPr>
+          <a:xfrm>
+            <a:off x="877824" y="5166360"/>
+            <a:ext cx="4989423" cy="914400"/>
           </a:xfrm>
           <a:prstGeom prst="rect">
             <a:avLst/>
@@ -7374,14 +10262,14 @@
       </p:sp>
       <p:sp>
         <p:nvSpPr>
-          <p:cNvPr id="13" name="TextBox 12"/>
-          <p:cNvSpPr txBox="1"/>
-          <p:nvPr/>
-        </p:nvSpPr>
-        <p:spPr>
-          <a:xfrm>
-            <a:off x="8335060" y="2487168"/>
-            <a:ext cx="2777642" cy="365760"/>
+          <p:cNvPr id="23" name="TextBox 22"/>
+          <p:cNvSpPr txBox="1"/>
+          <p:nvPr/>
+        </p:nvSpPr>
+        <p:spPr>
+          <a:xfrm>
+            <a:off x="1133856" y="5285232"/>
+            <a:ext cx="4532223" cy="365760"/>
           </a:xfrm>
           <a:prstGeom prst="rect">
             <a:avLst/>
@@ -7404,7 +10292,7 @@
               </a:spcAft>
             </a:pPr>
             <a:r>
-              <a:rPr sz="1050" b="1" i="0" lang="en-AU" spc="105" cap="all">
+              <a:rPr sz="1100" b="1" i="0" lang="en-AU" spc="110" cap="all">
                 <a:solidFill>
                   <a:srgbClr val="FFFFFF"/>
                 </a:solidFill>
@@ -7417,14 +10305,14 @@
       </p:sp>
       <p:sp>
         <p:nvSpPr>
-          <p:cNvPr id="14" name="TextBox 13"/>
-          <p:cNvSpPr txBox="1"/>
-          <p:nvPr/>
-        </p:nvSpPr>
-        <p:spPr>
-          <a:xfrm>
-            <a:off x="8335060" y="2852928"/>
-            <a:ext cx="2777642" cy="731520"/>
+          <p:cNvPr id="24" name="TextBox 23"/>
+          <p:cNvSpPr txBox="1"/>
+          <p:nvPr/>
+        </p:nvSpPr>
+        <p:spPr>
+          <a:xfrm>
+            <a:off x="1133856" y="5614416"/>
+            <a:ext cx="4532223" cy="411480"/>
           </a:xfrm>
           <a:prstGeom prst="rect">
             <a:avLst/>
@@ -7437,48 +10325,46 @@
           <a:p>
             <a:pPr algn="l">
               <a:lnSpc>
-                <a:spcPct val="118000"/>
-              </a:lnSpc>
-              <a:spcBef>
-                <a:spcPts val="0"/>
-              </a:spcBef>
-              <a:spcAft>
-                <a:spcPts val="0"/>
-              </a:spcAft>
-            </a:pPr>
-            <a:r>
-              <a:rPr sz="1100" b="1" i="0" lang="en-AU" spc="0">
+                <a:spcPct val="112000"/>
+              </a:lnSpc>
+              <a:spcBef>
+                <a:spcPts val="0"/>
+              </a:spcBef>
+              <a:spcAft>
+                <a:spcPts val="0"/>
+              </a:spcAft>
+            </a:pPr>
+            <a:r>
+              <a:rPr sz="1050" b="1" i="0" lang="en-AU" spc="0">
                 <a:solidFill>
                   <a:srgbClr val="FFFFFF"/>
                 </a:solidFill>
                 <a:latin typeface="Inter"/>
               </a:rPr>
-              <a:t>Direct CEO access for executive escalation and strategic sponsorship throughout the engagement.</a:t>
-            </a:r>
-          </a:p>
-        </p:txBody>
-      </p:sp>
-      <p:sp>
-        <p:nvSpPr>
-          <p:cNvPr id="15" name="Rectangle 14"/>
+              <a:t>Strategic advisory · direct CEO access for escalation &amp; sponsorship.</a:t>
+            </a:r>
+          </a:p>
+        </p:txBody>
+      </p:sp>
+      <p:sp>
+        <p:nvSpPr>
+          <p:cNvPr id="25" name="Rectangle 24"/>
           <p:cNvSpPr/>
           <p:nvPr/>
         </p:nvSpPr>
         <p:spPr>
           <a:xfrm>
-            <a:off x="877824" y="3840480"/>
-            <a:ext cx="5035143" cy="1234440"/>
+            <a:off x="6324447" y="5166360"/>
+            <a:ext cx="4989423" cy="914400"/>
           </a:xfrm>
           <a:prstGeom prst="rect">
             <a:avLst/>
           </a:prstGeom>
           <a:solidFill>
-            <a:srgbClr val="141414"/>
+            <a:srgbClr val="111111"/>
           </a:solidFill>
-          <a:ln w="12700">
-            <a:solidFill>
-              <a:srgbClr val="3A3A3A"/>
-            </a:solidFill>
+          <a:ln>
+            <a:noFill/>
           </a:ln>
           <a:effectLst/>
         </p:spPr>
@@ -7506,14 +10392,14 @@
       </p:sp>
       <p:sp>
         <p:nvSpPr>
-          <p:cNvPr id="16" name="TextBox 15"/>
-          <p:cNvSpPr txBox="1"/>
-          <p:nvPr/>
-        </p:nvSpPr>
-        <p:spPr>
-          <a:xfrm>
-            <a:off x="1152144" y="4023360"/>
-            <a:ext cx="4577943" cy="365760"/>
+          <p:cNvPr id="26" name="TextBox 25"/>
+          <p:cNvSpPr txBox="1"/>
+          <p:nvPr/>
+        </p:nvSpPr>
+        <p:spPr>
+          <a:xfrm>
+            <a:off x="6580479" y="5285232"/>
+            <a:ext cx="4532223" cy="365760"/>
           </a:xfrm>
           <a:prstGeom prst="rect">
             <a:avLst/>
@@ -7542,21 +10428,21 @@
                 </a:solidFill>
                 <a:latin typeface="Inter"/>
               </a:rPr>
-              <a:t>ONSHORE · AUSTRALIA</a:t>
-            </a:r>
-          </a:p>
-        </p:txBody>
-      </p:sp>
-      <p:sp>
-        <p:nvSpPr>
-          <p:cNvPr id="17" name="TextBox 16"/>
-          <p:cNvSpPr txBox="1"/>
-          <p:nvPr/>
-        </p:nvSpPr>
-        <p:spPr>
-          <a:xfrm>
-            <a:off x="1152144" y="4370832"/>
-            <a:ext cx="4577943" cy="365760"/>
+              <a:t>DEDICATED WORKDAY PRACTICE</a:t>
+            </a:r>
+          </a:p>
+        </p:txBody>
+      </p:sp>
+      <p:sp>
+        <p:nvSpPr>
+          <p:cNvPr id="27" name="TextBox 26"/>
+          <p:cNvSpPr txBox="1"/>
+          <p:nvPr/>
+        </p:nvSpPr>
+        <p:spPr>
+          <a:xfrm>
+            <a:off x="6580479" y="5614416"/>
+            <a:ext cx="4532223" cy="411480"/>
           </a:xfrm>
           <a:prstGeom prst="rect">
             <a:avLst/>
@@ -7569,284 +10455,23 @@
           <a:p>
             <a:pPr algn="l">
               <a:lnSpc>
-                <a:spcPct val="100000"/>
-              </a:lnSpc>
-              <a:spcBef>
-                <a:spcPts val="0"/>
-              </a:spcBef>
-              <a:spcAft>
-                <a:spcPts val="0"/>
-              </a:spcAft>
-            </a:pPr>
-            <a:r>
-              <a:rPr sz="1450" b="1" i="0" lang="en-AU" spc="-14">
-                <a:solidFill>
-                  <a:srgbClr val="FFFFFF"/>
-                </a:solidFill>
-                <a:latin typeface="Inter"/>
-              </a:rPr>
-              <a:t>Functional / Integration Consultants</a:t>
-            </a:r>
-          </a:p>
-        </p:txBody>
-      </p:sp>
-      <p:sp>
-        <p:nvSpPr>
-          <p:cNvPr id="18" name="TextBox 17"/>
-          <p:cNvSpPr txBox="1"/>
-          <p:nvPr/>
-        </p:nvSpPr>
-        <p:spPr>
-          <a:xfrm>
-            <a:off x="1152144" y="4736592"/>
-            <a:ext cx="4577943" cy="365760"/>
-          </a:xfrm>
-          <a:prstGeom prst="rect">
-            <a:avLst/>
-          </a:prstGeom>
-          <a:noFill/>
-        </p:spPr>
-        <p:txBody>
-          <a:bodyPr wrap="square" anchor="t" lIns="0" rIns="0" tIns="0" bIns="0"/>
-          <a:lstStyle/>
-          <a:p>
-            <a:pPr algn="l">
-              <a:lnSpc>
-                <a:spcPct val="100000"/>
-              </a:lnSpc>
-              <a:spcBef>
-                <a:spcPts val="0"/>
-              </a:spcBef>
-              <a:spcAft>
-                <a:spcPts val="0"/>
-              </a:spcAft>
-            </a:pPr>
-            <a:r>
-              <a:rPr sz="1050" b="0" i="0" lang="en-AU" spc="0">
-                <a:solidFill>
-                  <a:srgbClr val="CFCFCF"/>
-                </a:solidFill>
-                <a:latin typeface="Inter"/>
-              </a:rPr>
-              <a:t>Core HCM · Financials · Integrations (inbound &amp; outbound)</a:t>
-            </a:r>
-          </a:p>
-        </p:txBody>
-      </p:sp>
-      <p:sp>
-        <p:nvSpPr>
-          <p:cNvPr id="19" name="Rectangle 18"/>
-          <p:cNvSpPr/>
-          <p:nvPr/>
-        </p:nvSpPr>
-        <p:spPr>
-          <a:xfrm>
-            <a:off x="6278727" y="3840480"/>
-            <a:ext cx="5035143" cy="1234440"/>
-          </a:xfrm>
-          <a:prstGeom prst="rect">
-            <a:avLst/>
-          </a:prstGeom>
-          <a:solidFill>
-            <a:srgbClr val="141414"/>
-          </a:solidFill>
-          <a:ln w="12700">
-            <a:solidFill>
-              <a:srgbClr val="3A3A3A"/>
-            </a:solidFill>
-          </a:ln>
-          <a:effectLst/>
-        </p:spPr>
-        <p:style>
-          <a:lnRef idx="1">
-            <a:schemeClr val="accent1"/>
-          </a:lnRef>
-          <a:fillRef idx="3">
-            <a:schemeClr val="accent1"/>
-          </a:fillRef>
-          <a:effectRef idx="2">
-            <a:schemeClr val="accent1"/>
-          </a:effectRef>
-          <a:fontRef idx="minor">
-            <a:schemeClr val="lt1"/>
-          </a:fontRef>
-        </p:style>
-        <p:txBody>
-          <a:bodyPr rtlCol="0" anchor="ctr"/>
-          <a:lstStyle/>
-          <a:p>
-            <a:pPr algn="ctr"/>
-          </a:p>
-        </p:txBody>
-      </p:sp>
-      <p:sp>
-        <p:nvSpPr>
-          <p:cNvPr id="20" name="TextBox 19"/>
-          <p:cNvSpPr txBox="1"/>
-          <p:nvPr/>
-        </p:nvSpPr>
-        <p:spPr>
-          <a:xfrm>
-            <a:off x="6553047" y="4023360"/>
-            <a:ext cx="4577943" cy="365760"/>
-          </a:xfrm>
-          <a:prstGeom prst="rect">
-            <a:avLst/>
-          </a:prstGeom>
-          <a:noFill/>
-        </p:spPr>
-        <p:txBody>
-          <a:bodyPr wrap="square" anchor="t" lIns="0" rIns="0" tIns="0" bIns="0"/>
-          <a:lstStyle/>
-          <a:p>
-            <a:pPr algn="l">
-              <a:lnSpc>
-                <a:spcPct val="100000"/>
-              </a:lnSpc>
-              <a:spcBef>
-                <a:spcPts val="0"/>
-              </a:spcBef>
-              <a:spcAft>
-                <a:spcPts val="0"/>
-              </a:spcAft>
-            </a:pPr>
-            <a:r>
-              <a:rPr sz="1100" b="1" i="0" lang="en-AU" spc="110" cap="all">
-                <a:solidFill>
-                  <a:srgbClr val="EA493F"/>
-                </a:solidFill>
-                <a:latin typeface="Inter"/>
-              </a:rPr>
-              <a:t>OFFSHORE · INDIA</a:t>
-            </a:r>
-          </a:p>
-        </p:txBody>
-      </p:sp>
-      <p:sp>
-        <p:nvSpPr>
-          <p:cNvPr id="21" name="TextBox 20"/>
-          <p:cNvSpPr txBox="1"/>
-          <p:nvPr/>
-        </p:nvSpPr>
-        <p:spPr>
-          <a:xfrm>
-            <a:off x="6553047" y="4370832"/>
-            <a:ext cx="4577943" cy="365760"/>
-          </a:xfrm>
-          <a:prstGeom prst="rect">
-            <a:avLst/>
-          </a:prstGeom>
-          <a:noFill/>
-        </p:spPr>
-        <p:txBody>
-          <a:bodyPr wrap="square" anchor="t" lIns="0" rIns="0" tIns="0" bIns="0"/>
-          <a:lstStyle/>
-          <a:p>
-            <a:pPr algn="l">
-              <a:lnSpc>
-                <a:spcPct val="100000"/>
-              </a:lnSpc>
-              <a:spcBef>
-                <a:spcPts val="0"/>
-              </a:spcBef>
-              <a:spcAft>
-                <a:spcPts val="0"/>
-              </a:spcAft>
-            </a:pPr>
-            <a:r>
-              <a:rPr sz="1450" b="1" i="0" lang="en-AU" spc="-14">
-                <a:solidFill>
-                  <a:srgbClr val="FFFFFF"/>
-                </a:solidFill>
-                <a:latin typeface="Inter"/>
-              </a:rPr>
-              <a:t>Functional / Integration Consultants</a:t>
-            </a:r>
-          </a:p>
-        </p:txBody>
-      </p:sp>
-      <p:sp>
-        <p:nvSpPr>
-          <p:cNvPr id="22" name="TextBox 21"/>
-          <p:cNvSpPr txBox="1"/>
-          <p:nvPr/>
-        </p:nvSpPr>
-        <p:spPr>
-          <a:xfrm>
-            <a:off x="6553047" y="4736592"/>
-            <a:ext cx="4577943" cy="365760"/>
-          </a:xfrm>
-          <a:prstGeom prst="rect">
-            <a:avLst/>
-          </a:prstGeom>
-          <a:noFill/>
-        </p:spPr>
-        <p:txBody>
-          <a:bodyPr wrap="square" anchor="t" lIns="0" rIns="0" tIns="0" bIns="0"/>
-          <a:lstStyle/>
-          <a:p>
-            <a:pPr algn="l">
-              <a:lnSpc>
-                <a:spcPct val="100000"/>
-              </a:lnSpc>
-              <a:spcBef>
-                <a:spcPts val="0"/>
-              </a:spcBef>
-              <a:spcAft>
-                <a:spcPts val="0"/>
-              </a:spcAft>
-            </a:pPr>
-            <a:r>
-              <a:rPr sz="1050" b="0" i="0" lang="en-AU" spc="0">
-                <a:solidFill>
-                  <a:srgbClr val="CFCFCF"/>
-                </a:solidFill>
-                <a:latin typeface="Inter"/>
-              </a:rPr>
-              <a:t>Core HCM · Financials · Integrations (inbound &amp; outbound)</a:t>
-            </a:r>
-          </a:p>
-        </p:txBody>
-      </p:sp>
-      <p:sp>
-        <p:nvSpPr>
-          <p:cNvPr id="23" name="TextBox 22"/>
-          <p:cNvSpPr txBox="1"/>
-          <p:nvPr/>
-        </p:nvSpPr>
-        <p:spPr>
-          <a:xfrm>
-            <a:off x="877824" y="5257800"/>
-            <a:ext cx="10436047" cy="457200"/>
-          </a:xfrm>
-          <a:prstGeom prst="rect">
-            <a:avLst/>
-          </a:prstGeom>
-          <a:noFill/>
-        </p:spPr>
-        <p:txBody>
-          <a:bodyPr wrap="square" anchor="t" lIns="0" rIns="0" tIns="0" bIns="0"/>
-          <a:lstStyle/>
-          <a:p>
-            <a:pPr algn="l">
-              <a:lnSpc>
-                <a:spcPct val="100000"/>
-              </a:lnSpc>
-              <a:spcBef>
-                <a:spcPts val="0"/>
-              </a:spcBef>
-              <a:spcAft>
-                <a:spcPts val="0"/>
-              </a:spcAft>
-            </a:pPr>
-            <a:r>
-              <a:rPr sz="1100" b="1" i="0" lang="en-AU" spc="0">
-                <a:solidFill>
-                  <a:srgbClr val="AEAEAE"/>
-                </a:solidFill>
-                <a:latin typeface="Inter"/>
-              </a:rPr>
-              <a:t>Dedicated Workday practice · innovation — automation, new Workday features and process optimisation, flowing from Mivada's wider practice.</a:t>
+                <a:spcPct val="112000"/>
+              </a:lnSpc>
+              <a:spcBef>
+                <a:spcPts val="0"/>
+              </a:spcBef>
+              <a:spcAft>
+                <a:spcPts val="0"/>
+              </a:spcAft>
+            </a:pPr>
+            <a:r>
+              <a:rPr sz="1050" b="1" i="0" lang="en-AU" spc="0">
+                <a:solidFill>
+                  <a:srgbClr val="D6D6D6"/>
+                </a:solidFill>
+                <a:latin typeface="Inter"/>
+              </a:rPr>
+              <a:t>Innovation — automation, new Workday features &amp; process optimisation.</a:t>
             </a:r>
           </a:p>
         </p:txBody>
@@ -8005,7 +10630,7 @@
         <p:spPr>
           <a:xfrm>
             <a:off x="877824" y="1828800"/>
-            <a:ext cx="10058400" cy="640080"/>
+            <a:ext cx="10241280" cy="548640"/>
           </a:xfrm>
           <a:prstGeom prst="rect">
             <a:avLst/>
@@ -9001,7 +11626,7 @@
         <p:spPr>
           <a:xfrm>
             <a:off x="877824" y="1874519"/>
-            <a:ext cx="10058400" cy="640080"/>
+            <a:ext cx="10241280" cy="548640"/>
           </a:xfrm>
           <a:prstGeom prst="rect">
             <a:avLst/>
@@ -11212,7 +13837,7 @@
         <p:spPr>
           <a:xfrm>
             <a:off x="877824" y="1874519"/>
-            <a:ext cx="10058400" cy="640080"/>
+            <a:ext cx="10241280" cy="548640"/>
           </a:xfrm>
           <a:prstGeom prst="rect">
             <a:avLst/>
@@ -15222,7 +17847,7 @@
         <p:spPr>
           <a:xfrm>
             <a:off x="877824" y="1737360"/>
-            <a:ext cx="10058400" cy="640080"/>
+            <a:ext cx="10241280" cy="548640"/>
           </a:xfrm>
           <a:prstGeom prst="rect">
             <a:avLst/>
@@ -16832,7 +19457,7 @@
         <p:spPr>
           <a:xfrm>
             <a:off x="877824" y="1737360"/>
-            <a:ext cx="10058400" cy="640080"/>
+            <a:ext cx="10241280" cy="548640"/>
           </a:xfrm>
           <a:prstGeom prst="rect">
             <a:avLst/>

--- a/design-system/samples/Mivada_Overview_and_Services.pptx
+++ b/design-system/samples/Mivada_Overview_and_Services.pptx
@@ -5533,28 +5533,6 @@
         </p:nvSpPr>
         <p:spPr>
           <a:xfrm>
-            <a:off x="877824" y="2423160"/>
-            <a:ext cx="1097280" cy="228600"/>
-          </a:xfrm>
-          <a:prstGeom prst="rect">
-            <a:avLst/>
-          </a:prstGeom>
-          <a:noFill/>
-        </p:spPr>
-        <p:txBody>
-          <a:bodyPr wrap="square" anchor="t" lIns="0" rIns="0" tIns="0" bIns="0"/>
-          <a:lstStyle/>
-          <a:p/>
-        </p:txBody>
-      </p:sp>
-      <p:sp>
-        <p:nvSpPr>
-          <p:cNvPr id="7" name="TextBox 6"/>
-          <p:cNvSpPr txBox="1"/>
-          <p:nvPr/>
-        </p:nvSpPr>
-        <p:spPr>
-          <a:xfrm>
             <a:off x="877824" y="2441448"/>
             <a:ext cx="745431" cy="219456"/>
           </a:xfrm>
@@ -5592,7 +5570,7 @@
       </p:sp>
       <p:sp>
         <p:nvSpPr>
-          <p:cNvPr id="8" name="TextBox 7"/>
+          <p:cNvPr id="7" name="TextBox 6"/>
           <p:cNvSpPr txBox="1"/>
           <p:nvPr/>
         </p:nvSpPr>
@@ -5635,7 +5613,7 @@
       </p:sp>
       <p:sp>
         <p:nvSpPr>
-          <p:cNvPr id="9" name="TextBox 8"/>
+          <p:cNvPr id="8" name="TextBox 7"/>
           <p:cNvSpPr txBox="1"/>
           <p:nvPr/>
         </p:nvSpPr>
@@ -5678,7 +5656,7 @@
       </p:sp>
       <p:sp>
         <p:nvSpPr>
-          <p:cNvPr id="10" name="TextBox 9"/>
+          <p:cNvPr id="9" name="TextBox 8"/>
           <p:cNvSpPr txBox="1"/>
           <p:nvPr/>
         </p:nvSpPr>
@@ -5721,7 +5699,7 @@
       </p:sp>
       <p:sp>
         <p:nvSpPr>
-          <p:cNvPr id="11" name="TextBox 10"/>
+          <p:cNvPr id="10" name="TextBox 9"/>
           <p:cNvSpPr txBox="1"/>
           <p:nvPr/>
         </p:nvSpPr>
@@ -5764,7 +5742,7 @@
       </p:sp>
       <p:sp>
         <p:nvSpPr>
-          <p:cNvPr id="12" name="TextBox 11"/>
+          <p:cNvPr id="11" name="TextBox 10"/>
           <p:cNvSpPr txBox="1"/>
           <p:nvPr/>
         </p:nvSpPr>
@@ -5807,7 +5785,7 @@
       </p:sp>
       <p:sp>
         <p:nvSpPr>
-          <p:cNvPr id="13" name="TextBox 12"/>
+          <p:cNvPr id="12" name="TextBox 11"/>
           <p:cNvSpPr txBox="1"/>
           <p:nvPr/>
         </p:nvSpPr>
@@ -5850,7 +5828,7 @@
       </p:sp>
       <p:sp>
         <p:nvSpPr>
-          <p:cNvPr id="14" name="TextBox 13"/>
+          <p:cNvPr id="13" name="TextBox 12"/>
           <p:cNvSpPr txBox="1"/>
           <p:nvPr/>
         </p:nvSpPr>
@@ -5893,7 +5871,7 @@
       </p:sp>
       <p:sp>
         <p:nvSpPr>
-          <p:cNvPr id="15" name="TextBox 14"/>
+          <p:cNvPr id="14" name="TextBox 13"/>
           <p:cNvSpPr txBox="1"/>
           <p:nvPr/>
         </p:nvSpPr>
@@ -5936,7 +5914,7 @@
       </p:sp>
       <p:sp>
         <p:nvSpPr>
-          <p:cNvPr id="16" name="TextBox 15"/>
+          <p:cNvPr id="15" name="TextBox 14"/>
           <p:cNvSpPr txBox="1"/>
           <p:nvPr/>
         </p:nvSpPr>
@@ -5979,7 +5957,7 @@
       </p:sp>
       <p:sp>
         <p:nvSpPr>
-          <p:cNvPr id="17" name="TextBox 16"/>
+          <p:cNvPr id="16" name="TextBox 15"/>
           <p:cNvSpPr txBox="1"/>
           <p:nvPr/>
         </p:nvSpPr>
@@ -6022,7 +6000,7 @@
       </p:sp>
       <p:sp>
         <p:nvSpPr>
-          <p:cNvPr id="18" name="TextBox 17"/>
+          <p:cNvPr id="17" name="TextBox 16"/>
           <p:cNvSpPr txBox="1"/>
           <p:nvPr/>
         </p:nvSpPr>
@@ -6065,7 +6043,7 @@
       </p:sp>
       <p:sp>
         <p:nvSpPr>
-          <p:cNvPr id="19" name="TextBox 18"/>
+          <p:cNvPr id="18" name="TextBox 17"/>
           <p:cNvSpPr txBox="1"/>
           <p:nvPr/>
         </p:nvSpPr>
@@ -6108,7 +6086,7 @@
       </p:sp>
       <p:sp>
         <p:nvSpPr>
-          <p:cNvPr id="20" name="TextBox 19"/>
+          <p:cNvPr id="19" name="TextBox 18"/>
           <p:cNvSpPr txBox="1"/>
           <p:nvPr/>
         </p:nvSpPr>
@@ -6149,6 +6127,42 @@
           </a:p>
         </p:txBody>
       </p:sp>
+      <p:cxnSp>
+        <p:nvCxnSpPr>
+          <p:cNvPr id="20" name="Connector 19"/>
+          <p:cNvCxnSpPr/>
+          <p:nvPr/>
+        </p:nvCxnSpPr>
+        <p:spPr>
+          <a:xfrm>
+            <a:off x="877824" y="2697480"/>
+            <a:ext cx="0" cy="1371600"/>
+          </a:xfrm>
+          <a:prstGeom prst="bentConnector3">
+            <a:avLst/>
+          </a:prstGeom>
+          <a:ln w="9525">
+            <a:solidFill>
+              <a:srgbClr val="E4E4E0"/>
+            </a:solidFill>
+          </a:ln>
+          <a:effectLst/>
+        </p:spPr>
+        <p:style>
+          <a:lnRef idx="2">
+            <a:schemeClr val="accent1"/>
+          </a:lnRef>
+          <a:fillRef idx="0">
+            <a:schemeClr val="accent1"/>
+          </a:fillRef>
+          <a:effectRef idx="1">
+            <a:schemeClr val="accent1"/>
+          </a:effectRef>
+          <a:fontRef idx="minor">
+            <a:schemeClr val="tx1"/>
+          </a:fontRef>
+        </p:style>
+      </p:cxnSp>
       <p:cxnSp>
         <p:nvCxnSpPr>
           <p:cNvPr id="21" name="Connector 20"/>
@@ -6157,7 +6171,7 @@
         </p:nvCxnSpPr>
         <p:spPr>
           <a:xfrm>
-            <a:off x="877824" y="2697480"/>
+            <a:off x="1623255" y="2697480"/>
             <a:ext cx="0" cy="1371600"/>
           </a:xfrm>
           <a:prstGeom prst="bentConnector3">
@@ -6193,7 +6207,7 @@
         </p:nvCxnSpPr>
         <p:spPr>
           <a:xfrm>
-            <a:off x="1623255" y="2697480"/>
+            <a:off x="2368687" y="2697480"/>
             <a:ext cx="0" cy="1371600"/>
           </a:xfrm>
           <a:prstGeom prst="bentConnector3">
@@ -6229,7 +6243,7 @@
         </p:nvCxnSpPr>
         <p:spPr>
           <a:xfrm>
-            <a:off x="2368687" y="2697480"/>
+            <a:off x="3114119" y="2697480"/>
             <a:ext cx="0" cy="1371600"/>
           </a:xfrm>
           <a:prstGeom prst="bentConnector3">
@@ -6265,7 +6279,7 @@
         </p:nvCxnSpPr>
         <p:spPr>
           <a:xfrm>
-            <a:off x="3114119" y="2697480"/>
+            <a:off x="3859551" y="2697480"/>
             <a:ext cx="0" cy="1371600"/>
           </a:xfrm>
           <a:prstGeom prst="bentConnector3">
@@ -6301,7 +6315,7 @@
         </p:nvCxnSpPr>
         <p:spPr>
           <a:xfrm>
-            <a:off x="3859551" y="2697480"/>
+            <a:off x="4604983" y="2697480"/>
             <a:ext cx="0" cy="1371600"/>
           </a:xfrm>
           <a:prstGeom prst="bentConnector3">
@@ -6337,7 +6351,7 @@
         </p:nvCxnSpPr>
         <p:spPr>
           <a:xfrm>
-            <a:off x="4604983" y="2697480"/>
+            <a:off x="5350415" y="2697480"/>
             <a:ext cx="0" cy="1371600"/>
           </a:xfrm>
           <a:prstGeom prst="bentConnector3">
@@ -6373,7 +6387,7 @@
         </p:nvCxnSpPr>
         <p:spPr>
           <a:xfrm>
-            <a:off x="5350415" y="2697480"/>
+            <a:off x="6095847" y="2697480"/>
             <a:ext cx="0" cy="1371600"/>
           </a:xfrm>
           <a:prstGeom prst="bentConnector3">
@@ -6409,7 +6423,7 @@
         </p:nvCxnSpPr>
         <p:spPr>
           <a:xfrm>
-            <a:off x="6095847" y="2697480"/>
+            <a:off x="6841279" y="2697480"/>
             <a:ext cx="0" cy="1371600"/>
           </a:xfrm>
           <a:prstGeom prst="bentConnector3">
@@ -6445,7 +6459,7 @@
         </p:nvCxnSpPr>
         <p:spPr>
           <a:xfrm>
-            <a:off x="6841279" y="2697480"/>
+            <a:off x="7586711" y="2697480"/>
             <a:ext cx="0" cy="1371600"/>
           </a:xfrm>
           <a:prstGeom prst="bentConnector3">
@@ -6481,7 +6495,7 @@
         </p:nvCxnSpPr>
         <p:spPr>
           <a:xfrm>
-            <a:off x="7586711" y="2697480"/>
+            <a:off x="8332143" y="2697480"/>
             <a:ext cx="0" cy="1371600"/>
           </a:xfrm>
           <a:prstGeom prst="bentConnector3">
@@ -6517,7 +6531,7 @@
         </p:nvCxnSpPr>
         <p:spPr>
           <a:xfrm>
-            <a:off x="8332143" y="2697480"/>
+            <a:off x="9077575" y="2697480"/>
             <a:ext cx="0" cy="1371600"/>
           </a:xfrm>
           <a:prstGeom prst="bentConnector3">
@@ -6553,7 +6567,7 @@
         </p:nvCxnSpPr>
         <p:spPr>
           <a:xfrm>
-            <a:off x="9077575" y="2697480"/>
+            <a:off x="9823007" y="2697480"/>
             <a:ext cx="0" cy="1371600"/>
           </a:xfrm>
           <a:prstGeom prst="bentConnector3">
@@ -6589,7 +6603,7 @@
         </p:nvCxnSpPr>
         <p:spPr>
           <a:xfrm>
-            <a:off x="9823007" y="2697480"/>
+            <a:off x="10568439" y="2697480"/>
             <a:ext cx="0" cy="1371600"/>
           </a:xfrm>
           <a:prstGeom prst="bentConnector3">
@@ -6625,7 +6639,7 @@
         </p:nvCxnSpPr>
         <p:spPr>
           <a:xfrm>
-            <a:off x="10568439" y="2697480"/>
+            <a:off x="11313871" y="2697480"/>
             <a:ext cx="0" cy="1371600"/>
           </a:xfrm>
           <a:prstGeom prst="bentConnector3">
@@ -6661,8 +6675,8 @@
         </p:nvCxnSpPr>
         <p:spPr>
           <a:xfrm>
-            <a:off x="11313871" y="2697480"/>
-            <a:ext cx="0" cy="1371600"/>
+            <a:off x="877824" y="2697480"/>
+            <a:ext cx="10436047" cy="0"/>
           </a:xfrm>
           <a:prstGeom prst="bentConnector3">
             <a:avLst/>
@@ -6697,7 +6711,7 @@
         </p:nvCxnSpPr>
         <p:spPr>
           <a:xfrm>
-            <a:off x="877824" y="2697480"/>
+            <a:off x="877824" y="4069080"/>
             <a:ext cx="10436047" cy="0"/>
           </a:xfrm>
           <a:prstGeom prst="bentConnector3">
@@ -6725,45 +6739,9 @@
           </a:fontRef>
         </p:style>
       </p:cxnSp>
-      <p:cxnSp>
-        <p:nvCxnSpPr>
-          <p:cNvPr id="37" name="Connector 36"/>
-          <p:cNvCxnSpPr/>
-          <p:nvPr/>
-        </p:nvCxnSpPr>
-        <p:spPr>
-          <a:xfrm>
-            <a:off x="877824" y="4069080"/>
-            <a:ext cx="10436047" cy="0"/>
-          </a:xfrm>
-          <a:prstGeom prst="bentConnector3">
-            <a:avLst/>
-          </a:prstGeom>
-          <a:ln w="9525">
-            <a:solidFill>
-              <a:srgbClr val="E4E4E0"/>
-            </a:solidFill>
-          </a:ln>
-          <a:effectLst/>
-        </p:spPr>
-        <p:style>
-          <a:lnRef idx="2">
-            <a:schemeClr val="accent1"/>
-          </a:lnRef>
-          <a:fillRef idx="0">
-            <a:schemeClr val="accent1"/>
-          </a:fillRef>
-          <a:effectRef idx="1">
-            <a:schemeClr val="accent1"/>
-          </a:effectRef>
-          <a:fontRef idx="minor">
-            <a:schemeClr val="tx1"/>
-          </a:fontRef>
-        </p:style>
-      </p:cxnSp>
-      <p:sp>
-        <p:nvSpPr>
-          <p:cNvPr id="38" name="Rectangle 37"/>
+      <p:sp>
+        <p:nvSpPr>
+          <p:cNvPr id="37" name="Rectangle 36"/>
           <p:cNvSpPr/>
           <p:nvPr/>
         </p:nvSpPr>
@@ -6807,7 +6785,7 @@
       </p:sp>
       <p:sp>
         <p:nvSpPr>
-          <p:cNvPr id="39" name="Rectangle 38"/>
+          <p:cNvPr id="38" name="Rectangle 37"/>
           <p:cNvSpPr/>
           <p:nvPr/>
         </p:nvSpPr>
@@ -6851,7 +6829,7 @@
       </p:sp>
       <p:sp>
         <p:nvSpPr>
-          <p:cNvPr id="40" name="TextBox 39"/>
+          <p:cNvPr id="39" name="TextBox 38"/>
           <p:cNvSpPr txBox="1"/>
           <p:nvPr/>
         </p:nvSpPr>
@@ -6894,7 +6872,7 @@
       </p:sp>
       <p:sp>
         <p:nvSpPr>
-          <p:cNvPr id="41" name="Rectangle 40"/>
+          <p:cNvPr id="40" name="Rectangle 39"/>
           <p:cNvSpPr/>
           <p:nvPr/>
         </p:nvSpPr>
@@ -6938,7 +6916,7 @@
       </p:sp>
       <p:sp>
         <p:nvSpPr>
-          <p:cNvPr id="42" name="TextBox 41"/>
+          <p:cNvPr id="41" name="TextBox 40"/>
           <p:cNvSpPr txBox="1"/>
           <p:nvPr/>
         </p:nvSpPr>
@@ -6981,7 +6959,7 @@
       </p:sp>
       <p:sp>
         <p:nvSpPr>
-          <p:cNvPr id="43" name="TextBox 42"/>
+          <p:cNvPr id="42" name="TextBox 41"/>
           <p:cNvSpPr txBox="1"/>
           <p:nvPr/>
         </p:nvSpPr>
@@ -7024,7 +7002,7 @@
       </p:sp>
       <p:sp>
         <p:nvSpPr>
-          <p:cNvPr id="44" name="TextBox 43"/>
+          <p:cNvPr id="43" name="TextBox 42"/>
           <p:cNvSpPr txBox="1"/>
           <p:nvPr/>
         </p:nvSpPr>
@@ -7067,7 +7045,7 @@
       </p:sp>
       <p:sp>
         <p:nvSpPr>
-          <p:cNvPr id="45" name="TextBox 44"/>
+          <p:cNvPr id="44" name="TextBox 43"/>
           <p:cNvSpPr txBox="1"/>
           <p:nvPr/>
         </p:nvSpPr>
@@ -7110,7 +7088,7 @@
       </p:sp>
       <p:sp>
         <p:nvSpPr>
-          <p:cNvPr id="46" name="TextBox 45"/>
+          <p:cNvPr id="45" name="TextBox 44"/>
           <p:cNvSpPr txBox="1"/>
           <p:nvPr/>
         </p:nvSpPr>
@@ -7153,7 +7131,7 @@
       </p:sp>
       <p:sp>
         <p:nvSpPr>
-          <p:cNvPr id="47" name="TextBox 46"/>
+          <p:cNvPr id="46" name="TextBox 45"/>
           <p:cNvSpPr txBox="1"/>
           <p:nvPr/>
         </p:nvSpPr>
@@ -7196,7 +7174,7 @@
       </p:sp>
       <p:sp>
         <p:nvSpPr>
-          <p:cNvPr id="48" name="TextBox 47"/>
+          <p:cNvPr id="47" name="TextBox 46"/>
           <p:cNvSpPr txBox="1"/>
           <p:nvPr/>
         </p:nvSpPr>
@@ -7239,7 +7217,7 @@
       </p:sp>
       <p:sp>
         <p:nvSpPr>
-          <p:cNvPr id="49" name="TextBox 48"/>
+          <p:cNvPr id="48" name="TextBox 47"/>
           <p:cNvSpPr txBox="1"/>
           <p:nvPr/>
         </p:nvSpPr>
@@ -7282,7 +7260,7 @@
       </p:sp>
       <p:sp>
         <p:nvSpPr>
-          <p:cNvPr id="50" name="TextBox 49"/>
+          <p:cNvPr id="49" name="TextBox 48"/>
           <p:cNvSpPr txBox="1"/>
           <p:nvPr/>
         </p:nvSpPr>
@@ -7325,7 +7303,7 @@
       </p:sp>
       <p:sp>
         <p:nvSpPr>
-          <p:cNvPr id="51" name="TextBox 50"/>
+          <p:cNvPr id="50" name="TextBox 49"/>
           <p:cNvSpPr txBox="1"/>
           <p:nvPr/>
         </p:nvSpPr>
@@ -7368,7 +7346,7 @@
       </p:sp>
       <p:sp>
         <p:nvSpPr>
-          <p:cNvPr id="52" name="TextBox 51"/>
+          <p:cNvPr id="51" name="TextBox 50"/>
           <p:cNvSpPr txBox="1"/>
           <p:nvPr/>
         </p:nvSpPr>
@@ -7411,7 +7389,7 @@
       </p:sp>
       <p:sp>
         <p:nvSpPr>
-          <p:cNvPr id="53" name="TextBox 52"/>
+          <p:cNvPr id="52" name="TextBox 51"/>
           <p:cNvSpPr txBox="1"/>
           <p:nvPr/>
         </p:nvSpPr>
@@ -7454,7 +7432,7 @@
       </p:sp>
       <p:sp>
         <p:nvSpPr>
-          <p:cNvPr id="54" name="TextBox 53"/>
+          <p:cNvPr id="53" name="TextBox 52"/>
           <p:cNvSpPr txBox="1"/>
           <p:nvPr/>
         </p:nvSpPr>
@@ -7497,7 +7475,7 @@
       </p:sp>
       <p:sp>
         <p:nvSpPr>
-          <p:cNvPr id="55" name="TextBox 54"/>
+          <p:cNvPr id="54" name="TextBox 53"/>
           <p:cNvSpPr txBox="1"/>
           <p:nvPr/>
         </p:nvSpPr>
@@ -7540,7 +7518,7 @@
       </p:sp>
       <p:sp>
         <p:nvSpPr>
-          <p:cNvPr id="56" name="TextBox 55"/>
+          <p:cNvPr id="55" name="TextBox 54"/>
           <p:cNvSpPr txBox="1"/>
           <p:nvPr/>
         </p:nvSpPr>
@@ -7583,50 +7561,50 @@
       </p:sp>
       <p:sp>
         <p:nvSpPr>
+          <p:cNvPr id="56" name="TextBox 55"/>
+          <p:cNvSpPr txBox="1"/>
+          <p:nvPr/>
+        </p:nvSpPr>
+        <p:spPr>
+          <a:xfrm>
+            <a:off x="877824" y="4325112"/>
+            <a:ext cx="3657600" cy="201168"/>
+          </a:xfrm>
+          <a:prstGeom prst="rect">
+            <a:avLst/>
+          </a:prstGeom>
+          <a:noFill/>
+        </p:spPr>
+        <p:txBody>
+          <a:bodyPr wrap="square" anchor="t" lIns="0" rIns="0" tIns="0" bIns="0"/>
+          <a:lstStyle/>
+          <a:p>
+            <a:pPr algn="l">
+              <a:lnSpc>
+                <a:spcPct val="100000"/>
+              </a:lnSpc>
+              <a:spcBef>
+                <a:spcPts val="0"/>
+              </a:spcBef>
+              <a:spcAft>
+                <a:spcPts val="0"/>
+              </a:spcAft>
+            </a:pPr>
+            <a:r>
+              <a:rPr sz="850" b="1" i="0" lang="en-AU" spc="51" cap="all">
+                <a:solidFill>
+                  <a:srgbClr val="EA493F"/>
+                </a:solidFill>
+                <a:latin typeface="Inter"/>
+              </a:rPr>
+              <a:t>← AEST   ·   IST →</a:t>
+            </a:r>
+          </a:p>
+        </p:txBody>
+      </p:sp>
+      <p:sp>
+        <p:nvSpPr>
           <p:cNvPr id="57" name="TextBox 56"/>
-          <p:cNvSpPr txBox="1"/>
-          <p:nvPr/>
-        </p:nvSpPr>
-        <p:spPr>
-          <a:xfrm>
-            <a:off x="877824" y="4325112"/>
-            <a:ext cx="2743200" cy="201168"/>
-          </a:xfrm>
-          <a:prstGeom prst="rect">
-            <a:avLst/>
-          </a:prstGeom>
-          <a:noFill/>
-        </p:spPr>
-        <p:txBody>
-          <a:bodyPr wrap="square" anchor="t" lIns="0" rIns="0" tIns="0" bIns="0"/>
-          <a:lstStyle/>
-          <a:p>
-            <a:pPr algn="l">
-              <a:lnSpc>
-                <a:spcPct val="100000"/>
-              </a:lnSpc>
-              <a:spcBef>
-                <a:spcPts val="0"/>
-              </a:spcBef>
-              <a:spcAft>
-                <a:spcPts val="0"/>
-              </a:spcAft>
-            </a:pPr>
-            <a:r>
-              <a:rPr sz="850" b="1" i="0" lang="en-AU" spc="51" cap="all">
-                <a:solidFill>
-                  <a:srgbClr val="EA493F"/>
-                </a:solidFill>
-                <a:latin typeface="Inter"/>
-              </a:rPr>
-              <a:t>← AEST   ·   IST →</a:t>
-            </a:r>
-          </a:p>
-        </p:txBody>
-      </p:sp>
-      <p:sp>
-        <p:nvSpPr>
-          <p:cNvPr id="58" name="TextBox 57"/>
           <p:cNvSpPr txBox="1"/>
           <p:nvPr/>
         </p:nvSpPr>
@@ -7678,7 +7656,7 @@
       </p:sp>
       <p:sp>
         <p:nvSpPr>
-          <p:cNvPr id="59" name="TextBox 58"/>
+          <p:cNvPr id="58" name="TextBox 57"/>
           <p:cNvSpPr txBox="1"/>
           <p:nvPr/>
         </p:nvSpPr>
@@ -7730,7 +7708,7 @@
       </p:sp>
       <p:sp>
         <p:nvSpPr>
-          <p:cNvPr id="60" name="TextBox 59"/>
+          <p:cNvPr id="59" name="TextBox 58"/>
           <p:cNvSpPr txBox="1"/>
           <p:nvPr/>
         </p:nvSpPr>
@@ -7782,7 +7760,7 @@
       </p:sp>
       <p:sp>
         <p:nvSpPr>
-          <p:cNvPr id="61" name="TextBox 60"/>
+          <p:cNvPr id="60" name="TextBox 59"/>
           <p:cNvSpPr txBox="1"/>
           <p:nvPr/>
         </p:nvSpPr>
@@ -7834,7 +7812,7 @@
       </p:sp>
       <p:sp>
         <p:nvSpPr>
-          <p:cNvPr id="62" name="TextBox 61"/>
+          <p:cNvPr id="61" name="TextBox 60"/>
           <p:cNvSpPr txBox="1"/>
           <p:nvPr/>
         </p:nvSpPr>
@@ -7886,7 +7864,7 @@
       </p:sp>
       <p:sp>
         <p:nvSpPr>
-          <p:cNvPr id="63" name="TextBox 62"/>
+          <p:cNvPr id="62" name="TextBox 61"/>
           <p:cNvSpPr txBox="1"/>
           <p:nvPr/>
         </p:nvSpPr>
@@ -7938,7 +7916,7 @@
       </p:sp>
       <p:sp>
         <p:nvSpPr>
-          <p:cNvPr id="64" name="Rectangle 63"/>
+          <p:cNvPr id="63" name="Rectangle 62"/>
           <p:cNvSpPr/>
           <p:nvPr/>
         </p:nvSpPr>
@@ -7982,7 +7960,7 @@
       </p:sp>
       <p:sp>
         <p:nvSpPr>
-          <p:cNvPr id="65" name="TextBox 64"/>
+          <p:cNvPr id="64" name="TextBox 63"/>
           <p:cNvSpPr txBox="1"/>
           <p:nvPr/>
         </p:nvSpPr>
@@ -8018,7 +7996,7 @@
                 </a:solidFill>
                 <a:latin typeface="Inter"/>
               </a:rPr>
-              <a:t>24×7 P1/P2 ON-CALL   </a:t>
+              <a:t>24×7 P1/P2 on-call   </a:t>
             </a:r>
             <a:r>
               <a:rPr sz="1100" b="0" i="0" lang="en-AU" spc="0">
@@ -8185,49 +8163,6 @@
         </p:nvSpPr>
         <p:spPr>
           <a:xfrm>
-            <a:off x="877824" y="1737360"/>
-            <a:ext cx="10241280" cy="548640"/>
-          </a:xfrm>
-          <a:prstGeom prst="rect">
-            <a:avLst/>
-          </a:prstGeom>
-          <a:noFill/>
-        </p:spPr>
-        <p:txBody>
-          <a:bodyPr wrap="square" anchor="t" lIns="0" rIns="0" tIns="0" bIns="0"/>
-          <a:lstStyle/>
-          <a:p>
-            <a:pPr algn="l">
-              <a:lnSpc>
-                <a:spcPct val="125000"/>
-              </a:lnSpc>
-              <a:spcBef>
-                <a:spcPts val="0"/>
-              </a:spcBef>
-              <a:spcAft>
-                <a:spcPts val="0"/>
-              </a:spcAft>
-            </a:pPr>
-            <a:r>
-              <a:rPr sz="1300" b="0" i="0" lang="en-AU" spc="0">
-                <a:solidFill>
-                  <a:srgbClr val="323232"/>
-                </a:solidFill>
-                <a:latin typeface="Inter"/>
-              </a:rPr>
-              <a:t>Strong governance. Aligned teams. Confident execution.</a:t>
-            </a:r>
-          </a:p>
-        </p:txBody>
-      </p:sp>
-      <p:sp>
-        <p:nvSpPr>
-          <p:cNvPr id="6" name="TextBox 5"/>
-          <p:cNvSpPr txBox="1"/>
-          <p:nvPr/>
-        </p:nvSpPr>
-        <p:spPr>
-          <a:xfrm>
             <a:off x="877824" y="2194560"/>
             <a:ext cx="1828800" cy="274320"/>
           </a:xfrm>
@@ -8265,7 +8200,7 @@
       </p:sp>
       <p:sp>
         <p:nvSpPr>
-          <p:cNvPr id="7" name="TextBox 6"/>
+          <p:cNvPr id="6" name="TextBox 5"/>
           <p:cNvSpPr txBox="1"/>
           <p:nvPr/>
         </p:nvSpPr>
@@ -8308,7 +8243,7 @@
       </p:sp>
       <p:sp>
         <p:nvSpPr>
-          <p:cNvPr id="8" name="TextBox 7"/>
+          <p:cNvPr id="7" name="TextBox 6"/>
           <p:cNvSpPr txBox="1"/>
           <p:nvPr/>
         </p:nvSpPr>
@@ -8351,7 +8286,7 @@
       </p:sp>
       <p:sp>
         <p:nvSpPr>
-          <p:cNvPr id="9" name="TextBox 8"/>
+          <p:cNvPr id="8" name="TextBox 7"/>
           <p:cNvSpPr txBox="1"/>
           <p:nvPr/>
         </p:nvSpPr>
@@ -8394,7 +8329,7 @@
       </p:sp>
       <p:sp>
         <p:nvSpPr>
-          <p:cNvPr id="10" name="Rectangle 9"/>
+          <p:cNvPr id="9" name="Rectangle 8"/>
           <p:cNvSpPr/>
           <p:nvPr/>
         </p:nvSpPr>
@@ -8438,7 +8373,7 @@
       </p:sp>
       <p:sp>
         <p:nvSpPr>
-          <p:cNvPr id="11" name="TextBox 10"/>
+          <p:cNvPr id="10" name="TextBox 9"/>
           <p:cNvSpPr txBox="1"/>
           <p:nvPr/>
         </p:nvSpPr>
@@ -8481,7 +8416,7 @@
       </p:sp>
       <p:sp>
         <p:nvSpPr>
-          <p:cNvPr id="12" name="TextBox 11"/>
+          <p:cNvPr id="11" name="TextBox 10"/>
           <p:cNvSpPr txBox="1"/>
           <p:nvPr/>
         </p:nvSpPr>
@@ -8524,7 +8459,7 @@
       </p:sp>
       <p:sp>
         <p:nvSpPr>
-          <p:cNvPr id="13" name="TextBox 12"/>
+          <p:cNvPr id="12" name="TextBox 11"/>
           <p:cNvSpPr txBox="1"/>
           <p:nvPr/>
         </p:nvSpPr>
@@ -8567,7 +8502,7 @@
       </p:sp>
       <p:sp>
         <p:nvSpPr>
-          <p:cNvPr id="14" name="TextBox 13"/>
+          <p:cNvPr id="13" name="TextBox 12"/>
           <p:cNvSpPr txBox="1"/>
           <p:nvPr/>
         </p:nvSpPr>
@@ -8610,7 +8545,7 @@
       </p:sp>
       <p:sp>
         <p:nvSpPr>
-          <p:cNvPr id="15" name="TextBox 14"/>
+          <p:cNvPr id="14" name="TextBox 13"/>
           <p:cNvSpPr txBox="1"/>
           <p:nvPr/>
         </p:nvSpPr>
@@ -8653,7 +8588,7 @@
       </p:sp>
       <p:cxnSp>
         <p:nvCxnSpPr>
-          <p:cNvPr id="16" name="Connector 15"/>
+          <p:cNvPr id="15" name="Connector 14"/>
           <p:cNvCxnSpPr/>
           <p:nvPr/>
         </p:nvCxnSpPr>
@@ -8689,7 +8624,7 @@
       </p:cxnSp>
       <p:sp>
         <p:nvSpPr>
-          <p:cNvPr id="17" name="Rectangle 16"/>
+          <p:cNvPr id="16" name="Rectangle 15"/>
           <p:cNvSpPr/>
           <p:nvPr/>
         </p:nvSpPr>
@@ -8733,7 +8668,7 @@
       </p:sp>
       <p:sp>
         <p:nvSpPr>
-          <p:cNvPr id="18" name="TextBox 17"/>
+          <p:cNvPr id="17" name="TextBox 16"/>
           <p:cNvSpPr txBox="1"/>
           <p:nvPr/>
         </p:nvSpPr>
@@ -8776,7 +8711,7 @@
       </p:sp>
       <p:sp>
         <p:nvSpPr>
-          <p:cNvPr id="19" name="TextBox 18"/>
+          <p:cNvPr id="18" name="TextBox 17"/>
           <p:cNvSpPr txBox="1"/>
           <p:nvPr/>
         </p:nvSpPr>
@@ -8819,7 +8754,7 @@
       </p:sp>
       <p:sp>
         <p:nvSpPr>
-          <p:cNvPr id="20" name="TextBox 19"/>
+          <p:cNvPr id="19" name="TextBox 18"/>
           <p:cNvSpPr txBox="1"/>
           <p:nvPr/>
         </p:nvSpPr>
@@ -8862,7 +8797,7 @@
       </p:sp>
       <p:sp>
         <p:nvSpPr>
-          <p:cNvPr id="21" name="TextBox 20"/>
+          <p:cNvPr id="20" name="TextBox 19"/>
           <p:cNvSpPr txBox="1"/>
           <p:nvPr/>
         </p:nvSpPr>
@@ -8905,7 +8840,7 @@
       </p:sp>
       <p:sp>
         <p:nvSpPr>
-          <p:cNvPr id="22" name="TextBox 21"/>
+          <p:cNvPr id="21" name="TextBox 20"/>
           <p:cNvSpPr txBox="1"/>
           <p:nvPr/>
         </p:nvSpPr>
@@ -8948,7 +8883,7 @@
       </p:sp>
       <p:cxnSp>
         <p:nvCxnSpPr>
-          <p:cNvPr id="23" name="Connector 22"/>
+          <p:cNvPr id="22" name="Connector 21"/>
           <p:cNvCxnSpPr/>
           <p:nvPr/>
         </p:nvCxnSpPr>
@@ -8984,7 +8919,7 @@
       </p:cxnSp>
       <p:sp>
         <p:nvSpPr>
-          <p:cNvPr id="24" name="Rectangle 23"/>
+          <p:cNvPr id="23" name="Rectangle 22"/>
           <p:cNvSpPr/>
           <p:nvPr/>
         </p:nvSpPr>
@@ -9028,7 +8963,7 @@
       </p:sp>
       <p:sp>
         <p:nvSpPr>
-          <p:cNvPr id="25" name="TextBox 24"/>
+          <p:cNvPr id="24" name="TextBox 23"/>
           <p:cNvSpPr txBox="1"/>
           <p:nvPr/>
         </p:nvSpPr>
@@ -9071,7 +9006,7 @@
       </p:sp>
       <p:sp>
         <p:nvSpPr>
-          <p:cNvPr id="26" name="TextBox 25"/>
+          <p:cNvPr id="25" name="TextBox 24"/>
           <p:cNvSpPr txBox="1"/>
           <p:nvPr/>
         </p:nvSpPr>
@@ -9114,7 +9049,7 @@
       </p:sp>
       <p:sp>
         <p:nvSpPr>
-          <p:cNvPr id="27" name="TextBox 26"/>
+          <p:cNvPr id="26" name="TextBox 25"/>
           <p:cNvSpPr txBox="1"/>
           <p:nvPr/>
         </p:nvSpPr>
@@ -9157,7 +9092,7 @@
       </p:sp>
       <p:sp>
         <p:nvSpPr>
-          <p:cNvPr id="28" name="TextBox 27"/>
+          <p:cNvPr id="27" name="TextBox 26"/>
           <p:cNvSpPr txBox="1"/>
           <p:nvPr/>
         </p:nvSpPr>
@@ -9200,7 +9135,7 @@
       </p:sp>
       <p:sp>
         <p:nvSpPr>
-          <p:cNvPr id="29" name="TextBox 28"/>
+          <p:cNvPr id="28" name="TextBox 27"/>
           <p:cNvSpPr txBox="1"/>
           <p:nvPr/>
         </p:nvSpPr>
@@ -9243,7 +9178,7 @@
       </p:sp>
       <p:cxnSp>
         <p:nvCxnSpPr>
-          <p:cNvPr id="30" name="Connector 29"/>
+          <p:cNvPr id="29" name="Connector 28"/>
           <p:cNvCxnSpPr/>
           <p:nvPr/>
         </p:nvCxnSpPr>
@@ -9279,7 +9214,7 @@
       </p:cxnSp>
       <p:cxnSp>
         <p:nvCxnSpPr>
-          <p:cNvPr id="31" name="Connector 30"/>
+          <p:cNvPr id="30" name="Connector 29"/>
           <p:cNvCxnSpPr/>
           <p:nvPr/>
         </p:nvCxnSpPr>
@@ -9315,7 +9250,7 @@
       </p:cxnSp>
       <p:sp>
         <p:nvSpPr>
-          <p:cNvPr id="32" name="TextBox 31"/>
+          <p:cNvPr id="31" name="TextBox 30"/>
           <p:cNvSpPr txBox="1"/>
           <p:nvPr/>
         </p:nvSpPr>
@@ -9503,50 +9438,7 @@
       </p:sp>
       <p:sp>
         <p:nvSpPr>
-          <p:cNvPr id="5" name="TextBox 4"/>
-          <p:cNvSpPr txBox="1"/>
-          <p:nvPr/>
-        </p:nvSpPr>
-        <p:spPr>
-          <a:xfrm>
-            <a:off x="877824" y="1737360"/>
-            <a:ext cx="10241280" cy="548640"/>
-          </a:xfrm>
-          <a:prstGeom prst="rect">
-            <a:avLst/>
-          </a:prstGeom>
-          <a:noFill/>
-        </p:spPr>
-        <p:txBody>
-          <a:bodyPr wrap="square" anchor="t" lIns="0" rIns="0" tIns="0" bIns="0"/>
-          <a:lstStyle/>
-          <a:p>
-            <a:pPr algn="l">
-              <a:lnSpc>
-                <a:spcPct val="125000"/>
-              </a:lnSpc>
-              <a:spcBef>
-                <a:spcPts val="0"/>
-              </a:spcBef>
-              <a:spcAft>
-                <a:spcPts val="0"/>
-              </a:spcAft>
-            </a:pPr>
-            <a:r>
-              <a:rPr sz="1300" b="0" i="0" lang="en-AU" spc="0">
-                <a:solidFill>
-                  <a:srgbClr val="323232"/>
-                </a:solidFill>
-                <a:latin typeface="Inter"/>
-              </a:rPr>
-              <a:t>Integrated onshore–offshore teams delivering as one.</a:t>
-            </a:r>
-          </a:p>
-        </p:txBody>
-      </p:sp>
-      <p:sp>
-        <p:nvSpPr>
-          <p:cNvPr id="6" name="Rectangle 5"/>
+          <p:cNvPr id="5" name="Rectangle 4"/>
           <p:cNvSpPr/>
           <p:nvPr/>
         </p:nvSpPr>
@@ -9592,7 +9484,7 @@
       </p:sp>
       <p:sp>
         <p:nvSpPr>
-          <p:cNvPr id="7" name="TextBox 6"/>
+          <p:cNvPr id="6" name="TextBox 5"/>
           <p:cNvSpPr txBox="1"/>
           <p:nvPr/>
         </p:nvSpPr>
@@ -9635,7 +9527,7 @@
       </p:sp>
       <p:sp>
         <p:nvSpPr>
-          <p:cNvPr id="8" name="TextBox 7"/>
+          <p:cNvPr id="7" name="TextBox 6"/>
           <p:cNvSpPr txBox="1"/>
           <p:nvPr/>
         </p:nvSpPr>
@@ -9678,7 +9570,7 @@
       </p:sp>
       <p:sp>
         <p:nvSpPr>
-          <p:cNvPr id="9" name="Rectangle 8"/>
+          <p:cNvPr id="8" name="Rectangle 7"/>
           <p:cNvSpPr/>
           <p:nvPr/>
         </p:nvSpPr>
@@ -9724,7 +9616,7 @@
       </p:sp>
       <p:sp>
         <p:nvSpPr>
-          <p:cNvPr id="10" name="TextBox 9"/>
+          <p:cNvPr id="9" name="TextBox 8"/>
           <p:cNvSpPr txBox="1"/>
           <p:nvPr/>
         </p:nvSpPr>
@@ -9767,7 +9659,7 @@
       </p:sp>
       <p:sp>
         <p:nvSpPr>
-          <p:cNvPr id="11" name="TextBox 10"/>
+          <p:cNvPr id="10" name="TextBox 9"/>
           <p:cNvSpPr txBox="1"/>
           <p:nvPr/>
         </p:nvSpPr>
@@ -9808,6 +9700,42 @@
           </a:p>
         </p:txBody>
       </p:sp>
+      <p:cxnSp>
+        <p:nvCxnSpPr>
+          <p:cNvPr id="11" name="Connector 10"/>
+          <p:cNvCxnSpPr/>
+          <p:nvPr/>
+        </p:nvCxnSpPr>
+        <p:spPr>
+          <a:xfrm>
+            <a:off x="3372535" y="3246120"/>
+            <a:ext cx="0" cy="320040"/>
+          </a:xfrm>
+          <a:prstGeom prst="bentConnector3">
+            <a:avLst/>
+          </a:prstGeom>
+          <a:ln w="12700">
+            <a:solidFill>
+              <a:srgbClr val="AEAEAE"/>
+            </a:solidFill>
+          </a:ln>
+          <a:effectLst/>
+        </p:spPr>
+        <p:style>
+          <a:lnRef idx="2">
+            <a:schemeClr val="accent1"/>
+          </a:lnRef>
+          <a:fillRef idx="0">
+            <a:schemeClr val="accent1"/>
+          </a:fillRef>
+          <a:effectRef idx="1">
+            <a:schemeClr val="accent1"/>
+          </a:effectRef>
+          <a:fontRef idx="minor">
+            <a:schemeClr val="tx1"/>
+          </a:fontRef>
+        </p:style>
+      </p:cxnSp>
       <p:cxnSp>
         <p:nvCxnSpPr>
           <p:cNvPr id="12" name="Connector 11"/>
@@ -9816,7 +9744,7 @@
         </p:nvCxnSpPr>
         <p:spPr>
           <a:xfrm>
-            <a:off x="3372535" y="3246120"/>
+            <a:off x="8819159" y="3246120"/>
             <a:ext cx="0" cy="320040"/>
           </a:xfrm>
           <a:prstGeom prst="bentConnector3">
@@ -9852,8 +9780,8 @@
         </p:nvCxnSpPr>
         <p:spPr>
           <a:xfrm>
-            <a:off x="8819159" y="3246120"/>
-            <a:ext cx="0" cy="320040"/>
+            <a:off x="3372535" y="3566160"/>
+            <a:ext cx="5446624" cy="0"/>
           </a:xfrm>
           <a:prstGeom prst="bentConnector3">
             <a:avLst/>
@@ -9888,8 +9816,8 @@
         </p:nvCxnSpPr>
         <p:spPr>
           <a:xfrm>
-            <a:off x="3372535" y="3566160"/>
-            <a:ext cx="5446624" cy="0"/>
+            <a:off x="6095847" y="3566160"/>
+            <a:ext cx="0" cy="274320"/>
           </a:xfrm>
           <a:prstGeom prst="bentConnector3">
             <a:avLst/>
@@ -9916,45 +9844,9 @@
           </a:fontRef>
         </p:style>
       </p:cxnSp>
-      <p:cxnSp>
-        <p:nvCxnSpPr>
-          <p:cNvPr id="15" name="Connector 14"/>
-          <p:cNvCxnSpPr/>
-          <p:nvPr/>
-        </p:nvCxnSpPr>
-        <p:spPr>
-          <a:xfrm>
-            <a:off x="6095847" y="3566160"/>
-            <a:ext cx="0" cy="274320"/>
-          </a:xfrm>
-          <a:prstGeom prst="bentConnector3">
-            <a:avLst/>
-          </a:prstGeom>
-          <a:ln w="12700">
-            <a:solidFill>
-              <a:srgbClr val="AEAEAE"/>
-            </a:solidFill>
-          </a:ln>
-          <a:effectLst/>
-        </p:spPr>
-        <p:style>
-          <a:lnRef idx="2">
-            <a:schemeClr val="accent1"/>
-          </a:lnRef>
-          <a:fillRef idx="0">
-            <a:schemeClr val="accent1"/>
-          </a:fillRef>
-          <a:effectRef idx="1">
-            <a:schemeClr val="accent1"/>
-          </a:effectRef>
-          <a:fontRef idx="minor">
-            <a:schemeClr val="tx1"/>
-          </a:fontRef>
-        </p:style>
-      </p:cxnSp>
-      <p:sp>
-        <p:nvSpPr>
-          <p:cNvPr id="16" name="Rectangle 15"/>
+      <p:sp>
+        <p:nvSpPr>
+          <p:cNvPr id="15" name="Rectangle 14"/>
           <p:cNvSpPr/>
           <p:nvPr/>
         </p:nvSpPr>
@@ -10000,7 +9892,7 @@
       </p:sp>
       <p:sp>
         <p:nvSpPr>
-          <p:cNvPr id="17" name="TextBox 16"/>
+          <p:cNvPr id="16" name="TextBox 15"/>
           <p:cNvSpPr txBox="1"/>
           <p:nvPr/>
         </p:nvSpPr>
@@ -10043,7 +9935,7 @@
       </p:sp>
       <p:sp>
         <p:nvSpPr>
-          <p:cNvPr id="18" name="TextBox 17"/>
+          <p:cNvPr id="17" name="TextBox 16"/>
           <p:cNvSpPr txBox="1"/>
           <p:nvPr/>
         </p:nvSpPr>
@@ -10086,7 +9978,7 @@
       </p:sp>
       <p:sp>
         <p:nvSpPr>
-          <p:cNvPr id="19" name="Rectangle 18"/>
+          <p:cNvPr id="18" name="Rectangle 17"/>
           <p:cNvSpPr/>
           <p:nvPr/>
         </p:nvSpPr>
@@ -10132,7 +10024,7 @@
       </p:sp>
       <p:sp>
         <p:nvSpPr>
-          <p:cNvPr id="20" name="TextBox 19"/>
+          <p:cNvPr id="19" name="TextBox 18"/>
           <p:cNvSpPr txBox="1"/>
           <p:nvPr/>
         </p:nvSpPr>
@@ -10175,7 +10067,7 @@
       </p:sp>
       <p:sp>
         <p:nvSpPr>
-          <p:cNvPr id="21" name="TextBox 20"/>
+          <p:cNvPr id="20" name="TextBox 19"/>
           <p:cNvSpPr txBox="1"/>
           <p:nvPr/>
         </p:nvSpPr>
@@ -10218,7 +10110,7 @@
       </p:sp>
       <p:sp>
         <p:nvSpPr>
-          <p:cNvPr id="22" name="Rectangle 21"/>
+          <p:cNvPr id="21" name="Rectangle 20"/>
           <p:cNvSpPr/>
           <p:nvPr/>
         </p:nvSpPr>
@@ -10262,7 +10154,7 @@
       </p:sp>
       <p:sp>
         <p:nvSpPr>
-          <p:cNvPr id="23" name="TextBox 22"/>
+          <p:cNvPr id="22" name="TextBox 21"/>
           <p:cNvSpPr txBox="1"/>
           <p:nvPr/>
         </p:nvSpPr>
@@ -10305,7 +10197,7 @@
       </p:sp>
       <p:sp>
         <p:nvSpPr>
-          <p:cNvPr id="24" name="TextBox 23"/>
+          <p:cNvPr id="23" name="TextBox 22"/>
           <p:cNvSpPr txBox="1"/>
           <p:nvPr/>
         </p:nvSpPr>
@@ -10348,7 +10240,7 @@
       </p:sp>
       <p:sp>
         <p:nvSpPr>
-          <p:cNvPr id="25" name="Rectangle 24"/>
+          <p:cNvPr id="24" name="Rectangle 23"/>
           <p:cNvSpPr/>
           <p:nvPr/>
         </p:nvSpPr>
@@ -10392,7 +10284,7 @@
       </p:sp>
       <p:sp>
         <p:nvSpPr>
-          <p:cNvPr id="26" name="TextBox 25"/>
+          <p:cNvPr id="25" name="TextBox 24"/>
           <p:cNvSpPr txBox="1"/>
           <p:nvPr/>
         </p:nvSpPr>
@@ -10435,7 +10327,7 @@
       </p:sp>
       <p:sp>
         <p:nvSpPr>
-          <p:cNvPr id="27" name="TextBox 26"/>
+          <p:cNvPr id="26" name="TextBox 25"/>
           <p:cNvSpPr txBox="1"/>
           <p:nvPr/>
         </p:nvSpPr>
@@ -17881,15 +17773,682 @@
           </a:p>
         </p:txBody>
       </p:sp>
+      <p:sp>
+        <p:nvSpPr>
+          <p:cNvPr id="6" name="TextBox 5"/>
+          <p:cNvSpPr txBox="1"/>
+          <p:nvPr/>
+        </p:nvSpPr>
+        <p:spPr>
+          <a:xfrm>
+            <a:off x="877824" y="2468880"/>
+            <a:ext cx="4943703" cy="457200"/>
+          </a:xfrm>
+          <a:prstGeom prst="rect">
+            <a:avLst/>
+          </a:prstGeom>
+          <a:noFill/>
+        </p:spPr>
+        <p:txBody>
+          <a:bodyPr wrap="square" anchor="t" lIns="0" rIns="0" tIns="0" bIns="0"/>
+          <a:lstStyle/>
+          <a:p>
+            <a:pPr algn="l">
+              <a:lnSpc>
+                <a:spcPct val="100000"/>
+              </a:lnSpc>
+              <a:spcBef>
+                <a:spcPts val="0"/>
+              </a:spcBef>
+              <a:spcAft>
+                <a:spcPts val="0"/>
+              </a:spcAft>
+            </a:pPr>
+            <a:r>
+              <a:rPr sz="2000" b="1" i="0" lang="en-AU" spc="-40">
+                <a:solidFill>
+                  <a:srgbClr val="111111"/>
+                </a:solidFill>
+                <a:latin typeface="Inter"/>
+              </a:rPr>
+              <a:t>HCM</a:t>
+            </a:r>
+          </a:p>
+        </p:txBody>
+      </p:sp>
+      <p:sp>
+        <p:nvSpPr>
+          <p:cNvPr id="7" name="TextBox 6"/>
+          <p:cNvSpPr txBox="1"/>
+          <p:nvPr/>
+        </p:nvSpPr>
+        <p:spPr>
+          <a:xfrm>
+            <a:off x="877824" y="3063240"/>
+            <a:ext cx="2471851" cy="347472"/>
+          </a:xfrm>
+          <a:prstGeom prst="rect">
+            <a:avLst/>
+          </a:prstGeom>
+          <a:noFill/>
+        </p:spPr>
+        <p:txBody>
+          <a:bodyPr wrap="square" anchor="t" lIns="0" rIns="0" tIns="0" bIns="0"/>
+          <a:lstStyle/>
+          <a:p>
+            <a:pPr algn="l">
+              <a:lnSpc>
+                <a:spcPct val="112000"/>
+              </a:lnSpc>
+              <a:spcBef>
+                <a:spcPts val="0"/>
+              </a:spcBef>
+              <a:spcAft>
+                <a:spcPts val="0"/>
+              </a:spcAft>
+            </a:pPr>
+            <a:r>
+              <a:rPr sz="1050" b="1" i="0" lang="en-AU" spc="0">
+                <a:solidFill>
+                  <a:srgbClr val="EA493F"/>
+                </a:solidFill>
+                <a:latin typeface="Inter"/>
+              </a:rPr>
+              <a:t>—  </a:t>
+            </a:r>
+            <a:r>
+              <a:rPr sz="1050" b="0" i="0" lang="en-AU" spc="0">
+                <a:solidFill>
+                  <a:srgbClr val="323232"/>
+                </a:solidFill>
+                <a:latin typeface="Inter"/>
+              </a:rPr>
+              <a:t>Core HCM</a:t>
+            </a:r>
+          </a:p>
+        </p:txBody>
+      </p:sp>
+      <p:sp>
+        <p:nvSpPr>
+          <p:cNvPr id="8" name="TextBox 7"/>
+          <p:cNvSpPr txBox="1"/>
+          <p:nvPr/>
+        </p:nvSpPr>
+        <p:spPr>
+          <a:xfrm>
+            <a:off x="877824" y="3410712"/>
+            <a:ext cx="2471851" cy="347472"/>
+          </a:xfrm>
+          <a:prstGeom prst="rect">
+            <a:avLst/>
+          </a:prstGeom>
+          <a:noFill/>
+        </p:spPr>
+        <p:txBody>
+          <a:bodyPr wrap="square" anchor="t" lIns="0" rIns="0" tIns="0" bIns="0"/>
+          <a:lstStyle/>
+          <a:p>
+            <a:pPr algn="l">
+              <a:lnSpc>
+                <a:spcPct val="112000"/>
+              </a:lnSpc>
+              <a:spcBef>
+                <a:spcPts val="0"/>
+              </a:spcBef>
+              <a:spcAft>
+                <a:spcPts val="0"/>
+              </a:spcAft>
+            </a:pPr>
+            <a:r>
+              <a:rPr sz="1050" b="1" i="0" lang="en-AU" spc="0">
+                <a:solidFill>
+                  <a:srgbClr val="EA493F"/>
+                </a:solidFill>
+                <a:latin typeface="Inter"/>
+              </a:rPr>
+              <a:t>—  </a:t>
+            </a:r>
+            <a:r>
+              <a:rPr sz="1050" b="0" i="0" lang="en-AU" spc="0">
+                <a:solidFill>
+                  <a:srgbClr val="323232"/>
+                </a:solidFill>
+                <a:latin typeface="Inter"/>
+              </a:rPr>
+              <a:t>Absence</a:t>
+            </a:r>
+          </a:p>
+        </p:txBody>
+      </p:sp>
+      <p:sp>
+        <p:nvSpPr>
+          <p:cNvPr id="9" name="TextBox 8"/>
+          <p:cNvSpPr txBox="1"/>
+          <p:nvPr/>
+        </p:nvSpPr>
+        <p:spPr>
+          <a:xfrm>
+            <a:off x="877824" y="3758184"/>
+            <a:ext cx="2471851" cy="347472"/>
+          </a:xfrm>
+          <a:prstGeom prst="rect">
+            <a:avLst/>
+          </a:prstGeom>
+          <a:noFill/>
+        </p:spPr>
+        <p:txBody>
+          <a:bodyPr wrap="square" anchor="t" lIns="0" rIns="0" tIns="0" bIns="0"/>
+          <a:lstStyle/>
+          <a:p>
+            <a:pPr algn="l">
+              <a:lnSpc>
+                <a:spcPct val="112000"/>
+              </a:lnSpc>
+              <a:spcBef>
+                <a:spcPts val="0"/>
+              </a:spcBef>
+              <a:spcAft>
+                <a:spcPts val="0"/>
+              </a:spcAft>
+            </a:pPr>
+            <a:r>
+              <a:rPr sz="1050" b="1" i="0" lang="en-AU" spc="0">
+                <a:solidFill>
+                  <a:srgbClr val="EA493F"/>
+                </a:solidFill>
+                <a:latin typeface="Inter"/>
+              </a:rPr>
+              <a:t>—  </a:t>
+            </a:r>
+            <a:r>
+              <a:rPr sz="1050" b="0" i="0" lang="en-AU" spc="0">
+                <a:solidFill>
+                  <a:srgbClr val="323232"/>
+                </a:solidFill>
+                <a:latin typeface="Inter"/>
+              </a:rPr>
+              <a:t>Time Tracking</a:t>
+            </a:r>
+          </a:p>
+        </p:txBody>
+      </p:sp>
+      <p:sp>
+        <p:nvSpPr>
+          <p:cNvPr id="10" name="TextBox 9"/>
+          <p:cNvSpPr txBox="1"/>
+          <p:nvPr/>
+        </p:nvSpPr>
+        <p:spPr>
+          <a:xfrm>
+            <a:off x="877824" y="4105656"/>
+            <a:ext cx="2471851" cy="347472"/>
+          </a:xfrm>
+          <a:prstGeom prst="rect">
+            <a:avLst/>
+          </a:prstGeom>
+          <a:noFill/>
+        </p:spPr>
+        <p:txBody>
+          <a:bodyPr wrap="square" anchor="t" lIns="0" rIns="0" tIns="0" bIns="0"/>
+          <a:lstStyle/>
+          <a:p>
+            <a:pPr algn="l">
+              <a:lnSpc>
+                <a:spcPct val="112000"/>
+              </a:lnSpc>
+              <a:spcBef>
+                <a:spcPts val="0"/>
+              </a:spcBef>
+              <a:spcAft>
+                <a:spcPts val="0"/>
+              </a:spcAft>
+            </a:pPr>
+            <a:r>
+              <a:rPr sz="1050" b="1" i="0" lang="en-AU" spc="0">
+                <a:solidFill>
+                  <a:srgbClr val="EA493F"/>
+                </a:solidFill>
+                <a:latin typeface="Inter"/>
+              </a:rPr>
+              <a:t>—  </a:t>
+            </a:r>
+            <a:r>
+              <a:rPr sz="1050" b="0" i="0" lang="en-AU" spc="0">
+                <a:solidFill>
+                  <a:srgbClr val="323232"/>
+                </a:solidFill>
+                <a:latin typeface="Inter"/>
+              </a:rPr>
+              <a:t>Recruiting</a:t>
+            </a:r>
+          </a:p>
+        </p:txBody>
+      </p:sp>
+      <p:sp>
+        <p:nvSpPr>
+          <p:cNvPr id="11" name="TextBox 10"/>
+          <p:cNvSpPr txBox="1"/>
+          <p:nvPr/>
+        </p:nvSpPr>
+        <p:spPr>
+          <a:xfrm>
+            <a:off x="877824" y="4453128"/>
+            <a:ext cx="2471851" cy="347472"/>
+          </a:xfrm>
+          <a:prstGeom prst="rect">
+            <a:avLst/>
+          </a:prstGeom>
+          <a:noFill/>
+        </p:spPr>
+        <p:txBody>
+          <a:bodyPr wrap="square" anchor="t" lIns="0" rIns="0" tIns="0" bIns="0"/>
+          <a:lstStyle/>
+          <a:p>
+            <a:pPr algn="l">
+              <a:lnSpc>
+                <a:spcPct val="112000"/>
+              </a:lnSpc>
+              <a:spcBef>
+                <a:spcPts val="0"/>
+              </a:spcBef>
+              <a:spcAft>
+                <a:spcPts val="0"/>
+              </a:spcAft>
+            </a:pPr>
+            <a:r>
+              <a:rPr sz="1050" b="1" i="0" lang="en-AU" spc="0">
+                <a:solidFill>
+                  <a:srgbClr val="EA493F"/>
+                </a:solidFill>
+                <a:latin typeface="Inter"/>
+              </a:rPr>
+              <a:t>—  </a:t>
+            </a:r>
+            <a:r>
+              <a:rPr sz="1050" b="0" i="0" lang="en-AU" spc="0">
+                <a:solidFill>
+                  <a:srgbClr val="323232"/>
+                </a:solidFill>
+                <a:latin typeface="Inter"/>
+              </a:rPr>
+              <a:t>Talent &amp; Performance</a:t>
+            </a:r>
+          </a:p>
+        </p:txBody>
+      </p:sp>
+      <p:sp>
+        <p:nvSpPr>
+          <p:cNvPr id="12" name="TextBox 11"/>
+          <p:cNvSpPr txBox="1"/>
+          <p:nvPr/>
+        </p:nvSpPr>
+        <p:spPr>
+          <a:xfrm>
+            <a:off x="877824" y="4800600"/>
+            <a:ext cx="2471851" cy="347472"/>
+          </a:xfrm>
+          <a:prstGeom prst="rect">
+            <a:avLst/>
+          </a:prstGeom>
+          <a:noFill/>
+        </p:spPr>
+        <p:txBody>
+          <a:bodyPr wrap="square" anchor="t" lIns="0" rIns="0" tIns="0" bIns="0"/>
+          <a:lstStyle/>
+          <a:p>
+            <a:pPr algn="l">
+              <a:lnSpc>
+                <a:spcPct val="112000"/>
+              </a:lnSpc>
+              <a:spcBef>
+                <a:spcPts val="0"/>
+              </a:spcBef>
+              <a:spcAft>
+                <a:spcPts val="0"/>
+              </a:spcAft>
+            </a:pPr>
+            <a:r>
+              <a:rPr sz="1050" b="1" i="0" lang="en-AU" spc="0">
+                <a:solidFill>
+                  <a:srgbClr val="EA493F"/>
+                </a:solidFill>
+                <a:latin typeface="Inter"/>
+              </a:rPr>
+              <a:t>—  </a:t>
+            </a:r>
+            <a:r>
+              <a:rPr sz="1050" b="0" i="0" lang="en-AU" spc="0">
+                <a:solidFill>
+                  <a:srgbClr val="323232"/>
+                </a:solidFill>
+                <a:latin typeface="Inter"/>
+              </a:rPr>
+              <a:t>Compensation</a:t>
+            </a:r>
+          </a:p>
+        </p:txBody>
+      </p:sp>
+      <p:sp>
+        <p:nvSpPr>
+          <p:cNvPr id="13" name="TextBox 12"/>
+          <p:cNvSpPr txBox="1"/>
+          <p:nvPr/>
+        </p:nvSpPr>
+        <p:spPr>
+          <a:xfrm>
+            <a:off x="3349675" y="3063240"/>
+            <a:ext cx="2471851" cy="347472"/>
+          </a:xfrm>
+          <a:prstGeom prst="rect">
+            <a:avLst/>
+          </a:prstGeom>
+          <a:noFill/>
+        </p:spPr>
+        <p:txBody>
+          <a:bodyPr wrap="square" anchor="t" lIns="0" rIns="0" tIns="0" bIns="0"/>
+          <a:lstStyle/>
+          <a:p>
+            <a:pPr algn="l">
+              <a:lnSpc>
+                <a:spcPct val="112000"/>
+              </a:lnSpc>
+              <a:spcBef>
+                <a:spcPts val="0"/>
+              </a:spcBef>
+              <a:spcAft>
+                <a:spcPts val="0"/>
+              </a:spcAft>
+            </a:pPr>
+            <a:r>
+              <a:rPr sz="1050" b="1" i="0" lang="en-AU" spc="0">
+                <a:solidFill>
+                  <a:srgbClr val="EA493F"/>
+                </a:solidFill>
+                <a:latin typeface="Inter"/>
+              </a:rPr>
+              <a:t>—  </a:t>
+            </a:r>
+            <a:r>
+              <a:rPr sz="1050" b="0" i="0" lang="en-AU" spc="0">
+                <a:solidFill>
+                  <a:srgbClr val="323232"/>
+                </a:solidFill>
+                <a:latin typeface="Inter"/>
+              </a:rPr>
+              <a:t>Benefits</a:t>
+            </a:r>
+          </a:p>
+        </p:txBody>
+      </p:sp>
+      <p:sp>
+        <p:nvSpPr>
+          <p:cNvPr id="14" name="TextBox 13"/>
+          <p:cNvSpPr txBox="1"/>
+          <p:nvPr/>
+        </p:nvSpPr>
+        <p:spPr>
+          <a:xfrm>
+            <a:off x="3349675" y="3410712"/>
+            <a:ext cx="2471851" cy="347472"/>
+          </a:xfrm>
+          <a:prstGeom prst="rect">
+            <a:avLst/>
+          </a:prstGeom>
+          <a:noFill/>
+        </p:spPr>
+        <p:txBody>
+          <a:bodyPr wrap="square" anchor="t" lIns="0" rIns="0" tIns="0" bIns="0"/>
+          <a:lstStyle/>
+          <a:p>
+            <a:pPr algn="l">
+              <a:lnSpc>
+                <a:spcPct val="112000"/>
+              </a:lnSpc>
+              <a:spcBef>
+                <a:spcPts val="0"/>
+              </a:spcBef>
+              <a:spcAft>
+                <a:spcPts val="0"/>
+              </a:spcAft>
+            </a:pPr>
+            <a:r>
+              <a:rPr sz="1050" b="1" i="0" lang="en-AU" spc="0">
+                <a:solidFill>
+                  <a:srgbClr val="EA493F"/>
+                </a:solidFill>
+                <a:latin typeface="Inter"/>
+              </a:rPr>
+              <a:t>—  </a:t>
+            </a:r>
+            <a:r>
+              <a:rPr sz="1050" b="0" i="0" lang="en-AU" spc="0">
+                <a:solidFill>
+                  <a:srgbClr val="323232"/>
+                </a:solidFill>
+                <a:latin typeface="Inter"/>
+              </a:rPr>
+              <a:t>Payroll (AU / global)</a:t>
+            </a:r>
+          </a:p>
+        </p:txBody>
+      </p:sp>
+      <p:sp>
+        <p:nvSpPr>
+          <p:cNvPr id="15" name="TextBox 14"/>
+          <p:cNvSpPr txBox="1"/>
+          <p:nvPr/>
+        </p:nvSpPr>
+        <p:spPr>
+          <a:xfrm>
+            <a:off x="3349675" y="3758184"/>
+            <a:ext cx="2471851" cy="347472"/>
+          </a:xfrm>
+          <a:prstGeom prst="rect">
+            <a:avLst/>
+          </a:prstGeom>
+          <a:noFill/>
+        </p:spPr>
+        <p:txBody>
+          <a:bodyPr wrap="square" anchor="t" lIns="0" rIns="0" tIns="0" bIns="0"/>
+          <a:lstStyle/>
+          <a:p>
+            <a:pPr algn="l">
+              <a:lnSpc>
+                <a:spcPct val="112000"/>
+              </a:lnSpc>
+              <a:spcBef>
+                <a:spcPts val="0"/>
+              </a:spcBef>
+              <a:spcAft>
+                <a:spcPts val="0"/>
+              </a:spcAft>
+            </a:pPr>
+            <a:r>
+              <a:rPr sz="1050" b="1" i="0" lang="en-AU" spc="0">
+                <a:solidFill>
+                  <a:srgbClr val="EA493F"/>
+                </a:solidFill>
+                <a:latin typeface="Inter"/>
+              </a:rPr>
+              <a:t>—  </a:t>
+            </a:r>
+            <a:r>
+              <a:rPr sz="1050" b="0" i="0" lang="en-AU" spc="0">
+                <a:solidFill>
+                  <a:srgbClr val="323232"/>
+                </a:solidFill>
+                <a:latin typeface="Inter"/>
+              </a:rPr>
+              <a:t>Learning</a:t>
+            </a:r>
+          </a:p>
+        </p:txBody>
+      </p:sp>
+      <p:sp>
+        <p:nvSpPr>
+          <p:cNvPr id="16" name="TextBox 15"/>
+          <p:cNvSpPr txBox="1"/>
+          <p:nvPr/>
+        </p:nvSpPr>
+        <p:spPr>
+          <a:xfrm>
+            <a:off x="3349675" y="4105656"/>
+            <a:ext cx="2471851" cy="347472"/>
+          </a:xfrm>
+          <a:prstGeom prst="rect">
+            <a:avLst/>
+          </a:prstGeom>
+          <a:noFill/>
+        </p:spPr>
+        <p:txBody>
+          <a:bodyPr wrap="square" anchor="t" lIns="0" rIns="0" tIns="0" bIns="0"/>
+          <a:lstStyle/>
+          <a:p>
+            <a:pPr algn="l">
+              <a:lnSpc>
+                <a:spcPct val="112000"/>
+              </a:lnSpc>
+              <a:spcBef>
+                <a:spcPts val="0"/>
+              </a:spcBef>
+              <a:spcAft>
+                <a:spcPts val="0"/>
+              </a:spcAft>
+            </a:pPr>
+            <a:r>
+              <a:rPr sz="1050" b="1" i="0" lang="en-AU" spc="0">
+                <a:solidFill>
+                  <a:srgbClr val="EA493F"/>
+                </a:solidFill>
+                <a:latin typeface="Inter"/>
+              </a:rPr>
+              <a:t>—  </a:t>
+            </a:r>
+            <a:r>
+              <a:rPr sz="1050" b="0" i="0" lang="en-AU" spc="0">
+                <a:solidFill>
+                  <a:srgbClr val="323232"/>
+                </a:solidFill>
+                <a:latin typeface="Inter"/>
+              </a:rPr>
+              <a:t>Security &amp; BP config</a:t>
+            </a:r>
+          </a:p>
+        </p:txBody>
+      </p:sp>
+      <p:sp>
+        <p:nvSpPr>
+          <p:cNvPr id="17" name="TextBox 16"/>
+          <p:cNvSpPr txBox="1"/>
+          <p:nvPr/>
+        </p:nvSpPr>
+        <p:spPr>
+          <a:xfrm>
+            <a:off x="3349675" y="4453128"/>
+            <a:ext cx="2471851" cy="347472"/>
+          </a:xfrm>
+          <a:prstGeom prst="rect">
+            <a:avLst/>
+          </a:prstGeom>
+          <a:noFill/>
+        </p:spPr>
+        <p:txBody>
+          <a:bodyPr wrap="square" anchor="t" lIns="0" rIns="0" tIns="0" bIns="0"/>
+          <a:lstStyle/>
+          <a:p>
+            <a:pPr algn="l">
+              <a:lnSpc>
+                <a:spcPct val="112000"/>
+              </a:lnSpc>
+              <a:spcBef>
+                <a:spcPts val="0"/>
+              </a:spcBef>
+              <a:spcAft>
+                <a:spcPts val="0"/>
+              </a:spcAft>
+            </a:pPr>
+            <a:r>
+              <a:rPr sz="1050" b="1" i="0" lang="en-AU" spc="0">
+                <a:solidFill>
+                  <a:srgbClr val="EA493F"/>
+                </a:solidFill>
+                <a:latin typeface="Inter"/>
+              </a:rPr>
+              <a:t>—  </a:t>
+            </a:r>
+            <a:r>
+              <a:rPr sz="1050" b="0" i="0" lang="en-AU" spc="0">
+                <a:solidFill>
+                  <a:srgbClr val="323232"/>
+                </a:solidFill>
+                <a:latin typeface="Inter"/>
+              </a:rPr>
+              <a:t>Integrations (EIB, CC, Studio)</a:t>
+            </a:r>
+          </a:p>
+        </p:txBody>
+      </p:sp>
+      <p:sp>
+        <p:nvSpPr>
+          <p:cNvPr id="18" name="TextBox 17"/>
+          <p:cNvSpPr txBox="1"/>
+          <p:nvPr/>
+        </p:nvSpPr>
+        <p:spPr>
+          <a:xfrm>
+            <a:off x="3349675" y="4800600"/>
+            <a:ext cx="2471851" cy="347472"/>
+          </a:xfrm>
+          <a:prstGeom prst="rect">
+            <a:avLst/>
+          </a:prstGeom>
+          <a:noFill/>
+        </p:spPr>
+        <p:txBody>
+          <a:bodyPr wrap="square" anchor="t" lIns="0" rIns="0" tIns="0" bIns="0"/>
+          <a:lstStyle/>
+          <a:p>
+            <a:pPr algn="l">
+              <a:lnSpc>
+                <a:spcPct val="112000"/>
+              </a:lnSpc>
+              <a:spcBef>
+                <a:spcPts val="0"/>
+              </a:spcBef>
+              <a:spcAft>
+                <a:spcPts val="0"/>
+              </a:spcAft>
+            </a:pPr>
+            <a:r>
+              <a:rPr sz="1050" b="1" i="0" lang="en-AU" spc="0">
+                <a:solidFill>
+                  <a:srgbClr val="EA493F"/>
+                </a:solidFill>
+                <a:latin typeface="Inter"/>
+              </a:rPr>
+              <a:t>—  </a:t>
+            </a:r>
+            <a:r>
+              <a:rPr sz="1050" b="0" i="0" lang="en-AU" spc="0">
+                <a:solidFill>
+                  <a:srgbClr val="323232"/>
+                </a:solidFill>
+                <a:latin typeface="Inter"/>
+              </a:rPr>
+              <a:t>Advanced &amp; Composite Reporting</a:t>
+            </a:r>
+          </a:p>
+        </p:txBody>
+      </p:sp>
       <p:cxnSp>
         <p:nvCxnSpPr>
-          <p:cNvPr id="6" name="Connector 5"/>
+          <p:cNvPr id="19" name="Connector 18"/>
           <p:cNvCxnSpPr/>
           <p:nvPr/>
         </p:nvCxnSpPr>
         <p:spPr>
           <a:xfrm>
-            <a:off x="6089904" y="2468880"/>
+            <a:off x="6095847" y="2468880"/>
             <a:ext cx="0" cy="3200400"/>
           </a:xfrm>
           <a:prstGeom prst="bentConnector3">
@@ -17919,14 +18478,14 @@
       </p:cxnSp>
       <p:sp>
         <p:nvSpPr>
-          <p:cNvPr id="7" name="TextBox 6"/>
-          <p:cNvSpPr txBox="1"/>
-          <p:nvPr/>
-        </p:nvSpPr>
-        <p:spPr>
-          <a:xfrm>
-            <a:off x="877824" y="2468880"/>
-            <a:ext cx="4572000" cy="457200"/>
+          <p:cNvPr id="20" name="TextBox 19"/>
+          <p:cNvSpPr txBox="1"/>
+          <p:nvPr/>
+        </p:nvSpPr>
+        <p:spPr>
+          <a:xfrm>
+            <a:off x="6406743" y="2468880"/>
+            <a:ext cx="4632807" cy="457200"/>
           </a:xfrm>
           <a:prstGeom prst="rect">
             <a:avLst/>
@@ -17949,27 +18508,27 @@
               </a:spcAft>
             </a:pPr>
             <a:r>
-              <a:rPr sz="2200" b="1" i="0" lang="en-AU" spc="-44">
+              <a:rPr sz="2000" b="1" i="0" lang="en-AU" spc="-40">
                 <a:solidFill>
                   <a:srgbClr val="111111"/>
                 </a:solidFill>
                 <a:latin typeface="Inter"/>
               </a:rPr>
-              <a:t>HCM</a:t>
-            </a:r>
-          </a:p>
-        </p:txBody>
-      </p:sp>
-      <p:sp>
-        <p:nvSpPr>
-          <p:cNvPr id="8" name="TextBox 7"/>
-          <p:cNvSpPr txBox="1"/>
-          <p:nvPr/>
-        </p:nvSpPr>
-        <p:spPr>
-          <a:xfrm>
-            <a:off x="877824" y="3063240"/>
-            <a:ext cx="2286000" cy="347472"/>
+              <a:t>FIN</a:t>
+            </a:r>
+          </a:p>
+        </p:txBody>
+      </p:sp>
+      <p:sp>
+        <p:nvSpPr>
+          <p:cNvPr id="21" name="TextBox 20"/>
+          <p:cNvSpPr txBox="1"/>
+          <p:nvPr/>
+        </p:nvSpPr>
+        <p:spPr>
+          <a:xfrm>
+            <a:off x="6406743" y="3063240"/>
+            <a:ext cx="2316403" cy="347472"/>
           </a:xfrm>
           <a:prstGeom prst="rect">
             <a:avLst/>
@@ -18007,21 +18566,21 @@
                 </a:solidFill>
                 <a:latin typeface="Inter"/>
               </a:rPr>
-              <a:t>Core HCM</a:t>
-            </a:r>
-          </a:p>
-        </p:txBody>
-      </p:sp>
-      <p:sp>
-        <p:nvSpPr>
-          <p:cNvPr id="9" name="TextBox 8"/>
-          <p:cNvSpPr txBox="1"/>
-          <p:nvPr/>
-        </p:nvSpPr>
-        <p:spPr>
-          <a:xfrm>
-            <a:off x="877824" y="3410712"/>
-            <a:ext cx="2286000" cy="347472"/>
+              <a:t>Financial Accounting (GL)</a:t>
+            </a:r>
+          </a:p>
+        </p:txBody>
+      </p:sp>
+      <p:sp>
+        <p:nvSpPr>
+          <p:cNvPr id="22" name="TextBox 21"/>
+          <p:cNvSpPr txBox="1"/>
+          <p:nvPr/>
+        </p:nvSpPr>
+        <p:spPr>
+          <a:xfrm>
+            <a:off x="6406743" y="3410712"/>
+            <a:ext cx="2316403" cy="347472"/>
           </a:xfrm>
           <a:prstGeom prst="rect">
             <a:avLst/>
@@ -18059,21 +18618,21 @@
                 </a:solidFill>
                 <a:latin typeface="Inter"/>
               </a:rPr>
-              <a:t>Absence</a:t>
-            </a:r>
-          </a:p>
-        </p:txBody>
-      </p:sp>
-      <p:sp>
-        <p:nvSpPr>
-          <p:cNvPr id="10" name="TextBox 9"/>
-          <p:cNvSpPr txBox="1"/>
-          <p:nvPr/>
-        </p:nvSpPr>
-        <p:spPr>
-          <a:xfrm>
-            <a:off x="877824" y="3758184"/>
-            <a:ext cx="2286000" cy="347472"/>
+              <a:t>Accounting Center</a:t>
+            </a:r>
+          </a:p>
+        </p:txBody>
+      </p:sp>
+      <p:sp>
+        <p:nvSpPr>
+          <p:cNvPr id="23" name="TextBox 22"/>
+          <p:cNvSpPr txBox="1"/>
+          <p:nvPr/>
+        </p:nvSpPr>
+        <p:spPr>
+          <a:xfrm>
+            <a:off x="6406743" y="3758184"/>
+            <a:ext cx="2316403" cy="347472"/>
           </a:xfrm>
           <a:prstGeom prst="rect">
             <a:avLst/>
@@ -18111,21 +18670,21 @@
                 </a:solidFill>
                 <a:latin typeface="Inter"/>
               </a:rPr>
-              <a:t>Time Tracking</a:t>
-            </a:r>
-          </a:p>
-        </p:txBody>
-      </p:sp>
-      <p:sp>
-        <p:nvSpPr>
-          <p:cNvPr id="11" name="TextBox 10"/>
-          <p:cNvSpPr txBox="1"/>
-          <p:nvPr/>
-        </p:nvSpPr>
-        <p:spPr>
-          <a:xfrm>
-            <a:off x="877824" y="4105656"/>
-            <a:ext cx="2286000" cy="347472"/>
+              <a:t>Accounts Payable / Suppliers</a:t>
+            </a:r>
+          </a:p>
+        </p:txBody>
+      </p:sp>
+      <p:sp>
+        <p:nvSpPr>
+          <p:cNvPr id="24" name="TextBox 23"/>
+          <p:cNvSpPr txBox="1"/>
+          <p:nvPr/>
+        </p:nvSpPr>
+        <p:spPr>
+          <a:xfrm>
+            <a:off x="6406743" y="4105656"/>
+            <a:ext cx="2316403" cy="347472"/>
           </a:xfrm>
           <a:prstGeom prst="rect">
             <a:avLst/>
@@ -18163,21 +18722,21 @@
                 </a:solidFill>
                 <a:latin typeface="Inter"/>
               </a:rPr>
-              <a:t>Recruiting</a:t>
-            </a:r>
-          </a:p>
-        </p:txBody>
-      </p:sp>
-      <p:sp>
-        <p:nvSpPr>
-          <p:cNvPr id="12" name="TextBox 11"/>
-          <p:cNvSpPr txBox="1"/>
-          <p:nvPr/>
-        </p:nvSpPr>
-        <p:spPr>
-          <a:xfrm>
-            <a:off x="877824" y="4453128"/>
-            <a:ext cx="2286000" cy="347472"/>
+              <a:t>Accounts Receivable / Customers</a:t>
+            </a:r>
+          </a:p>
+        </p:txBody>
+      </p:sp>
+      <p:sp>
+        <p:nvSpPr>
+          <p:cNvPr id="25" name="TextBox 24"/>
+          <p:cNvSpPr txBox="1"/>
+          <p:nvPr/>
+        </p:nvSpPr>
+        <p:spPr>
+          <a:xfrm>
+            <a:off x="6406743" y="4453128"/>
+            <a:ext cx="2316403" cy="347472"/>
           </a:xfrm>
           <a:prstGeom prst="rect">
             <a:avLst/>
@@ -18215,21 +18774,21 @@
                 </a:solidFill>
                 <a:latin typeface="Inter"/>
               </a:rPr>
-              <a:t>Talent &amp; Performance</a:t>
-            </a:r>
-          </a:p>
-        </p:txBody>
-      </p:sp>
-      <p:sp>
-        <p:nvSpPr>
-          <p:cNvPr id="13" name="TextBox 12"/>
-          <p:cNvSpPr txBox="1"/>
-          <p:nvPr/>
-        </p:nvSpPr>
-        <p:spPr>
-          <a:xfrm>
-            <a:off x="877824" y="4800600"/>
-            <a:ext cx="2286000" cy="347472"/>
+              <a:t>Procurement</a:t>
+            </a:r>
+          </a:p>
+        </p:txBody>
+      </p:sp>
+      <p:sp>
+        <p:nvSpPr>
+          <p:cNvPr id="26" name="TextBox 25"/>
+          <p:cNvSpPr txBox="1"/>
+          <p:nvPr/>
+        </p:nvSpPr>
+        <p:spPr>
+          <a:xfrm>
+            <a:off x="6406743" y="4800600"/>
+            <a:ext cx="2316403" cy="347472"/>
           </a:xfrm>
           <a:prstGeom prst="rect">
             <a:avLst/>
@@ -18267,21 +18826,21 @@
                 </a:solidFill>
                 <a:latin typeface="Inter"/>
               </a:rPr>
-              <a:t>Compensation</a:t>
-            </a:r>
-          </a:p>
-        </p:txBody>
-      </p:sp>
-      <p:sp>
-        <p:nvSpPr>
-          <p:cNvPr id="14" name="TextBox 13"/>
-          <p:cNvSpPr txBox="1"/>
-          <p:nvPr/>
-        </p:nvSpPr>
-        <p:spPr>
-          <a:xfrm>
-            <a:off x="3209544" y="3063240"/>
-            <a:ext cx="2286000" cy="347472"/>
+              <a:t>Expenses</a:t>
+            </a:r>
+          </a:p>
+        </p:txBody>
+      </p:sp>
+      <p:sp>
+        <p:nvSpPr>
+          <p:cNvPr id="27" name="TextBox 26"/>
+          <p:cNvSpPr txBox="1"/>
+          <p:nvPr/>
+        </p:nvSpPr>
+        <p:spPr>
+          <a:xfrm>
+            <a:off x="8723147" y="3063240"/>
+            <a:ext cx="2316403" cy="347472"/>
           </a:xfrm>
           <a:prstGeom prst="rect">
             <a:avLst/>
@@ -18319,21 +18878,21 @@
                 </a:solidFill>
                 <a:latin typeface="Inter"/>
               </a:rPr>
-              <a:t>Benefits</a:t>
-            </a:r>
-          </a:p>
-        </p:txBody>
-      </p:sp>
-      <p:sp>
-        <p:nvSpPr>
-          <p:cNvPr id="15" name="TextBox 14"/>
-          <p:cNvSpPr txBox="1"/>
-          <p:nvPr/>
-        </p:nvSpPr>
-        <p:spPr>
-          <a:xfrm>
-            <a:off x="3209544" y="3410712"/>
-            <a:ext cx="2286000" cy="347472"/>
+              <a:t>Banking &amp; Settlement</a:t>
+            </a:r>
+          </a:p>
+        </p:txBody>
+      </p:sp>
+      <p:sp>
+        <p:nvSpPr>
+          <p:cNvPr id="28" name="TextBox 27"/>
+          <p:cNvSpPr txBox="1"/>
+          <p:nvPr/>
+        </p:nvSpPr>
+        <p:spPr>
+          <a:xfrm>
+            <a:off x="8723147" y="3410712"/>
+            <a:ext cx="2316403" cy="347472"/>
           </a:xfrm>
           <a:prstGeom prst="rect">
             <a:avLst/>
@@ -18371,21 +18930,21 @@
                 </a:solidFill>
                 <a:latin typeface="Inter"/>
               </a:rPr>
-              <a:t>Payroll (AU / global)</a:t>
-            </a:r>
-          </a:p>
-        </p:txBody>
-      </p:sp>
-      <p:sp>
-        <p:nvSpPr>
-          <p:cNvPr id="16" name="TextBox 15"/>
-          <p:cNvSpPr txBox="1"/>
-          <p:nvPr/>
-        </p:nvSpPr>
-        <p:spPr>
-          <a:xfrm>
-            <a:off x="3209544" y="3758184"/>
-            <a:ext cx="2286000" cy="347472"/>
+              <a:t>Business Assets</a:t>
+            </a:r>
+          </a:p>
+        </p:txBody>
+      </p:sp>
+      <p:sp>
+        <p:nvSpPr>
+          <p:cNvPr id="29" name="TextBox 28"/>
+          <p:cNvSpPr txBox="1"/>
+          <p:nvPr/>
+        </p:nvSpPr>
+        <p:spPr>
+          <a:xfrm>
+            <a:off x="8723147" y="3758184"/>
+            <a:ext cx="2316403" cy="347472"/>
           </a:xfrm>
           <a:prstGeom prst="rect">
             <a:avLst/>
@@ -18423,21 +18982,21 @@
                 </a:solidFill>
                 <a:latin typeface="Inter"/>
               </a:rPr>
-              <a:t>Learning</a:t>
-            </a:r>
-          </a:p>
-        </p:txBody>
-      </p:sp>
-      <p:sp>
-        <p:nvSpPr>
-          <p:cNvPr id="17" name="TextBox 16"/>
-          <p:cNvSpPr txBox="1"/>
-          <p:nvPr/>
-        </p:nvSpPr>
-        <p:spPr>
-          <a:xfrm>
-            <a:off x="3209544" y="4105656"/>
-            <a:ext cx="2286000" cy="347472"/>
+              <a:t>Financial Reporting</a:t>
+            </a:r>
+          </a:p>
+        </p:txBody>
+      </p:sp>
+      <p:sp>
+        <p:nvSpPr>
+          <p:cNvPr id="30" name="TextBox 29"/>
+          <p:cNvSpPr txBox="1"/>
+          <p:nvPr/>
+        </p:nvSpPr>
+        <p:spPr>
+          <a:xfrm>
+            <a:off x="8723147" y="4105656"/>
+            <a:ext cx="2316403" cy="347472"/>
           </a:xfrm>
           <a:prstGeom prst="rect">
             <a:avLst/>
@@ -18475,6 +19034,58 @@
                 </a:solidFill>
                 <a:latin typeface="Inter"/>
               </a:rPr>
+              <a:t>Prism Analytics</a:t>
+            </a:r>
+          </a:p>
+        </p:txBody>
+      </p:sp>
+      <p:sp>
+        <p:nvSpPr>
+          <p:cNvPr id="31" name="TextBox 30"/>
+          <p:cNvSpPr txBox="1"/>
+          <p:nvPr/>
+        </p:nvSpPr>
+        <p:spPr>
+          <a:xfrm>
+            <a:off x="8723147" y="4453128"/>
+            <a:ext cx="2316403" cy="347472"/>
+          </a:xfrm>
+          <a:prstGeom prst="rect">
+            <a:avLst/>
+          </a:prstGeom>
+          <a:noFill/>
+        </p:spPr>
+        <p:txBody>
+          <a:bodyPr wrap="square" anchor="t" lIns="0" rIns="0" tIns="0" bIns="0"/>
+          <a:lstStyle/>
+          <a:p>
+            <a:pPr algn="l">
+              <a:lnSpc>
+                <a:spcPct val="112000"/>
+              </a:lnSpc>
+              <a:spcBef>
+                <a:spcPts val="0"/>
+              </a:spcBef>
+              <a:spcAft>
+                <a:spcPts val="0"/>
+              </a:spcAft>
+            </a:pPr>
+            <a:r>
+              <a:rPr sz="1050" b="1" i="0" lang="en-AU" spc="0">
+                <a:solidFill>
+                  <a:srgbClr val="EA493F"/>
+                </a:solidFill>
+                <a:latin typeface="Inter"/>
+              </a:rPr>
+              <a:t>—  </a:t>
+            </a:r>
+            <a:r>
+              <a:rPr sz="1050" b="0" i="0" lang="en-AU" spc="0">
+                <a:solidFill>
+                  <a:srgbClr val="323232"/>
+                </a:solidFill>
+                <a:latin typeface="Inter"/>
+              </a:rPr>
               <a:t>Security &amp; BP config</a:t>
             </a:r>
           </a:p>
@@ -18482,14 +19093,14 @@
       </p:sp>
       <p:sp>
         <p:nvSpPr>
-          <p:cNvPr id="18" name="TextBox 17"/>
-          <p:cNvSpPr txBox="1"/>
-          <p:nvPr/>
-        </p:nvSpPr>
-        <p:spPr>
-          <a:xfrm>
-            <a:off x="3209544" y="4453128"/>
-            <a:ext cx="2286000" cy="347472"/>
+          <p:cNvPr id="32" name="TextBox 31"/>
+          <p:cNvSpPr txBox="1"/>
+          <p:nvPr/>
+        </p:nvSpPr>
+        <p:spPr>
+          <a:xfrm>
+            <a:off x="8723147" y="4800600"/>
+            <a:ext cx="2316403" cy="347472"/>
           </a:xfrm>
           <a:prstGeom prst="rect">
             <a:avLst/>
@@ -18534,14 +19145,14 @@
       </p:sp>
       <p:sp>
         <p:nvSpPr>
-          <p:cNvPr id="19" name="TextBox 18"/>
-          <p:cNvSpPr txBox="1"/>
-          <p:nvPr/>
-        </p:nvSpPr>
-        <p:spPr>
-          <a:xfrm>
-            <a:off x="3209544" y="4800600"/>
-            <a:ext cx="2286000" cy="347472"/>
+          <p:cNvPr id="33" name="TextBox 32"/>
+          <p:cNvSpPr txBox="1"/>
+          <p:nvPr/>
+        </p:nvSpPr>
+        <p:spPr>
+          <a:xfrm>
+            <a:off x="877824" y="6035040"/>
+            <a:ext cx="10436047" cy="365760"/>
           </a:xfrm>
           <a:prstGeom prst="rect">
             <a:avLst/>
@@ -18554,751 +19165,23 @@
           <a:p>
             <a:pPr algn="l">
               <a:lnSpc>
-                <a:spcPct val="112000"/>
-              </a:lnSpc>
-              <a:spcBef>
-                <a:spcPts val="0"/>
-              </a:spcBef>
-              <a:spcAft>
-                <a:spcPts val="0"/>
-              </a:spcAft>
-            </a:pPr>
-            <a:r>
-              <a:rPr sz="1050" b="1" i="0" lang="en-AU" spc="0">
+                <a:spcPct val="100000"/>
+              </a:lnSpc>
+              <a:spcBef>
+                <a:spcPts val="0"/>
+              </a:spcBef>
+              <a:spcAft>
+                <a:spcPts val="0"/>
+              </a:spcAft>
+            </a:pPr>
+            <a:r>
+              <a:rPr sz="1250" b="1" i="0" lang="en-AU" spc="25">
                 <a:solidFill>
                   <a:srgbClr val="EA493F"/>
                 </a:solidFill>
                 <a:latin typeface="Inter"/>
               </a:rPr>
-              <a:t>—  </a:t>
-            </a:r>
-            <a:r>
-              <a:rPr sz="1050" b="0" i="0" lang="en-AU" spc="0">
-                <a:solidFill>
-                  <a:srgbClr val="323232"/>
-                </a:solidFill>
-                <a:latin typeface="Inter"/>
-              </a:rPr>
-              <a:t>Advanced &amp; Composite Reporting</a:t>
-            </a:r>
-          </a:p>
-        </p:txBody>
-      </p:sp>
-      <p:sp>
-        <p:nvSpPr>
-          <p:cNvPr id="20" name="TextBox 19"/>
-          <p:cNvSpPr txBox="1"/>
-          <p:nvPr/>
-        </p:nvSpPr>
-        <p:spPr>
-          <a:xfrm>
-            <a:off x="6400800" y="2468880"/>
-            <a:ext cx="4572000" cy="457200"/>
-          </a:xfrm>
-          <a:prstGeom prst="rect">
-            <a:avLst/>
-          </a:prstGeom>
-          <a:noFill/>
-        </p:spPr>
-        <p:txBody>
-          <a:bodyPr wrap="square" anchor="t" lIns="0" rIns="0" tIns="0" bIns="0"/>
-          <a:lstStyle/>
-          <a:p>
-            <a:pPr algn="l">
-              <a:lnSpc>
-                <a:spcPct val="100000"/>
-              </a:lnSpc>
-              <a:spcBef>
-                <a:spcPts val="0"/>
-              </a:spcBef>
-              <a:spcAft>
-                <a:spcPts val="0"/>
-              </a:spcAft>
-            </a:pPr>
-            <a:r>
-              <a:rPr sz="2200" b="1" i="0" lang="en-AU" spc="-44">
-                <a:solidFill>
-                  <a:srgbClr val="111111"/>
-                </a:solidFill>
-                <a:latin typeface="Inter"/>
-              </a:rPr>
-              <a:t>FIN</a:t>
-            </a:r>
-          </a:p>
-        </p:txBody>
-      </p:sp>
-      <p:sp>
-        <p:nvSpPr>
-          <p:cNvPr id="21" name="TextBox 20"/>
-          <p:cNvSpPr txBox="1"/>
-          <p:nvPr/>
-        </p:nvSpPr>
-        <p:spPr>
-          <a:xfrm>
-            <a:off x="6400800" y="3063240"/>
-            <a:ext cx="2286000" cy="347472"/>
-          </a:xfrm>
-          <a:prstGeom prst="rect">
-            <a:avLst/>
-          </a:prstGeom>
-          <a:noFill/>
-        </p:spPr>
-        <p:txBody>
-          <a:bodyPr wrap="square" anchor="t" lIns="0" rIns="0" tIns="0" bIns="0"/>
-          <a:lstStyle/>
-          <a:p>
-            <a:pPr algn="l">
-              <a:lnSpc>
-                <a:spcPct val="112000"/>
-              </a:lnSpc>
-              <a:spcBef>
-                <a:spcPts val="0"/>
-              </a:spcBef>
-              <a:spcAft>
-                <a:spcPts val="0"/>
-              </a:spcAft>
-            </a:pPr>
-            <a:r>
-              <a:rPr sz="1050" b="1" i="0" lang="en-AU" spc="0">
-                <a:solidFill>
-                  <a:srgbClr val="EA493F"/>
-                </a:solidFill>
-                <a:latin typeface="Inter"/>
-              </a:rPr>
-              <a:t>—  </a:t>
-            </a:r>
-            <a:r>
-              <a:rPr sz="1050" b="0" i="0" lang="en-AU" spc="0">
-                <a:solidFill>
-                  <a:srgbClr val="323232"/>
-                </a:solidFill>
-                <a:latin typeface="Inter"/>
-              </a:rPr>
-              <a:t>Financial Accounting (GL)</a:t>
-            </a:r>
-          </a:p>
-        </p:txBody>
-      </p:sp>
-      <p:sp>
-        <p:nvSpPr>
-          <p:cNvPr id="22" name="TextBox 21"/>
-          <p:cNvSpPr txBox="1"/>
-          <p:nvPr/>
-        </p:nvSpPr>
-        <p:spPr>
-          <a:xfrm>
-            <a:off x="6400800" y="3410712"/>
-            <a:ext cx="2286000" cy="347472"/>
-          </a:xfrm>
-          <a:prstGeom prst="rect">
-            <a:avLst/>
-          </a:prstGeom>
-          <a:noFill/>
-        </p:spPr>
-        <p:txBody>
-          <a:bodyPr wrap="square" anchor="t" lIns="0" rIns="0" tIns="0" bIns="0"/>
-          <a:lstStyle/>
-          <a:p>
-            <a:pPr algn="l">
-              <a:lnSpc>
-                <a:spcPct val="112000"/>
-              </a:lnSpc>
-              <a:spcBef>
-                <a:spcPts val="0"/>
-              </a:spcBef>
-              <a:spcAft>
-                <a:spcPts val="0"/>
-              </a:spcAft>
-            </a:pPr>
-            <a:r>
-              <a:rPr sz="1050" b="1" i="0" lang="en-AU" spc="0">
-                <a:solidFill>
-                  <a:srgbClr val="EA493F"/>
-                </a:solidFill>
-                <a:latin typeface="Inter"/>
-              </a:rPr>
-              <a:t>—  </a:t>
-            </a:r>
-            <a:r>
-              <a:rPr sz="1050" b="0" i="0" lang="en-AU" spc="0">
-                <a:solidFill>
-                  <a:srgbClr val="323232"/>
-                </a:solidFill>
-                <a:latin typeface="Inter"/>
-              </a:rPr>
-              <a:t>Accounting Center</a:t>
-            </a:r>
-          </a:p>
-        </p:txBody>
-      </p:sp>
-      <p:sp>
-        <p:nvSpPr>
-          <p:cNvPr id="23" name="TextBox 22"/>
-          <p:cNvSpPr txBox="1"/>
-          <p:nvPr/>
-        </p:nvSpPr>
-        <p:spPr>
-          <a:xfrm>
-            <a:off x="6400800" y="3758184"/>
-            <a:ext cx="2286000" cy="347472"/>
-          </a:xfrm>
-          <a:prstGeom prst="rect">
-            <a:avLst/>
-          </a:prstGeom>
-          <a:noFill/>
-        </p:spPr>
-        <p:txBody>
-          <a:bodyPr wrap="square" anchor="t" lIns="0" rIns="0" tIns="0" bIns="0"/>
-          <a:lstStyle/>
-          <a:p>
-            <a:pPr algn="l">
-              <a:lnSpc>
-                <a:spcPct val="112000"/>
-              </a:lnSpc>
-              <a:spcBef>
-                <a:spcPts val="0"/>
-              </a:spcBef>
-              <a:spcAft>
-                <a:spcPts val="0"/>
-              </a:spcAft>
-            </a:pPr>
-            <a:r>
-              <a:rPr sz="1050" b="1" i="0" lang="en-AU" spc="0">
-                <a:solidFill>
-                  <a:srgbClr val="EA493F"/>
-                </a:solidFill>
-                <a:latin typeface="Inter"/>
-              </a:rPr>
-              <a:t>—  </a:t>
-            </a:r>
-            <a:r>
-              <a:rPr sz="1050" b="0" i="0" lang="en-AU" spc="0">
-                <a:solidFill>
-                  <a:srgbClr val="323232"/>
-                </a:solidFill>
-                <a:latin typeface="Inter"/>
-              </a:rPr>
-              <a:t>Accounts Payable / Suppliers</a:t>
-            </a:r>
-          </a:p>
-        </p:txBody>
-      </p:sp>
-      <p:sp>
-        <p:nvSpPr>
-          <p:cNvPr id="24" name="TextBox 23"/>
-          <p:cNvSpPr txBox="1"/>
-          <p:nvPr/>
-        </p:nvSpPr>
-        <p:spPr>
-          <a:xfrm>
-            <a:off x="6400800" y="4105656"/>
-            <a:ext cx="2286000" cy="347472"/>
-          </a:xfrm>
-          <a:prstGeom prst="rect">
-            <a:avLst/>
-          </a:prstGeom>
-          <a:noFill/>
-        </p:spPr>
-        <p:txBody>
-          <a:bodyPr wrap="square" anchor="t" lIns="0" rIns="0" tIns="0" bIns="0"/>
-          <a:lstStyle/>
-          <a:p>
-            <a:pPr algn="l">
-              <a:lnSpc>
-                <a:spcPct val="112000"/>
-              </a:lnSpc>
-              <a:spcBef>
-                <a:spcPts val="0"/>
-              </a:spcBef>
-              <a:spcAft>
-                <a:spcPts val="0"/>
-              </a:spcAft>
-            </a:pPr>
-            <a:r>
-              <a:rPr sz="1050" b="1" i="0" lang="en-AU" spc="0">
-                <a:solidFill>
-                  <a:srgbClr val="EA493F"/>
-                </a:solidFill>
-                <a:latin typeface="Inter"/>
-              </a:rPr>
-              <a:t>—  </a:t>
-            </a:r>
-            <a:r>
-              <a:rPr sz="1050" b="0" i="0" lang="en-AU" spc="0">
-                <a:solidFill>
-                  <a:srgbClr val="323232"/>
-                </a:solidFill>
-                <a:latin typeface="Inter"/>
-              </a:rPr>
-              <a:t>Accounts Receivable / Customers</a:t>
-            </a:r>
-          </a:p>
-        </p:txBody>
-      </p:sp>
-      <p:sp>
-        <p:nvSpPr>
-          <p:cNvPr id="25" name="TextBox 24"/>
-          <p:cNvSpPr txBox="1"/>
-          <p:nvPr/>
-        </p:nvSpPr>
-        <p:spPr>
-          <a:xfrm>
-            <a:off x="6400800" y="4453128"/>
-            <a:ext cx="2286000" cy="347472"/>
-          </a:xfrm>
-          <a:prstGeom prst="rect">
-            <a:avLst/>
-          </a:prstGeom>
-          <a:noFill/>
-        </p:spPr>
-        <p:txBody>
-          <a:bodyPr wrap="square" anchor="t" lIns="0" rIns="0" tIns="0" bIns="0"/>
-          <a:lstStyle/>
-          <a:p>
-            <a:pPr algn="l">
-              <a:lnSpc>
-                <a:spcPct val="112000"/>
-              </a:lnSpc>
-              <a:spcBef>
-                <a:spcPts val="0"/>
-              </a:spcBef>
-              <a:spcAft>
-                <a:spcPts val="0"/>
-              </a:spcAft>
-            </a:pPr>
-            <a:r>
-              <a:rPr sz="1050" b="1" i="0" lang="en-AU" spc="0">
-                <a:solidFill>
-                  <a:srgbClr val="EA493F"/>
-                </a:solidFill>
-                <a:latin typeface="Inter"/>
-              </a:rPr>
-              <a:t>—  </a:t>
-            </a:r>
-            <a:r>
-              <a:rPr sz="1050" b="0" i="0" lang="en-AU" spc="0">
-                <a:solidFill>
-                  <a:srgbClr val="323232"/>
-                </a:solidFill>
-                <a:latin typeface="Inter"/>
-              </a:rPr>
-              <a:t>Procurement</a:t>
-            </a:r>
-          </a:p>
-        </p:txBody>
-      </p:sp>
-      <p:sp>
-        <p:nvSpPr>
-          <p:cNvPr id="26" name="TextBox 25"/>
-          <p:cNvSpPr txBox="1"/>
-          <p:nvPr/>
-        </p:nvSpPr>
-        <p:spPr>
-          <a:xfrm>
-            <a:off x="6400800" y="4800600"/>
-            <a:ext cx="2286000" cy="347472"/>
-          </a:xfrm>
-          <a:prstGeom prst="rect">
-            <a:avLst/>
-          </a:prstGeom>
-          <a:noFill/>
-        </p:spPr>
-        <p:txBody>
-          <a:bodyPr wrap="square" anchor="t" lIns="0" rIns="0" tIns="0" bIns="0"/>
-          <a:lstStyle/>
-          <a:p>
-            <a:pPr algn="l">
-              <a:lnSpc>
-                <a:spcPct val="112000"/>
-              </a:lnSpc>
-              <a:spcBef>
-                <a:spcPts val="0"/>
-              </a:spcBef>
-              <a:spcAft>
-                <a:spcPts val="0"/>
-              </a:spcAft>
-            </a:pPr>
-            <a:r>
-              <a:rPr sz="1050" b="1" i="0" lang="en-AU" spc="0">
-                <a:solidFill>
-                  <a:srgbClr val="EA493F"/>
-                </a:solidFill>
-                <a:latin typeface="Inter"/>
-              </a:rPr>
-              <a:t>—  </a:t>
-            </a:r>
-            <a:r>
-              <a:rPr sz="1050" b="0" i="0" lang="en-AU" spc="0">
-                <a:solidFill>
-                  <a:srgbClr val="323232"/>
-                </a:solidFill>
-                <a:latin typeface="Inter"/>
-              </a:rPr>
-              <a:t>Expenses</a:t>
-            </a:r>
-          </a:p>
-        </p:txBody>
-      </p:sp>
-      <p:sp>
-        <p:nvSpPr>
-          <p:cNvPr id="27" name="TextBox 26"/>
-          <p:cNvSpPr txBox="1"/>
-          <p:nvPr/>
-        </p:nvSpPr>
-        <p:spPr>
-          <a:xfrm>
-            <a:off x="8732520" y="3063240"/>
-            <a:ext cx="2286000" cy="347472"/>
-          </a:xfrm>
-          <a:prstGeom prst="rect">
-            <a:avLst/>
-          </a:prstGeom>
-          <a:noFill/>
-        </p:spPr>
-        <p:txBody>
-          <a:bodyPr wrap="square" anchor="t" lIns="0" rIns="0" tIns="0" bIns="0"/>
-          <a:lstStyle/>
-          <a:p>
-            <a:pPr algn="l">
-              <a:lnSpc>
-                <a:spcPct val="112000"/>
-              </a:lnSpc>
-              <a:spcBef>
-                <a:spcPts val="0"/>
-              </a:spcBef>
-              <a:spcAft>
-                <a:spcPts val="0"/>
-              </a:spcAft>
-            </a:pPr>
-            <a:r>
-              <a:rPr sz="1050" b="1" i="0" lang="en-AU" spc="0">
-                <a:solidFill>
-                  <a:srgbClr val="EA493F"/>
-                </a:solidFill>
-                <a:latin typeface="Inter"/>
-              </a:rPr>
-              <a:t>—  </a:t>
-            </a:r>
-            <a:r>
-              <a:rPr sz="1050" b="0" i="0" lang="en-AU" spc="0">
-                <a:solidFill>
-                  <a:srgbClr val="323232"/>
-                </a:solidFill>
-                <a:latin typeface="Inter"/>
-              </a:rPr>
-              <a:t>Banking &amp; Settlement</a:t>
-            </a:r>
-          </a:p>
-        </p:txBody>
-      </p:sp>
-      <p:sp>
-        <p:nvSpPr>
-          <p:cNvPr id="28" name="TextBox 27"/>
-          <p:cNvSpPr txBox="1"/>
-          <p:nvPr/>
-        </p:nvSpPr>
-        <p:spPr>
-          <a:xfrm>
-            <a:off x="8732520" y="3410712"/>
-            <a:ext cx="2286000" cy="347472"/>
-          </a:xfrm>
-          <a:prstGeom prst="rect">
-            <a:avLst/>
-          </a:prstGeom>
-          <a:noFill/>
-        </p:spPr>
-        <p:txBody>
-          <a:bodyPr wrap="square" anchor="t" lIns="0" rIns="0" tIns="0" bIns="0"/>
-          <a:lstStyle/>
-          <a:p>
-            <a:pPr algn="l">
-              <a:lnSpc>
-                <a:spcPct val="112000"/>
-              </a:lnSpc>
-              <a:spcBef>
-                <a:spcPts val="0"/>
-              </a:spcBef>
-              <a:spcAft>
-                <a:spcPts val="0"/>
-              </a:spcAft>
-            </a:pPr>
-            <a:r>
-              <a:rPr sz="1050" b="1" i="0" lang="en-AU" spc="0">
-                <a:solidFill>
-                  <a:srgbClr val="EA493F"/>
-                </a:solidFill>
-                <a:latin typeface="Inter"/>
-              </a:rPr>
-              <a:t>—  </a:t>
-            </a:r>
-            <a:r>
-              <a:rPr sz="1050" b="0" i="0" lang="en-AU" spc="0">
-                <a:solidFill>
-                  <a:srgbClr val="323232"/>
-                </a:solidFill>
-                <a:latin typeface="Inter"/>
-              </a:rPr>
-              <a:t>Business Assets</a:t>
-            </a:r>
-          </a:p>
-        </p:txBody>
-      </p:sp>
-      <p:sp>
-        <p:nvSpPr>
-          <p:cNvPr id="29" name="TextBox 28"/>
-          <p:cNvSpPr txBox="1"/>
-          <p:nvPr/>
-        </p:nvSpPr>
-        <p:spPr>
-          <a:xfrm>
-            <a:off x="8732520" y="3758184"/>
-            <a:ext cx="2286000" cy="347472"/>
-          </a:xfrm>
-          <a:prstGeom prst="rect">
-            <a:avLst/>
-          </a:prstGeom>
-          <a:noFill/>
-        </p:spPr>
-        <p:txBody>
-          <a:bodyPr wrap="square" anchor="t" lIns="0" rIns="0" tIns="0" bIns="0"/>
-          <a:lstStyle/>
-          <a:p>
-            <a:pPr algn="l">
-              <a:lnSpc>
-                <a:spcPct val="112000"/>
-              </a:lnSpc>
-              <a:spcBef>
-                <a:spcPts val="0"/>
-              </a:spcBef>
-              <a:spcAft>
-                <a:spcPts val="0"/>
-              </a:spcAft>
-            </a:pPr>
-            <a:r>
-              <a:rPr sz="1050" b="1" i="0" lang="en-AU" spc="0">
-                <a:solidFill>
-                  <a:srgbClr val="EA493F"/>
-                </a:solidFill>
-                <a:latin typeface="Inter"/>
-              </a:rPr>
-              <a:t>—  </a:t>
-            </a:r>
-            <a:r>
-              <a:rPr sz="1050" b="0" i="0" lang="en-AU" spc="0">
-                <a:solidFill>
-                  <a:srgbClr val="323232"/>
-                </a:solidFill>
-                <a:latin typeface="Inter"/>
-              </a:rPr>
-              <a:t>Financial Reporting</a:t>
-            </a:r>
-          </a:p>
-        </p:txBody>
-      </p:sp>
-      <p:sp>
-        <p:nvSpPr>
-          <p:cNvPr id="30" name="TextBox 29"/>
-          <p:cNvSpPr txBox="1"/>
-          <p:nvPr/>
-        </p:nvSpPr>
-        <p:spPr>
-          <a:xfrm>
-            <a:off x="8732520" y="4105656"/>
-            <a:ext cx="2286000" cy="347472"/>
-          </a:xfrm>
-          <a:prstGeom prst="rect">
-            <a:avLst/>
-          </a:prstGeom>
-          <a:noFill/>
-        </p:spPr>
-        <p:txBody>
-          <a:bodyPr wrap="square" anchor="t" lIns="0" rIns="0" tIns="0" bIns="0"/>
-          <a:lstStyle/>
-          <a:p>
-            <a:pPr algn="l">
-              <a:lnSpc>
-                <a:spcPct val="112000"/>
-              </a:lnSpc>
-              <a:spcBef>
-                <a:spcPts val="0"/>
-              </a:spcBef>
-              <a:spcAft>
-                <a:spcPts val="0"/>
-              </a:spcAft>
-            </a:pPr>
-            <a:r>
-              <a:rPr sz="1050" b="1" i="0" lang="en-AU" spc="0">
-                <a:solidFill>
-                  <a:srgbClr val="EA493F"/>
-                </a:solidFill>
-                <a:latin typeface="Inter"/>
-              </a:rPr>
-              <a:t>—  </a:t>
-            </a:r>
-            <a:r>
-              <a:rPr sz="1050" b="0" i="0" lang="en-AU" spc="0">
-                <a:solidFill>
-                  <a:srgbClr val="323232"/>
-                </a:solidFill>
-                <a:latin typeface="Inter"/>
-              </a:rPr>
-              <a:t>Prism Analytics</a:t>
-            </a:r>
-          </a:p>
-        </p:txBody>
-      </p:sp>
-      <p:sp>
-        <p:nvSpPr>
-          <p:cNvPr id="31" name="TextBox 30"/>
-          <p:cNvSpPr txBox="1"/>
-          <p:nvPr/>
-        </p:nvSpPr>
-        <p:spPr>
-          <a:xfrm>
-            <a:off x="8732520" y="4453128"/>
-            <a:ext cx="2286000" cy="347472"/>
-          </a:xfrm>
-          <a:prstGeom prst="rect">
-            <a:avLst/>
-          </a:prstGeom>
-          <a:noFill/>
-        </p:spPr>
-        <p:txBody>
-          <a:bodyPr wrap="square" anchor="t" lIns="0" rIns="0" tIns="0" bIns="0"/>
-          <a:lstStyle/>
-          <a:p>
-            <a:pPr algn="l">
-              <a:lnSpc>
-                <a:spcPct val="112000"/>
-              </a:lnSpc>
-              <a:spcBef>
-                <a:spcPts val="0"/>
-              </a:spcBef>
-              <a:spcAft>
-                <a:spcPts val="0"/>
-              </a:spcAft>
-            </a:pPr>
-            <a:r>
-              <a:rPr sz="1050" b="1" i="0" lang="en-AU" spc="0">
-                <a:solidFill>
-                  <a:srgbClr val="EA493F"/>
-                </a:solidFill>
-                <a:latin typeface="Inter"/>
-              </a:rPr>
-              <a:t>—  </a:t>
-            </a:r>
-            <a:r>
-              <a:rPr sz="1050" b="0" i="0" lang="en-AU" spc="0">
-                <a:solidFill>
-                  <a:srgbClr val="323232"/>
-                </a:solidFill>
-                <a:latin typeface="Inter"/>
-              </a:rPr>
-              <a:t>Security &amp; BP config</a:t>
-            </a:r>
-          </a:p>
-        </p:txBody>
-      </p:sp>
-      <p:sp>
-        <p:nvSpPr>
-          <p:cNvPr id="32" name="TextBox 31"/>
-          <p:cNvSpPr txBox="1"/>
-          <p:nvPr/>
-        </p:nvSpPr>
-        <p:spPr>
-          <a:xfrm>
-            <a:off x="8732520" y="4800600"/>
-            <a:ext cx="2286000" cy="347472"/>
-          </a:xfrm>
-          <a:prstGeom prst="rect">
-            <a:avLst/>
-          </a:prstGeom>
-          <a:noFill/>
-        </p:spPr>
-        <p:txBody>
-          <a:bodyPr wrap="square" anchor="t" lIns="0" rIns="0" tIns="0" bIns="0"/>
-          <a:lstStyle/>
-          <a:p>
-            <a:pPr algn="l">
-              <a:lnSpc>
-                <a:spcPct val="112000"/>
-              </a:lnSpc>
-              <a:spcBef>
-                <a:spcPts val="0"/>
-              </a:spcBef>
-              <a:spcAft>
-                <a:spcPts val="0"/>
-              </a:spcAft>
-            </a:pPr>
-            <a:r>
-              <a:rPr sz="1050" b="1" i="0" lang="en-AU" spc="0">
-                <a:solidFill>
-                  <a:srgbClr val="EA493F"/>
-                </a:solidFill>
-                <a:latin typeface="Inter"/>
-              </a:rPr>
-              <a:t>—  </a:t>
-            </a:r>
-            <a:r>
-              <a:rPr sz="1050" b="0" i="0" lang="en-AU" spc="0">
-                <a:solidFill>
-                  <a:srgbClr val="323232"/>
-                </a:solidFill>
-                <a:latin typeface="Inter"/>
-              </a:rPr>
-              <a:t>Integrations (EIB, CC, Studio)</a:t>
-            </a:r>
-          </a:p>
-        </p:txBody>
-      </p:sp>
-      <p:sp>
-        <p:nvSpPr>
-          <p:cNvPr id="33" name="TextBox 32"/>
-          <p:cNvSpPr txBox="1"/>
-          <p:nvPr/>
-        </p:nvSpPr>
-        <p:spPr>
-          <a:xfrm>
-            <a:off x="877824" y="5943600"/>
-            <a:ext cx="10436047" cy="457200"/>
-          </a:xfrm>
-          <a:prstGeom prst="rect">
-            <a:avLst/>
-          </a:prstGeom>
-          <a:noFill/>
-        </p:spPr>
-        <p:txBody>
-          <a:bodyPr wrap="square" anchor="t" lIns="0" rIns="0" tIns="0" bIns="0"/>
-          <a:lstStyle/>
-          <a:p>
-            <a:pPr algn="l">
-              <a:lnSpc>
-                <a:spcPct val="100000"/>
-              </a:lnSpc>
-              <a:spcBef>
-                <a:spcPts val="0"/>
-              </a:spcBef>
-              <a:spcAft>
-                <a:spcPts val="0"/>
-              </a:spcAft>
-            </a:pPr>
-            <a:r>
-              <a:rPr sz="1250" b="1" i="0" lang="en-AU" spc="12">
-                <a:solidFill>
-                  <a:srgbClr val="EA493F"/>
-                </a:solidFill>
-                <a:latin typeface="Inter"/>
-              </a:rPr>
-              <a:t>Adaptive Planning — all modules.   </a:t>
-            </a:r>
-            <a:r>
-              <a:rPr sz="1250" b="0" i="0" lang="en-AU" spc="0">
-                <a:solidFill>
-                  <a:srgbClr val="323232"/>
-                </a:solidFill>
-                <a:latin typeface="Inter"/>
-              </a:rPr>
-              <a:t>Cross-skilled in reporting, security and integrations across both suites — one team, two suites.</a:t>
+              <a:t>Adaptive Planning — all modules.  ·  Cross-skilled across both suites — one team, two suites.</a:t>
             </a:r>
           </a:p>
         </p:txBody>
@@ -19670,7 +19553,7 @@
                 </a:solidFill>
                 <a:latin typeface="Inter"/>
               </a:rPr>
-              <a:t>You direct the work; we provide certified Workday FIN &amp; HCM consultants</a:t>
+              <a:t>You direct the work; certified Workday FIN &amp; HCM consultants</a:t>
             </a:r>
           </a:p>
         </p:txBody>

--- a/design-system/samples/Mivada_Overview_and_Services.pptx
+++ b/design-system/samples/Mivada_Overview_and_Services.pptx
@@ -3202,7 +3202,7 @@
     <p:bg>
       <p:bgPr>
         <a:solidFill>
-          <a:srgbClr val="FAFAFA"/>
+          <a:srgbClr val="000000"/>
         </a:solidFill>
         <a:effectLst/>
       </p:bgPr>
@@ -3216,7 +3216,7 @@
       <p:grpSpPr/>
       <p:pic>
         <p:nvPicPr>
-          <p:cNvPr id="2" name="Picture 1" descr="Mivada_Icon_Melon_RGB_L.png"/>
+          <p:cNvPr id="2" name="Picture 1" descr="Mivada_Icon_White_RGB_L.png"/>
           <p:cNvPicPr>
             <a:picLocks noChangeAspect="1"/>
           </p:cNvPicPr>
@@ -3315,11 +3315,11 @@
             <a:r>
               <a:rPr sz="3300" b="1" i="0" lang="en-AU" spc="-72">
                 <a:solidFill>
-                  <a:srgbClr val="111111"/>
-                </a:solidFill>
-                <a:latin typeface="Inter"/>
-              </a:rPr>
-              <a:t>AMS operating </a:t>
+                  <a:srgbClr val="FFFFFF"/>
+                </a:solidFill>
+                <a:latin typeface="Inter"/>
+              </a:rPr>
+              <a:t>AMS, built on </a:t>
             </a:r>
             <a:r>
               <a:rPr sz="3300" b="1" i="0" lang="en-AU" spc="-72">
@@ -3328,7 +3328,7 @@
                 </a:solidFill>
                 <a:latin typeface="Inter"/>
               </a:rPr>
-              <a:t>framework.</a:t>
+              <a:t>ITIL.</a:t>
             </a:r>
           </a:p>
         </p:txBody>
@@ -3367,11 +3367,11 @@
             <a:r>
               <a:rPr sz="1300" b="0" i="0" lang="en-AU" spc="0">
                 <a:solidFill>
-                  <a:srgbClr val="323232"/>
-                </a:solidFill>
-                <a:latin typeface="Inter"/>
-              </a:rPr>
-              <a:t>Driving operational excellence through governance, integration and continuous improvement.</a:t>
+                  <a:srgbClr val="CFCFCF"/>
+                </a:solidFill>
+                <a:latin typeface="Inter"/>
+              </a:rPr>
+              <a:t>We run Workday on ITIL — the global standard for IT service management.</a:t>
             </a:r>
           </a:p>
         </p:txBody>
@@ -3384,17 +3384,19 @@
         </p:nvSpPr>
         <p:spPr>
           <a:xfrm>
-            <a:off x="877824" y="2286000"/>
-            <a:ext cx="10436047" cy="310896"/>
+            <a:off x="877824" y="2514600"/>
+            <a:ext cx="3234842" cy="3017520"/>
           </a:xfrm>
           <a:prstGeom prst="rect">
             <a:avLst/>
           </a:prstGeom>
           <a:solidFill>
-            <a:srgbClr val="EA493F"/>
+            <a:srgbClr val="141414"/>
           </a:solidFill>
-          <a:ln>
-            <a:noFill/>
+          <a:ln w="12700">
+            <a:solidFill>
+              <a:srgbClr val="3A3A3A"/>
+            </a:solidFill>
           </a:ln>
           <a:effectLst/>
         </p:spPr>
@@ -3428,16 +3430,16 @@
         </p:nvSpPr>
         <p:spPr>
           <a:xfrm>
-            <a:off x="1106424" y="2286000"/>
-            <a:ext cx="9978847" cy="310896"/>
-          </a:xfrm>
-          <a:prstGeom prst="rect">
-            <a:avLst/>
-          </a:prstGeom>
-          <a:noFill/>
-        </p:spPr>
-        <p:txBody>
-          <a:bodyPr wrap="square" anchor="ctr" lIns="0" rIns="0" tIns="0" bIns="0"/>
+            <a:off x="1152144" y="2807208"/>
+            <a:ext cx="2731922" cy="365760"/>
+          </a:xfrm>
+          <a:prstGeom prst="rect">
+            <a:avLst/>
+          </a:prstGeom>
+          <a:noFill/>
+        </p:spPr>
+        <p:txBody>
+          <a:bodyPr wrap="square" anchor="t" lIns="0" rIns="0" tIns="0" bIns="0"/>
           <a:lstStyle/>
           <a:p>
             <a:pPr algn="l">
@@ -3452,36 +3454,81 @@
               </a:spcAft>
             </a:pPr>
             <a:r>
-              <a:rPr sz="1150" b="1" i="0" lang="en-AU" spc="115" cap="all">
-                <a:solidFill>
-                  <a:srgbClr val="FFFFFF"/>
-                </a:solidFill>
-                <a:latin typeface="Inter"/>
-              </a:rPr>
-              <a:t>CONTINUOUS IMPROVEMENT</a:t>
-            </a:r>
-          </a:p>
-        </p:txBody>
-      </p:sp>
-      <p:sp>
-        <p:nvSpPr>
-          <p:cNvPr id="8" name="Rectangle 7"/>
+              <a:rPr sz="1250" b="1" i="0" lang="en-AU" spc="125" cap="all">
+                <a:solidFill>
+                  <a:srgbClr val="EA493F"/>
+                </a:solidFill>
+                <a:latin typeface="Inter"/>
+              </a:rPr>
+              <a:t>WHAT IT IS</a:t>
+            </a:r>
+          </a:p>
+        </p:txBody>
+      </p:sp>
+      <p:sp>
+        <p:nvSpPr>
+          <p:cNvPr id="8" name="TextBox 7"/>
+          <p:cNvSpPr txBox="1"/>
+          <p:nvPr/>
+        </p:nvSpPr>
+        <p:spPr>
+          <a:xfrm>
+            <a:off x="1152144" y="3355848"/>
+            <a:ext cx="2686202" cy="1920239"/>
+          </a:xfrm>
+          <a:prstGeom prst="rect">
+            <a:avLst/>
+          </a:prstGeom>
+          <a:noFill/>
+        </p:spPr>
+        <p:txBody>
+          <a:bodyPr wrap="square" anchor="t" lIns="0" rIns="0" tIns="0" bIns="0"/>
+          <a:lstStyle/>
+          <a:p>
+            <a:pPr algn="l">
+              <a:lnSpc>
+                <a:spcPct val="140000"/>
+              </a:lnSpc>
+              <a:spcBef>
+                <a:spcPts val="0"/>
+              </a:spcBef>
+              <a:spcAft>
+                <a:spcPts val="0"/>
+              </a:spcAft>
+            </a:pPr>
+            <a:r>
+              <a:rPr sz="1300" b="0" i="0" lang="en-AU" spc="0">
+                <a:solidFill>
+                  <a:srgbClr val="D6D6D6"/>
+                </a:solidFill>
+                <a:latin typeface="Inter"/>
+              </a:rPr>
+              <a:t>The proven framework for running IT services — incident, problem, change and release management, done to a recognised standard.</a:t>
+            </a:r>
+          </a:p>
+        </p:txBody>
+      </p:sp>
+      <p:sp>
+        <p:nvSpPr>
+          <p:cNvPr id="9" name="Rectangle 8"/>
           <p:cNvSpPr/>
           <p:nvPr/>
         </p:nvSpPr>
         <p:spPr>
           <a:xfrm>
-            <a:off x="877824" y="2633472"/>
-            <a:ext cx="10436047" cy="420624"/>
+            <a:off x="4478426" y="2514600"/>
+            <a:ext cx="3234842" cy="3017520"/>
           </a:xfrm>
           <a:prstGeom prst="rect">
             <a:avLst/>
           </a:prstGeom>
           <a:solidFill>
-            <a:srgbClr val="111111"/>
+            <a:srgbClr val="141414"/>
           </a:solidFill>
-          <a:ln>
-            <a:noFill/>
+          <a:ln w="12700">
+            <a:solidFill>
+              <a:srgbClr val="3A3A3A"/>
+            </a:solidFill>
           </a:ln>
           <a:effectLst/>
         </p:spPr>
@@ -3509,22 +3556,22 @@
       </p:sp>
       <p:sp>
         <p:nvSpPr>
-          <p:cNvPr id="9" name="TextBox 8"/>
-          <p:cNvSpPr txBox="1"/>
-          <p:nvPr/>
-        </p:nvSpPr>
-        <p:spPr>
-          <a:xfrm>
-            <a:off x="1106424" y="2633472"/>
-            <a:ext cx="9978847" cy="420624"/>
-          </a:xfrm>
-          <a:prstGeom prst="rect">
-            <a:avLst/>
-          </a:prstGeom>
-          <a:noFill/>
-        </p:spPr>
-        <p:txBody>
-          <a:bodyPr wrap="square" anchor="ctr" lIns="0" rIns="0" tIns="0" bIns="0"/>
+          <p:cNvPr id="10" name="TextBox 9"/>
+          <p:cNvSpPr txBox="1"/>
+          <p:nvPr/>
+        </p:nvSpPr>
+        <p:spPr>
+          <a:xfrm>
+            <a:off x="4752746" y="2807208"/>
+            <a:ext cx="2731922" cy="365760"/>
+          </a:xfrm>
+          <a:prstGeom prst="rect">
+            <a:avLst/>
+          </a:prstGeom>
+          <a:noFill/>
+        </p:spPr>
+        <p:txBody>
+          <a:bodyPr wrap="square" anchor="t" lIns="0" rIns="0" tIns="0" bIns="0"/>
           <a:lstStyle/>
           <a:p>
             <a:pPr algn="l">
@@ -3539,46 +3586,80 @@
               </a:spcAft>
             </a:pPr>
             <a:r>
-              <a:rPr sz="1150" b="1" i="0" lang="en-AU" spc="115" cap="all">
-                <a:solidFill>
-                  <a:srgbClr val="FFFFFF"/>
-                </a:solidFill>
-                <a:latin typeface="Inter"/>
-              </a:rPr>
-              <a:t>GOVERNANCE</a:t>
-            </a:r>
-            <a:r>
-              <a:rPr sz="1000" b="0" i="0" lang="en-AU" spc="0">
-                <a:solidFill>
-                  <a:srgbClr val="FFFFFF"/>
-                </a:solidFill>
-                <a:latin typeface="Inter"/>
-              </a:rPr>
-              <a:t>    Thought leadership · Product &amp; vendor relationship · Technical-debt reduction · WD bi-annual release management</a:t>
-            </a:r>
-          </a:p>
-        </p:txBody>
-      </p:sp>
-      <p:sp>
-        <p:nvSpPr>
-          <p:cNvPr id="10" name="Rectangle 9"/>
+              <a:rPr sz="1250" b="1" i="0" lang="en-AU" spc="125" cap="all">
+                <a:solidFill>
+                  <a:srgbClr val="EA493F"/>
+                </a:solidFill>
+                <a:latin typeface="Inter"/>
+              </a:rPr>
+              <a:t>WHY IT MATTERS</a:t>
+            </a:r>
+          </a:p>
+        </p:txBody>
+      </p:sp>
+      <p:sp>
+        <p:nvSpPr>
+          <p:cNvPr id="11" name="TextBox 10"/>
+          <p:cNvSpPr txBox="1"/>
+          <p:nvPr/>
+        </p:nvSpPr>
+        <p:spPr>
+          <a:xfrm>
+            <a:off x="4752746" y="3355848"/>
+            <a:ext cx="2686202" cy="1920239"/>
+          </a:xfrm>
+          <a:prstGeom prst="rect">
+            <a:avLst/>
+          </a:prstGeom>
+          <a:noFill/>
+        </p:spPr>
+        <p:txBody>
+          <a:bodyPr wrap="square" anchor="t" lIns="0" rIns="0" tIns="0" bIns="0"/>
+          <a:lstStyle/>
+          <a:p>
+            <a:pPr algn="l">
+              <a:lnSpc>
+                <a:spcPct val="140000"/>
+              </a:lnSpc>
+              <a:spcBef>
+                <a:spcPts val="0"/>
+              </a:spcBef>
+              <a:spcAft>
+                <a:spcPts val="0"/>
+              </a:spcAft>
+            </a:pPr>
+            <a:r>
+              <a:rPr sz="1300" b="0" i="0" lang="en-AU" spc="0">
+                <a:solidFill>
+                  <a:srgbClr val="D6D6D6"/>
+                </a:solidFill>
+                <a:latin typeface="Inter"/>
+              </a:rPr>
+              <a:t>Predictable, SLA-backed support: fewer incidents, faster resolution, controlled change and continuous improvement.</a:t>
+            </a:r>
+          </a:p>
+        </p:txBody>
+      </p:sp>
+      <p:sp>
+        <p:nvSpPr>
+          <p:cNvPr id="12" name="Rectangle 11"/>
           <p:cNvSpPr/>
           <p:nvPr/>
         </p:nvSpPr>
         <p:spPr>
           <a:xfrm>
-            <a:off x="877824" y="3200400"/>
-            <a:ext cx="2512999" cy="457200"/>
+            <a:off x="8079028" y="2514600"/>
+            <a:ext cx="3234842" cy="3017520"/>
           </a:xfrm>
           <a:prstGeom prst="rect">
             <a:avLst/>
           </a:prstGeom>
           <a:solidFill>
-            <a:srgbClr val="FFFFFF"/>
+            <a:srgbClr val="141414"/>
           </a:solidFill>
           <a:ln w="12700">
             <a:solidFill>
-              <a:srgbClr val="E4E4E0"/>
+              <a:srgbClr val="3A3A3A"/>
             </a:solidFill>
           </a:ln>
           <a:effectLst/>
@@ -3607,25 +3688,25 @@
       </p:sp>
       <p:sp>
         <p:nvSpPr>
-          <p:cNvPr id="11" name="TextBox 10"/>
-          <p:cNvSpPr txBox="1"/>
-          <p:nvPr/>
-        </p:nvSpPr>
-        <p:spPr>
-          <a:xfrm>
-            <a:off x="950976" y="3200400"/>
-            <a:ext cx="2366695" cy="457200"/>
-          </a:xfrm>
-          <a:prstGeom prst="rect">
-            <a:avLst/>
-          </a:prstGeom>
-          <a:noFill/>
-        </p:spPr>
-        <p:txBody>
-          <a:bodyPr wrap="square" anchor="ctr" lIns="0" rIns="0" tIns="0" bIns="0"/>
-          <a:lstStyle/>
-          <a:p>
-            <a:pPr algn="ctr">
+          <p:cNvPr id="13" name="TextBox 12"/>
+          <p:cNvSpPr txBox="1"/>
+          <p:nvPr/>
+        </p:nvSpPr>
+        <p:spPr>
+          <a:xfrm>
+            <a:off x="8353348" y="2807208"/>
+            <a:ext cx="2731922" cy="365760"/>
+          </a:xfrm>
+          <a:prstGeom prst="rect">
+            <a:avLst/>
+          </a:prstGeom>
+          <a:noFill/>
+        </p:spPr>
+        <p:txBody>
+          <a:bodyPr wrap="square" anchor="t" lIns="0" rIns="0" tIns="0" bIns="0"/>
+          <a:lstStyle/>
+          <a:p>
+            <a:pPr algn="l">
               <a:lnSpc>
                 <a:spcPct val="100000"/>
               </a:lnSpc>
@@ -3637,84 +3718,81 @@
               </a:spcAft>
             </a:pPr>
             <a:r>
-              <a:rPr sz="950" b="1" i="0" lang="en-AU" spc="-4">
-                <a:solidFill>
-                  <a:srgbClr val="111111"/>
-                </a:solidFill>
-                <a:latin typeface="Inter"/>
-              </a:rPr>
-              <a:t>Incident management</a:t>
-            </a:r>
-          </a:p>
-        </p:txBody>
-      </p:sp>
-      <p:sp>
-        <p:nvSpPr>
-          <p:cNvPr id="12" name="Rectangle 11"/>
-          <p:cNvSpPr/>
-          <p:nvPr/>
-        </p:nvSpPr>
-        <p:spPr>
-          <a:xfrm>
-            <a:off x="3518839" y="3200400"/>
-            <a:ext cx="2512999" cy="457200"/>
-          </a:xfrm>
-          <a:prstGeom prst="rect">
-            <a:avLst/>
-          </a:prstGeom>
-          <a:solidFill>
-            <a:srgbClr val="FFFFFF"/>
-          </a:solidFill>
-          <a:ln w="12700">
-            <a:solidFill>
-              <a:srgbClr val="E4E4E0"/>
-            </a:solidFill>
-          </a:ln>
-          <a:effectLst/>
-        </p:spPr>
-        <p:style>
-          <a:lnRef idx="1">
-            <a:schemeClr val="accent1"/>
-          </a:lnRef>
-          <a:fillRef idx="3">
-            <a:schemeClr val="accent1"/>
-          </a:fillRef>
-          <a:effectRef idx="2">
-            <a:schemeClr val="accent1"/>
-          </a:effectRef>
-          <a:fontRef idx="minor">
-            <a:schemeClr val="lt1"/>
-          </a:fontRef>
-        </p:style>
-        <p:txBody>
-          <a:bodyPr rtlCol="0" anchor="ctr"/>
-          <a:lstStyle/>
-          <a:p>
-            <a:pPr algn="ctr"/>
-          </a:p>
-        </p:txBody>
-      </p:sp>
-      <p:sp>
-        <p:nvSpPr>
-          <p:cNvPr id="13" name="TextBox 12"/>
-          <p:cNvSpPr txBox="1"/>
-          <p:nvPr/>
-        </p:nvSpPr>
-        <p:spPr>
-          <a:xfrm>
-            <a:off x="3591991" y="3200400"/>
-            <a:ext cx="2366695" cy="457200"/>
-          </a:xfrm>
-          <a:prstGeom prst="rect">
-            <a:avLst/>
-          </a:prstGeom>
-          <a:noFill/>
-        </p:spPr>
-        <p:txBody>
-          <a:bodyPr wrap="square" anchor="ctr" lIns="0" rIns="0" tIns="0" bIns="0"/>
-          <a:lstStyle/>
-          <a:p>
-            <a:pPr algn="ctr">
+              <a:rPr sz="1250" b="1" i="0" lang="en-AU" spc="125" cap="all">
+                <a:solidFill>
+                  <a:srgbClr val="EA493F"/>
+                </a:solidFill>
+                <a:latin typeface="Inter"/>
+              </a:rPr>
+              <a:t>HOW WE APPLY IT</a:t>
+            </a:r>
+          </a:p>
+        </p:txBody>
+      </p:sp>
+      <p:sp>
+        <p:nvSpPr>
+          <p:cNvPr id="14" name="TextBox 13"/>
+          <p:cNvSpPr txBox="1"/>
+          <p:nvPr/>
+        </p:nvSpPr>
+        <p:spPr>
+          <a:xfrm>
+            <a:off x="8353348" y="3355848"/>
+            <a:ext cx="2686202" cy="1920239"/>
+          </a:xfrm>
+          <a:prstGeom prst="rect">
+            <a:avLst/>
+          </a:prstGeom>
+          <a:noFill/>
+        </p:spPr>
+        <p:txBody>
+          <a:bodyPr wrap="square" anchor="t" lIns="0" rIns="0" tIns="0" bIns="0"/>
+          <a:lstStyle/>
+          <a:p>
+            <a:pPr algn="l">
+              <a:lnSpc>
+                <a:spcPct val="140000"/>
+              </a:lnSpc>
+              <a:spcBef>
+                <a:spcPts val="0"/>
+              </a:spcBef>
+              <a:spcAft>
+                <a:spcPts val="0"/>
+              </a:spcAft>
+            </a:pPr>
+            <a:r>
+              <a:rPr sz="1300" b="0" i="0" lang="en-AU" spc="0">
+                <a:solidFill>
+                  <a:srgbClr val="D6D6D6"/>
+                </a:solidFill>
+                <a:latin typeface="Inter"/>
+              </a:rPr>
+              <a:t>Governed run operations · 24×7 P1/P2 on-call · change &amp; release control · continuous improvement.</a:t>
+            </a:r>
+          </a:p>
+        </p:txBody>
+      </p:sp>
+      <p:sp>
+        <p:nvSpPr>
+          <p:cNvPr id="15" name="TextBox 14"/>
+          <p:cNvSpPr txBox="1"/>
+          <p:nvPr/>
+        </p:nvSpPr>
+        <p:spPr>
+          <a:xfrm>
+            <a:off x="877824" y="5943600"/>
+            <a:ext cx="10436047" cy="365760"/>
+          </a:xfrm>
+          <a:prstGeom prst="rect">
+            <a:avLst/>
+          </a:prstGeom>
+          <a:noFill/>
+        </p:spPr>
+        <p:txBody>
+          <a:bodyPr wrap="square" anchor="t" lIns="0" rIns="0" tIns="0" bIns="0"/>
+          <a:lstStyle/>
+          <a:p>
+            <a:pPr algn="l">
               <a:lnSpc>
                 <a:spcPct val="100000"/>
               </a:lnSpc>
@@ -3726,1613 +3804,13 @@
               </a:spcAft>
             </a:pPr>
             <a:r>
-              <a:rPr sz="950" b="1" i="0" lang="en-AU" spc="-4">
-                <a:solidFill>
-                  <a:srgbClr val="111111"/>
-                </a:solidFill>
-                <a:latin typeface="Inter"/>
-              </a:rPr>
-              <a:t>Problem management</a:t>
-            </a:r>
-          </a:p>
-        </p:txBody>
-      </p:sp>
-      <p:sp>
-        <p:nvSpPr>
-          <p:cNvPr id="14" name="Rectangle 13"/>
-          <p:cNvSpPr/>
-          <p:nvPr/>
-        </p:nvSpPr>
-        <p:spPr>
-          <a:xfrm>
-            <a:off x="6159855" y="3200400"/>
-            <a:ext cx="2512999" cy="457200"/>
-          </a:xfrm>
-          <a:prstGeom prst="rect">
-            <a:avLst/>
-          </a:prstGeom>
-          <a:solidFill>
-            <a:srgbClr val="FFFFFF"/>
-          </a:solidFill>
-          <a:ln w="12700">
-            <a:solidFill>
-              <a:srgbClr val="E4E4E0"/>
-            </a:solidFill>
-          </a:ln>
-          <a:effectLst/>
-        </p:spPr>
-        <p:style>
-          <a:lnRef idx="1">
-            <a:schemeClr val="accent1"/>
-          </a:lnRef>
-          <a:fillRef idx="3">
-            <a:schemeClr val="accent1"/>
-          </a:fillRef>
-          <a:effectRef idx="2">
-            <a:schemeClr val="accent1"/>
-          </a:effectRef>
-          <a:fontRef idx="minor">
-            <a:schemeClr val="lt1"/>
-          </a:fontRef>
-        </p:style>
-        <p:txBody>
-          <a:bodyPr rtlCol="0" anchor="ctr"/>
-          <a:lstStyle/>
-          <a:p>
-            <a:pPr algn="ctr"/>
-          </a:p>
-        </p:txBody>
-      </p:sp>
-      <p:sp>
-        <p:nvSpPr>
-          <p:cNvPr id="15" name="TextBox 14"/>
-          <p:cNvSpPr txBox="1"/>
-          <p:nvPr/>
-        </p:nvSpPr>
-        <p:spPr>
-          <a:xfrm>
-            <a:off x="6233007" y="3200400"/>
-            <a:ext cx="2366695" cy="457200"/>
-          </a:xfrm>
-          <a:prstGeom prst="rect">
-            <a:avLst/>
-          </a:prstGeom>
-          <a:noFill/>
-        </p:spPr>
-        <p:txBody>
-          <a:bodyPr wrap="square" anchor="ctr" lIns="0" rIns="0" tIns="0" bIns="0"/>
-          <a:lstStyle/>
-          <a:p>
-            <a:pPr algn="ctr">
-              <a:lnSpc>
-                <a:spcPct val="100000"/>
-              </a:lnSpc>
-              <a:spcBef>
-                <a:spcPts val="0"/>
-              </a:spcBef>
-              <a:spcAft>
-                <a:spcPts val="0"/>
-              </a:spcAft>
-            </a:pPr>
-            <a:r>
-              <a:rPr sz="950" b="1" i="0" lang="en-AU" spc="-4">
-                <a:solidFill>
-                  <a:srgbClr val="111111"/>
-                </a:solidFill>
-                <a:latin typeface="Inter"/>
-              </a:rPr>
-              <a:t>Change management</a:t>
-            </a:r>
-          </a:p>
-        </p:txBody>
-      </p:sp>
-      <p:sp>
-        <p:nvSpPr>
-          <p:cNvPr id="16" name="Rectangle 15"/>
-          <p:cNvSpPr/>
-          <p:nvPr/>
-        </p:nvSpPr>
-        <p:spPr>
-          <a:xfrm>
-            <a:off x="8800871" y="3200400"/>
-            <a:ext cx="2512999" cy="457200"/>
-          </a:xfrm>
-          <a:prstGeom prst="rect">
-            <a:avLst/>
-          </a:prstGeom>
-          <a:solidFill>
-            <a:srgbClr val="FFFFFF"/>
-          </a:solidFill>
-          <a:ln w="12700">
-            <a:solidFill>
-              <a:srgbClr val="E4E4E0"/>
-            </a:solidFill>
-          </a:ln>
-          <a:effectLst/>
-        </p:spPr>
-        <p:style>
-          <a:lnRef idx="1">
-            <a:schemeClr val="accent1"/>
-          </a:lnRef>
-          <a:fillRef idx="3">
-            <a:schemeClr val="accent1"/>
-          </a:fillRef>
-          <a:effectRef idx="2">
-            <a:schemeClr val="accent1"/>
-          </a:effectRef>
-          <a:fontRef idx="minor">
-            <a:schemeClr val="lt1"/>
-          </a:fontRef>
-        </p:style>
-        <p:txBody>
-          <a:bodyPr rtlCol="0" anchor="ctr"/>
-          <a:lstStyle/>
-          <a:p>
-            <a:pPr algn="ctr"/>
-          </a:p>
-        </p:txBody>
-      </p:sp>
-      <p:sp>
-        <p:nvSpPr>
-          <p:cNvPr id="17" name="TextBox 16"/>
-          <p:cNvSpPr txBox="1"/>
-          <p:nvPr/>
-        </p:nvSpPr>
-        <p:spPr>
-          <a:xfrm>
-            <a:off x="8874023" y="3200400"/>
-            <a:ext cx="2366695" cy="457200"/>
-          </a:xfrm>
-          <a:prstGeom prst="rect">
-            <a:avLst/>
-          </a:prstGeom>
-          <a:noFill/>
-        </p:spPr>
-        <p:txBody>
-          <a:bodyPr wrap="square" anchor="ctr" lIns="0" rIns="0" tIns="0" bIns="0"/>
-          <a:lstStyle/>
-          <a:p>
-            <a:pPr algn="ctr">
-              <a:lnSpc>
-                <a:spcPct val="100000"/>
-              </a:lnSpc>
-              <a:spcBef>
-                <a:spcPts val="0"/>
-              </a:spcBef>
-              <a:spcAft>
-                <a:spcPts val="0"/>
-              </a:spcAft>
-            </a:pPr>
-            <a:r>
-              <a:rPr sz="950" b="1" i="0" lang="en-AU" spc="-4">
-                <a:solidFill>
-                  <a:srgbClr val="111111"/>
-                </a:solidFill>
-                <a:latin typeface="Inter"/>
-              </a:rPr>
-              <a:t>Release management</a:t>
-            </a:r>
-          </a:p>
-        </p:txBody>
-      </p:sp>
-      <p:sp>
-        <p:nvSpPr>
-          <p:cNvPr id="18" name="Rectangle 17"/>
-          <p:cNvSpPr/>
-          <p:nvPr/>
-        </p:nvSpPr>
-        <p:spPr>
-          <a:xfrm>
-            <a:off x="877824" y="3785615"/>
-            <a:ext cx="2512999" cy="457200"/>
-          </a:xfrm>
-          <a:prstGeom prst="rect">
-            <a:avLst/>
-          </a:prstGeom>
-          <a:solidFill>
-            <a:srgbClr val="FFFFFF"/>
-          </a:solidFill>
-          <a:ln w="12700">
-            <a:solidFill>
-              <a:srgbClr val="E4E4E0"/>
-            </a:solidFill>
-          </a:ln>
-          <a:effectLst/>
-        </p:spPr>
-        <p:style>
-          <a:lnRef idx="1">
-            <a:schemeClr val="accent1"/>
-          </a:lnRef>
-          <a:fillRef idx="3">
-            <a:schemeClr val="accent1"/>
-          </a:fillRef>
-          <a:effectRef idx="2">
-            <a:schemeClr val="accent1"/>
-          </a:effectRef>
-          <a:fontRef idx="minor">
-            <a:schemeClr val="lt1"/>
-          </a:fontRef>
-        </p:style>
-        <p:txBody>
-          <a:bodyPr rtlCol="0" anchor="ctr"/>
-          <a:lstStyle/>
-          <a:p>
-            <a:pPr algn="ctr"/>
-          </a:p>
-        </p:txBody>
-      </p:sp>
-      <p:sp>
-        <p:nvSpPr>
-          <p:cNvPr id="19" name="TextBox 18"/>
-          <p:cNvSpPr txBox="1"/>
-          <p:nvPr/>
-        </p:nvSpPr>
-        <p:spPr>
-          <a:xfrm>
-            <a:off x="950976" y="3785615"/>
-            <a:ext cx="2366695" cy="457200"/>
-          </a:xfrm>
-          <a:prstGeom prst="rect">
-            <a:avLst/>
-          </a:prstGeom>
-          <a:noFill/>
-        </p:spPr>
-        <p:txBody>
-          <a:bodyPr wrap="square" anchor="ctr" lIns="0" rIns="0" tIns="0" bIns="0"/>
-          <a:lstStyle/>
-          <a:p>
-            <a:pPr algn="ctr">
-              <a:lnSpc>
-                <a:spcPct val="100000"/>
-              </a:lnSpc>
-              <a:spcBef>
-                <a:spcPts val="0"/>
-              </a:spcBef>
-              <a:spcAft>
-                <a:spcPts val="0"/>
-              </a:spcAft>
-            </a:pPr>
-            <a:r>
-              <a:rPr sz="950" b="1" i="0" lang="en-AU" spc="-4">
-                <a:solidFill>
-                  <a:srgbClr val="111111"/>
-                </a:solidFill>
-                <a:latin typeface="Inter"/>
-              </a:rPr>
-              <a:t>Service requests</a:t>
-            </a:r>
-          </a:p>
-        </p:txBody>
-      </p:sp>
-      <p:sp>
-        <p:nvSpPr>
-          <p:cNvPr id="20" name="Rectangle 19"/>
-          <p:cNvSpPr/>
-          <p:nvPr/>
-        </p:nvSpPr>
-        <p:spPr>
-          <a:xfrm>
-            <a:off x="3518839" y="3785615"/>
-            <a:ext cx="2512999" cy="457200"/>
-          </a:xfrm>
-          <a:prstGeom prst="rect">
-            <a:avLst/>
-          </a:prstGeom>
-          <a:solidFill>
-            <a:srgbClr val="FFFFFF"/>
-          </a:solidFill>
-          <a:ln w="12700">
-            <a:solidFill>
-              <a:srgbClr val="E4E4E0"/>
-            </a:solidFill>
-          </a:ln>
-          <a:effectLst/>
-        </p:spPr>
-        <p:style>
-          <a:lnRef idx="1">
-            <a:schemeClr val="accent1"/>
-          </a:lnRef>
-          <a:fillRef idx="3">
-            <a:schemeClr val="accent1"/>
-          </a:fillRef>
-          <a:effectRef idx="2">
-            <a:schemeClr val="accent1"/>
-          </a:effectRef>
-          <a:fontRef idx="minor">
-            <a:schemeClr val="lt1"/>
-          </a:fontRef>
-        </p:style>
-        <p:txBody>
-          <a:bodyPr rtlCol="0" anchor="ctr"/>
-          <a:lstStyle/>
-          <a:p>
-            <a:pPr algn="ctr"/>
-          </a:p>
-        </p:txBody>
-      </p:sp>
-      <p:sp>
-        <p:nvSpPr>
-          <p:cNvPr id="21" name="TextBox 20"/>
-          <p:cNvSpPr txBox="1"/>
-          <p:nvPr/>
-        </p:nvSpPr>
-        <p:spPr>
-          <a:xfrm>
-            <a:off x="3591991" y="3785615"/>
-            <a:ext cx="2366695" cy="457200"/>
-          </a:xfrm>
-          <a:prstGeom prst="rect">
-            <a:avLst/>
-          </a:prstGeom>
-          <a:noFill/>
-        </p:spPr>
-        <p:txBody>
-          <a:bodyPr wrap="square" anchor="ctr" lIns="0" rIns="0" tIns="0" bIns="0"/>
-          <a:lstStyle/>
-          <a:p>
-            <a:pPr algn="ctr">
-              <a:lnSpc>
-                <a:spcPct val="100000"/>
-              </a:lnSpc>
-              <a:spcBef>
-                <a:spcPts val="0"/>
-              </a:spcBef>
-              <a:spcAft>
-                <a:spcPts val="0"/>
-              </a:spcAft>
-            </a:pPr>
-            <a:r>
-              <a:rPr sz="950" b="1" i="0" lang="en-AU" spc="-4">
-                <a:solidFill>
-                  <a:srgbClr val="111111"/>
-                </a:solidFill>
-                <a:latin typeface="Inter"/>
-              </a:rPr>
-              <a:t>Change Advisory Board</a:t>
-            </a:r>
-          </a:p>
-        </p:txBody>
-      </p:sp>
-      <p:sp>
-        <p:nvSpPr>
-          <p:cNvPr id="22" name="Rectangle 21"/>
-          <p:cNvSpPr/>
-          <p:nvPr/>
-        </p:nvSpPr>
-        <p:spPr>
-          <a:xfrm>
-            <a:off x="6159855" y="3785615"/>
-            <a:ext cx="2512999" cy="457200"/>
-          </a:xfrm>
-          <a:prstGeom prst="rect">
-            <a:avLst/>
-          </a:prstGeom>
-          <a:solidFill>
-            <a:srgbClr val="FFFFFF"/>
-          </a:solidFill>
-          <a:ln w="12700">
-            <a:solidFill>
-              <a:srgbClr val="E4E4E0"/>
-            </a:solidFill>
-          </a:ln>
-          <a:effectLst/>
-        </p:spPr>
-        <p:style>
-          <a:lnRef idx="1">
-            <a:schemeClr val="accent1"/>
-          </a:lnRef>
-          <a:fillRef idx="3">
-            <a:schemeClr val="accent1"/>
-          </a:fillRef>
-          <a:effectRef idx="2">
-            <a:schemeClr val="accent1"/>
-          </a:effectRef>
-          <a:fontRef idx="minor">
-            <a:schemeClr val="lt1"/>
-          </a:fontRef>
-        </p:style>
-        <p:txBody>
-          <a:bodyPr rtlCol="0" anchor="ctr"/>
-          <a:lstStyle/>
-          <a:p>
-            <a:pPr algn="ctr"/>
-          </a:p>
-        </p:txBody>
-      </p:sp>
-      <p:sp>
-        <p:nvSpPr>
-          <p:cNvPr id="23" name="TextBox 22"/>
-          <p:cNvSpPr txBox="1"/>
-          <p:nvPr/>
-        </p:nvSpPr>
-        <p:spPr>
-          <a:xfrm>
-            <a:off x="6233007" y="3785615"/>
-            <a:ext cx="2366695" cy="457200"/>
-          </a:xfrm>
-          <a:prstGeom prst="rect">
-            <a:avLst/>
-          </a:prstGeom>
-          <a:noFill/>
-        </p:spPr>
-        <p:txBody>
-          <a:bodyPr wrap="square" anchor="ctr" lIns="0" rIns="0" tIns="0" bIns="0"/>
-          <a:lstStyle/>
-          <a:p>
-            <a:pPr algn="ctr">
-              <a:lnSpc>
-                <a:spcPct val="100000"/>
-              </a:lnSpc>
-              <a:spcBef>
-                <a:spcPts val="0"/>
-              </a:spcBef>
-              <a:spcAft>
-                <a:spcPts val="0"/>
-              </a:spcAft>
-            </a:pPr>
-            <a:r>
-              <a:rPr sz="950" b="1" i="0" lang="en-AU" spc="-4">
-                <a:solidFill>
-                  <a:srgbClr val="111111"/>
-                </a:solidFill>
-                <a:latin typeface="Inter"/>
-              </a:rPr>
-              <a:t>SLAs</a:t>
-            </a:r>
-          </a:p>
-        </p:txBody>
-      </p:sp>
-      <p:sp>
-        <p:nvSpPr>
-          <p:cNvPr id="24" name="Rectangle 23"/>
-          <p:cNvSpPr/>
-          <p:nvPr/>
-        </p:nvSpPr>
-        <p:spPr>
-          <a:xfrm>
-            <a:off x="8800871" y="3785615"/>
-            <a:ext cx="2512999" cy="457200"/>
-          </a:xfrm>
-          <a:prstGeom prst="rect">
-            <a:avLst/>
-          </a:prstGeom>
-          <a:solidFill>
-            <a:srgbClr val="FFFFFF"/>
-          </a:solidFill>
-          <a:ln w="12700">
-            <a:solidFill>
-              <a:srgbClr val="E4E4E0"/>
-            </a:solidFill>
-          </a:ln>
-          <a:effectLst/>
-        </p:spPr>
-        <p:style>
-          <a:lnRef idx="1">
-            <a:schemeClr val="accent1"/>
-          </a:lnRef>
-          <a:fillRef idx="3">
-            <a:schemeClr val="accent1"/>
-          </a:fillRef>
-          <a:effectRef idx="2">
-            <a:schemeClr val="accent1"/>
-          </a:effectRef>
-          <a:fontRef idx="minor">
-            <a:schemeClr val="lt1"/>
-          </a:fontRef>
-        </p:style>
-        <p:txBody>
-          <a:bodyPr rtlCol="0" anchor="ctr"/>
-          <a:lstStyle/>
-          <a:p>
-            <a:pPr algn="ctr"/>
-          </a:p>
-        </p:txBody>
-      </p:sp>
-      <p:sp>
-        <p:nvSpPr>
-          <p:cNvPr id="25" name="TextBox 24"/>
-          <p:cNvSpPr txBox="1"/>
-          <p:nvPr/>
-        </p:nvSpPr>
-        <p:spPr>
-          <a:xfrm>
-            <a:off x="8874023" y="3785615"/>
-            <a:ext cx="2366695" cy="457200"/>
-          </a:xfrm>
-          <a:prstGeom prst="rect">
-            <a:avLst/>
-          </a:prstGeom>
-          <a:noFill/>
-        </p:spPr>
-        <p:txBody>
-          <a:bodyPr wrap="square" anchor="ctr" lIns="0" rIns="0" tIns="0" bIns="0"/>
-          <a:lstStyle/>
-          <a:p>
-            <a:pPr algn="ctr">
-              <a:lnSpc>
-                <a:spcPct val="100000"/>
-              </a:lnSpc>
-              <a:spcBef>
-                <a:spcPts val="0"/>
-              </a:spcBef>
-              <a:spcAft>
-                <a:spcPts val="0"/>
-              </a:spcAft>
-            </a:pPr>
-            <a:r>
-              <a:rPr sz="950" b="1" i="0" lang="en-AU" spc="-4">
-                <a:solidFill>
-                  <a:srgbClr val="111111"/>
-                </a:solidFill>
-                <a:latin typeface="Inter"/>
-              </a:rPr>
-              <a:t>Metrics</a:t>
-            </a:r>
-          </a:p>
-        </p:txBody>
-      </p:sp>
-      <p:sp>
-        <p:nvSpPr>
-          <p:cNvPr id="26" name="Rectangle 25"/>
-          <p:cNvSpPr/>
-          <p:nvPr/>
-        </p:nvSpPr>
-        <p:spPr>
-          <a:xfrm>
-            <a:off x="877824" y="4370832"/>
-            <a:ext cx="2512999" cy="457200"/>
-          </a:xfrm>
-          <a:prstGeom prst="rect">
-            <a:avLst/>
-          </a:prstGeom>
-          <a:solidFill>
-            <a:srgbClr val="FFFFFF"/>
-          </a:solidFill>
-          <a:ln w="12700">
-            <a:solidFill>
-              <a:srgbClr val="E4E4E0"/>
-            </a:solidFill>
-          </a:ln>
-          <a:effectLst/>
-        </p:spPr>
-        <p:style>
-          <a:lnRef idx="1">
-            <a:schemeClr val="accent1"/>
-          </a:lnRef>
-          <a:fillRef idx="3">
-            <a:schemeClr val="accent1"/>
-          </a:fillRef>
-          <a:effectRef idx="2">
-            <a:schemeClr val="accent1"/>
-          </a:effectRef>
-          <a:fontRef idx="minor">
-            <a:schemeClr val="lt1"/>
-          </a:fontRef>
-        </p:style>
-        <p:txBody>
-          <a:bodyPr rtlCol="0" anchor="ctr"/>
-          <a:lstStyle/>
-          <a:p>
-            <a:pPr algn="ctr"/>
-          </a:p>
-        </p:txBody>
-      </p:sp>
-      <p:sp>
-        <p:nvSpPr>
-          <p:cNvPr id="27" name="TextBox 26"/>
-          <p:cNvSpPr txBox="1"/>
-          <p:nvPr/>
-        </p:nvSpPr>
-        <p:spPr>
-          <a:xfrm>
-            <a:off x="950976" y="4370832"/>
-            <a:ext cx="2366695" cy="457200"/>
-          </a:xfrm>
-          <a:prstGeom prst="rect">
-            <a:avLst/>
-          </a:prstGeom>
-          <a:noFill/>
-        </p:spPr>
-        <p:txBody>
-          <a:bodyPr wrap="square" anchor="ctr" lIns="0" rIns="0" tIns="0" bIns="0"/>
-          <a:lstStyle/>
-          <a:p>
-            <a:pPr algn="ctr">
-              <a:lnSpc>
-                <a:spcPct val="100000"/>
-              </a:lnSpc>
-              <a:spcBef>
-                <a:spcPts val="0"/>
-              </a:spcBef>
-              <a:spcAft>
-                <a:spcPts val="0"/>
-              </a:spcAft>
-            </a:pPr>
-            <a:r>
-              <a:rPr sz="950" b="1" i="0" lang="en-AU" spc="-4">
-                <a:solidFill>
-                  <a:srgbClr val="111111"/>
-                </a:solidFill>
-                <a:latin typeface="Inter"/>
-              </a:rPr>
-              <a:t>Integration health checks</a:t>
-            </a:r>
-          </a:p>
-        </p:txBody>
-      </p:sp>
-      <p:sp>
-        <p:nvSpPr>
-          <p:cNvPr id="28" name="Rectangle 27"/>
-          <p:cNvSpPr/>
-          <p:nvPr/>
-        </p:nvSpPr>
-        <p:spPr>
-          <a:xfrm>
-            <a:off x="3518839" y="4370832"/>
-            <a:ext cx="2512999" cy="457200"/>
-          </a:xfrm>
-          <a:prstGeom prst="rect">
-            <a:avLst/>
-          </a:prstGeom>
-          <a:solidFill>
-            <a:srgbClr val="FFFFFF"/>
-          </a:solidFill>
-          <a:ln w="12700">
-            <a:solidFill>
-              <a:srgbClr val="E4E4E0"/>
-            </a:solidFill>
-          </a:ln>
-          <a:effectLst/>
-        </p:spPr>
-        <p:style>
-          <a:lnRef idx="1">
-            <a:schemeClr val="accent1"/>
-          </a:lnRef>
-          <a:fillRef idx="3">
-            <a:schemeClr val="accent1"/>
-          </a:fillRef>
-          <a:effectRef idx="2">
-            <a:schemeClr val="accent1"/>
-          </a:effectRef>
-          <a:fontRef idx="minor">
-            <a:schemeClr val="lt1"/>
-          </a:fontRef>
-        </p:style>
-        <p:txBody>
-          <a:bodyPr rtlCol="0" anchor="ctr"/>
-          <a:lstStyle/>
-          <a:p>
-            <a:pPr algn="ctr"/>
-          </a:p>
-        </p:txBody>
-      </p:sp>
-      <p:sp>
-        <p:nvSpPr>
-          <p:cNvPr id="29" name="TextBox 28"/>
-          <p:cNvSpPr txBox="1"/>
-          <p:nvPr/>
-        </p:nvSpPr>
-        <p:spPr>
-          <a:xfrm>
-            <a:off x="3591991" y="4370832"/>
-            <a:ext cx="2366695" cy="457200"/>
-          </a:xfrm>
-          <a:prstGeom prst="rect">
-            <a:avLst/>
-          </a:prstGeom>
-          <a:noFill/>
-        </p:spPr>
-        <p:txBody>
-          <a:bodyPr wrap="square" anchor="ctr" lIns="0" rIns="0" tIns="0" bIns="0"/>
-          <a:lstStyle/>
-          <a:p>
-            <a:pPr algn="ctr">
-              <a:lnSpc>
-                <a:spcPct val="100000"/>
-              </a:lnSpc>
-              <a:spcBef>
-                <a:spcPts val="0"/>
-              </a:spcBef>
-              <a:spcAft>
-                <a:spcPts val="0"/>
-              </a:spcAft>
-            </a:pPr>
-            <a:r>
-              <a:rPr sz="950" b="1" i="0" lang="en-AU" spc="-4">
-                <a:solidFill>
-                  <a:srgbClr val="111111"/>
-                </a:solidFill>
-                <a:latin typeface="Inter"/>
-              </a:rPr>
-              <a:t>Backlog management</a:t>
-            </a:r>
-          </a:p>
-        </p:txBody>
-      </p:sp>
-      <p:sp>
-        <p:nvSpPr>
-          <p:cNvPr id="30" name="Rectangle 29"/>
-          <p:cNvSpPr/>
-          <p:nvPr/>
-        </p:nvSpPr>
-        <p:spPr>
-          <a:xfrm>
-            <a:off x="6159855" y="4370832"/>
-            <a:ext cx="2512999" cy="457200"/>
-          </a:xfrm>
-          <a:prstGeom prst="rect">
-            <a:avLst/>
-          </a:prstGeom>
-          <a:solidFill>
-            <a:srgbClr val="FFFFFF"/>
-          </a:solidFill>
-          <a:ln w="12700">
-            <a:solidFill>
-              <a:srgbClr val="E4E4E0"/>
-            </a:solidFill>
-          </a:ln>
-          <a:effectLst/>
-        </p:spPr>
-        <p:style>
-          <a:lnRef idx="1">
-            <a:schemeClr val="accent1"/>
-          </a:lnRef>
-          <a:fillRef idx="3">
-            <a:schemeClr val="accent1"/>
-          </a:fillRef>
-          <a:effectRef idx="2">
-            <a:schemeClr val="accent1"/>
-          </a:effectRef>
-          <a:fontRef idx="minor">
-            <a:schemeClr val="lt1"/>
-          </a:fontRef>
-        </p:style>
-        <p:txBody>
-          <a:bodyPr rtlCol="0" anchor="ctr"/>
-          <a:lstStyle/>
-          <a:p>
-            <a:pPr algn="ctr"/>
-          </a:p>
-        </p:txBody>
-      </p:sp>
-      <p:sp>
-        <p:nvSpPr>
-          <p:cNvPr id="31" name="TextBox 30"/>
-          <p:cNvSpPr txBox="1"/>
-          <p:nvPr/>
-        </p:nvSpPr>
-        <p:spPr>
-          <a:xfrm>
-            <a:off x="6233007" y="4370832"/>
-            <a:ext cx="2366695" cy="457200"/>
-          </a:xfrm>
-          <a:prstGeom prst="rect">
-            <a:avLst/>
-          </a:prstGeom>
-          <a:noFill/>
-        </p:spPr>
-        <p:txBody>
-          <a:bodyPr wrap="square" anchor="ctr" lIns="0" rIns="0" tIns="0" bIns="0"/>
-          <a:lstStyle/>
-          <a:p>
-            <a:pPr algn="ctr">
-              <a:lnSpc>
-                <a:spcPct val="100000"/>
-              </a:lnSpc>
-              <a:spcBef>
-                <a:spcPts val="0"/>
-              </a:spcBef>
-              <a:spcAft>
-                <a:spcPts val="0"/>
-              </a:spcAft>
-            </a:pPr>
-            <a:r>
-              <a:rPr sz="950" b="1" i="0" lang="en-AU" spc="-4">
-                <a:solidFill>
-                  <a:srgbClr val="111111"/>
-                </a:solidFill>
-                <a:latin typeface="Inter"/>
-              </a:rPr>
-              <a:t>Prioritisation forum</a:t>
-            </a:r>
-          </a:p>
-        </p:txBody>
-      </p:sp>
-      <p:sp>
-        <p:nvSpPr>
-          <p:cNvPr id="32" name="Rectangle 31"/>
-          <p:cNvSpPr/>
-          <p:nvPr/>
-        </p:nvSpPr>
-        <p:spPr>
-          <a:xfrm>
-            <a:off x="8800871" y="4370832"/>
-            <a:ext cx="2512999" cy="457200"/>
-          </a:xfrm>
-          <a:prstGeom prst="rect">
-            <a:avLst/>
-          </a:prstGeom>
-          <a:solidFill>
-            <a:srgbClr val="FFFFFF"/>
-          </a:solidFill>
-          <a:ln w="12700">
-            <a:solidFill>
-              <a:srgbClr val="E4E4E0"/>
-            </a:solidFill>
-          </a:ln>
-          <a:effectLst/>
-        </p:spPr>
-        <p:style>
-          <a:lnRef idx="1">
-            <a:schemeClr val="accent1"/>
-          </a:lnRef>
-          <a:fillRef idx="3">
-            <a:schemeClr val="accent1"/>
-          </a:fillRef>
-          <a:effectRef idx="2">
-            <a:schemeClr val="accent1"/>
-          </a:effectRef>
-          <a:fontRef idx="minor">
-            <a:schemeClr val="lt1"/>
-          </a:fontRef>
-        </p:style>
-        <p:txBody>
-          <a:bodyPr rtlCol="0" anchor="ctr"/>
-          <a:lstStyle/>
-          <a:p>
-            <a:pPr algn="ctr"/>
-          </a:p>
-        </p:txBody>
-      </p:sp>
-      <p:sp>
-        <p:nvSpPr>
-          <p:cNvPr id="33" name="TextBox 32"/>
-          <p:cNvSpPr txBox="1"/>
-          <p:nvPr/>
-        </p:nvSpPr>
-        <p:spPr>
-          <a:xfrm>
-            <a:off x="8874023" y="4370832"/>
-            <a:ext cx="2366695" cy="457200"/>
-          </a:xfrm>
-          <a:prstGeom prst="rect">
-            <a:avLst/>
-          </a:prstGeom>
-          <a:noFill/>
-        </p:spPr>
-        <p:txBody>
-          <a:bodyPr wrap="square" anchor="ctr" lIns="0" rIns="0" tIns="0" bIns="0"/>
-          <a:lstStyle/>
-          <a:p>
-            <a:pPr algn="ctr">
-              <a:lnSpc>
-                <a:spcPct val="100000"/>
-              </a:lnSpc>
-              <a:spcBef>
-                <a:spcPts val="0"/>
-              </a:spcBef>
-              <a:spcAft>
-                <a:spcPts val="0"/>
-              </a:spcAft>
-            </a:pPr>
-            <a:r>
-              <a:rPr sz="950" b="1" i="0" lang="en-AU" spc="-4">
-                <a:solidFill>
-                  <a:srgbClr val="111111"/>
-                </a:solidFill>
-                <a:latin typeface="Inter"/>
-              </a:rPr>
-              <a:t>Capacity management</a:t>
-            </a:r>
-          </a:p>
-        </p:txBody>
-      </p:sp>
-      <p:sp>
-        <p:nvSpPr>
-          <p:cNvPr id="34" name="Rectangle 33"/>
-          <p:cNvSpPr/>
-          <p:nvPr/>
-        </p:nvSpPr>
-        <p:spPr>
-          <a:xfrm>
-            <a:off x="877824" y="4956048"/>
-            <a:ext cx="2512999" cy="457200"/>
-          </a:xfrm>
-          <a:prstGeom prst="rect">
-            <a:avLst/>
-          </a:prstGeom>
-          <a:solidFill>
-            <a:srgbClr val="FFFFFF"/>
-          </a:solidFill>
-          <a:ln w="12700">
-            <a:solidFill>
-              <a:srgbClr val="E4E4E0"/>
-            </a:solidFill>
-          </a:ln>
-          <a:effectLst/>
-        </p:spPr>
-        <p:style>
-          <a:lnRef idx="1">
-            <a:schemeClr val="accent1"/>
-          </a:lnRef>
-          <a:fillRef idx="3">
-            <a:schemeClr val="accent1"/>
-          </a:fillRef>
-          <a:effectRef idx="2">
-            <a:schemeClr val="accent1"/>
-          </a:effectRef>
-          <a:fontRef idx="minor">
-            <a:schemeClr val="lt1"/>
-          </a:fontRef>
-        </p:style>
-        <p:txBody>
-          <a:bodyPr rtlCol="0" anchor="ctr"/>
-          <a:lstStyle/>
-          <a:p>
-            <a:pPr algn="ctr"/>
-          </a:p>
-        </p:txBody>
-      </p:sp>
-      <p:sp>
-        <p:nvSpPr>
-          <p:cNvPr id="35" name="TextBox 34"/>
-          <p:cNvSpPr txBox="1"/>
-          <p:nvPr/>
-        </p:nvSpPr>
-        <p:spPr>
-          <a:xfrm>
-            <a:off x="950976" y="4956048"/>
-            <a:ext cx="2366695" cy="457200"/>
-          </a:xfrm>
-          <a:prstGeom prst="rect">
-            <a:avLst/>
-          </a:prstGeom>
-          <a:noFill/>
-        </p:spPr>
-        <p:txBody>
-          <a:bodyPr wrap="square" anchor="ctr" lIns="0" rIns="0" tIns="0" bIns="0"/>
-          <a:lstStyle/>
-          <a:p>
-            <a:pPr algn="ctr">
-              <a:lnSpc>
-                <a:spcPct val="100000"/>
-              </a:lnSpc>
-              <a:spcBef>
-                <a:spcPts val="0"/>
-              </a:spcBef>
-              <a:spcAft>
-                <a:spcPts val="0"/>
-              </a:spcAft>
-            </a:pPr>
-            <a:r>
-              <a:rPr sz="950" b="1" i="0" lang="en-AU" spc="-4">
-                <a:solidFill>
-                  <a:srgbClr val="111111"/>
-                </a:solidFill>
-                <a:latin typeface="Inter"/>
-              </a:rPr>
-              <a:t>Enhancements</a:t>
-            </a:r>
-          </a:p>
-        </p:txBody>
-      </p:sp>
-      <p:sp>
-        <p:nvSpPr>
-          <p:cNvPr id="36" name="Rectangle 35"/>
-          <p:cNvSpPr/>
-          <p:nvPr/>
-        </p:nvSpPr>
-        <p:spPr>
-          <a:xfrm>
-            <a:off x="3518839" y="4956048"/>
-            <a:ext cx="2512999" cy="457200"/>
-          </a:xfrm>
-          <a:prstGeom prst="rect">
-            <a:avLst/>
-          </a:prstGeom>
-          <a:solidFill>
-            <a:srgbClr val="FFFFFF"/>
-          </a:solidFill>
-          <a:ln w="12700">
-            <a:solidFill>
-              <a:srgbClr val="E4E4E0"/>
-            </a:solidFill>
-          </a:ln>
-          <a:effectLst/>
-        </p:spPr>
-        <p:style>
-          <a:lnRef idx="1">
-            <a:schemeClr val="accent1"/>
-          </a:lnRef>
-          <a:fillRef idx="3">
-            <a:schemeClr val="accent1"/>
-          </a:fillRef>
-          <a:effectRef idx="2">
-            <a:schemeClr val="accent1"/>
-          </a:effectRef>
-          <a:fontRef idx="minor">
-            <a:schemeClr val="lt1"/>
-          </a:fontRef>
-        </p:style>
-        <p:txBody>
-          <a:bodyPr rtlCol="0" anchor="ctr"/>
-          <a:lstStyle/>
-          <a:p>
-            <a:pPr algn="ctr"/>
-          </a:p>
-        </p:txBody>
-      </p:sp>
-      <p:sp>
-        <p:nvSpPr>
-          <p:cNvPr id="37" name="TextBox 36"/>
-          <p:cNvSpPr txBox="1"/>
-          <p:nvPr/>
-        </p:nvSpPr>
-        <p:spPr>
-          <a:xfrm>
-            <a:off x="3591991" y="4956048"/>
-            <a:ext cx="2366695" cy="457200"/>
-          </a:xfrm>
-          <a:prstGeom prst="rect">
-            <a:avLst/>
-          </a:prstGeom>
-          <a:noFill/>
-        </p:spPr>
-        <p:txBody>
-          <a:bodyPr wrap="square" anchor="ctr" lIns="0" rIns="0" tIns="0" bIns="0"/>
-          <a:lstStyle/>
-          <a:p>
-            <a:pPr algn="ctr">
-              <a:lnSpc>
-                <a:spcPct val="100000"/>
-              </a:lnSpc>
-              <a:spcBef>
-                <a:spcPts val="0"/>
-              </a:spcBef>
-              <a:spcAft>
-                <a:spcPts val="0"/>
-              </a:spcAft>
-            </a:pPr>
-            <a:r>
-              <a:rPr sz="950" b="1" i="0" lang="en-AU" spc="-4">
-                <a:solidFill>
-                  <a:srgbClr val="111111"/>
-                </a:solidFill>
-                <a:latin typeface="Inter"/>
-              </a:rPr>
-              <a:t>Knowledge base</a:t>
-            </a:r>
-          </a:p>
-        </p:txBody>
-      </p:sp>
-      <p:sp>
-        <p:nvSpPr>
-          <p:cNvPr id="38" name="Rectangle 37"/>
-          <p:cNvSpPr/>
-          <p:nvPr/>
-        </p:nvSpPr>
-        <p:spPr>
-          <a:xfrm>
-            <a:off x="6159855" y="4956048"/>
-            <a:ext cx="2512999" cy="457200"/>
-          </a:xfrm>
-          <a:prstGeom prst="rect">
-            <a:avLst/>
-          </a:prstGeom>
-          <a:solidFill>
-            <a:srgbClr val="FFFFFF"/>
-          </a:solidFill>
-          <a:ln w="12700">
-            <a:solidFill>
-              <a:srgbClr val="E4E4E0"/>
-            </a:solidFill>
-          </a:ln>
-          <a:effectLst/>
-        </p:spPr>
-        <p:style>
-          <a:lnRef idx="1">
-            <a:schemeClr val="accent1"/>
-          </a:lnRef>
-          <a:fillRef idx="3">
-            <a:schemeClr val="accent1"/>
-          </a:fillRef>
-          <a:effectRef idx="2">
-            <a:schemeClr val="accent1"/>
-          </a:effectRef>
-          <a:fontRef idx="minor">
-            <a:schemeClr val="lt1"/>
-          </a:fontRef>
-        </p:style>
-        <p:txBody>
-          <a:bodyPr rtlCol="0" anchor="ctr"/>
-          <a:lstStyle/>
-          <a:p>
-            <a:pPr algn="ctr"/>
-          </a:p>
-        </p:txBody>
-      </p:sp>
-      <p:sp>
-        <p:nvSpPr>
-          <p:cNvPr id="39" name="TextBox 38"/>
-          <p:cNvSpPr txBox="1"/>
-          <p:nvPr/>
-        </p:nvSpPr>
-        <p:spPr>
-          <a:xfrm>
-            <a:off x="6233007" y="4956048"/>
-            <a:ext cx="2366695" cy="457200"/>
-          </a:xfrm>
-          <a:prstGeom prst="rect">
-            <a:avLst/>
-          </a:prstGeom>
-          <a:noFill/>
-        </p:spPr>
-        <p:txBody>
-          <a:bodyPr wrap="square" anchor="ctr" lIns="0" rIns="0" tIns="0" bIns="0"/>
-          <a:lstStyle/>
-          <a:p>
-            <a:pPr algn="ctr">
-              <a:lnSpc>
-                <a:spcPct val="100000"/>
-              </a:lnSpc>
-              <a:spcBef>
-                <a:spcPts val="0"/>
-              </a:spcBef>
-              <a:spcAft>
-                <a:spcPts val="0"/>
-              </a:spcAft>
-            </a:pPr>
-            <a:r>
-              <a:rPr sz="950" b="1" i="0" lang="en-AU" spc="-4">
-                <a:solidFill>
-                  <a:srgbClr val="111111"/>
-                </a:solidFill>
-                <a:latin typeface="Inter"/>
-              </a:rPr>
-              <a:t>Cyber security</a:t>
-            </a:r>
-          </a:p>
-        </p:txBody>
-      </p:sp>
-      <p:sp>
-        <p:nvSpPr>
-          <p:cNvPr id="40" name="Rectangle 39"/>
-          <p:cNvSpPr/>
-          <p:nvPr/>
-        </p:nvSpPr>
-        <p:spPr>
-          <a:xfrm>
-            <a:off x="8800871" y="4956048"/>
-            <a:ext cx="2512999" cy="457200"/>
-          </a:xfrm>
-          <a:prstGeom prst="rect">
-            <a:avLst/>
-          </a:prstGeom>
-          <a:solidFill>
-            <a:srgbClr val="FFFFFF"/>
-          </a:solidFill>
-          <a:ln w="12700">
-            <a:solidFill>
-              <a:srgbClr val="E4E4E0"/>
-            </a:solidFill>
-          </a:ln>
-          <a:effectLst/>
-        </p:spPr>
-        <p:style>
-          <a:lnRef idx="1">
-            <a:schemeClr val="accent1"/>
-          </a:lnRef>
-          <a:fillRef idx="3">
-            <a:schemeClr val="accent1"/>
-          </a:fillRef>
-          <a:effectRef idx="2">
-            <a:schemeClr val="accent1"/>
-          </a:effectRef>
-          <a:fontRef idx="minor">
-            <a:schemeClr val="lt1"/>
-          </a:fontRef>
-        </p:style>
-        <p:txBody>
-          <a:bodyPr rtlCol="0" anchor="ctr"/>
-          <a:lstStyle/>
-          <a:p>
-            <a:pPr algn="ctr"/>
-          </a:p>
-        </p:txBody>
-      </p:sp>
-      <p:sp>
-        <p:nvSpPr>
-          <p:cNvPr id="41" name="TextBox 40"/>
-          <p:cNvSpPr txBox="1"/>
-          <p:nvPr/>
-        </p:nvSpPr>
-        <p:spPr>
-          <a:xfrm>
-            <a:off x="8874023" y="4956048"/>
-            <a:ext cx="2366695" cy="457200"/>
-          </a:xfrm>
-          <a:prstGeom prst="rect">
-            <a:avLst/>
-          </a:prstGeom>
-          <a:noFill/>
-        </p:spPr>
-        <p:txBody>
-          <a:bodyPr wrap="square" anchor="ctr" lIns="0" rIns="0" tIns="0" bIns="0"/>
-          <a:lstStyle/>
-          <a:p>
-            <a:pPr algn="ctr">
-              <a:lnSpc>
-                <a:spcPct val="100000"/>
-              </a:lnSpc>
-              <a:spcBef>
-                <a:spcPts val="0"/>
-              </a:spcBef>
-              <a:spcAft>
-                <a:spcPts val="0"/>
-              </a:spcAft>
-            </a:pPr>
-            <a:r>
-              <a:rPr sz="950" b="1" i="0" lang="en-AU" spc="-4">
-                <a:solidFill>
-                  <a:srgbClr val="111111"/>
-                </a:solidFill>
-                <a:latin typeface="Inter"/>
-              </a:rPr>
-              <a:t>BP &amp; security config</a:t>
-            </a:r>
-          </a:p>
-        </p:txBody>
-      </p:sp>
-      <p:sp>
-        <p:nvSpPr>
-          <p:cNvPr id="42" name="Rectangle 41"/>
-          <p:cNvSpPr/>
-          <p:nvPr/>
-        </p:nvSpPr>
-        <p:spPr>
-          <a:xfrm>
-            <a:off x="877824" y="5541264"/>
-            <a:ext cx="10436047" cy="384048"/>
-          </a:xfrm>
-          <a:prstGeom prst="rect">
-            <a:avLst/>
-          </a:prstGeom>
-          <a:solidFill>
-            <a:srgbClr val="EA493F"/>
-          </a:solidFill>
-          <a:ln>
-            <a:noFill/>
-          </a:ln>
-          <a:effectLst/>
-        </p:spPr>
-        <p:style>
-          <a:lnRef idx="1">
-            <a:schemeClr val="accent1"/>
-          </a:lnRef>
-          <a:fillRef idx="3">
-            <a:schemeClr val="accent1"/>
-          </a:fillRef>
-          <a:effectRef idx="2">
-            <a:schemeClr val="accent1"/>
-          </a:effectRef>
-          <a:fontRef idx="minor">
-            <a:schemeClr val="lt1"/>
-          </a:fontRef>
-        </p:style>
-        <p:txBody>
-          <a:bodyPr rtlCol="0" anchor="ctr"/>
-          <a:lstStyle/>
-          <a:p>
-            <a:pPr algn="ctr"/>
-          </a:p>
-        </p:txBody>
-      </p:sp>
-      <p:sp>
-        <p:nvSpPr>
-          <p:cNvPr id="43" name="TextBox 42"/>
-          <p:cNvSpPr txBox="1"/>
-          <p:nvPr/>
-        </p:nvSpPr>
-        <p:spPr>
-          <a:xfrm>
-            <a:off x="1106424" y="5541264"/>
-            <a:ext cx="9978847" cy="384048"/>
-          </a:xfrm>
-          <a:prstGeom prst="rect">
-            <a:avLst/>
-          </a:prstGeom>
-          <a:noFill/>
-        </p:spPr>
-        <p:txBody>
-          <a:bodyPr wrap="square" anchor="ctr" lIns="0" rIns="0" tIns="0" bIns="0"/>
-          <a:lstStyle/>
-          <a:p>
-            <a:pPr algn="l">
-              <a:lnSpc>
-                <a:spcPct val="100000"/>
-              </a:lnSpc>
-              <a:spcBef>
-                <a:spcPts val="0"/>
-              </a:spcBef>
-              <a:spcAft>
-                <a:spcPts val="0"/>
-              </a:spcAft>
-            </a:pPr>
-            <a:r>
-              <a:rPr sz="1150" b="1" i="0" lang="en-AU" spc="115" cap="all">
-                <a:solidFill>
-                  <a:srgbClr val="FFFFFF"/>
-                </a:solidFill>
-                <a:latin typeface="Inter"/>
-              </a:rPr>
-              <a:t>SERVICE INTEGRATION · ITSM</a:t>
-            </a:r>
-          </a:p>
-        </p:txBody>
-      </p:sp>
-      <p:sp>
-        <p:nvSpPr>
-          <p:cNvPr id="44" name="Rectangle 43"/>
-          <p:cNvSpPr/>
-          <p:nvPr/>
-        </p:nvSpPr>
-        <p:spPr>
-          <a:xfrm>
-            <a:off x="877824" y="6016752"/>
-            <a:ext cx="3387242" cy="365760"/>
-          </a:xfrm>
-          <a:prstGeom prst="rect">
-            <a:avLst/>
-          </a:prstGeom>
-          <a:solidFill>
-            <a:srgbClr val="F2F3EE"/>
-          </a:solidFill>
-          <a:ln w="12700">
-            <a:solidFill>
-              <a:srgbClr val="E4E4E0"/>
-            </a:solidFill>
-          </a:ln>
-          <a:effectLst/>
-        </p:spPr>
-        <p:style>
-          <a:lnRef idx="1">
-            <a:schemeClr val="accent1"/>
-          </a:lnRef>
-          <a:fillRef idx="3">
-            <a:schemeClr val="accent1"/>
-          </a:fillRef>
-          <a:effectRef idx="2">
-            <a:schemeClr val="accent1"/>
-          </a:effectRef>
-          <a:fontRef idx="minor">
-            <a:schemeClr val="lt1"/>
-          </a:fontRef>
-        </p:style>
-        <p:txBody>
-          <a:bodyPr rtlCol="0" anchor="ctr"/>
-          <a:lstStyle/>
-          <a:p>
-            <a:pPr algn="ctr"/>
-          </a:p>
-        </p:txBody>
-      </p:sp>
-      <p:sp>
-        <p:nvSpPr>
-          <p:cNvPr id="45" name="TextBox 44"/>
-          <p:cNvSpPr txBox="1"/>
-          <p:nvPr/>
-        </p:nvSpPr>
-        <p:spPr>
-          <a:xfrm>
-            <a:off x="950976" y="6016752"/>
-            <a:ext cx="3240938" cy="365760"/>
-          </a:xfrm>
-          <a:prstGeom prst="rect">
-            <a:avLst/>
-          </a:prstGeom>
-          <a:noFill/>
-        </p:spPr>
-        <p:txBody>
-          <a:bodyPr wrap="square" anchor="ctr" lIns="0" rIns="0" tIns="0" bIns="0"/>
-          <a:lstStyle/>
-          <a:p>
-            <a:pPr algn="ctr">
-              <a:lnSpc>
-                <a:spcPct val="100000"/>
-              </a:lnSpc>
-              <a:spcBef>
-                <a:spcPts val="0"/>
-              </a:spcBef>
-              <a:spcAft>
-                <a:spcPts val="0"/>
-              </a:spcAft>
-            </a:pPr>
-            <a:r>
-              <a:rPr sz="1000" b="1" i="0" lang="en-AU" spc="-5">
-                <a:solidFill>
-                  <a:srgbClr val="EA493F"/>
-                </a:solidFill>
-                <a:latin typeface="Inter"/>
-              </a:rPr>
-              <a:t>OPERATIONS AS A PRIORITY</a:t>
-            </a:r>
-          </a:p>
-        </p:txBody>
-      </p:sp>
-      <p:sp>
-        <p:nvSpPr>
-          <p:cNvPr id="46" name="Rectangle 45"/>
-          <p:cNvSpPr/>
-          <p:nvPr/>
-        </p:nvSpPr>
-        <p:spPr>
-          <a:xfrm>
-            <a:off x="4402226" y="6016752"/>
-            <a:ext cx="3387242" cy="365760"/>
-          </a:xfrm>
-          <a:prstGeom prst="rect">
-            <a:avLst/>
-          </a:prstGeom>
-          <a:solidFill>
-            <a:srgbClr val="F2F3EE"/>
-          </a:solidFill>
-          <a:ln w="12700">
-            <a:solidFill>
-              <a:srgbClr val="E4E4E0"/>
-            </a:solidFill>
-          </a:ln>
-          <a:effectLst/>
-        </p:spPr>
-        <p:style>
-          <a:lnRef idx="1">
-            <a:schemeClr val="accent1"/>
-          </a:lnRef>
-          <a:fillRef idx="3">
-            <a:schemeClr val="accent1"/>
-          </a:fillRef>
-          <a:effectRef idx="2">
-            <a:schemeClr val="accent1"/>
-          </a:effectRef>
-          <a:fontRef idx="minor">
-            <a:schemeClr val="lt1"/>
-          </a:fontRef>
-        </p:style>
-        <p:txBody>
-          <a:bodyPr rtlCol="0" anchor="ctr"/>
-          <a:lstStyle/>
-          <a:p>
-            <a:pPr algn="ctr"/>
-          </a:p>
-        </p:txBody>
-      </p:sp>
-      <p:sp>
-        <p:nvSpPr>
-          <p:cNvPr id="47" name="TextBox 46"/>
-          <p:cNvSpPr txBox="1"/>
-          <p:nvPr/>
-        </p:nvSpPr>
-        <p:spPr>
-          <a:xfrm>
-            <a:off x="4475378" y="6016752"/>
-            <a:ext cx="3240938" cy="365760"/>
-          </a:xfrm>
-          <a:prstGeom prst="rect">
-            <a:avLst/>
-          </a:prstGeom>
-          <a:noFill/>
-        </p:spPr>
-        <p:txBody>
-          <a:bodyPr wrap="square" anchor="ctr" lIns="0" rIns="0" tIns="0" bIns="0"/>
-          <a:lstStyle/>
-          <a:p>
-            <a:pPr algn="ctr">
-              <a:lnSpc>
-                <a:spcPct val="100000"/>
-              </a:lnSpc>
-              <a:spcBef>
-                <a:spcPts val="0"/>
-              </a:spcBef>
-              <a:spcAft>
-                <a:spcPts val="0"/>
-              </a:spcAft>
-            </a:pPr>
-            <a:r>
-              <a:rPr sz="1000" b="1" i="0" lang="en-AU" spc="-5">
-                <a:solidFill>
-                  <a:srgbClr val="EA493F"/>
-                </a:solidFill>
-                <a:latin typeface="Inter"/>
-              </a:rPr>
-              <a:t>BUSINESS VALUE REALISATION</a:t>
-            </a:r>
-          </a:p>
-        </p:txBody>
-      </p:sp>
-      <p:sp>
-        <p:nvSpPr>
-          <p:cNvPr id="48" name="Rectangle 47"/>
-          <p:cNvSpPr/>
-          <p:nvPr/>
-        </p:nvSpPr>
-        <p:spPr>
-          <a:xfrm>
-            <a:off x="7926628" y="6016752"/>
-            <a:ext cx="3387242" cy="365760"/>
-          </a:xfrm>
-          <a:prstGeom prst="rect">
-            <a:avLst/>
-          </a:prstGeom>
-          <a:solidFill>
-            <a:srgbClr val="F2F3EE"/>
-          </a:solidFill>
-          <a:ln w="12700">
-            <a:solidFill>
-              <a:srgbClr val="E4E4E0"/>
-            </a:solidFill>
-          </a:ln>
-          <a:effectLst/>
-        </p:spPr>
-        <p:style>
-          <a:lnRef idx="1">
-            <a:schemeClr val="accent1"/>
-          </a:lnRef>
-          <a:fillRef idx="3">
-            <a:schemeClr val="accent1"/>
-          </a:fillRef>
-          <a:effectRef idx="2">
-            <a:schemeClr val="accent1"/>
-          </a:effectRef>
-          <a:fontRef idx="minor">
-            <a:schemeClr val="lt1"/>
-          </a:fontRef>
-        </p:style>
-        <p:txBody>
-          <a:bodyPr rtlCol="0" anchor="ctr"/>
-          <a:lstStyle/>
-          <a:p>
-            <a:pPr algn="ctr"/>
-          </a:p>
-        </p:txBody>
-      </p:sp>
-      <p:sp>
-        <p:nvSpPr>
-          <p:cNvPr id="49" name="TextBox 48"/>
-          <p:cNvSpPr txBox="1"/>
-          <p:nvPr/>
-        </p:nvSpPr>
-        <p:spPr>
-          <a:xfrm>
-            <a:off x="7999780" y="6016752"/>
-            <a:ext cx="3240938" cy="365760"/>
-          </a:xfrm>
-          <a:prstGeom prst="rect">
-            <a:avLst/>
-          </a:prstGeom>
-          <a:noFill/>
-        </p:spPr>
-        <p:txBody>
-          <a:bodyPr wrap="square" anchor="ctr" lIns="0" rIns="0" tIns="0" bIns="0"/>
-          <a:lstStyle/>
-          <a:p>
-            <a:pPr algn="ctr">
-              <a:lnSpc>
-                <a:spcPct val="100000"/>
-              </a:lnSpc>
-              <a:spcBef>
-                <a:spcPts val="0"/>
-              </a:spcBef>
-              <a:spcAft>
-                <a:spcPts val="0"/>
-              </a:spcAft>
-            </a:pPr>
-            <a:r>
-              <a:rPr sz="1000" b="1" i="0" lang="en-AU" spc="-5">
-                <a:solidFill>
-                  <a:srgbClr val="EA493F"/>
-                </a:solidFill>
-                <a:latin typeface="Inter"/>
-              </a:rPr>
-              <a:t>OPERATIONAL EXCELLENCE · ITIL</a:t>
+              <a:rPr sz="1200" b="1" i="0" lang="en-AU" spc="24">
+                <a:solidFill>
+                  <a:srgbClr val="AEAEAE"/>
+                </a:solidFill>
+                <a:latin typeface="Inter"/>
+              </a:rPr>
+              <a:t>Operational excellence, by design.</a:t>
             </a:r>
           </a:p>
         </p:txBody>
@@ -19274,7 +17752,7 @@
                 </a:solidFill>
                 <a:latin typeface="Inter"/>
               </a:rPr>
-              <a:t>ENGAGEMENT MODELS</a:t>
+              <a:t>WORKDAY SERVICES</a:t>
             </a:r>
           </a:p>
         </p:txBody>
@@ -19317,7 +17795,7 @@
                 </a:solidFill>
                 <a:latin typeface="Inter"/>
               </a:rPr>
-              <a:t>Two ways we </a:t>
+              <a:t>Across the whole </a:t>
             </a:r>
             <a:r>
               <a:rPr sz="3300" b="1" i="0" lang="en-AU" spc="-72">
@@ -19326,64 +17804,21 @@
                 </a:solidFill>
                 <a:latin typeface="Inter"/>
               </a:rPr>
-              <a:t>support you.</a:t>
-            </a:r>
-          </a:p>
-        </p:txBody>
-      </p:sp>
-      <p:sp>
-        <p:nvSpPr>
-          <p:cNvPr id="5" name="TextBox 4"/>
-          <p:cNvSpPr txBox="1"/>
-          <p:nvPr/>
-        </p:nvSpPr>
-        <p:spPr>
-          <a:xfrm>
-            <a:off x="877824" y="1737360"/>
-            <a:ext cx="10241280" cy="548640"/>
-          </a:xfrm>
-          <a:prstGeom prst="rect">
-            <a:avLst/>
-          </a:prstGeom>
-          <a:noFill/>
-        </p:spPr>
-        <p:txBody>
-          <a:bodyPr wrap="square" anchor="t" lIns="0" rIns="0" tIns="0" bIns="0"/>
-          <a:lstStyle/>
-          <a:p>
-            <a:pPr algn="l">
-              <a:lnSpc>
-                <a:spcPct val="125000"/>
-              </a:lnSpc>
-              <a:spcBef>
-                <a:spcPts val="0"/>
-              </a:spcBef>
-              <a:spcAft>
-                <a:spcPts val="0"/>
-              </a:spcAft>
-            </a:pPr>
-            <a:r>
-              <a:rPr sz="1300" b="0" i="0" lang="en-AU" spc="0">
-                <a:solidFill>
-                  <a:srgbClr val="CFCFCF"/>
-                </a:solidFill>
-                <a:latin typeface="Inter"/>
-              </a:rPr>
-              <a:t>Augmentation and Application Management Services — flex between them as your needs change.</a:t>
-            </a:r>
-          </a:p>
-        </p:txBody>
-      </p:sp>
-      <p:sp>
-        <p:nvSpPr>
-          <p:cNvPr id="6" name="Rectangle 5"/>
+              <a:t>Workday lifecycle.</a:t>
+            </a:r>
+          </a:p>
+        </p:txBody>
+      </p:sp>
+      <p:sp>
+        <p:nvSpPr>
+          <p:cNvPr id="5" name="Rectangle 4"/>
           <p:cNvSpPr/>
           <p:nvPr/>
         </p:nvSpPr>
         <p:spPr>
           <a:xfrm>
-            <a:off x="877824" y="2331720"/>
-            <a:ext cx="5035143" cy="3291840"/>
+            <a:off x="877824" y="2194560"/>
+            <a:ext cx="3234842" cy="1783080"/>
           </a:xfrm>
           <a:prstGeom prst="rect">
             <a:avLst/>
@@ -19422,360 +17857,100 @@
       </p:sp>
       <p:sp>
         <p:nvSpPr>
+          <p:cNvPr id="6" name="TextBox 5"/>
+          <p:cNvSpPr txBox="1"/>
+          <p:nvPr/>
+        </p:nvSpPr>
+        <p:spPr>
+          <a:xfrm>
+            <a:off x="1152144" y="2468879"/>
+            <a:ext cx="2731922" cy="365760"/>
+          </a:xfrm>
+          <a:prstGeom prst="rect">
+            <a:avLst/>
+          </a:prstGeom>
+          <a:noFill/>
+        </p:spPr>
+        <p:txBody>
+          <a:bodyPr wrap="square" anchor="t" lIns="0" rIns="0" tIns="0" bIns="0"/>
+          <a:lstStyle/>
+          <a:p>
+            <a:pPr algn="l">
+              <a:lnSpc>
+                <a:spcPct val="100000"/>
+              </a:lnSpc>
+              <a:spcBef>
+                <a:spcPts val="0"/>
+              </a:spcBef>
+              <a:spcAft>
+                <a:spcPts val="0"/>
+              </a:spcAft>
+            </a:pPr>
+            <a:r>
+              <a:rPr sz="1400" b="1" i="0" lang="en-AU" spc="112" cap="all">
+                <a:solidFill>
+                  <a:srgbClr val="EA493F"/>
+                </a:solidFill>
+                <a:latin typeface="Inter"/>
+              </a:rPr>
+              <a:t>IMPLEMENT</a:t>
+            </a:r>
+          </a:p>
+        </p:txBody>
+      </p:sp>
+      <p:sp>
+        <p:nvSpPr>
           <p:cNvPr id="7" name="TextBox 6"/>
           <p:cNvSpPr txBox="1"/>
           <p:nvPr/>
         </p:nvSpPr>
         <p:spPr>
           <a:xfrm>
-            <a:off x="1152144" y="2569463"/>
-            <a:ext cx="4532223" cy="365760"/>
-          </a:xfrm>
-          <a:prstGeom prst="rect">
-            <a:avLst/>
-          </a:prstGeom>
-          <a:noFill/>
-        </p:spPr>
-        <p:txBody>
-          <a:bodyPr wrap="square" anchor="t" lIns="0" rIns="0" tIns="0" bIns="0"/>
-          <a:lstStyle/>
-          <a:p>
-            <a:pPr algn="l">
-              <a:lnSpc>
-                <a:spcPct val="100000"/>
-              </a:lnSpc>
-              <a:spcBef>
-                <a:spcPts val="0"/>
-              </a:spcBef>
-              <a:spcAft>
-                <a:spcPts val="0"/>
-              </a:spcAft>
-            </a:pPr>
-            <a:r>
-              <a:rPr sz="1250" b="1" i="0" lang="en-AU" spc="150" cap="all">
-                <a:solidFill>
-                  <a:srgbClr val="EA493F"/>
-                </a:solidFill>
-                <a:latin typeface="Inter"/>
-              </a:rPr>
-              <a:t>STAFF AUGMENTATION</a:t>
-            </a:r>
-          </a:p>
-        </p:txBody>
-      </p:sp>
-      <p:sp>
-        <p:nvSpPr>
-          <p:cNvPr id="8" name="TextBox 7"/>
-          <p:cNvSpPr txBox="1"/>
-          <p:nvPr/>
-        </p:nvSpPr>
-        <p:spPr>
-          <a:xfrm>
-            <a:off x="1152144" y="2935224"/>
-            <a:ext cx="4532223" cy="457200"/>
-          </a:xfrm>
-          <a:prstGeom prst="rect">
-            <a:avLst/>
-          </a:prstGeom>
-          <a:noFill/>
-        </p:spPr>
-        <p:txBody>
-          <a:bodyPr wrap="square" anchor="t" lIns="0" rIns="0" tIns="0" bIns="0"/>
-          <a:lstStyle/>
-          <a:p>
-            <a:pPr algn="l">
-              <a:lnSpc>
-                <a:spcPct val="105000"/>
-              </a:lnSpc>
-              <a:spcBef>
-                <a:spcPts val="0"/>
-              </a:spcBef>
-              <a:spcAft>
-                <a:spcPts val="0"/>
-              </a:spcAft>
-            </a:pPr>
-            <a:r>
-              <a:rPr sz="1450" b="1" i="0" lang="en-AU" spc="-14">
+            <a:off x="1152144" y="2962656"/>
+            <a:ext cx="2686202" cy="822959"/>
+          </a:xfrm>
+          <a:prstGeom prst="rect">
+            <a:avLst/>
+          </a:prstGeom>
+          <a:noFill/>
+        </p:spPr>
+        <p:txBody>
+          <a:bodyPr wrap="square" anchor="t" lIns="0" rIns="0" tIns="0" bIns="0"/>
+          <a:lstStyle/>
+          <a:p>
+            <a:pPr algn="l">
+              <a:lnSpc>
+                <a:spcPct val="132000"/>
+              </a:lnSpc>
+              <a:spcBef>
+                <a:spcPts val="0"/>
+              </a:spcBef>
+              <a:spcAft>
+                <a:spcPts val="0"/>
+              </a:spcAft>
+            </a:pPr>
+            <a:r>
+              <a:rPr sz="1350" b="1" i="0" lang="en-AU" spc="-13">
                 <a:solidFill>
                   <a:srgbClr val="FFFFFF"/>
                 </a:solidFill>
                 <a:latin typeface="Inter"/>
               </a:rPr>
-              <a:t>Our certified consultants, embedded in your team</a:t>
-            </a:r>
-          </a:p>
-        </p:txBody>
-      </p:sp>
-      <p:sp>
-        <p:nvSpPr>
-          <p:cNvPr id="9" name="TextBox 8"/>
-          <p:cNvSpPr txBox="1"/>
-          <p:nvPr/>
-        </p:nvSpPr>
-        <p:spPr>
-          <a:xfrm>
-            <a:off x="1152144" y="3538728"/>
-            <a:ext cx="4486503" cy="420624"/>
-          </a:xfrm>
-          <a:prstGeom prst="rect">
-            <a:avLst/>
-          </a:prstGeom>
-          <a:noFill/>
-        </p:spPr>
-        <p:txBody>
-          <a:bodyPr wrap="square" anchor="t" lIns="0" rIns="0" tIns="0" bIns="0"/>
-          <a:lstStyle/>
-          <a:p>
-            <a:pPr algn="l">
-              <a:lnSpc>
-                <a:spcPct val="112000"/>
-              </a:lnSpc>
-              <a:spcBef>
-                <a:spcPts val="0"/>
-              </a:spcBef>
-              <a:spcAft>
-                <a:spcPts val="0"/>
-              </a:spcAft>
-            </a:pPr>
-            <a:r>
-              <a:rPr sz="1050" b="1" i="0" lang="en-AU" spc="0">
-                <a:solidFill>
-                  <a:srgbClr val="EA493F"/>
-                </a:solidFill>
-                <a:latin typeface="Inter"/>
-              </a:rPr>
-              <a:t>—  </a:t>
-            </a:r>
-            <a:r>
-              <a:rPr sz="1050" b="0" i="0" lang="en-AU" spc="0">
-                <a:solidFill>
-                  <a:srgbClr val="D6D6D6"/>
-                </a:solidFill>
-                <a:latin typeface="Inter"/>
-              </a:rPr>
-              <a:t>You direct the work; certified Workday FIN &amp; HCM consultants</a:t>
-            </a:r>
-          </a:p>
-        </p:txBody>
-      </p:sp>
-      <p:sp>
-        <p:nvSpPr>
-          <p:cNvPr id="10" name="TextBox 9"/>
-          <p:cNvSpPr txBox="1"/>
-          <p:nvPr/>
-        </p:nvSpPr>
-        <p:spPr>
-          <a:xfrm>
-            <a:off x="1152144" y="3959352"/>
-            <a:ext cx="4486503" cy="420624"/>
-          </a:xfrm>
-          <a:prstGeom prst="rect">
-            <a:avLst/>
-          </a:prstGeom>
-          <a:noFill/>
-        </p:spPr>
-        <p:txBody>
-          <a:bodyPr wrap="square" anchor="t" lIns="0" rIns="0" tIns="0" bIns="0"/>
-          <a:lstStyle/>
-          <a:p>
-            <a:pPr algn="l">
-              <a:lnSpc>
-                <a:spcPct val="112000"/>
-              </a:lnSpc>
-              <a:spcBef>
-                <a:spcPts val="0"/>
-              </a:spcBef>
-              <a:spcAft>
-                <a:spcPts val="0"/>
-              </a:spcAft>
-            </a:pPr>
-            <a:r>
-              <a:rPr sz="1050" b="1" i="0" lang="en-AU" spc="0">
-                <a:solidFill>
-                  <a:srgbClr val="EA493F"/>
-                </a:solidFill>
-                <a:latin typeface="Inter"/>
-              </a:rPr>
-              <a:t>—  </a:t>
-            </a:r>
-            <a:r>
-              <a:rPr sz="1050" b="0" i="0" lang="en-AU" spc="0">
-                <a:solidFill>
-                  <a:srgbClr val="D6D6D6"/>
-                </a:solidFill>
-                <a:latin typeface="Inter"/>
-              </a:rPr>
-              <a:t>Scale capacity up or down by the day, week or sprint</a:t>
-            </a:r>
-          </a:p>
-        </p:txBody>
-      </p:sp>
-      <p:sp>
-        <p:nvSpPr>
-          <p:cNvPr id="11" name="TextBox 10"/>
-          <p:cNvSpPr txBox="1"/>
-          <p:nvPr/>
-        </p:nvSpPr>
-        <p:spPr>
-          <a:xfrm>
-            <a:off x="1152144" y="4379976"/>
-            <a:ext cx="4486503" cy="420624"/>
-          </a:xfrm>
-          <a:prstGeom prst="rect">
-            <a:avLst/>
-          </a:prstGeom>
-          <a:noFill/>
-        </p:spPr>
-        <p:txBody>
-          <a:bodyPr wrap="square" anchor="t" lIns="0" rIns="0" tIns="0" bIns="0"/>
-          <a:lstStyle/>
-          <a:p>
-            <a:pPr algn="l">
-              <a:lnSpc>
-                <a:spcPct val="112000"/>
-              </a:lnSpc>
-              <a:spcBef>
-                <a:spcPts val="0"/>
-              </a:spcBef>
-              <a:spcAft>
-                <a:spcPts val="0"/>
-              </a:spcAft>
-            </a:pPr>
-            <a:r>
-              <a:rPr sz="1050" b="1" i="0" lang="en-AU" spc="0">
-                <a:solidFill>
-                  <a:srgbClr val="EA493F"/>
-                </a:solidFill>
-                <a:latin typeface="Inter"/>
-              </a:rPr>
-              <a:t>—  </a:t>
-            </a:r>
-            <a:r>
-              <a:rPr sz="1050" b="0" i="0" lang="en-AU" spc="0">
-                <a:solidFill>
-                  <a:srgbClr val="D6D6D6"/>
-                </a:solidFill>
-                <a:latin typeface="Inter"/>
-              </a:rPr>
-              <a:t>Ideal for project surge, BAU backlog, leave cover or niche skills</a:t>
-            </a:r>
-          </a:p>
-        </p:txBody>
-      </p:sp>
-      <p:sp>
-        <p:nvSpPr>
-          <p:cNvPr id="12" name="TextBox 11"/>
-          <p:cNvSpPr txBox="1"/>
-          <p:nvPr/>
-        </p:nvSpPr>
-        <p:spPr>
-          <a:xfrm>
-            <a:off x="1152144" y="4800600"/>
-            <a:ext cx="4486503" cy="420624"/>
-          </a:xfrm>
-          <a:prstGeom prst="rect">
-            <a:avLst/>
-          </a:prstGeom>
-          <a:noFill/>
-        </p:spPr>
-        <p:txBody>
-          <a:bodyPr wrap="square" anchor="t" lIns="0" rIns="0" tIns="0" bIns="0"/>
-          <a:lstStyle/>
-          <a:p>
-            <a:pPr algn="l">
-              <a:lnSpc>
-                <a:spcPct val="112000"/>
-              </a:lnSpc>
-              <a:spcBef>
-                <a:spcPts val="0"/>
-              </a:spcBef>
-              <a:spcAft>
-                <a:spcPts val="0"/>
-              </a:spcAft>
-            </a:pPr>
-            <a:r>
-              <a:rPr sz="1050" b="1" i="0" lang="en-AU" spc="0">
-                <a:solidFill>
-                  <a:srgbClr val="EA493F"/>
-                </a:solidFill>
-                <a:latin typeface="Inter"/>
-              </a:rPr>
-              <a:t>—  </a:t>
-            </a:r>
-            <a:r>
-              <a:rPr sz="1050" b="0" i="0" lang="en-AU" spc="0">
-                <a:solidFill>
-                  <a:srgbClr val="D6D6D6"/>
-                </a:solidFill>
-                <a:latin typeface="Inter"/>
-              </a:rPr>
-              <a:t>Onshore (AU), offshore (India) or a blended model</a:t>
-            </a:r>
-          </a:p>
-        </p:txBody>
-      </p:sp>
-      <p:sp>
-        <p:nvSpPr>
-          <p:cNvPr id="13" name="TextBox 12"/>
-          <p:cNvSpPr txBox="1"/>
-          <p:nvPr/>
-        </p:nvSpPr>
-        <p:spPr>
-          <a:xfrm>
-            <a:off x="1152144" y="5221224"/>
-            <a:ext cx="4486503" cy="420624"/>
-          </a:xfrm>
-          <a:prstGeom prst="rect">
-            <a:avLst/>
-          </a:prstGeom>
-          <a:noFill/>
-        </p:spPr>
-        <p:txBody>
-          <a:bodyPr wrap="square" anchor="t" lIns="0" rIns="0" tIns="0" bIns="0"/>
-          <a:lstStyle/>
-          <a:p>
-            <a:pPr algn="l">
-              <a:lnSpc>
-                <a:spcPct val="112000"/>
-              </a:lnSpc>
-              <a:spcBef>
-                <a:spcPts val="0"/>
-              </a:spcBef>
-              <a:spcAft>
-                <a:spcPts val="0"/>
-              </a:spcAft>
-            </a:pPr>
-            <a:r>
-              <a:rPr sz="1050" b="1" i="0" lang="en-AU" spc="0">
-                <a:solidFill>
-                  <a:srgbClr val="EA493F"/>
-                </a:solidFill>
-                <a:latin typeface="Inter"/>
-              </a:rPr>
-              <a:t>—  </a:t>
-            </a:r>
-            <a:r>
-              <a:rPr sz="1050" b="0" i="0" lang="en-AU" spc="0">
-                <a:solidFill>
-                  <a:srgbClr val="D6D6D6"/>
-                </a:solidFill>
-                <a:latin typeface="Inter"/>
-              </a:rPr>
-              <a:t>Time-and-materials or a pre-agreed block of hours</a:t>
-            </a:r>
-          </a:p>
-        </p:txBody>
-      </p:sp>
-      <p:sp>
-        <p:nvSpPr>
-          <p:cNvPr id="14" name="Rectangle 13"/>
+              <a:t>Deploy Workday HCM, Payroll &amp; Finance.</a:t>
+            </a:r>
+          </a:p>
+        </p:txBody>
+      </p:sp>
+      <p:sp>
+        <p:nvSpPr>
+          <p:cNvPr id="8" name="Rectangle 7"/>
           <p:cNvSpPr/>
           <p:nvPr/>
         </p:nvSpPr>
         <p:spPr>
           <a:xfrm>
-            <a:off x="6278727" y="2331720"/>
-            <a:ext cx="5035143" cy="3291840"/>
+            <a:off x="4478426" y="2194560"/>
+            <a:ext cx="3234842" cy="1783080"/>
           </a:xfrm>
           <a:prstGeom prst="rect">
             <a:avLst/>
@@ -19814,25 +17989,286 @@
       </p:sp>
       <p:sp>
         <p:nvSpPr>
+          <p:cNvPr id="9" name="TextBox 8"/>
+          <p:cNvSpPr txBox="1"/>
+          <p:nvPr/>
+        </p:nvSpPr>
+        <p:spPr>
+          <a:xfrm>
+            <a:off x="4752746" y="2468879"/>
+            <a:ext cx="2731922" cy="365760"/>
+          </a:xfrm>
+          <a:prstGeom prst="rect">
+            <a:avLst/>
+          </a:prstGeom>
+          <a:noFill/>
+        </p:spPr>
+        <p:txBody>
+          <a:bodyPr wrap="square" anchor="t" lIns="0" rIns="0" tIns="0" bIns="0"/>
+          <a:lstStyle/>
+          <a:p>
+            <a:pPr algn="l">
+              <a:lnSpc>
+                <a:spcPct val="100000"/>
+              </a:lnSpc>
+              <a:spcBef>
+                <a:spcPts val="0"/>
+              </a:spcBef>
+              <a:spcAft>
+                <a:spcPts val="0"/>
+              </a:spcAft>
+            </a:pPr>
+            <a:r>
+              <a:rPr sz="1400" b="1" i="0" lang="en-AU" spc="112" cap="all">
+                <a:solidFill>
+                  <a:srgbClr val="EA493F"/>
+                </a:solidFill>
+                <a:latin typeface="Inter"/>
+              </a:rPr>
+              <a:t>OPTIMISE</a:t>
+            </a:r>
+          </a:p>
+        </p:txBody>
+      </p:sp>
+      <p:sp>
+        <p:nvSpPr>
+          <p:cNvPr id="10" name="TextBox 9"/>
+          <p:cNvSpPr txBox="1"/>
+          <p:nvPr/>
+        </p:nvSpPr>
+        <p:spPr>
+          <a:xfrm>
+            <a:off x="4752746" y="2962656"/>
+            <a:ext cx="2686202" cy="822959"/>
+          </a:xfrm>
+          <a:prstGeom prst="rect">
+            <a:avLst/>
+          </a:prstGeom>
+          <a:noFill/>
+        </p:spPr>
+        <p:txBody>
+          <a:bodyPr wrap="square" anchor="t" lIns="0" rIns="0" tIns="0" bIns="0"/>
+          <a:lstStyle/>
+          <a:p>
+            <a:pPr algn="l">
+              <a:lnSpc>
+                <a:spcPct val="132000"/>
+              </a:lnSpc>
+              <a:spcBef>
+                <a:spcPts val="0"/>
+              </a:spcBef>
+              <a:spcAft>
+                <a:spcPts val="0"/>
+              </a:spcAft>
+            </a:pPr>
+            <a:r>
+              <a:rPr sz="1350" b="1" i="0" lang="en-AU" spc="-13">
+                <a:solidFill>
+                  <a:srgbClr val="FFFFFF"/>
+                </a:solidFill>
+                <a:latin typeface="Inter"/>
+              </a:rPr>
+              <a:t>Phase 2, integrations &amp; reporting.</a:t>
+            </a:r>
+          </a:p>
+        </p:txBody>
+      </p:sp>
+      <p:sp>
+        <p:nvSpPr>
+          <p:cNvPr id="11" name="Rectangle 10"/>
+          <p:cNvSpPr/>
+          <p:nvPr/>
+        </p:nvSpPr>
+        <p:spPr>
+          <a:xfrm>
+            <a:off x="8079028" y="2194560"/>
+            <a:ext cx="3234842" cy="1783080"/>
+          </a:xfrm>
+          <a:prstGeom prst="rect">
+            <a:avLst/>
+          </a:prstGeom>
+          <a:solidFill>
+            <a:srgbClr val="141414"/>
+          </a:solidFill>
+          <a:ln w="12700">
+            <a:solidFill>
+              <a:srgbClr val="3A3A3A"/>
+            </a:solidFill>
+          </a:ln>
+          <a:effectLst/>
+        </p:spPr>
+        <p:style>
+          <a:lnRef idx="1">
+            <a:schemeClr val="accent1"/>
+          </a:lnRef>
+          <a:fillRef idx="3">
+            <a:schemeClr val="accent1"/>
+          </a:fillRef>
+          <a:effectRef idx="2">
+            <a:schemeClr val="accent1"/>
+          </a:effectRef>
+          <a:fontRef idx="minor">
+            <a:schemeClr val="lt1"/>
+          </a:fontRef>
+        </p:style>
+        <p:txBody>
+          <a:bodyPr rtlCol="0" anchor="ctr"/>
+          <a:lstStyle/>
+          <a:p>
+            <a:pPr algn="ctr"/>
+          </a:p>
+        </p:txBody>
+      </p:sp>
+      <p:sp>
+        <p:nvSpPr>
+          <p:cNvPr id="12" name="TextBox 11"/>
+          <p:cNvSpPr txBox="1"/>
+          <p:nvPr/>
+        </p:nvSpPr>
+        <p:spPr>
+          <a:xfrm>
+            <a:off x="8353348" y="2468879"/>
+            <a:ext cx="2731922" cy="365760"/>
+          </a:xfrm>
+          <a:prstGeom prst="rect">
+            <a:avLst/>
+          </a:prstGeom>
+          <a:noFill/>
+        </p:spPr>
+        <p:txBody>
+          <a:bodyPr wrap="square" anchor="t" lIns="0" rIns="0" tIns="0" bIns="0"/>
+          <a:lstStyle/>
+          <a:p>
+            <a:pPr algn="l">
+              <a:lnSpc>
+                <a:spcPct val="100000"/>
+              </a:lnSpc>
+              <a:spcBef>
+                <a:spcPts val="0"/>
+              </a:spcBef>
+              <a:spcAft>
+                <a:spcPts val="0"/>
+              </a:spcAft>
+            </a:pPr>
+            <a:r>
+              <a:rPr sz="1400" b="1" i="0" lang="en-AU" spc="112" cap="all">
+                <a:solidFill>
+                  <a:srgbClr val="EA493F"/>
+                </a:solidFill>
+                <a:latin typeface="Inter"/>
+              </a:rPr>
+              <a:t>MANAGE</a:t>
+            </a:r>
+          </a:p>
+        </p:txBody>
+      </p:sp>
+      <p:sp>
+        <p:nvSpPr>
+          <p:cNvPr id="13" name="TextBox 12"/>
+          <p:cNvSpPr txBox="1"/>
+          <p:nvPr/>
+        </p:nvSpPr>
+        <p:spPr>
+          <a:xfrm>
+            <a:off x="8353348" y="2962656"/>
+            <a:ext cx="2686202" cy="822959"/>
+          </a:xfrm>
+          <a:prstGeom prst="rect">
+            <a:avLst/>
+          </a:prstGeom>
+          <a:noFill/>
+        </p:spPr>
+        <p:txBody>
+          <a:bodyPr wrap="square" anchor="t" lIns="0" rIns="0" tIns="0" bIns="0"/>
+          <a:lstStyle/>
+          <a:p>
+            <a:pPr algn="l">
+              <a:lnSpc>
+                <a:spcPct val="132000"/>
+              </a:lnSpc>
+              <a:spcBef>
+                <a:spcPts val="0"/>
+              </a:spcBef>
+              <a:spcAft>
+                <a:spcPts val="0"/>
+              </a:spcAft>
+            </a:pPr>
+            <a:r>
+              <a:rPr sz="1350" b="1" i="0" lang="en-AU" spc="-13">
+                <a:solidFill>
+                  <a:srgbClr val="FFFFFF"/>
+                </a:solidFill>
+                <a:latin typeface="Inter"/>
+              </a:rPr>
+              <a:t>Managed Services &amp; Managed Payroll — 24×7, continuous improvement.</a:t>
+            </a:r>
+          </a:p>
+        </p:txBody>
+      </p:sp>
+      <p:sp>
+        <p:nvSpPr>
+          <p:cNvPr id="14" name="TextBox 13"/>
+          <p:cNvSpPr txBox="1"/>
+          <p:nvPr/>
+        </p:nvSpPr>
+        <p:spPr>
+          <a:xfrm>
+            <a:off x="4167530" y="2830068"/>
+            <a:ext cx="548640" cy="512064"/>
+          </a:xfrm>
+          <a:prstGeom prst="rect">
+            <a:avLst/>
+          </a:prstGeom>
+          <a:noFill/>
+        </p:spPr>
+        <p:txBody>
+          <a:bodyPr wrap="square" anchor="ctr" lIns="0" rIns="0" tIns="0" bIns="0"/>
+          <a:lstStyle/>
+          <a:p>
+            <a:pPr algn="ctr">
+              <a:lnSpc>
+                <a:spcPct val="100000"/>
+              </a:lnSpc>
+              <a:spcBef>
+                <a:spcPts val="0"/>
+              </a:spcBef>
+              <a:spcAft>
+                <a:spcPts val="0"/>
+              </a:spcAft>
+            </a:pPr>
+            <a:r>
+              <a:rPr sz="2600" b="1" i="0" lang="en-AU" spc="0">
+                <a:solidFill>
+                  <a:srgbClr val="EA493F"/>
+                </a:solidFill>
+                <a:latin typeface="Inter"/>
+              </a:rPr>
+              <a:t>›</a:t>
+            </a:r>
+          </a:p>
+        </p:txBody>
+      </p:sp>
+      <p:sp>
+        <p:nvSpPr>
           <p:cNvPr id="15" name="TextBox 14"/>
           <p:cNvSpPr txBox="1"/>
           <p:nvPr/>
         </p:nvSpPr>
         <p:spPr>
           <a:xfrm>
-            <a:off x="6553047" y="2569463"/>
-            <a:ext cx="4532223" cy="365760"/>
-          </a:xfrm>
-          <a:prstGeom prst="rect">
-            <a:avLst/>
-          </a:prstGeom>
-          <a:noFill/>
-        </p:spPr>
-        <p:txBody>
-          <a:bodyPr wrap="square" anchor="t" lIns="0" rIns="0" tIns="0" bIns="0"/>
-          <a:lstStyle/>
-          <a:p>
-            <a:pPr algn="l">
+            <a:off x="7768132" y="2830068"/>
+            <a:ext cx="548640" cy="512064"/>
+          </a:xfrm>
+          <a:prstGeom prst="rect">
+            <a:avLst/>
+          </a:prstGeom>
+          <a:noFill/>
+        </p:spPr>
+        <p:txBody>
+          <a:bodyPr wrap="square" anchor="ctr" lIns="0" rIns="0" tIns="0" bIns="0"/>
+          <a:lstStyle/>
+          <a:p>
+            <a:pPr algn="ctr">
               <a:lnSpc>
                 <a:spcPct val="100000"/>
               </a:lnSpc>
@@ -19844,264 +18280,230 @@
               </a:spcAft>
             </a:pPr>
             <a:r>
-              <a:rPr sz="1250" b="1" i="0" lang="en-AU" spc="150" cap="all">
+              <a:rPr sz="2600" b="1" i="0" lang="en-AU" spc="0">
                 <a:solidFill>
                   <a:srgbClr val="EA493F"/>
                 </a:solidFill>
                 <a:latin typeface="Inter"/>
               </a:rPr>
-              <a:t>MANAGED SERVICES (AMS)</a:t>
-            </a:r>
-          </a:p>
-        </p:txBody>
-      </p:sp>
-      <p:sp>
-        <p:nvSpPr>
-          <p:cNvPr id="16" name="TextBox 15"/>
-          <p:cNvSpPr txBox="1"/>
-          <p:nvPr/>
-        </p:nvSpPr>
-        <p:spPr>
-          <a:xfrm>
-            <a:off x="6553047" y="2935224"/>
-            <a:ext cx="4532223" cy="457200"/>
-          </a:xfrm>
-          <a:prstGeom prst="rect">
-            <a:avLst/>
-          </a:prstGeom>
-          <a:noFill/>
-        </p:spPr>
-        <p:txBody>
-          <a:bodyPr wrap="square" anchor="t" lIns="0" rIns="0" tIns="0" bIns="0"/>
-          <a:lstStyle/>
-          <a:p>
-            <a:pPr algn="l">
-              <a:lnSpc>
-                <a:spcPct val="105000"/>
-              </a:lnSpc>
-              <a:spcBef>
-                <a:spcPts val="0"/>
-              </a:spcBef>
-              <a:spcAft>
-                <a:spcPts val="0"/>
-              </a:spcAft>
-            </a:pPr>
-            <a:r>
-              <a:rPr sz="1450" b="1" i="0" lang="en-AU" spc="-14">
+              <a:t>›</a:t>
+            </a:r>
+          </a:p>
+        </p:txBody>
+      </p:sp>
+      <p:sp>
+        <p:nvSpPr>
+          <p:cNvPr id="16" name="Rectangle 15"/>
+          <p:cNvSpPr/>
+          <p:nvPr/>
+        </p:nvSpPr>
+        <p:spPr>
+          <a:xfrm>
+            <a:off x="877824" y="4389120"/>
+            <a:ext cx="6835444" cy="914400"/>
+          </a:xfrm>
+          <a:prstGeom prst="rect">
+            <a:avLst/>
+          </a:prstGeom>
+          <a:noFill/>
+          <a:ln w="19050">
+            <a:solidFill>
+              <a:srgbClr val="EA493F"/>
+            </a:solidFill>
+          </a:ln>
+          <a:effectLst/>
+        </p:spPr>
+        <p:style>
+          <a:lnRef idx="1">
+            <a:schemeClr val="accent1"/>
+          </a:lnRef>
+          <a:fillRef idx="3">
+            <a:schemeClr val="accent1"/>
+          </a:fillRef>
+          <a:effectRef idx="2">
+            <a:schemeClr val="accent1"/>
+          </a:effectRef>
+          <a:fontRef idx="minor">
+            <a:schemeClr val="lt1"/>
+          </a:fontRef>
+        </p:style>
+        <p:txBody>
+          <a:bodyPr rtlCol="0" anchor="ctr"/>
+          <a:lstStyle/>
+          <a:p>
+            <a:pPr algn="ctr"/>
+          </a:p>
+        </p:txBody>
+      </p:sp>
+      <p:sp>
+        <p:nvSpPr>
+          <p:cNvPr id="17" name="TextBox 16"/>
+          <p:cNvSpPr txBox="1"/>
+          <p:nvPr/>
+        </p:nvSpPr>
+        <p:spPr>
+          <a:xfrm>
+            <a:off x="1152144" y="4572000"/>
+            <a:ext cx="6286804" cy="329184"/>
+          </a:xfrm>
+          <a:prstGeom prst="rect">
+            <a:avLst/>
+          </a:prstGeom>
+          <a:noFill/>
+        </p:spPr>
+        <p:txBody>
+          <a:bodyPr wrap="square" anchor="t" lIns="0" rIns="0" tIns="0" bIns="0"/>
+          <a:lstStyle/>
+          <a:p>
+            <a:pPr algn="l">
+              <a:lnSpc>
+                <a:spcPct val="100000"/>
+              </a:lnSpc>
+              <a:spcBef>
+                <a:spcPts val="0"/>
+              </a:spcBef>
+              <a:spcAft>
+                <a:spcPts val="0"/>
+              </a:spcAft>
+            </a:pPr>
+            <a:r>
+              <a:rPr sz="1150" b="1" i="0" lang="en-AU" spc="115" cap="all">
+                <a:solidFill>
+                  <a:srgbClr val="EA493F"/>
+                </a:solidFill>
+                <a:latin typeface="Inter"/>
+              </a:rPr>
+              <a:t>STAFF AUGMENTATION</a:t>
+            </a:r>
+          </a:p>
+        </p:txBody>
+      </p:sp>
+      <p:sp>
+        <p:nvSpPr>
+          <p:cNvPr id="18" name="TextBox 17"/>
+          <p:cNvSpPr txBox="1"/>
+          <p:nvPr/>
+        </p:nvSpPr>
+        <p:spPr>
+          <a:xfrm>
+            <a:off x="1152144" y="4901183"/>
+            <a:ext cx="6286804" cy="329184"/>
+          </a:xfrm>
+          <a:prstGeom prst="rect">
+            <a:avLst/>
+          </a:prstGeom>
+          <a:noFill/>
+        </p:spPr>
+        <p:txBody>
+          <a:bodyPr wrap="square" anchor="t" lIns="0" rIns="0" tIns="0" bIns="0"/>
+          <a:lstStyle/>
+          <a:p>
+            <a:pPr algn="l">
+              <a:lnSpc>
+                <a:spcPct val="100000"/>
+              </a:lnSpc>
+              <a:spcBef>
+                <a:spcPts val="0"/>
+              </a:spcBef>
+              <a:spcAft>
+                <a:spcPts val="0"/>
+              </a:spcAft>
+            </a:pPr>
+            <a:r>
+              <a:rPr sz="1200" b="0" i="0" lang="en-AU" spc="0">
+                <a:solidFill>
+                  <a:srgbClr val="D6D6D6"/>
+                </a:solidFill>
+                <a:latin typeface="Inter"/>
+              </a:rPr>
+              <a:t>Our certified consultants, embedded in your team — through Implement and Optimise.</a:t>
+            </a:r>
+          </a:p>
+        </p:txBody>
+      </p:sp>
+      <p:sp>
+        <p:nvSpPr>
+          <p:cNvPr id="19" name="Rectangle 18"/>
+          <p:cNvSpPr/>
+          <p:nvPr/>
+        </p:nvSpPr>
+        <p:spPr>
+          <a:xfrm>
+            <a:off x="8079028" y="4389120"/>
+            <a:ext cx="3234842" cy="914400"/>
+          </a:xfrm>
+          <a:prstGeom prst="rect">
+            <a:avLst/>
+          </a:prstGeom>
+          <a:solidFill>
+            <a:srgbClr val="EA493F"/>
+          </a:solidFill>
+          <a:ln>
+            <a:noFill/>
+          </a:ln>
+          <a:effectLst/>
+        </p:spPr>
+        <p:style>
+          <a:lnRef idx="1">
+            <a:schemeClr val="accent1"/>
+          </a:lnRef>
+          <a:fillRef idx="3">
+            <a:schemeClr val="accent1"/>
+          </a:fillRef>
+          <a:effectRef idx="2">
+            <a:schemeClr val="accent1"/>
+          </a:effectRef>
+          <a:fontRef idx="minor">
+            <a:schemeClr val="lt1"/>
+          </a:fontRef>
+        </p:style>
+        <p:txBody>
+          <a:bodyPr rtlCol="0" anchor="ctr"/>
+          <a:lstStyle/>
+          <a:p>
+            <a:pPr algn="ctr"/>
+          </a:p>
+        </p:txBody>
+      </p:sp>
+      <p:sp>
+        <p:nvSpPr>
+          <p:cNvPr id="20" name="TextBox 19"/>
+          <p:cNvSpPr txBox="1"/>
+          <p:nvPr/>
+        </p:nvSpPr>
+        <p:spPr>
+          <a:xfrm>
+            <a:off x="8353348" y="4572000"/>
+            <a:ext cx="2686202" cy="329184"/>
+          </a:xfrm>
+          <a:prstGeom prst="rect">
+            <a:avLst/>
+          </a:prstGeom>
+          <a:noFill/>
+        </p:spPr>
+        <p:txBody>
+          <a:bodyPr wrap="square" anchor="t" lIns="0" rIns="0" tIns="0" bIns="0"/>
+          <a:lstStyle/>
+          <a:p>
+            <a:pPr algn="l">
+              <a:lnSpc>
+                <a:spcPct val="100000"/>
+              </a:lnSpc>
+              <a:spcBef>
+                <a:spcPts val="0"/>
+              </a:spcBef>
+              <a:spcAft>
+                <a:spcPts val="0"/>
+              </a:spcAft>
+            </a:pPr>
+            <a:r>
+              <a:rPr sz="1150" b="1" i="0" lang="en-AU" spc="115" cap="all">
                 <a:solidFill>
                   <a:srgbClr val="FFFFFF"/>
                 </a:solidFill>
                 <a:latin typeface="Inter"/>
               </a:rPr>
-              <a:t>We own the outcome, end to end</a:t>
-            </a:r>
-          </a:p>
-        </p:txBody>
-      </p:sp>
-      <p:sp>
-        <p:nvSpPr>
-          <p:cNvPr id="17" name="TextBox 16"/>
-          <p:cNvSpPr txBox="1"/>
-          <p:nvPr/>
-        </p:nvSpPr>
-        <p:spPr>
-          <a:xfrm>
-            <a:off x="6553047" y="3538728"/>
-            <a:ext cx="4486503" cy="420624"/>
-          </a:xfrm>
-          <a:prstGeom prst="rect">
-            <a:avLst/>
-          </a:prstGeom>
-          <a:noFill/>
-        </p:spPr>
-        <p:txBody>
-          <a:bodyPr wrap="square" anchor="t" lIns="0" rIns="0" tIns="0" bIns="0"/>
-          <a:lstStyle/>
-          <a:p>
-            <a:pPr algn="l">
-              <a:lnSpc>
-                <a:spcPct val="112000"/>
-              </a:lnSpc>
-              <a:spcBef>
-                <a:spcPts val="0"/>
-              </a:spcBef>
-              <a:spcAft>
-                <a:spcPts val="0"/>
-              </a:spcAft>
-            </a:pPr>
-            <a:r>
-              <a:rPr sz="1050" b="1" i="0" lang="en-AU" spc="0">
-                <a:solidFill>
-                  <a:srgbClr val="EA493F"/>
-                </a:solidFill>
-                <a:latin typeface="Inter"/>
-              </a:rPr>
-              <a:t>—  </a:t>
-            </a:r>
-            <a:r>
-              <a:rPr sz="1050" b="0" i="0" lang="en-AU" spc="0">
-                <a:solidFill>
-                  <a:srgbClr val="D6D6D6"/>
-                </a:solidFill>
-                <a:latin typeface="Inter"/>
-              </a:rPr>
-              <a:t>Mivada owns incident, problem, change &amp; release management</a:t>
-            </a:r>
-          </a:p>
-        </p:txBody>
-      </p:sp>
-      <p:sp>
-        <p:nvSpPr>
-          <p:cNvPr id="18" name="TextBox 17"/>
-          <p:cNvSpPr txBox="1"/>
-          <p:nvPr/>
-        </p:nvSpPr>
-        <p:spPr>
-          <a:xfrm>
-            <a:off x="6553047" y="3959352"/>
-            <a:ext cx="4486503" cy="420624"/>
-          </a:xfrm>
-          <a:prstGeom prst="rect">
-            <a:avLst/>
-          </a:prstGeom>
-          <a:noFill/>
-        </p:spPr>
-        <p:txBody>
-          <a:bodyPr wrap="square" anchor="t" lIns="0" rIns="0" tIns="0" bIns="0"/>
-          <a:lstStyle/>
-          <a:p>
-            <a:pPr algn="l">
-              <a:lnSpc>
-                <a:spcPct val="112000"/>
-              </a:lnSpc>
-              <a:spcBef>
-                <a:spcPts val="0"/>
-              </a:spcBef>
-              <a:spcAft>
-                <a:spcPts val="0"/>
-              </a:spcAft>
-            </a:pPr>
-            <a:r>
-              <a:rPr sz="1050" b="1" i="0" lang="en-AU" spc="0">
-                <a:solidFill>
-                  <a:srgbClr val="EA493F"/>
-                </a:solidFill>
-                <a:latin typeface="Inter"/>
-              </a:rPr>
-              <a:t>—  </a:t>
-            </a:r>
-            <a:r>
-              <a:rPr sz="1050" b="0" i="0" lang="en-AU" spc="0">
-                <a:solidFill>
-                  <a:srgbClr val="D6D6D6"/>
-                </a:solidFill>
-                <a:latin typeface="Inter"/>
-              </a:rPr>
-              <a:t>SLA-backed and governed, with 24×7 P1/P2 on-call</a:t>
-            </a:r>
-          </a:p>
-        </p:txBody>
-      </p:sp>
-      <p:sp>
-        <p:nvSpPr>
-          <p:cNvPr id="19" name="TextBox 18"/>
-          <p:cNvSpPr txBox="1"/>
-          <p:nvPr/>
-        </p:nvSpPr>
-        <p:spPr>
-          <a:xfrm>
-            <a:off x="6553047" y="4379976"/>
-            <a:ext cx="4486503" cy="420624"/>
-          </a:xfrm>
-          <a:prstGeom prst="rect">
-            <a:avLst/>
-          </a:prstGeom>
-          <a:noFill/>
-        </p:spPr>
-        <p:txBody>
-          <a:bodyPr wrap="square" anchor="t" lIns="0" rIns="0" tIns="0" bIns="0"/>
-          <a:lstStyle/>
-          <a:p>
-            <a:pPr algn="l">
-              <a:lnSpc>
-                <a:spcPct val="112000"/>
-              </a:lnSpc>
-              <a:spcBef>
-                <a:spcPts val="0"/>
-              </a:spcBef>
-              <a:spcAft>
-                <a:spcPts val="0"/>
-              </a:spcAft>
-            </a:pPr>
-            <a:r>
-              <a:rPr sz="1050" b="1" i="0" lang="en-AU" spc="0">
-                <a:solidFill>
-                  <a:srgbClr val="EA493F"/>
-                </a:solidFill>
-                <a:latin typeface="Inter"/>
-              </a:rPr>
-              <a:t>—  </a:t>
-            </a:r>
-            <a:r>
-              <a:rPr sz="1050" b="0" i="0" lang="en-AU" spc="0">
-                <a:solidFill>
-                  <a:srgbClr val="D6D6D6"/>
-                </a:solidFill>
-                <a:latin typeface="Inter"/>
-              </a:rPr>
-              <a:t>Continuous improvement and bi-annual release management</a:t>
-            </a:r>
-          </a:p>
-        </p:txBody>
-      </p:sp>
-      <p:sp>
-        <p:nvSpPr>
-          <p:cNvPr id="20" name="TextBox 19"/>
-          <p:cNvSpPr txBox="1"/>
-          <p:nvPr/>
-        </p:nvSpPr>
-        <p:spPr>
-          <a:xfrm>
-            <a:off x="6553047" y="4800600"/>
-            <a:ext cx="4486503" cy="420624"/>
-          </a:xfrm>
-          <a:prstGeom prst="rect">
-            <a:avLst/>
-          </a:prstGeom>
-          <a:noFill/>
-        </p:spPr>
-        <p:txBody>
-          <a:bodyPr wrap="square" anchor="t" lIns="0" rIns="0" tIns="0" bIns="0"/>
-          <a:lstStyle/>
-          <a:p>
-            <a:pPr algn="l">
-              <a:lnSpc>
-                <a:spcPct val="112000"/>
-              </a:lnSpc>
-              <a:spcBef>
-                <a:spcPts val="0"/>
-              </a:spcBef>
-              <a:spcAft>
-                <a:spcPts val="0"/>
-              </a:spcAft>
-            </a:pPr>
-            <a:r>
-              <a:rPr sz="1050" b="1" i="0" lang="en-AU" spc="0">
-                <a:solidFill>
-                  <a:srgbClr val="EA493F"/>
-                </a:solidFill>
-                <a:latin typeface="Inter"/>
-              </a:rPr>
-              <a:t>—  </a:t>
-            </a:r>
-            <a:r>
-              <a:rPr sz="1050" b="0" i="0" lang="en-AU" spc="0">
-                <a:solidFill>
-                  <a:srgbClr val="D6D6D6"/>
-                </a:solidFill>
-                <a:latin typeface="Inter"/>
-              </a:rPr>
-              <a:t>Ideal for steady-state operations and long-term partnership</a:t>
+              <a:t>MANAGED SERVICES</a:t>
             </a:r>
           </a:p>
         </p:txBody>
@@ -20114,46 +18516,37 @@
         </p:nvSpPr>
         <p:spPr>
           <a:xfrm>
-            <a:off x="6553047" y="5221224"/>
-            <a:ext cx="4486503" cy="420624"/>
-          </a:xfrm>
-          <a:prstGeom prst="rect">
-            <a:avLst/>
-          </a:prstGeom>
-          <a:noFill/>
-        </p:spPr>
-        <p:txBody>
-          <a:bodyPr wrap="square" anchor="t" lIns="0" rIns="0" tIns="0" bIns="0"/>
-          <a:lstStyle/>
-          <a:p>
-            <a:pPr algn="l">
-              <a:lnSpc>
-                <a:spcPct val="112000"/>
-              </a:lnSpc>
-              <a:spcBef>
-                <a:spcPts val="0"/>
-              </a:spcBef>
-              <a:spcAft>
-                <a:spcPts val="0"/>
-              </a:spcAft>
-            </a:pPr>
-            <a:r>
-              <a:rPr sz="1050" b="1" i="0" lang="en-AU" spc="0">
-                <a:solidFill>
-                  <a:srgbClr val="EA493F"/>
-                </a:solidFill>
-                <a:latin typeface="Inter"/>
-              </a:rPr>
-              <a:t>—  </a:t>
-            </a:r>
-            <a:r>
-              <a:rPr sz="1050" b="0" i="0" lang="en-AU" spc="0">
-                <a:solidFill>
-                  <a:srgbClr val="D6D6D6"/>
-                </a:solidFill>
-                <a:latin typeface="Inter"/>
-              </a:rPr>
-              <a:t>Fixed monthly hours with carry-forward flexibility</a:t>
+            <a:off x="8353348" y="4901183"/>
+            <a:ext cx="2686202" cy="329184"/>
+          </a:xfrm>
+          <a:prstGeom prst="rect">
+            <a:avLst/>
+          </a:prstGeom>
+          <a:noFill/>
+        </p:spPr>
+        <p:txBody>
+          <a:bodyPr wrap="square" anchor="t" lIns="0" rIns="0" tIns="0" bIns="0"/>
+          <a:lstStyle/>
+          <a:p>
+            <a:pPr algn="l">
+              <a:lnSpc>
+                <a:spcPct val="100000"/>
+              </a:lnSpc>
+              <a:spcBef>
+                <a:spcPts val="0"/>
+              </a:spcBef>
+              <a:spcAft>
+                <a:spcPts val="0"/>
+              </a:spcAft>
+            </a:pPr>
+            <a:r>
+              <a:rPr sz="1200" b="1" i="0" lang="en-AU" spc="0">
+                <a:solidFill>
+                  <a:srgbClr val="FFFFFF"/>
+                </a:solidFill>
+                <a:latin typeface="Inter"/>
+              </a:rPr>
+              <a:t>We own the outcome at Manage</a:t>
             </a:r>
           </a:p>
         </p:txBody>
@@ -20166,8 +18559,8 @@
         </p:nvSpPr>
         <p:spPr>
           <a:xfrm>
-            <a:off x="877824" y="5806440"/>
-            <a:ext cx="10436047" cy="457200"/>
+            <a:off x="877824" y="6144768"/>
+            <a:ext cx="10436047" cy="365760"/>
           </a:xfrm>
           <a:prstGeom prst="rect">
             <a:avLst/>
@@ -20190,13 +18583,13 @@
               </a:spcAft>
             </a:pPr>
             <a:r>
-              <a:rPr sz="1200" b="1" i="0" lang="en-AU" spc="0">
+              <a:rPr sz="1200" b="1" i="0" lang="en-AU" spc="24">
                 <a:solidFill>
                   <a:srgbClr val="AEAEAE"/>
                 </a:solidFill>
                 <a:latin typeface="Inter"/>
               </a:rPr>
-              <a:t>Many clients start with augmentation and move into AMS as their environment stabilises — the same team carries the knowledge across.</a:t>
+              <a:t>Flex between engagement models as you move from build to run.</a:t>
             </a:r>
           </a:p>
         </p:txBody>
